--- a/courses/nus1/files/slides/W06.pptx
+++ b/courses/nus1/files/slides/W06.pptx
@@ -5,7 +5,7 @@
     <p:sldMasterId id="2147483648" r:id="rId1"/>
   </p:sldMasterIdLst>
   <p:notesMasterIdLst>
-    <p:notesMasterId r:id="rId41"/>
+    <p:notesMasterId r:id="rId38"/>
   </p:notesMasterIdLst>
   <p:sldIdLst>
     <p:sldId id="256" r:id="rId2"/>
@@ -18,35 +18,32 @@
     <p:sldId id="270" r:id="rId9"/>
     <p:sldId id="271" r:id="rId10"/>
     <p:sldId id="272" r:id="rId11"/>
-    <p:sldId id="298" r:id="rId12"/>
-    <p:sldId id="300" r:id="rId13"/>
-    <p:sldId id="301" r:id="rId14"/>
-    <p:sldId id="267" r:id="rId15"/>
-    <p:sldId id="273" r:id="rId16"/>
-    <p:sldId id="274" r:id="rId17"/>
-    <p:sldId id="275" r:id="rId18"/>
-    <p:sldId id="277" r:id="rId19"/>
-    <p:sldId id="276" r:id="rId20"/>
-    <p:sldId id="278" r:id="rId21"/>
-    <p:sldId id="279" r:id="rId22"/>
-    <p:sldId id="280" r:id="rId23"/>
-    <p:sldId id="281" r:id="rId24"/>
-    <p:sldId id="282" r:id="rId25"/>
-    <p:sldId id="284" r:id="rId26"/>
-    <p:sldId id="283" r:id="rId27"/>
-    <p:sldId id="285" r:id="rId28"/>
-    <p:sldId id="286" r:id="rId29"/>
-    <p:sldId id="287" r:id="rId30"/>
-    <p:sldId id="288" r:id="rId31"/>
-    <p:sldId id="289" r:id="rId32"/>
-    <p:sldId id="290" r:id="rId33"/>
-    <p:sldId id="291" r:id="rId34"/>
-    <p:sldId id="293" r:id="rId35"/>
-    <p:sldId id="294" r:id="rId36"/>
-    <p:sldId id="295" r:id="rId37"/>
-    <p:sldId id="296" r:id="rId38"/>
-    <p:sldId id="297" r:id="rId39"/>
-    <p:sldId id="262" r:id="rId40"/>
+    <p:sldId id="267" r:id="rId12"/>
+    <p:sldId id="273" r:id="rId13"/>
+    <p:sldId id="274" r:id="rId14"/>
+    <p:sldId id="275" r:id="rId15"/>
+    <p:sldId id="277" r:id="rId16"/>
+    <p:sldId id="276" r:id="rId17"/>
+    <p:sldId id="278" r:id="rId18"/>
+    <p:sldId id="279" r:id="rId19"/>
+    <p:sldId id="280" r:id="rId20"/>
+    <p:sldId id="281" r:id="rId21"/>
+    <p:sldId id="282" r:id="rId22"/>
+    <p:sldId id="284" r:id="rId23"/>
+    <p:sldId id="283" r:id="rId24"/>
+    <p:sldId id="285" r:id="rId25"/>
+    <p:sldId id="286" r:id="rId26"/>
+    <p:sldId id="287" r:id="rId27"/>
+    <p:sldId id="288" r:id="rId28"/>
+    <p:sldId id="289" r:id="rId29"/>
+    <p:sldId id="290" r:id="rId30"/>
+    <p:sldId id="291" r:id="rId31"/>
+    <p:sldId id="293" r:id="rId32"/>
+    <p:sldId id="294" r:id="rId33"/>
+    <p:sldId id="295" r:id="rId34"/>
+    <p:sldId id="296" r:id="rId35"/>
+    <p:sldId id="297" r:id="rId36"/>
+    <p:sldId id="262" r:id="rId37"/>
   </p:sldIdLst>
   <p:sldSz cx="12192000" cy="6858000"/>
   <p:notesSz cx="6858000" cy="9144000"/>
@@ -493,303 +490,6 @@
         <p:cNvPr id="1" name="">
           <a:extLst>
             <a:ext uri="{FF2B5EF4-FFF2-40B4-BE49-F238E27FC236}">
-              <a16:creationId xmlns:a16="http://schemas.microsoft.com/office/drawing/2014/main" id="{5970BC5A-A082-C7E3-90A8-5A7202C7A8D4}"/>
-            </a:ext>
-          </a:extLst>
-        </p:cNvPr>
-        <p:cNvGrpSpPr/>
-        <p:nvPr/>
-      </p:nvGrpSpPr>
-      <p:grpSpPr>
-        <a:xfrm>
-          <a:off x="0" y="0"/>
-          <a:ext cx="0" cy="0"/>
-          <a:chOff x="0" y="0"/>
-          <a:chExt cx="0" cy="0"/>
-        </a:xfrm>
-      </p:grpSpPr>
-      <p:sp>
-        <p:nvSpPr>
-          <p:cNvPr id="2" name="Slide Image Placeholder 1">
-            <a:extLst>
-              <a:ext uri="{FF2B5EF4-FFF2-40B4-BE49-F238E27FC236}">
-                <a16:creationId xmlns:a16="http://schemas.microsoft.com/office/drawing/2014/main" id="{AB2BB2B4-E980-AADF-84FB-795132FFF72B}"/>
-              </a:ext>
-            </a:extLst>
-          </p:cNvPr>
-          <p:cNvSpPr>
-            <a:spLocks noGrp="1" noRot="1" noChangeAspect="1"/>
-          </p:cNvSpPr>
-          <p:nvPr>
-            <p:ph type="sldImg" idx="2"/>
-          </p:nvPr>
-        </p:nvSpPr>
-        <p:spPr/>
-      </p:sp>
-      <p:sp>
-        <p:nvSpPr>
-          <p:cNvPr id="3" name="Notes Placeholder 2">
-            <a:extLst>
-              <a:ext uri="{FF2B5EF4-FFF2-40B4-BE49-F238E27FC236}">
-                <a16:creationId xmlns:a16="http://schemas.microsoft.com/office/drawing/2014/main" id="{E43342A0-C1BA-7570-01D9-5E4720BBBE19}"/>
-              </a:ext>
-            </a:extLst>
-          </p:cNvPr>
-          <p:cNvSpPr>
-            <a:spLocks noGrp="1"/>
-          </p:cNvSpPr>
-          <p:nvPr>
-            <p:ph type="body" sz="quarter" idx="3"/>
-          </p:nvPr>
-        </p:nvSpPr>
-        <p:spPr/>
-        <p:txBody>
-          <a:bodyPr/>
-          <a:lstStyle/>
-          <a:p>
-            <a:r>
-              <a:t>Die wichtigste Standardfolie: links 2–5 Stichpunkte, rechts ein grosses Bild, eine Schaltung, ein Screenshot oder eine Skizze. Wenn kein Visual nötig ist, die rechte Fläche für eine grosse Formel nutzen.</a:t>
-            </a:r>
-          </a:p>
-        </p:txBody>
-      </p:sp>
-      <p:sp>
-        <p:nvSpPr>
-          <p:cNvPr id="4" name="Slide Number Placeholder 3">
-            <a:extLst>
-              <a:ext uri="{FF2B5EF4-FFF2-40B4-BE49-F238E27FC236}">
-                <a16:creationId xmlns:a16="http://schemas.microsoft.com/office/drawing/2014/main" id="{506C3669-B8A8-B897-64B9-F807C872E882}"/>
-              </a:ext>
-            </a:extLst>
-          </p:cNvPr>
-          <p:cNvSpPr>
-            <a:spLocks noGrp="1"/>
-          </p:cNvSpPr>
-          <p:nvPr>
-            <p:ph type="sldNum" sz="quarter" idx="5"/>
-          </p:nvPr>
-        </p:nvSpPr>
-        <p:spPr/>
-      </p:sp>
-    </p:spTree>
-    <p:extLst>
-      <p:ext uri="{BB962C8B-B14F-4D97-AF65-F5344CB8AC3E}">
-        <p14:creationId xmlns:p14="http://schemas.microsoft.com/office/powerpoint/2010/main" val="907393608"/>
-      </p:ext>
-    </p:extLst>
-  </p:cSld>
-  <p:clrMapOvr>
-    <a:masterClrMapping/>
-  </p:clrMapOvr>
-</p:notes>
-</file>
-
-<file path=ppt/notesSlides/notesSlide12.xml><?xml version="1.0" encoding="utf-8"?>
-<p:notes xmlns:a="http://schemas.openxmlformats.org/drawingml/2006/main" xmlns:r="http://schemas.openxmlformats.org/officeDocument/2006/relationships" xmlns:p="http://schemas.openxmlformats.org/presentationml/2006/main">
-  <p:cSld>
-    <p:spTree>
-      <p:nvGrpSpPr>
-        <p:cNvPr id="1" name="">
-          <a:extLst>
-            <a:ext uri="{FF2B5EF4-FFF2-40B4-BE49-F238E27FC236}">
-              <a16:creationId xmlns:a16="http://schemas.microsoft.com/office/drawing/2014/main" id="{E7D84D41-D81E-45B2-4600-9C5FDCECEECB}"/>
-            </a:ext>
-          </a:extLst>
-        </p:cNvPr>
-        <p:cNvGrpSpPr/>
-        <p:nvPr/>
-      </p:nvGrpSpPr>
-      <p:grpSpPr>
-        <a:xfrm>
-          <a:off x="0" y="0"/>
-          <a:ext cx="0" cy="0"/>
-          <a:chOff x="0" y="0"/>
-          <a:chExt cx="0" cy="0"/>
-        </a:xfrm>
-      </p:grpSpPr>
-      <p:sp>
-        <p:nvSpPr>
-          <p:cNvPr id="2" name="Slide Image Placeholder 1">
-            <a:extLst>
-              <a:ext uri="{FF2B5EF4-FFF2-40B4-BE49-F238E27FC236}">
-                <a16:creationId xmlns:a16="http://schemas.microsoft.com/office/drawing/2014/main" id="{2A766E24-C4EB-C711-6B69-AE6CCED34C44}"/>
-              </a:ext>
-            </a:extLst>
-          </p:cNvPr>
-          <p:cNvSpPr>
-            <a:spLocks noGrp="1" noRot="1" noChangeAspect="1"/>
-          </p:cNvSpPr>
-          <p:nvPr>
-            <p:ph type="sldImg" idx="2"/>
-          </p:nvPr>
-        </p:nvSpPr>
-        <p:spPr/>
-      </p:sp>
-      <p:sp>
-        <p:nvSpPr>
-          <p:cNvPr id="3" name="Notes Placeholder 2">
-            <a:extLst>
-              <a:ext uri="{FF2B5EF4-FFF2-40B4-BE49-F238E27FC236}">
-                <a16:creationId xmlns:a16="http://schemas.microsoft.com/office/drawing/2014/main" id="{12678759-C34F-B6DB-5804-EA894C1CDB99}"/>
-              </a:ext>
-            </a:extLst>
-          </p:cNvPr>
-          <p:cNvSpPr>
-            <a:spLocks noGrp="1"/>
-          </p:cNvSpPr>
-          <p:nvPr>
-            <p:ph type="body" sz="quarter" idx="3"/>
-          </p:nvPr>
-        </p:nvSpPr>
-        <p:spPr/>
-        <p:txBody>
-          <a:bodyPr/>
-          <a:lstStyle/>
-          <a:p>
-            <a:r>
-              <a:t>Die wichtigste Standardfolie: links 2–5 Stichpunkte, rechts ein grosses Bild, eine Schaltung, ein Screenshot oder eine Skizze. Wenn kein Visual nötig ist, die rechte Fläche für eine grosse Formel nutzen.</a:t>
-            </a:r>
-          </a:p>
-        </p:txBody>
-      </p:sp>
-      <p:sp>
-        <p:nvSpPr>
-          <p:cNvPr id="4" name="Slide Number Placeholder 3">
-            <a:extLst>
-              <a:ext uri="{FF2B5EF4-FFF2-40B4-BE49-F238E27FC236}">
-                <a16:creationId xmlns:a16="http://schemas.microsoft.com/office/drawing/2014/main" id="{9CBC5786-283C-FA56-0AEA-9CAAEF6E0570}"/>
-              </a:ext>
-            </a:extLst>
-          </p:cNvPr>
-          <p:cNvSpPr>
-            <a:spLocks noGrp="1"/>
-          </p:cNvSpPr>
-          <p:nvPr>
-            <p:ph type="sldNum" sz="quarter" idx="5"/>
-          </p:nvPr>
-        </p:nvSpPr>
-        <p:spPr/>
-      </p:sp>
-    </p:spTree>
-    <p:extLst>
-      <p:ext uri="{BB962C8B-B14F-4D97-AF65-F5344CB8AC3E}">
-        <p14:creationId xmlns:p14="http://schemas.microsoft.com/office/powerpoint/2010/main" val="272503691"/>
-      </p:ext>
-    </p:extLst>
-  </p:cSld>
-  <p:clrMapOvr>
-    <a:masterClrMapping/>
-  </p:clrMapOvr>
-</p:notes>
-</file>
-
-<file path=ppt/notesSlides/notesSlide13.xml><?xml version="1.0" encoding="utf-8"?>
-<p:notes xmlns:a="http://schemas.openxmlformats.org/drawingml/2006/main" xmlns:r="http://schemas.openxmlformats.org/officeDocument/2006/relationships" xmlns:p="http://schemas.openxmlformats.org/presentationml/2006/main">
-  <p:cSld>
-    <p:spTree>
-      <p:nvGrpSpPr>
-        <p:cNvPr id="1" name="">
-          <a:extLst>
-            <a:ext uri="{FF2B5EF4-FFF2-40B4-BE49-F238E27FC236}">
-              <a16:creationId xmlns:a16="http://schemas.microsoft.com/office/drawing/2014/main" id="{B07DE0BB-2B29-31E2-3317-41B64AE9D483}"/>
-            </a:ext>
-          </a:extLst>
-        </p:cNvPr>
-        <p:cNvGrpSpPr/>
-        <p:nvPr/>
-      </p:nvGrpSpPr>
-      <p:grpSpPr>
-        <a:xfrm>
-          <a:off x="0" y="0"/>
-          <a:ext cx="0" cy="0"/>
-          <a:chOff x="0" y="0"/>
-          <a:chExt cx="0" cy="0"/>
-        </a:xfrm>
-      </p:grpSpPr>
-      <p:sp>
-        <p:nvSpPr>
-          <p:cNvPr id="2" name="Slide Image Placeholder 1">
-            <a:extLst>
-              <a:ext uri="{FF2B5EF4-FFF2-40B4-BE49-F238E27FC236}">
-                <a16:creationId xmlns:a16="http://schemas.microsoft.com/office/drawing/2014/main" id="{11028809-21B6-3405-7E87-A5F4BF319BBF}"/>
-              </a:ext>
-            </a:extLst>
-          </p:cNvPr>
-          <p:cNvSpPr>
-            <a:spLocks noGrp="1" noRot="1" noChangeAspect="1"/>
-          </p:cNvSpPr>
-          <p:nvPr>
-            <p:ph type="sldImg" idx="2"/>
-          </p:nvPr>
-        </p:nvSpPr>
-        <p:spPr/>
-      </p:sp>
-      <p:sp>
-        <p:nvSpPr>
-          <p:cNvPr id="3" name="Notes Placeholder 2">
-            <a:extLst>
-              <a:ext uri="{FF2B5EF4-FFF2-40B4-BE49-F238E27FC236}">
-                <a16:creationId xmlns:a16="http://schemas.microsoft.com/office/drawing/2014/main" id="{6DDBC20A-FFCF-1EB4-FE7C-EF5875EE5CFE}"/>
-              </a:ext>
-            </a:extLst>
-          </p:cNvPr>
-          <p:cNvSpPr>
-            <a:spLocks noGrp="1"/>
-          </p:cNvSpPr>
-          <p:nvPr>
-            <p:ph type="body" sz="quarter" idx="3"/>
-          </p:nvPr>
-        </p:nvSpPr>
-        <p:spPr/>
-        <p:txBody>
-          <a:bodyPr/>
-          <a:lstStyle/>
-          <a:p>
-            <a:r>
-              <a:t>Die wichtigste Standardfolie: links 2–5 Stichpunkte, rechts ein grosses Bild, eine Schaltung, ein Screenshot oder eine Skizze. Wenn kein Visual nötig ist, die rechte Fläche für eine grosse Formel nutzen.</a:t>
-            </a:r>
-          </a:p>
-        </p:txBody>
-      </p:sp>
-      <p:sp>
-        <p:nvSpPr>
-          <p:cNvPr id="4" name="Slide Number Placeholder 3">
-            <a:extLst>
-              <a:ext uri="{FF2B5EF4-FFF2-40B4-BE49-F238E27FC236}">
-                <a16:creationId xmlns:a16="http://schemas.microsoft.com/office/drawing/2014/main" id="{24712F35-87FC-B400-76A0-057D240C187C}"/>
-              </a:ext>
-            </a:extLst>
-          </p:cNvPr>
-          <p:cNvSpPr>
-            <a:spLocks noGrp="1"/>
-          </p:cNvSpPr>
-          <p:nvPr>
-            <p:ph type="sldNum" sz="quarter" idx="5"/>
-          </p:nvPr>
-        </p:nvSpPr>
-        <p:spPr/>
-      </p:sp>
-    </p:spTree>
-    <p:extLst>
-      <p:ext uri="{BB962C8B-B14F-4D97-AF65-F5344CB8AC3E}">
-        <p14:creationId xmlns:p14="http://schemas.microsoft.com/office/powerpoint/2010/main" val="1425436174"/>
-      </p:ext>
-    </p:extLst>
-  </p:cSld>
-  <p:clrMapOvr>
-    <a:masterClrMapping/>
-  </p:clrMapOvr>
-</p:notes>
-</file>
-
-<file path=ppt/notesSlides/notesSlide14.xml><?xml version="1.0" encoding="utf-8"?>
-<p:notes xmlns:a="http://schemas.openxmlformats.org/drawingml/2006/main" xmlns:r="http://schemas.openxmlformats.org/officeDocument/2006/relationships" xmlns:p="http://schemas.openxmlformats.org/presentationml/2006/main">
-  <p:cSld>
-    <p:spTree>
-      <p:nvGrpSpPr>
-        <p:cNvPr id="1" name="">
-          <a:extLst>
-            <a:ext uri="{FF2B5EF4-FFF2-40B4-BE49-F238E27FC236}">
               <a16:creationId xmlns:a16="http://schemas.microsoft.com/office/drawing/2014/main" id="{C259D88D-63D4-0CC7-8A38-ED97F1C76C09}"/>
             </a:ext>
           </a:extLst>
@@ -881,7 +581,7 @@
 </p:notes>
 </file>
 
-<file path=ppt/notesSlides/notesSlide15.xml><?xml version="1.0" encoding="utf-8"?>
+<file path=ppt/notesSlides/notesSlide12.xml><?xml version="1.0" encoding="utf-8"?>
 <p:notes xmlns:a="http://schemas.openxmlformats.org/drawingml/2006/main" xmlns:r="http://schemas.openxmlformats.org/officeDocument/2006/relationships" xmlns:p="http://schemas.openxmlformats.org/presentationml/2006/main">
   <p:cSld>
     <p:spTree>
@@ -980,7 +680,7 @@
 </p:notes>
 </file>
 
-<file path=ppt/notesSlides/notesSlide16.xml><?xml version="1.0" encoding="utf-8"?>
+<file path=ppt/notesSlides/notesSlide13.xml><?xml version="1.0" encoding="utf-8"?>
 <p:notes xmlns:a="http://schemas.openxmlformats.org/drawingml/2006/main" xmlns:r="http://schemas.openxmlformats.org/officeDocument/2006/relationships" xmlns:p="http://schemas.openxmlformats.org/presentationml/2006/main">
   <p:cSld>
     <p:spTree>
@@ -1079,7 +779,7 @@
 </p:notes>
 </file>
 
-<file path=ppt/notesSlides/notesSlide17.xml><?xml version="1.0" encoding="utf-8"?>
+<file path=ppt/notesSlides/notesSlide14.xml><?xml version="1.0" encoding="utf-8"?>
 <p:notes xmlns:a="http://schemas.openxmlformats.org/drawingml/2006/main" xmlns:r="http://schemas.openxmlformats.org/officeDocument/2006/relationships" xmlns:p="http://schemas.openxmlformats.org/presentationml/2006/main">
   <p:cSld>
     <p:spTree>
@@ -1178,7 +878,7 @@
 </p:notes>
 </file>
 
-<file path=ppt/notesSlides/notesSlide18.xml><?xml version="1.0" encoding="utf-8"?>
+<file path=ppt/notesSlides/notesSlide15.xml><?xml version="1.0" encoding="utf-8"?>
 <p:notes xmlns:a="http://schemas.openxmlformats.org/drawingml/2006/main" xmlns:r="http://schemas.openxmlformats.org/officeDocument/2006/relationships" xmlns:p="http://schemas.openxmlformats.org/presentationml/2006/main">
   <p:cSld>
     <p:spTree>
@@ -1277,7 +977,7 @@
 </p:notes>
 </file>
 
-<file path=ppt/notesSlides/notesSlide19.xml><?xml version="1.0" encoding="utf-8"?>
+<file path=ppt/notesSlides/notesSlide16.xml><?xml version="1.0" encoding="utf-8"?>
 <p:notes xmlns:a="http://schemas.openxmlformats.org/drawingml/2006/main" xmlns:r="http://schemas.openxmlformats.org/officeDocument/2006/relationships" xmlns:p="http://schemas.openxmlformats.org/presentationml/2006/main">
   <p:cSld>
     <p:spTree>
@@ -1367,6 +1067,303 @@
     <p:extLst>
       <p:ext uri="{BB962C8B-B14F-4D97-AF65-F5344CB8AC3E}">
         <p14:creationId xmlns:p14="http://schemas.microsoft.com/office/powerpoint/2010/main" val="2524833393"/>
+      </p:ext>
+    </p:extLst>
+  </p:cSld>
+  <p:clrMapOvr>
+    <a:masterClrMapping/>
+  </p:clrMapOvr>
+</p:notes>
+</file>
+
+<file path=ppt/notesSlides/notesSlide17.xml><?xml version="1.0" encoding="utf-8"?>
+<p:notes xmlns:a="http://schemas.openxmlformats.org/drawingml/2006/main" xmlns:r="http://schemas.openxmlformats.org/officeDocument/2006/relationships" xmlns:p="http://schemas.openxmlformats.org/presentationml/2006/main">
+  <p:cSld>
+    <p:spTree>
+      <p:nvGrpSpPr>
+        <p:cNvPr id="1" name="">
+          <a:extLst>
+            <a:ext uri="{FF2B5EF4-FFF2-40B4-BE49-F238E27FC236}">
+              <a16:creationId xmlns:a16="http://schemas.microsoft.com/office/drawing/2014/main" id="{2CFC50D2-BBBE-2D3F-217D-9CB45B6F0E1E}"/>
+            </a:ext>
+          </a:extLst>
+        </p:cNvPr>
+        <p:cNvGrpSpPr/>
+        <p:nvPr/>
+      </p:nvGrpSpPr>
+      <p:grpSpPr>
+        <a:xfrm>
+          <a:off x="0" y="0"/>
+          <a:ext cx="0" cy="0"/>
+          <a:chOff x="0" y="0"/>
+          <a:chExt cx="0" cy="0"/>
+        </a:xfrm>
+      </p:grpSpPr>
+      <p:sp>
+        <p:nvSpPr>
+          <p:cNvPr id="2" name="Slide Image Placeholder 1">
+            <a:extLst>
+              <a:ext uri="{FF2B5EF4-FFF2-40B4-BE49-F238E27FC236}">
+                <a16:creationId xmlns:a16="http://schemas.microsoft.com/office/drawing/2014/main" id="{39AC62BA-B070-0FBD-5DDE-3F6AE8734C9A}"/>
+              </a:ext>
+            </a:extLst>
+          </p:cNvPr>
+          <p:cNvSpPr>
+            <a:spLocks noGrp="1" noRot="1" noChangeAspect="1"/>
+          </p:cNvSpPr>
+          <p:nvPr>
+            <p:ph type="sldImg" idx="2"/>
+          </p:nvPr>
+        </p:nvSpPr>
+        <p:spPr/>
+      </p:sp>
+      <p:sp>
+        <p:nvSpPr>
+          <p:cNvPr id="3" name="Notes Placeholder 2">
+            <a:extLst>
+              <a:ext uri="{FF2B5EF4-FFF2-40B4-BE49-F238E27FC236}">
+                <a16:creationId xmlns:a16="http://schemas.microsoft.com/office/drawing/2014/main" id="{1A9C1D92-FB01-5E00-EC80-786E6F09AFDC}"/>
+              </a:ext>
+            </a:extLst>
+          </p:cNvPr>
+          <p:cNvSpPr>
+            <a:spLocks noGrp="1"/>
+          </p:cNvSpPr>
+          <p:nvPr>
+            <p:ph type="body" sz="quarter" idx="3"/>
+          </p:nvPr>
+        </p:nvSpPr>
+        <p:spPr/>
+        <p:txBody>
+          <a:bodyPr/>
+          <a:lstStyle/>
+          <a:p>
+            <a:r>
+              <a:t>Die wichtigste Standardfolie: links 2–5 Stichpunkte, rechts ein grosses Bild, eine Schaltung, ein Screenshot oder eine Skizze. Wenn kein Visual nötig ist, die rechte Fläche für eine grosse Formel nutzen.</a:t>
+            </a:r>
+          </a:p>
+        </p:txBody>
+      </p:sp>
+      <p:sp>
+        <p:nvSpPr>
+          <p:cNvPr id="4" name="Slide Number Placeholder 3">
+            <a:extLst>
+              <a:ext uri="{FF2B5EF4-FFF2-40B4-BE49-F238E27FC236}">
+                <a16:creationId xmlns:a16="http://schemas.microsoft.com/office/drawing/2014/main" id="{9FD6E67D-0728-BA67-B57F-33187B2636CB}"/>
+              </a:ext>
+            </a:extLst>
+          </p:cNvPr>
+          <p:cNvSpPr>
+            <a:spLocks noGrp="1"/>
+          </p:cNvSpPr>
+          <p:nvPr>
+            <p:ph type="sldNum" sz="quarter" idx="5"/>
+          </p:nvPr>
+        </p:nvSpPr>
+        <p:spPr/>
+      </p:sp>
+    </p:spTree>
+    <p:extLst>
+      <p:ext uri="{BB962C8B-B14F-4D97-AF65-F5344CB8AC3E}">
+        <p14:creationId xmlns:p14="http://schemas.microsoft.com/office/powerpoint/2010/main" val="3569401629"/>
+      </p:ext>
+    </p:extLst>
+  </p:cSld>
+  <p:clrMapOvr>
+    <a:masterClrMapping/>
+  </p:clrMapOvr>
+</p:notes>
+</file>
+
+<file path=ppt/notesSlides/notesSlide18.xml><?xml version="1.0" encoding="utf-8"?>
+<p:notes xmlns:a="http://schemas.openxmlformats.org/drawingml/2006/main" xmlns:r="http://schemas.openxmlformats.org/officeDocument/2006/relationships" xmlns:p="http://schemas.openxmlformats.org/presentationml/2006/main">
+  <p:cSld>
+    <p:spTree>
+      <p:nvGrpSpPr>
+        <p:cNvPr id="1" name="">
+          <a:extLst>
+            <a:ext uri="{FF2B5EF4-FFF2-40B4-BE49-F238E27FC236}">
+              <a16:creationId xmlns:a16="http://schemas.microsoft.com/office/drawing/2014/main" id="{4DC03B99-577C-916E-C2DE-E8E0DF51385D}"/>
+            </a:ext>
+          </a:extLst>
+        </p:cNvPr>
+        <p:cNvGrpSpPr/>
+        <p:nvPr/>
+      </p:nvGrpSpPr>
+      <p:grpSpPr>
+        <a:xfrm>
+          <a:off x="0" y="0"/>
+          <a:ext cx="0" cy="0"/>
+          <a:chOff x="0" y="0"/>
+          <a:chExt cx="0" cy="0"/>
+        </a:xfrm>
+      </p:grpSpPr>
+      <p:sp>
+        <p:nvSpPr>
+          <p:cNvPr id="2" name="Slide Image Placeholder 1">
+            <a:extLst>
+              <a:ext uri="{FF2B5EF4-FFF2-40B4-BE49-F238E27FC236}">
+                <a16:creationId xmlns:a16="http://schemas.microsoft.com/office/drawing/2014/main" id="{872F1257-78F1-2702-362F-3E1487AD29C2}"/>
+              </a:ext>
+            </a:extLst>
+          </p:cNvPr>
+          <p:cNvSpPr>
+            <a:spLocks noGrp="1" noRot="1" noChangeAspect="1"/>
+          </p:cNvSpPr>
+          <p:nvPr>
+            <p:ph type="sldImg" idx="2"/>
+          </p:nvPr>
+        </p:nvSpPr>
+        <p:spPr/>
+      </p:sp>
+      <p:sp>
+        <p:nvSpPr>
+          <p:cNvPr id="3" name="Notes Placeholder 2">
+            <a:extLst>
+              <a:ext uri="{FF2B5EF4-FFF2-40B4-BE49-F238E27FC236}">
+                <a16:creationId xmlns:a16="http://schemas.microsoft.com/office/drawing/2014/main" id="{00D5C39C-19F7-AA55-47FC-014EBF7988B4}"/>
+              </a:ext>
+            </a:extLst>
+          </p:cNvPr>
+          <p:cNvSpPr>
+            <a:spLocks noGrp="1"/>
+          </p:cNvSpPr>
+          <p:nvPr>
+            <p:ph type="body" sz="quarter" idx="3"/>
+          </p:nvPr>
+        </p:nvSpPr>
+        <p:spPr/>
+        <p:txBody>
+          <a:bodyPr/>
+          <a:lstStyle/>
+          <a:p>
+            <a:r>
+              <a:t>Die wichtigste Standardfolie: links 2–5 Stichpunkte, rechts ein grosses Bild, eine Schaltung, ein Screenshot oder eine Skizze. Wenn kein Visual nötig ist, die rechte Fläche für eine grosse Formel nutzen.</a:t>
+            </a:r>
+          </a:p>
+        </p:txBody>
+      </p:sp>
+      <p:sp>
+        <p:nvSpPr>
+          <p:cNvPr id="4" name="Slide Number Placeholder 3">
+            <a:extLst>
+              <a:ext uri="{FF2B5EF4-FFF2-40B4-BE49-F238E27FC236}">
+                <a16:creationId xmlns:a16="http://schemas.microsoft.com/office/drawing/2014/main" id="{55B46655-30B3-0715-04F5-7F28EA6A15EC}"/>
+              </a:ext>
+            </a:extLst>
+          </p:cNvPr>
+          <p:cNvSpPr>
+            <a:spLocks noGrp="1"/>
+          </p:cNvSpPr>
+          <p:nvPr>
+            <p:ph type="sldNum" sz="quarter" idx="5"/>
+          </p:nvPr>
+        </p:nvSpPr>
+        <p:spPr/>
+      </p:sp>
+    </p:spTree>
+    <p:extLst>
+      <p:ext uri="{BB962C8B-B14F-4D97-AF65-F5344CB8AC3E}">
+        <p14:creationId xmlns:p14="http://schemas.microsoft.com/office/powerpoint/2010/main" val="2384198258"/>
+      </p:ext>
+    </p:extLst>
+  </p:cSld>
+  <p:clrMapOvr>
+    <a:masterClrMapping/>
+  </p:clrMapOvr>
+</p:notes>
+</file>
+
+<file path=ppt/notesSlides/notesSlide19.xml><?xml version="1.0" encoding="utf-8"?>
+<p:notes xmlns:a="http://schemas.openxmlformats.org/drawingml/2006/main" xmlns:r="http://schemas.openxmlformats.org/officeDocument/2006/relationships" xmlns:p="http://schemas.openxmlformats.org/presentationml/2006/main">
+  <p:cSld>
+    <p:spTree>
+      <p:nvGrpSpPr>
+        <p:cNvPr id="1" name="">
+          <a:extLst>
+            <a:ext uri="{FF2B5EF4-FFF2-40B4-BE49-F238E27FC236}">
+              <a16:creationId xmlns:a16="http://schemas.microsoft.com/office/drawing/2014/main" id="{57C30488-686C-768A-F3CD-543943102FB5}"/>
+            </a:ext>
+          </a:extLst>
+        </p:cNvPr>
+        <p:cNvGrpSpPr/>
+        <p:nvPr/>
+      </p:nvGrpSpPr>
+      <p:grpSpPr>
+        <a:xfrm>
+          <a:off x="0" y="0"/>
+          <a:ext cx="0" cy="0"/>
+          <a:chOff x="0" y="0"/>
+          <a:chExt cx="0" cy="0"/>
+        </a:xfrm>
+      </p:grpSpPr>
+      <p:sp>
+        <p:nvSpPr>
+          <p:cNvPr id="2" name="Slide Image Placeholder 1">
+            <a:extLst>
+              <a:ext uri="{FF2B5EF4-FFF2-40B4-BE49-F238E27FC236}">
+                <a16:creationId xmlns:a16="http://schemas.microsoft.com/office/drawing/2014/main" id="{ABBA0621-FBF0-AFD5-0896-CAD2D4B46719}"/>
+              </a:ext>
+            </a:extLst>
+          </p:cNvPr>
+          <p:cNvSpPr>
+            <a:spLocks noGrp="1" noRot="1" noChangeAspect="1"/>
+          </p:cNvSpPr>
+          <p:nvPr>
+            <p:ph type="sldImg" idx="2"/>
+          </p:nvPr>
+        </p:nvSpPr>
+        <p:spPr/>
+      </p:sp>
+      <p:sp>
+        <p:nvSpPr>
+          <p:cNvPr id="3" name="Notes Placeholder 2">
+            <a:extLst>
+              <a:ext uri="{FF2B5EF4-FFF2-40B4-BE49-F238E27FC236}">
+                <a16:creationId xmlns:a16="http://schemas.microsoft.com/office/drawing/2014/main" id="{DAF01E71-5CF7-9AC4-5A4F-6AA31302E5B0}"/>
+              </a:ext>
+            </a:extLst>
+          </p:cNvPr>
+          <p:cNvSpPr>
+            <a:spLocks noGrp="1"/>
+          </p:cNvSpPr>
+          <p:nvPr>
+            <p:ph type="body" sz="quarter" idx="3"/>
+          </p:nvPr>
+        </p:nvSpPr>
+        <p:spPr/>
+        <p:txBody>
+          <a:bodyPr/>
+          <a:lstStyle/>
+          <a:p>
+            <a:r>
+              <a:t>Die wichtigste Standardfolie: links 2–5 Stichpunkte, rechts ein grosses Bild, eine Schaltung, ein Screenshot oder eine Skizze. Wenn kein Visual nötig ist, die rechte Fläche für eine grosse Formel nutzen.</a:t>
+            </a:r>
+          </a:p>
+        </p:txBody>
+      </p:sp>
+      <p:sp>
+        <p:nvSpPr>
+          <p:cNvPr id="4" name="Slide Number Placeholder 3">
+            <a:extLst>
+              <a:ext uri="{FF2B5EF4-FFF2-40B4-BE49-F238E27FC236}">
+                <a16:creationId xmlns:a16="http://schemas.microsoft.com/office/drawing/2014/main" id="{8CA229BD-52CD-AD47-4340-BDED2AE2925F}"/>
+              </a:ext>
+            </a:extLst>
+          </p:cNvPr>
+          <p:cNvSpPr>
+            <a:spLocks noGrp="1"/>
+          </p:cNvSpPr>
+          <p:nvPr>
+            <p:ph type="sldNum" sz="quarter" idx="5"/>
+          </p:nvPr>
+        </p:nvSpPr>
+        <p:spPr/>
+      </p:sp>
+    </p:spTree>
+    <p:extLst>
+      <p:ext uri="{BB962C8B-B14F-4D97-AF65-F5344CB8AC3E}">
+        <p14:creationId xmlns:p14="http://schemas.microsoft.com/office/powerpoint/2010/main" val="1321810453"/>
       </p:ext>
     </p:extLst>
   </p:cSld>
@@ -1454,303 +1451,6 @@
         <p:cNvPr id="1" name="">
           <a:extLst>
             <a:ext uri="{FF2B5EF4-FFF2-40B4-BE49-F238E27FC236}">
-              <a16:creationId xmlns:a16="http://schemas.microsoft.com/office/drawing/2014/main" id="{2CFC50D2-BBBE-2D3F-217D-9CB45B6F0E1E}"/>
-            </a:ext>
-          </a:extLst>
-        </p:cNvPr>
-        <p:cNvGrpSpPr/>
-        <p:nvPr/>
-      </p:nvGrpSpPr>
-      <p:grpSpPr>
-        <a:xfrm>
-          <a:off x="0" y="0"/>
-          <a:ext cx="0" cy="0"/>
-          <a:chOff x="0" y="0"/>
-          <a:chExt cx="0" cy="0"/>
-        </a:xfrm>
-      </p:grpSpPr>
-      <p:sp>
-        <p:nvSpPr>
-          <p:cNvPr id="2" name="Slide Image Placeholder 1">
-            <a:extLst>
-              <a:ext uri="{FF2B5EF4-FFF2-40B4-BE49-F238E27FC236}">
-                <a16:creationId xmlns:a16="http://schemas.microsoft.com/office/drawing/2014/main" id="{39AC62BA-B070-0FBD-5DDE-3F6AE8734C9A}"/>
-              </a:ext>
-            </a:extLst>
-          </p:cNvPr>
-          <p:cNvSpPr>
-            <a:spLocks noGrp="1" noRot="1" noChangeAspect="1"/>
-          </p:cNvSpPr>
-          <p:nvPr>
-            <p:ph type="sldImg" idx="2"/>
-          </p:nvPr>
-        </p:nvSpPr>
-        <p:spPr/>
-      </p:sp>
-      <p:sp>
-        <p:nvSpPr>
-          <p:cNvPr id="3" name="Notes Placeholder 2">
-            <a:extLst>
-              <a:ext uri="{FF2B5EF4-FFF2-40B4-BE49-F238E27FC236}">
-                <a16:creationId xmlns:a16="http://schemas.microsoft.com/office/drawing/2014/main" id="{1A9C1D92-FB01-5E00-EC80-786E6F09AFDC}"/>
-              </a:ext>
-            </a:extLst>
-          </p:cNvPr>
-          <p:cNvSpPr>
-            <a:spLocks noGrp="1"/>
-          </p:cNvSpPr>
-          <p:nvPr>
-            <p:ph type="body" sz="quarter" idx="3"/>
-          </p:nvPr>
-        </p:nvSpPr>
-        <p:spPr/>
-        <p:txBody>
-          <a:bodyPr/>
-          <a:lstStyle/>
-          <a:p>
-            <a:r>
-              <a:t>Die wichtigste Standardfolie: links 2–5 Stichpunkte, rechts ein grosses Bild, eine Schaltung, ein Screenshot oder eine Skizze. Wenn kein Visual nötig ist, die rechte Fläche für eine grosse Formel nutzen.</a:t>
-            </a:r>
-          </a:p>
-        </p:txBody>
-      </p:sp>
-      <p:sp>
-        <p:nvSpPr>
-          <p:cNvPr id="4" name="Slide Number Placeholder 3">
-            <a:extLst>
-              <a:ext uri="{FF2B5EF4-FFF2-40B4-BE49-F238E27FC236}">
-                <a16:creationId xmlns:a16="http://schemas.microsoft.com/office/drawing/2014/main" id="{9FD6E67D-0728-BA67-B57F-33187B2636CB}"/>
-              </a:ext>
-            </a:extLst>
-          </p:cNvPr>
-          <p:cNvSpPr>
-            <a:spLocks noGrp="1"/>
-          </p:cNvSpPr>
-          <p:nvPr>
-            <p:ph type="sldNum" sz="quarter" idx="5"/>
-          </p:nvPr>
-        </p:nvSpPr>
-        <p:spPr/>
-      </p:sp>
-    </p:spTree>
-    <p:extLst>
-      <p:ext uri="{BB962C8B-B14F-4D97-AF65-F5344CB8AC3E}">
-        <p14:creationId xmlns:p14="http://schemas.microsoft.com/office/powerpoint/2010/main" val="3569401629"/>
-      </p:ext>
-    </p:extLst>
-  </p:cSld>
-  <p:clrMapOvr>
-    <a:masterClrMapping/>
-  </p:clrMapOvr>
-</p:notes>
-</file>
-
-<file path=ppt/notesSlides/notesSlide21.xml><?xml version="1.0" encoding="utf-8"?>
-<p:notes xmlns:a="http://schemas.openxmlformats.org/drawingml/2006/main" xmlns:r="http://schemas.openxmlformats.org/officeDocument/2006/relationships" xmlns:p="http://schemas.openxmlformats.org/presentationml/2006/main">
-  <p:cSld>
-    <p:spTree>
-      <p:nvGrpSpPr>
-        <p:cNvPr id="1" name="">
-          <a:extLst>
-            <a:ext uri="{FF2B5EF4-FFF2-40B4-BE49-F238E27FC236}">
-              <a16:creationId xmlns:a16="http://schemas.microsoft.com/office/drawing/2014/main" id="{4DC03B99-577C-916E-C2DE-E8E0DF51385D}"/>
-            </a:ext>
-          </a:extLst>
-        </p:cNvPr>
-        <p:cNvGrpSpPr/>
-        <p:nvPr/>
-      </p:nvGrpSpPr>
-      <p:grpSpPr>
-        <a:xfrm>
-          <a:off x="0" y="0"/>
-          <a:ext cx="0" cy="0"/>
-          <a:chOff x="0" y="0"/>
-          <a:chExt cx="0" cy="0"/>
-        </a:xfrm>
-      </p:grpSpPr>
-      <p:sp>
-        <p:nvSpPr>
-          <p:cNvPr id="2" name="Slide Image Placeholder 1">
-            <a:extLst>
-              <a:ext uri="{FF2B5EF4-FFF2-40B4-BE49-F238E27FC236}">
-                <a16:creationId xmlns:a16="http://schemas.microsoft.com/office/drawing/2014/main" id="{872F1257-78F1-2702-362F-3E1487AD29C2}"/>
-              </a:ext>
-            </a:extLst>
-          </p:cNvPr>
-          <p:cNvSpPr>
-            <a:spLocks noGrp="1" noRot="1" noChangeAspect="1"/>
-          </p:cNvSpPr>
-          <p:nvPr>
-            <p:ph type="sldImg" idx="2"/>
-          </p:nvPr>
-        </p:nvSpPr>
-        <p:spPr/>
-      </p:sp>
-      <p:sp>
-        <p:nvSpPr>
-          <p:cNvPr id="3" name="Notes Placeholder 2">
-            <a:extLst>
-              <a:ext uri="{FF2B5EF4-FFF2-40B4-BE49-F238E27FC236}">
-                <a16:creationId xmlns:a16="http://schemas.microsoft.com/office/drawing/2014/main" id="{00D5C39C-19F7-AA55-47FC-014EBF7988B4}"/>
-              </a:ext>
-            </a:extLst>
-          </p:cNvPr>
-          <p:cNvSpPr>
-            <a:spLocks noGrp="1"/>
-          </p:cNvSpPr>
-          <p:nvPr>
-            <p:ph type="body" sz="quarter" idx="3"/>
-          </p:nvPr>
-        </p:nvSpPr>
-        <p:spPr/>
-        <p:txBody>
-          <a:bodyPr/>
-          <a:lstStyle/>
-          <a:p>
-            <a:r>
-              <a:t>Die wichtigste Standardfolie: links 2–5 Stichpunkte, rechts ein grosses Bild, eine Schaltung, ein Screenshot oder eine Skizze. Wenn kein Visual nötig ist, die rechte Fläche für eine grosse Formel nutzen.</a:t>
-            </a:r>
-          </a:p>
-        </p:txBody>
-      </p:sp>
-      <p:sp>
-        <p:nvSpPr>
-          <p:cNvPr id="4" name="Slide Number Placeholder 3">
-            <a:extLst>
-              <a:ext uri="{FF2B5EF4-FFF2-40B4-BE49-F238E27FC236}">
-                <a16:creationId xmlns:a16="http://schemas.microsoft.com/office/drawing/2014/main" id="{55B46655-30B3-0715-04F5-7F28EA6A15EC}"/>
-              </a:ext>
-            </a:extLst>
-          </p:cNvPr>
-          <p:cNvSpPr>
-            <a:spLocks noGrp="1"/>
-          </p:cNvSpPr>
-          <p:nvPr>
-            <p:ph type="sldNum" sz="quarter" idx="5"/>
-          </p:nvPr>
-        </p:nvSpPr>
-        <p:spPr/>
-      </p:sp>
-    </p:spTree>
-    <p:extLst>
-      <p:ext uri="{BB962C8B-B14F-4D97-AF65-F5344CB8AC3E}">
-        <p14:creationId xmlns:p14="http://schemas.microsoft.com/office/powerpoint/2010/main" val="2384198258"/>
-      </p:ext>
-    </p:extLst>
-  </p:cSld>
-  <p:clrMapOvr>
-    <a:masterClrMapping/>
-  </p:clrMapOvr>
-</p:notes>
-</file>
-
-<file path=ppt/notesSlides/notesSlide22.xml><?xml version="1.0" encoding="utf-8"?>
-<p:notes xmlns:a="http://schemas.openxmlformats.org/drawingml/2006/main" xmlns:r="http://schemas.openxmlformats.org/officeDocument/2006/relationships" xmlns:p="http://schemas.openxmlformats.org/presentationml/2006/main">
-  <p:cSld>
-    <p:spTree>
-      <p:nvGrpSpPr>
-        <p:cNvPr id="1" name="">
-          <a:extLst>
-            <a:ext uri="{FF2B5EF4-FFF2-40B4-BE49-F238E27FC236}">
-              <a16:creationId xmlns:a16="http://schemas.microsoft.com/office/drawing/2014/main" id="{57C30488-686C-768A-F3CD-543943102FB5}"/>
-            </a:ext>
-          </a:extLst>
-        </p:cNvPr>
-        <p:cNvGrpSpPr/>
-        <p:nvPr/>
-      </p:nvGrpSpPr>
-      <p:grpSpPr>
-        <a:xfrm>
-          <a:off x="0" y="0"/>
-          <a:ext cx="0" cy="0"/>
-          <a:chOff x="0" y="0"/>
-          <a:chExt cx="0" cy="0"/>
-        </a:xfrm>
-      </p:grpSpPr>
-      <p:sp>
-        <p:nvSpPr>
-          <p:cNvPr id="2" name="Slide Image Placeholder 1">
-            <a:extLst>
-              <a:ext uri="{FF2B5EF4-FFF2-40B4-BE49-F238E27FC236}">
-                <a16:creationId xmlns:a16="http://schemas.microsoft.com/office/drawing/2014/main" id="{ABBA0621-FBF0-AFD5-0896-CAD2D4B46719}"/>
-              </a:ext>
-            </a:extLst>
-          </p:cNvPr>
-          <p:cNvSpPr>
-            <a:spLocks noGrp="1" noRot="1" noChangeAspect="1"/>
-          </p:cNvSpPr>
-          <p:nvPr>
-            <p:ph type="sldImg" idx="2"/>
-          </p:nvPr>
-        </p:nvSpPr>
-        <p:spPr/>
-      </p:sp>
-      <p:sp>
-        <p:nvSpPr>
-          <p:cNvPr id="3" name="Notes Placeholder 2">
-            <a:extLst>
-              <a:ext uri="{FF2B5EF4-FFF2-40B4-BE49-F238E27FC236}">
-                <a16:creationId xmlns:a16="http://schemas.microsoft.com/office/drawing/2014/main" id="{DAF01E71-5CF7-9AC4-5A4F-6AA31302E5B0}"/>
-              </a:ext>
-            </a:extLst>
-          </p:cNvPr>
-          <p:cNvSpPr>
-            <a:spLocks noGrp="1"/>
-          </p:cNvSpPr>
-          <p:nvPr>
-            <p:ph type="body" sz="quarter" idx="3"/>
-          </p:nvPr>
-        </p:nvSpPr>
-        <p:spPr/>
-        <p:txBody>
-          <a:bodyPr/>
-          <a:lstStyle/>
-          <a:p>
-            <a:r>
-              <a:t>Die wichtigste Standardfolie: links 2–5 Stichpunkte, rechts ein grosses Bild, eine Schaltung, ein Screenshot oder eine Skizze. Wenn kein Visual nötig ist, die rechte Fläche für eine grosse Formel nutzen.</a:t>
-            </a:r>
-          </a:p>
-        </p:txBody>
-      </p:sp>
-      <p:sp>
-        <p:nvSpPr>
-          <p:cNvPr id="4" name="Slide Number Placeholder 3">
-            <a:extLst>
-              <a:ext uri="{FF2B5EF4-FFF2-40B4-BE49-F238E27FC236}">
-                <a16:creationId xmlns:a16="http://schemas.microsoft.com/office/drawing/2014/main" id="{8CA229BD-52CD-AD47-4340-BDED2AE2925F}"/>
-              </a:ext>
-            </a:extLst>
-          </p:cNvPr>
-          <p:cNvSpPr>
-            <a:spLocks noGrp="1"/>
-          </p:cNvSpPr>
-          <p:nvPr>
-            <p:ph type="sldNum" sz="quarter" idx="5"/>
-          </p:nvPr>
-        </p:nvSpPr>
-        <p:spPr/>
-      </p:sp>
-    </p:spTree>
-    <p:extLst>
-      <p:ext uri="{BB962C8B-B14F-4D97-AF65-F5344CB8AC3E}">
-        <p14:creationId xmlns:p14="http://schemas.microsoft.com/office/powerpoint/2010/main" val="1321810453"/>
-      </p:ext>
-    </p:extLst>
-  </p:cSld>
-  <p:clrMapOvr>
-    <a:masterClrMapping/>
-  </p:clrMapOvr>
-</p:notes>
-</file>
-
-<file path=ppt/notesSlides/notesSlide23.xml><?xml version="1.0" encoding="utf-8"?>
-<p:notes xmlns:a="http://schemas.openxmlformats.org/drawingml/2006/main" xmlns:r="http://schemas.openxmlformats.org/officeDocument/2006/relationships" xmlns:p="http://schemas.openxmlformats.org/presentationml/2006/main">
-  <p:cSld>
-    <p:spTree>
-      <p:nvGrpSpPr>
-        <p:cNvPr id="1" name="">
-          <a:extLst>
-            <a:ext uri="{FF2B5EF4-FFF2-40B4-BE49-F238E27FC236}">
               <a16:creationId xmlns:a16="http://schemas.microsoft.com/office/drawing/2014/main" id="{FBF6CF6F-490F-8EE0-B0A9-5BC68E5AA6B2}"/>
             </a:ext>
           </a:extLst>
@@ -1842,7 +1542,7 @@
 </p:notes>
 </file>
 
-<file path=ppt/notesSlides/notesSlide24.xml><?xml version="1.0" encoding="utf-8"?>
+<file path=ppt/notesSlides/notesSlide21.xml><?xml version="1.0" encoding="utf-8"?>
 <p:notes xmlns:a="http://schemas.openxmlformats.org/drawingml/2006/main" xmlns:r="http://schemas.openxmlformats.org/officeDocument/2006/relationships" xmlns:p="http://schemas.openxmlformats.org/presentationml/2006/main">
   <p:cSld>
     <p:spTree>
@@ -1941,7 +1641,7 @@
 </p:notes>
 </file>
 
-<file path=ppt/notesSlides/notesSlide25.xml><?xml version="1.0" encoding="utf-8"?>
+<file path=ppt/notesSlides/notesSlide22.xml><?xml version="1.0" encoding="utf-8"?>
 <p:notes xmlns:a="http://schemas.openxmlformats.org/drawingml/2006/main" xmlns:r="http://schemas.openxmlformats.org/officeDocument/2006/relationships" xmlns:p="http://schemas.openxmlformats.org/presentationml/2006/main">
   <p:cSld>
     <p:spTree>
@@ -2040,7 +1740,7 @@
 </p:notes>
 </file>
 
-<file path=ppt/notesSlides/notesSlide26.xml><?xml version="1.0" encoding="utf-8"?>
+<file path=ppt/notesSlides/notesSlide23.xml><?xml version="1.0" encoding="utf-8"?>
 <p:notes xmlns:a="http://schemas.openxmlformats.org/drawingml/2006/main" xmlns:r="http://schemas.openxmlformats.org/officeDocument/2006/relationships" xmlns:p="http://schemas.openxmlformats.org/presentationml/2006/main">
   <p:cSld>
     <p:spTree>
@@ -2139,7 +1839,7 @@
 </p:notes>
 </file>
 
-<file path=ppt/notesSlides/notesSlide27.xml><?xml version="1.0" encoding="utf-8"?>
+<file path=ppt/notesSlides/notesSlide24.xml><?xml version="1.0" encoding="utf-8"?>
 <p:notes xmlns:a="http://schemas.openxmlformats.org/drawingml/2006/main" xmlns:r="http://schemas.openxmlformats.org/officeDocument/2006/relationships" xmlns:p="http://schemas.openxmlformats.org/presentationml/2006/main">
   <p:cSld>
     <p:spTree>
@@ -2238,7 +1938,7 @@
 </p:notes>
 </file>
 
-<file path=ppt/notesSlides/notesSlide28.xml><?xml version="1.0" encoding="utf-8"?>
+<file path=ppt/notesSlides/notesSlide25.xml><?xml version="1.0" encoding="utf-8"?>
 <p:notes xmlns:a="http://schemas.openxmlformats.org/drawingml/2006/main" xmlns:r="http://schemas.openxmlformats.org/officeDocument/2006/relationships" xmlns:p="http://schemas.openxmlformats.org/presentationml/2006/main">
   <p:cSld>
     <p:spTree>
@@ -2337,7 +2037,7 @@
 </p:notes>
 </file>
 
-<file path=ppt/notesSlides/notesSlide29.xml><?xml version="1.0" encoding="utf-8"?>
+<file path=ppt/notesSlides/notesSlide26.xml><?xml version="1.0" encoding="utf-8"?>
 <p:notes xmlns:a="http://schemas.openxmlformats.org/drawingml/2006/main" xmlns:r="http://schemas.openxmlformats.org/officeDocument/2006/relationships" xmlns:p="http://schemas.openxmlformats.org/presentationml/2006/main">
   <p:cSld>
     <p:spTree>
@@ -2427,6 +2127,303 @@
     <p:extLst>
       <p:ext uri="{BB962C8B-B14F-4D97-AF65-F5344CB8AC3E}">
         <p14:creationId xmlns:p14="http://schemas.microsoft.com/office/powerpoint/2010/main" val="1858837655"/>
+      </p:ext>
+    </p:extLst>
+  </p:cSld>
+  <p:clrMapOvr>
+    <a:masterClrMapping/>
+  </p:clrMapOvr>
+</p:notes>
+</file>
+
+<file path=ppt/notesSlides/notesSlide27.xml><?xml version="1.0" encoding="utf-8"?>
+<p:notes xmlns:a="http://schemas.openxmlformats.org/drawingml/2006/main" xmlns:r="http://schemas.openxmlformats.org/officeDocument/2006/relationships" xmlns:p="http://schemas.openxmlformats.org/presentationml/2006/main">
+  <p:cSld>
+    <p:spTree>
+      <p:nvGrpSpPr>
+        <p:cNvPr id="1" name="">
+          <a:extLst>
+            <a:ext uri="{FF2B5EF4-FFF2-40B4-BE49-F238E27FC236}">
+              <a16:creationId xmlns:a16="http://schemas.microsoft.com/office/drawing/2014/main" id="{D49FDB76-68B2-BE5B-538C-849169E26C2B}"/>
+            </a:ext>
+          </a:extLst>
+        </p:cNvPr>
+        <p:cNvGrpSpPr/>
+        <p:nvPr/>
+      </p:nvGrpSpPr>
+      <p:grpSpPr>
+        <a:xfrm>
+          <a:off x="0" y="0"/>
+          <a:ext cx="0" cy="0"/>
+          <a:chOff x="0" y="0"/>
+          <a:chExt cx="0" cy="0"/>
+        </a:xfrm>
+      </p:grpSpPr>
+      <p:sp>
+        <p:nvSpPr>
+          <p:cNvPr id="2" name="Slide Image Placeholder 1">
+            <a:extLst>
+              <a:ext uri="{FF2B5EF4-FFF2-40B4-BE49-F238E27FC236}">
+                <a16:creationId xmlns:a16="http://schemas.microsoft.com/office/drawing/2014/main" id="{5C062E32-ECB5-FD3F-22CC-4F7DB3801C17}"/>
+              </a:ext>
+            </a:extLst>
+          </p:cNvPr>
+          <p:cNvSpPr>
+            <a:spLocks noGrp="1" noRot="1" noChangeAspect="1"/>
+          </p:cNvSpPr>
+          <p:nvPr>
+            <p:ph type="sldImg" idx="2"/>
+          </p:nvPr>
+        </p:nvSpPr>
+        <p:spPr/>
+      </p:sp>
+      <p:sp>
+        <p:nvSpPr>
+          <p:cNvPr id="3" name="Notes Placeholder 2">
+            <a:extLst>
+              <a:ext uri="{FF2B5EF4-FFF2-40B4-BE49-F238E27FC236}">
+                <a16:creationId xmlns:a16="http://schemas.microsoft.com/office/drawing/2014/main" id="{274EE420-02F6-03A2-9324-886A04BADD1E}"/>
+              </a:ext>
+            </a:extLst>
+          </p:cNvPr>
+          <p:cNvSpPr>
+            <a:spLocks noGrp="1"/>
+          </p:cNvSpPr>
+          <p:nvPr>
+            <p:ph type="body" sz="quarter" idx="3"/>
+          </p:nvPr>
+        </p:nvSpPr>
+        <p:spPr/>
+        <p:txBody>
+          <a:bodyPr/>
+          <a:lstStyle/>
+          <a:p>
+            <a:r>
+              <a:t>Die wichtigste Standardfolie: links 2–5 Stichpunkte, rechts ein grosses Bild, eine Schaltung, ein Screenshot oder eine Skizze. Wenn kein Visual nötig ist, die rechte Fläche für eine grosse Formel nutzen.</a:t>
+            </a:r>
+          </a:p>
+        </p:txBody>
+      </p:sp>
+      <p:sp>
+        <p:nvSpPr>
+          <p:cNvPr id="4" name="Slide Number Placeholder 3">
+            <a:extLst>
+              <a:ext uri="{FF2B5EF4-FFF2-40B4-BE49-F238E27FC236}">
+                <a16:creationId xmlns:a16="http://schemas.microsoft.com/office/drawing/2014/main" id="{042F4B12-8506-904A-3192-A07C6F2160A8}"/>
+              </a:ext>
+            </a:extLst>
+          </p:cNvPr>
+          <p:cNvSpPr>
+            <a:spLocks noGrp="1"/>
+          </p:cNvSpPr>
+          <p:nvPr>
+            <p:ph type="sldNum" sz="quarter" idx="5"/>
+          </p:nvPr>
+        </p:nvSpPr>
+        <p:spPr/>
+      </p:sp>
+    </p:spTree>
+    <p:extLst>
+      <p:ext uri="{BB962C8B-B14F-4D97-AF65-F5344CB8AC3E}">
+        <p14:creationId xmlns:p14="http://schemas.microsoft.com/office/powerpoint/2010/main" val="2312176854"/>
+      </p:ext>
+    </p:extLst>
+  </p:cSld>
+  <p:clrMapOvr>
+    <a:masterClrMapping/>
+  </p:clrMapOvr>
+</p:notes>
+</file>
+
+<file path=ppt/notesSlides/notesSlide28.xml><?xml version="1.0" encoding="utf-8"?>
+<p:notes xmlns:a="http://schemas.openxmlformats.org/drawingml/2006/main" xmlns:r="http://schemas.openxmlformats.org/officeDocument/2006/relationships" xmlns:p="http://schemas.openxmlformats.org/presentationml/2006/main">
+  <p:cSld>
+    <p:spTree>
+      <p:nvGrpSpPr>
+        <p:cNvPr id="1" name="">
+          <a:extLst>
+            <a:ext uri="{FF2B5EF4-FFF2-40B4-BE49-F238E27FC236}">
+              <a16:creationId xmlns:a16="http://schemas.microsoft.com/office/drawing/2014/main" id="{11696FD5-0072-DA75-AFA0-73B37DB77CB7}"/>
+            </a:ext>
+          </a:extLst>
+        </p:cNvPr>
+        <p:cNvGrpSpPr/>
+        <p:nvPr/>
+      </p:nvGrpSpPr>
+      <p:grpSpPr>
+        <a:xfrm>
+          <a:off x="0" y="0"/>
+          <a:ext cx="0" cy="0"/>
+          <a:chOff x="0" y="0"/>
+          <a:chExt cx="0" cy="0"/>
+        </a:xfrm>
+      </p:grpSpPr>
+      <p:sp>
+        <p:nvSpPr>
+          <p:cNvPr id="2" name="Slide Image Placeholder 1">
+            <a:extLst>
+              <a:ext uri="{FF2B5EF4-FFF2-40B4-BE49-F238E27FC236}">
+                <a16:creationId xmlns:a16="http://schemas.microsoft.com/office/drawing/2014/main" id="{A57EC1E1-7167-3C19-1947-E94020442EA1}"/>
+              </a:ext>
+            </a:extLst>
+          </p:cNvPr>
+          <p:cNvSpPr>
+            <a:spLocks noGrp="1" noRot="1" noChangeAspect="1"/>
+          </p:cNvSpPr>
+          <p:nvPr>
+            <p:ph type="sldImg" idx="2"/>
+          </p:nvPr>
+        </p:nvSpPr>
+        <p:spPr/>
+      </p:sp>
+      <p:sp>
+        <p:nvSpPr>
+          <p:cNvPr id="3" name="Notes Placeholder 2">
+            <a:extLst>
+              <a:ext uri="{FF2B5EF4-FFF2-40B4-BE49-F238E27FC236}">
+                <a16:creationId xmlns:a16="http://schemas.microsoft.com/office/drawing/2014/main" id="{E311A947-5556-D820-D03B-34156F9ED636}"/>
+              </a:ext>
+            </a:extLst>
+          </p:cNvPr>
+          <p:cNvSpPr>
+            <a:spLocks noGrp="1"/>
+          </p:cNvSpPr>
+          <p:nvPr>
+            <p:ph type="body" sz="quarter" idx="3"/>
+          </p:nvPr>
+        </p:nvSpPr>
+        <p:spPr/>
+        <p:txBody>
+          <a:bodyPr/>
+          <a:lstStyle/>
+          <a:p>
+            <a:r>
+              <a:t>Die wichtigste Standardfolie: links 2–5 Stichpunkte, rechts ein grosses Bild, eine Schaltung, ein Screenshot oder eine Skizze. Wenn kein Visual nötig ist, die rechte Fläche für eine grosse Formel nutzen.</a:t>
+            </a:r>
+          </a:p>
+        </p:txBody>
+      </p:sp>
+      <p:sp>
+        <p:nvSpPr>
+          <p:cNvPr id="4" name="Slide Number Placeholder 3">
+            <a:extLst>
+              <a:ext uri="{FF2B5EF4-FFF2-40B4-BE49-F238E27FC236}">
+                <a16:creationId xmlns:a16="http://schemas.microsoft.com/office/drawing/2014/main" id="{96AF338F-1550-BF75-B280-7789EC474AA2}"/>
+              </a:ext>
+            </a:extLst>
+          </p:cNvPr>
+          <p:cNvSpPr>
+            <a:spLocks noGrp="1"/>
+          </p:cNvSpPr>
+          <p:nvPr>
+            <p:ph type="sldNum" sz="quarter" idx="5"/>
+          </p:nvPr>
+        </p:nvSpPr>
+        <p:spPr/>
+      </p:sp>
+    </p:spTree>
+    <p:extLst>
+      <p:ext uri="{BB962C8B-B14F-4D97-AF65-F5344CB8AC3E}">
+        <p14:creationId xmlns:p14="http://schemas.microsoft.com/office/powerpoint/2010/main" val="54678645"/>
+      </p:ext>
+    </p:extLst>
+  </p:cSld>
+  <p:clrMapOvr>
+    <a:masterClrMapping/>
+  </p:clrMapOvr>
+</p:notes>
+</file>
+
+<file path=ppt/notesSlides/notesSlide29.xml><?xml version="1.0" encoding="utf-8"?>
+<p:notes xmlns:a="http://schemas.openxmlformats.org/drawingml/2006/main" xmlns:r="http://schemas.openxmlformats.org/officeDocument/2006/relationships" xmlns:p="http://schemas.openxmlformats.org/presentationml/2006/main">
+  <p:cSld>
+    <p:spTree>
+      <p:nvGrpSpPr>
+        <p:cNvPr id="1" name="">
+          <a:extLst>
+            <a:ext uri="{FF2B5EF4-FFF2-40B4-BE49-F238E27FC236}">
+              <a16:creationId xmlns:a16="http://schemas.microsoft.com/office/drawing/2014/main" id="{697F1B50-00F9-47BC-9EA0-6A5608259F1B}"/>
+            </a:ext>
+          </a:extLst>
+        </p:cNvPr>
+        <p:cNvGrpSpPr/>
+        <p:nvPr/>
+      </p:nvGrpSpPr>
+      <p:grpSpPr>
+        <a:xfrm>
+          <a:off x="0" y="0"/>
+          <a:ext cx="0" cy="0"/>
+          <a:chOff x="0" y="0"/>
+          <a:chExt cx="0" cy="0"/>
+        </a:xfrm>
+      </p:grpSpPr>
+      <p:sp>
+        <p:nvSpPr>
+          <p:cNvPr id="2" name="Slide Image Placeholder 1">
+            <a:extLst>
+              <a:ext uri="{FF2B5EF4-FFF2-40B4-BE49-F238E27FC236}">
+                <a16:creationId xmlns:a16="http://schemas.microsoft.com/office/drawing/2014/main" id="{CD2D6005-E1EA-7BA9-40CF-CD5349674804}"/>
+              </a:ext>
+            </a:extLst>
+          </p:cNvPr>
+          <p:cNvSpPr>
+            <a:spLocks noGrp="1" noRot="1" noChangeAspect="1"/>
+          </p:cNvSpPr>
+          <p:nvPr>
+            <p:ph type="sldImg" idx="2"/>
+          </p:nvPr>
+        </p:nvSpPr>
+        <p:spPr/>
+      </p:sp>
+      <p:sp>
+        <p:nvSpPr>
+          <p:cNvPr id="3" name="Notes Placeholder 2">
+            <a:extLst>
+              <a:ext uri="{FF2B5EF4-FFF2-40B4-BE49-F238E27FC236}">
+                <a16:creationId xmlns:a16="http://schemas.microsoft.com/office/drawing/2014/main" id="{C6EEA4EA-969E-E819-4733-D4030CA0C314}"/>
+              </a:ext>
+            </a:extLst>
+          </p:cNvPr>
+          <p:cNvSpPr>
+            <a:spLocks noGrp="1"/>
+          </p:cNvSpPr>
+          <p:nvPr>
+            <p:ph type="body" sz="quarter" idx="3"/>
+          </p:nvPr>
+        </p:nvSpPr>
+        <p:spPr/>
+        <p:txBody>
+          <a:bodyPr/>
+          <a:lstStyle/>
+          <a:p>
+            <a:r>
+              <a:t>Die wichtigste Standardfolie: links 2–5 Stichpunkte, rechts ein grosses Bild, eine Schaltung, ein Screenshot oder eine Skizze. Wenn kein Visual nötig ist, die rechte Fläche für eine grosse Formel nutzen.</a:t>
+            </a:r>
+          </a:p>
+        </p:txBody>
+      </p:sp>
+      <p:sp>
+        <p:nvSpPr>
+          <p:cNvPr id="4" name="Slide Number Placeholder 3">
+            <a:extLst>
+              <a:ext uri="{FF2B5EF4-FFF2-40B4-BE49-F238E27FC236}">
+                <a16:creationId xmlns:a16="http://schemas.microsoft.com/office/drawing/2014/main" id="{C758FA9C-4AF2-7726-AD4D-3CED3413FBF9}"/>
+              </a:ext>
+            </a:extLst>
+          </p:cNvPr>
+          <p:cNvSpPr>
+            <a:spLocks noGrp="1"/>
+          </p:cNvSpPr>
+          <p:nvPr>
+            <p:ph type="sldNum" sz="quarter" idx="5"/>
+          </p:nvPr>
+        </p:nvSpPr>
+        <p:spPr/>
+      </p:sp>
+    </p:spTree>
+    <p:extLst>
+      <p:ext uri="{BB962C8B-B14F-4D97-AF65-F5344CB8AC3E}">
+        <p14:creationId xmlns:p14="http://schemas.microsoft.com/office/powerpoint/2010/main" val="2864950109"/>
       </p:ext>
     </p:extLst>
   </p:cSld>
@@ -2543,303 +2540,6 @@
         <p:cNvPr id="1" name="">
           <a:extLst>
             <a:ext uri="{FF2B5EF4-FFF2-40B4-BE49-F238E27FC236}">
-              <a16:creationId xmlns:a16="http://schemas.microsoft.com/office/drawing/2014/main" id="{D49FDB76-68B2-BE5B-538C-849169E26C2B}"/>
-            </a:ext>
-          </a:extLst>
-        </p:cNvPr>
-        <p:cNvGrpSpPr/>
-        <p:nvPr/>
-      </p:nvGrpSpPr>
-      <p:grpSpPr>
-        <a:xfrm>
-          <a:off x="0" y="0"/>
-          <a:ext cx="0" cy="0"/>
-          <a:chOff x="0" y="0"/>
-          <a:chExt cx="0" cy="0"/>
-        </a:xfrm>
-      </p:grpSpPr>
-      <p:sp>
-        <p:nvSpPr>
-          <p:cNvPr id="2" name="Slide Image Placeholder 1">
-            <a:extLst>
-              <a:ext uri="{FF2B5EF4-FFF2-40B4-BE49-F238E27FC236}">
-                <a16:creationId xmlns:a16="http://schemas.microsoft.com/office/drawing/2014/main" id="{5C062E32-ECB5-FD3F-22CC-4F7DB3801C17}"/>
-              </a:ext>
-            </a:extLst>
-          </p:cNvPr>
-          <p:cNvSpPr>
-            <a:spLocks noGrp="1" noRot="1" noChangeAspect="1"/>
-          </p:cNvSpPr>
-          <p:nvPr>
-            <p:ph type="sldImg" idx="2"/>
-          </p:nvPr>
-        </p:nvSpPr>
-        <p:spPr/>
-      </p:sp>
-      <p:sp>
-        <p:nvSpPr>
-          <p:cNvPr id="3" name="Notes Placeholder 2">
-            <a:extLst>
-              <a:ext uri="{FF2B5EF4-FFF2-40B4-BE49-F238E27FC236}">
-                <a16:creationId xmlns:a16="http://schemas.microsoft.com/office/drawing/2014/main" id="{274EE420-02F6-03A2-9324-886A04BADD1E}"/>
-              </a:ext>
-            </a:extLst>
-          </p:cNvPr>
-          <p:cNvSpPr>
-            <a:spLocks noGrp="1"/>
-          </p:cNvSpPr>
-          <p:nvPr>
-            <p:ph type="body" sz="quarter" idx="3"/>
-          </p:nvPr>
-        </p:nvSpPr>
-        <p:spPr/>
-        <p:txBody>
-          <a:bodyPr/>
-          <a:lstStyle/>
-          <a:p>
-            <a:r>
-              <a:t>Die wichtigste Standardfolie: links 2–5 Stichpunkte, rechts ein grosses Bild, eine Schaltung, ein Screenshot oder eine Skizze. Wenn kein Visual nötig ist, die rechte Fläche für eine grosse Formel nutzen.</a:t>
-            </a:r>
-          </a:p>
-        </p:txBody>
-      </p:sp>
-      <p:sp>
-        <p:nvSpPr>
-          <p:cNvPr id="4" name="Slide Number Placeholder 3">
-            <a:extLst>
-              <a:ext uri="{FF2B5EF4-FFF2-40B4-BE49-F238E27FC236}">
-                <a16:creationId xmlns:a16="http://schemas.microsoft.com/office/drawing/2014/main" id="{042F4B12-8506-904A-3192-A07C6F2160A8}"/>
-              </a:ext>
-            </a:extLst>
-          </p:cNvPr>
-          <p:cNvSpPr>
-            <a:spLocks noGrp="1"/>
-          </p:cNvSpPr>
-          <p:nvPr>
-            <p:ph type="sldNum" sz="quarter" idx="5"/>
-          </p:nvPr>
-        </p:nvSpPr>
-        <p:spPr/>
-      </p:sp>
-    </p:spTree>
-    <p:extLst>
-      <p:ext uri="{BB962C8B-B14F-4D97-AF65-F5344CB8AC3E}">
-        <p14:creationId xmlns:p14="http://schemas.microsoft.com/office/powerpoint/2010/main" val="2312176854"/>
-      </p:ext>
-    </p:extLst>
-  </p:cSld>
-  <p:clrMapOvr>
-    <a:masterClrMapping/>
-  </p:clrMapOvr>
-</p:notes>
-</file>
-
-<file path=ppt/notesSlides/notesSlide31.xml><?xml version="1.0" encoding="utf-8"?>
-<p:notes xmlns:a="http://schemas.openxmlformats.org/drawingml/2006/main" xmlns:r="http://schemas.openxmlformats.org/officeDocument/2006/relationships" xmlns:p="http://schemas.openxmlformats.org/presentationml/2006/main">
-  <p:cSld>
-    <p:spTree>
-      <p:nvGrpSpPr>
-        <p:cNvPr id="1" name="">
-          <a:extLst>
-            <a:ext uri="{FF2B5EF4-FFF2-40B4-BE49-F238E27FC236}">
-              <a16:creationId xmlns:a16="http://schemas.microsoft.com/office/drawing/2014/main" id="{11696FD5-0072-DA75-AFA0-73B37DB77CB7}"/>
-            </a:ext>
-          </a:extLst>
-        </p:cNvPr>
-        <p:cNvGrpSpPr/>
-        <p:nvPr/>
-      </p:nvGrpSpPr>
-      <p:grpSpPr>
-        <a:xfrm>
-          <a:off x="0" y="0"/>
-          <a:ext cx="0" cy="0"/>
-          <a:chOff x="0" y="0"/>
-          <a:chExt cx="0" cy="0"/>
-        </a:xfrm>
-      </p:grpSpPr>
-      <p:sp>
-        <p:nvSpPr>
-          <p:cNvPr id="2" name="Slide Image Placeholder 1">
-            <a:extLst>
-              <a:ext uri="{FF2B5EF4-FFF2-40B4-BE49-F238E27FC236}">
-                <a16:creationId xmlns:a16="http://schemas.microsoft.com/office/drawing/2014/main" id="{A57EC1E1-7167-3C19-1947-E94020442EA1}"/>
-              </a:ext>
-            </a:extLst>
-          </p:cNvPr>
-          <p:cNvSpPr>
-            <a:spLocks noGrp="1" noRot="1" noChangeAspect="1"/>
-          </p:cNvSpPr>
-          <p:nvPr>
-            <p:ph type="sldImg" idx="2"/>
-          </p:nvPr>
-        </p:nvSpPr>
-        <p:spPr/>
-      </p:sp>
-      <p:sp>
-        <p:nvSpPr>
-          <p:cNvPr id="3" name="Notes Placeholder 2">
-            <a:extLst>
-              <a:ext uri="{FF2B5EF4-FFF2-40B4-BE49-F238E27FC236}">
-                <a16:creationId xmlns:a16="http://schemas.microsoft.com/office/drawing/2014/main" id="{E311A947-5556-D820-D03B-34156F9ED636}"/>
-              </a:ext>
-            </a:extLst>
-          </p:cNvPr>
-          <p:cNvSpPr>
-            <a:spLocks noGrp="1"/>
-          </p:cNvSpPr>
-          <p:nvPr>
-            <p:ph type="body" sz="quarter" idx="3"/>
-          </p:nvPr>
-        </p:nvSpPr>
-        <p:spPr/>
-        <p:txBody>
-          <a:bodyPr/>
-          <a:lstStyle/>
-          <a:p>
-            <a:r>
-              <a:t>Die wichtigste Standardfolie: links 2–5 Stichpunkte, rechts ein grosses Bild, eine Schaltung, ein Screenshot oder eine Skizze. Wenn kein Visual nötig ist, die rechte Fläche für eine grosse Formel nutzen.</a:t>
-            </a:r>
-          </a:p>
-        </p:txBody>
-      </p:sp>
-      <p:sp>
-        <p:nvSpPr>
-          <p:cNvPr id="4" name="Slide Number Placeholder 3">
-            <a:extLst>
-              <a:ext uri="{FF2B5EF4-FFF2-40B4-BE49-F238E27FC236}">
-                <a16:creationId xmlns:a16="http://schemas.microsoft.com/office/drawing/2014/main" id="{96AF338F-1550-BF75-B280-7789EC474AA2}"/>
-              </a:ext>
-            </a:extLst>
-          </p:cNvPr>
-          <p:cNvSpPr>
-            <a:spLocks noGrp="1"/>
-          </p:cNvSpPr>
-          <p:nvPr>
-            <p:ph type="sldNum" sz="quarter" idx="5"/>
-          </p:nvPr>
-        </p:nvSpPr>
-        <p:spPr/>
-      </p:sp>
-    </p:spTree>
-    <p:extLst>
-      <p:ext uri="{BB962C8B-B14F-4D97-AF65-F5344CB8AC3E}">
-        <p14:creationId xmlns:p14="http://schemas.microsoft.com/office/powerpoint/2010/main" val="54678645"/>
-      </p:ext>
-    </p:extLst>
-  </p:cSld>
-  <p:clrMapOvr>
-    <a:masterClrMapping/>
-  </p:clrMapOvr>
-</p:notes>
-</file>
-
-<file path=ppt/notesSlides/notesSlide32.xml><?xml version="1.0" encoding="utf-8"?>
-<p:notes xmlns:a="http://schemas.openxmlformats.org/drawingml/2006/main" xmlns:r="http://schemas.openxmlformats.org/officeDocument/2006/relationships" xmlns:p="http://schemas.openxmlformats.org/presentationml/2006/main">
-  <p:cSld>
-    <p:spTree>
-      <p:nvGrpSpPr>
-        <p:cNvPr id="1" name="">
-          <a:extLst>
-            <a:ext uri="{FF2B5EF4-FFF2-40B4-BE49-F238E27FC236}">
-              <a16:creationId xmlns:a16="http://schemas.microsoft.com/office/drawing/2014/main" id="{697F1B50-00F9-47BC-9EA0-6A5608259F1B}"/>
-            </a:ext>
-          </a:extLst>
-        </p:cNvPr>
-        <p:cNvGrpSpPr/>
-        <p:nvPr/>
-      </p:nvGrpSpPr>
-      <p:grpSpPr>
-        <a:xfrm>
-          <a:off x="0" y="0"/>
-          <a:ext cx="0" cy="0"/>
-          <a:chOff x="0" y="0"/>
-          <a:chExt cx="0" cy="0"/>
-        </a:xfrm>
-      </p:grpSpPr>
-      <p:sp>
-        <p:nvSpPr>
-          <p:cNvPr id="2" name="Slide Image Placeholder 1">
-            <a:extLst>
-              <a:ext uri="{FF2B5EF4-FFF2-40B4-BE49-F238E27FC236}">
-                <a16:creationId xmlns:a16="http://schemas.microsoft.com/office/drawing/2014/main" id="{CD2D6005-E1EA-7BA9-40CF-CD5349674804}"/>
-              </a:ext>
-            </a:extLst>
-          </p:cNvPr>
-          <p:cNvSpPr>
-            <a:spLocks noGrp="1" noRot="1" noChangeAspect="1"/>
-          </p:cNvSpPr>
-          <p:nvPr>
-            <p:ph type="sldImg" idx="2"/>
-          </p:nvPr>
-        </p:nvSpPr>
-        <p:spPr/>
-      </p:sp>
-      <p:sp>
-        <p:nvSpPr>
-          <p:cNvPr id="3" name="Notes Placeholder 2">
-            <a:extLst>
-              <a:ext uri="{FF2B5EF4-FFF2-40B4-BE49-F238E27FC236}">
-                <a16:creationId xmlns:a16="http://schemas.microsoft.com/office/drawing/2014/main" id="{C6EEA4EA-969E-E819-4733-D4030CA0C314}"/>
-              </a:ext>
-            </a:extLst>
-          </p:cNvPr>
-          <p:cNvSpPr>
-            <a:spLocks noGrp="1"/>
-          </p:cNvSpPr>
-          <p:nvPr>
-            <p:ph type="body" sz="quarter" idx="3"/>
-          </p:nvPr>
-        </p:nvSpPr>
-        <p:spPr/>
-        <p:txBody>
-          <a:bodyPr/>
-          <a:lstStyle/>
-          <a:p>
-            <a:r>
-              <a:t>Die wichtigste Standardfolie: links 2–5 Stichpunkte, rechts ein grosses Bild, eine Schaltung, ein Screenshot oder eine Skizze. Wenn kein Visual nötig ist, die rechte Fläche für eine grosse Formel nutzen.</a:t>
-            </a:r>
-          </a:p>
-        </p:txBody>
-      </p:sp>
-      <p:sp>
-        <p:nvSpPr>
-          <p:cNvPr id="4" name="Slide Number Placeholder 3">
-            <a:extLst>
-              <a:ext uri="{FF2B5EF4-FFF2-40B4-BE49-F238E27FC236}">
-                <a16:creationId xmlns:a16="http://schemas.microsoft.com/office/drawing/2014/main" id="{C758FA9C-4AF2-7726-AD4D-3CED3413FBF9}"/>
-              </a:ext>
-            </a:extLst>
-          </p:cNvPr>
-          <p:cNvSpPr>
-            <a:spLocks noGrp="1"/>
-          </p:cNvSpPr>
-          <p:nvPr>
-            <p:ph type="sldNum" sz="quarter" idx="5"/>
-          </p:nvPr>
-        </p:nvSpPr>
-        <p:spPr/>
-      </p:sp>
-    </p:spTree>
-    <p:extLst>
-      <p:ext uri="{BB962C8B-B14F-4D97-AF65-F5344CB8AC3E}">
-        <p14:creationId xmlns:p14="http://schemas.microsoft.com/office/powerpoint/2010/main" val="2864950109"/>
-      </p:ext>
-    </p:extLst>
-  </p:cSld>
-  <p:clrMapOvr>
-    <a:masterClrMapping/>
-  </p:clrMapOvr>
-</p:notes>
-</file>
-
-<file path=ppt/notesSlides/notesSlide33.xml><?xml version="1.0" encoding="utf-8"?>
-<p:notes xmlns:a="http://schemas.openxmlformats.org/drawingml/2006/main" xmlns:r="http://schemas.openxmlformats.org/officeDocument/2006/relationships" xmlns:p="http://schemas.openxmlformats.org/presentationml/2006/main">
-  <p:cSld>
-    <p:spTree>
-      <p:nvGrpSpPr>
-        <p:cNvPr id="1" name="">
-          <a:extLst>
-            <a:ext uri="{FF2B5EF4-FFF2-40B4-BE49-F238E27FC236}">
               <a16:creationId xmlns:a16="http://schemas.microsoft.com/office/drawing/2014/main" id="{75B1D9DA-1843-A89B-E164-7ADA34878036}"/>
             </a:ext>
           </a:extLst>
@@ -2931,7 +2631,7 @@
 </p:notes>
 </file>
 
-<file path=ppt/notesSlides/notesSlide34.xml><?xml version="1.0" encoding="utf-8"?>
+<file path=ppt/notesSlides/notesSlide31.xml><?xml version="1.0" encoding="utf-8"?>
 <p:notes xmlns:a="http://schemas.openxmlformats.org/drawingml/2006/main" xmlns:r="http://schemas.openxmlformats.org/officeDocument/2006/relationships" xmlns:p="http://schemas.openxmlformats.org/presentationml/2006/main">
   <p:cSld>
     <p:spTree>
@@ -3030,7 +2730,7 @@
 </p:notes>
 </file>
 
-<file path=ppt/notesSlides/notesSlide35.xml><?xml version="1.0" encoding="utf-8"?>
+<file path=ppt/notesSlides/notesSlide32.xml><?xml version="1.0" encoding="utf-8"?>
 <p:notes xmlns:a="http://schemas.openxmlformats.org/drawingml/2006/main" xmlns:r="http://schemas.openxmlformats.org/officeDocument/2006/relationships" xmlns:p="http://schemas.openxmlformats.org/presentationml/2006/main">
   <p:cSld>
     <p:spTree>
@@ -3129,7 +2829,7 @@
 </p:notes>
 </file>
 
-<file path=ppt/notesSlides/notesSlide36.xml><?xml version="1.0" encoding="utf-8"?>
+<file path=ppt/notesSlides/notesSlide33.xml><?xml version="1.0" encoding="utf-8"?>
 <p:notes xmlns:a="http://schemas.openxmlformats.org/drawingml/2006/main" xmlns:r="http://schemas.openxmlformats.org/officeDocument/2006/relationships" xmlns:p="http://schemas.openxmlformats.org/presentationml/2006/main">
   <p:cSld>
     <p:spTree>
@@ -3228,7 +2928,7 @@
 </p:notes>
 </file>
 
-<file path=ppt/notesSlides/notesSlide37.xml><?xml version="1.0" encoding="utf-8"?>
+<file path=ppt/notesSlides/notesSlide34.xml><?xml version="1.0" encoding="utf-8"?>
 <p:notes xmlns:a="http://schemas.openxmlformats.org/drawingml/2006/main" xmlns:r="http://schemas.openxmlformats.org/officeDocument/2006/relationships" xmlns:p="http://schemas.openxmlformats.org/presentationml/2006/main">
   <p:cSld>
     <p:spTree>
@@ -3327,7 +3027,7 @@
 </p:notes>
 </file>
 
-<file path=ppt/notesSlides/notesSlide38.xml><?xml version="1.0" encoding="utf-8"?>
+<file path=ppt/notesSlides/notesSlide35.xml><?xml version="1.0" encoding="utf-8"?>
 <p:notes xmlns:a="http://schemas.openxmlformats.org/drawingml/2006/main" xmlns:r="http://schemas.openxmlformats.org/officeDocument/2006/relationships" xmlns:p="http://schemas.openxmlformats.org/presentationml/2006/main">
   <p:cSld>
     <p:spTree>
@@ -3426,7 +3126,7 @@
 </p:notes>
 </file>
 
-<file path=ppt/notesSlides/notesSlide39.xml><?xml version="1.0" encoding="utf-8"?>
+<file path=ppt/notesSlides/notesSlide36.xml><?xml version="1.0" encoding="utf-8"?>
 <p:notes xmlns:a="http://schemas.openxmlformats.org/drawingml/2006/main" xmlns:r="http://schemas.openxmlformats.org/officeDocument/2006/relationships" xmlns:p="http://schemas.openxmlformats.org/presentationml/2006/main">
   <p:cSld>
     <p:spTree>
@@ -7836,8 +7536,8 @@
           </a:p>
         </p:txBody>
       </p:sp>
-      <mc:AlternateContent xmlns:mc="http://schemas.openxmlformats.org/markup-compatibility/2006">
-        <mc:Choice xmlns:a14="http://schemas.microsoft.com/office/drawing/2010/main" Requires="a14">
+      <mc:AlternateContent xmlns:mc="http://schemas.openxmlformats.org/markup-compatibility/2006" xmlns:a14="http://schemas.microsoft.com/office/drawing/2010/main">
+        <mc:Choice Requires="a14">
           <p:sp>
             <p:nvSpPr>
               <p:cNvPr id="5" name="Content Placeholder 2">
@@ -8532,7 +8232,7 @@
             </p:txBody>
           </p:sp>
         </mc:Choice>
-        <mc:Fallback>
+        <mc:Fallback xmlns="">
           <p:sp>
             <p:nvSpPr>
               <p:cNvPr id="5" name="Content Placeholder 2">
@@ -8866,7 +8566,7 @@
         <p:cNvPr id="1" name="">
           <a:extLst>
             <a:ext uri="{FF2B5EF4-FFF2-40B4-BE49-F238E27FC236}">
-              <a16:creationId xmlns:a16="http://schemas.microsoft.com/office/drawing/2014/main" id="{6396C9B4-59C9-D9BC-C19D-ACCF07CB75CB}"/>
+              <a16:creationId xmlns:a16="http://schemas.microsoft.com/office/drawing/2014/main" id="{DDF6332E-2FD5-6FB3-F842-A40538C2A738}"/>
             </a:ext>
           </a:extLst>
         </p:cNvPr>
@@ -8886,7 +8586,7 @@
           <p:cNvPr id="2" name="Rounded Rectangle 1">
             <a:extLst>
               <a:ext uri="{FF2B5EF4-FFF2-40B4-BE49-F238E27FC236}">
-                <a16:creationId xmlns:a16="http://schemas.microsoft.com/office/drawing/2014/main" id="{11ADD814-AEE7-1F81-FF2D-5D7D30826F1B}"/>
+                <a16:creationId xmlns:a16="http://schemas.microsoft.com/office/drawing/2014/main" id="{6A35AC10-3FF1-0107-E12B-BC0C04EFEFD2}"/>
               </a:ext>
             </a:extLst>
           </p:cNvPr>
@@ -8938,4550 +8638,6 @@
           <p:cNvPr id="3" name="TextBox 2">
             <a:extLst>
               <a:ext uri="{FF2B5EF4-FFF2-40B4-BE49-F238E27FC236}">
-                <a16:creationId xmlns:a16="http://schemas.microsoft.com/office/drawing/2014/main" id="{23D80BC3-5432-189C-D7A9-54DAE91E3880}"/>
-              </a:ext>
-            </a:extLst>
-          </p:cNvPr>
-          <p:cNvSpPr txBox="1"/>
-          <p:nvPr/>
-        </p:nvSpPr>
-        <p:spPr>
-          <a:xfrm>
-            <a:off x="873811" y="542673"/>
-            <a:ext cx="410369" cy="130805"/>
-          </a:xfrm>
-          <a:prstGeom prst="rect">
-            <a:avLst/>
-          </a:prstGeom>
-          <a:noFill/>
-        </p:spPr>
-        <p:txBody>
-          <a:bodyPr wrap="none" lIns="0" tIns="0" rIns="0" bIns="0" anchor="ctr">
-            <a:spAutoFit/>
-          </a:bodyPr>
-          <a:lstStyle/>
-          <a:p>
-            <a:pPr algn="ctr"/>
-            <a:r>
-              <a:rPr lang="de-CH" sz="850" b="1" dirty="0">
-                <a:solidFill>
-                  <a:srgbClr val="737373"/>
-                </a:solidFill>
-                <a:latin typeface="Aptos"/>
-              </a:rPr>
-              <a:t>Aufgabe</a:t>
-            </a:r>
-            <a:endParaRPr sz="850" b="1" dirty="0">
-              <a:solidFill>
-                <a:srgbClr val="737373"/>
-              </a:solidFill>
-              <a:latin typeface="Aptos"/>
-            </a:endParaRPr>
-          </a:p>
-        </p:txBody>
-      </p:sp>
-      <p:sp>
-        <p:nvSpPr>
-          <p:cNvPr id="4" name="TextBox 3">
-            <a:extLst>
-              <a:ext uri="{FF2B5EF4-FFF2-40B4-BE49-F238E27FC236}">
-                <a16:creationId xmlns:a16="http://schemas.microsoft.com/office/drawing/2014/main" id="{94907BE9-D09F-DC1A-F0A3-1A2C5B68B060}"/>
-              </a:ext>
-            </a:extLst>
-          </p:cNvPr>
-          <p:cNvSpPr txBox="1"/>
-          <p:nvPr/>
-        </p:nvSpPr>
-        <p:spPr>
-          <a:xfrm>
-            <a:off x="594360" y="932688"/>
-            <a:ext cx="3724802" cy="477054"/>
-          </a:xfrm>
-          <a:prstGeom prst="rect">
-            <a:avLst/>
-          </a:prstGeom>
-          <a:noFill/>
-        </p:spPr>
-        <p:txBody>
-          <a:bodyPr wrap="none" lIns="0" tIns="0" rIns="0" bIns="0" anchor="t">
-            <a:spAutoFit/>
-          </a:bodyPr>
-          <a:lstStyle/>
-          <a:p>
-            <a:pPr algn="l"/>
-            <a:r>
-              <a:rPr lang="de-CH" sz="3100" b="1" dirty="0">
-                <a:solidFill>
-                  <a:srgbClr val="171717"/>
-                </a:solidFill>
-                <a:latin typeface="Aptos"/>
-              </a:rPr>
-              <a:t>Leistungsanpassung</a:t>
-            </a:r>
-            <a:endParaRPr sz="3100" b="1" dirty="0">
-              <a:solidFill>
-                <a:srgbClr val="171717"/>
-              </a:solidFill>
-              <a:latin typeface="Aptos"/>
-            </a:endParaRPr>
-          </a:p>
-        </p:txBody>
-      </p:sp>
-      <p:sp>
-        <p:nvSpPr>
-          <p:cNvPr id="15" name="Datumsplatzhalter 14">
-            <a:extLst>
-              <a:ext uri="{FF2B5EF4-FFF2-40B4-BE49-F238E27FC236}">
-                <a16:creationId xmlns:a16="http://schemas.microsoft.com/office/drawing/2014/main" id="{2A538979-4027-F09C-DD89-DCB2556DB277}"/>
-              </a:ext>
-            </a:extLst>
-          </p:cNvPr>
-          <p:cNvSpPr>
-            <a:spLocks noGrp="1"/>
-          </p:cNvSpPr>
-          <p:nvPr>
-            <p:ph type="dt" sz="half" idx="10"/>
-          </p:nvPr>
-        </p:nvSpPr>
-        <p:spPr/>
-        <p:txBody>
-          <a:bodyPr/>
-          <a:lstStyle/>
-          <a:p>
-            <a:fld id="{5BEE0FE1-AF03-4944-8B59-6F3340FFC6D2}" type="datetime1">
-              <a:rPr lang="de-CH" smtClean="0"/>
-              <a:t>21.10.2026</a:t>
-            </a:fld>
-            <a:endParaRPr lang="en-US"/>
-          </a:p>
-        </p:txBody>
-      </p:sp>
-      <p:sp>
-        <p:nvSpPr>
-          <p:cNvPr id="16" name="Fußzeilenplatzhalter 15">
-            <a:extLst>
-              <a:ext uri="{FF2B5EF4-FFF2-40B4-BE49-F238E27FC236}">
-                <a16:creationId xmlns:a16="http://schemas.microsoft.com/office/drawing/2014/main" id="{139FAE51-D30B-E93D-81D5-9DA4983F23F6}"/>
-              </a:ext>
-            </a:extLst>
-          </p:cNvPr>
-          <p:cNvSpPr>
-            <a:spLocks noGrp="1"/>
-          </p:cNvSpPr>
-          <p:nvPr>
-            <p:ph type="ftr" sz="quarter" idx="11"/>
-          </p:nvPr>
-        </p:nvSpPr>
-        <p:spPr/>
-        <p:txBody>
-          <a:bodyPr/>
-          <a:lstStyle/>
-          <a:p>
-            <a:r>
-              <a:rPr lang="en-US" dirty="0"/>
-              <a:t>Enrico Putzi W06</a:t>
-            </a:r>
-          </a:p>
-        </p:txBody>
-      </p:sp>
-      <p:sp>
-        <p:nvSpPr>
-          <p:cNvPr id="17" name="Foliennummernplatzhalter 16">
-            <a:extLst>
-              <a:ext uri="{FF2B5EF4-FFF2-40B4-BE49-F238E27FC236}">
-                <a16:creationId xmlns:a16="http://schemas.microsoft.com/office/drawing/2014/main" id="{70B1F70E-620D-2E2E-DB7B-A39CECBECEAD}"/>
-              </a:ext>
-            </a:extLst>
-          </p:cNvPr>
-          <p:cNvSpPr>
-            <a:spLocks noGrp="1"/>
-          </p:cNvSpPr>
-          <p:nvPr>
-            <p:ph type="sldNum" sz="quarter" idx="12"/>
-          </p:nvPr>
-        </p:nvSpPr>
-        <p:spPr/>
-        <p:txBody>
-          <a:bodyPr/>
-          <a:lstStyle/>
-          <a:p>
-            <a:fld id="{C1FF6DA9-008F-8B48-92A6-B652298478BF}" type="slidenum">
-              <a:rPr lang="en-US" smtClean="0"/>
-              <a:t>11</a:t>
-            </a:fld>
-            <a:endParaRPr lang="en-US"/>
-          </a:p>
-        </p:txBody>
-      </p:sp>
-      <p:pic>
-        <p:nvPicPr>
-          <p:cNvPr id="9" name="Grafik 10" descr="Netzwerk mit Last">
-            <a:extLst>
-              <a:ext uri="{FF2B5EF4-FFF2-40B4-BE49-F238E27FC236}">
-                <a16:creationId xmlns:a16="http://schemas.microsoft.com/office/drawing/2014/main" id="{6C6A949F-F6E6-E867-8FB6-101D421EE1AA}"/>
-              </a:ext>
-            </a:extLst>
-          </p:cNvPr>
-          <p:cNvPicPr>
-            <a:picLocks noChangeAspect="1"/>
-          </p:cNvPicPr>
-          <p:nvPr/>
-        </p:nvPicPr>
-        <p:blipFill>
-          <a:blip r:embed="rId3"/>
-          <a:stretch>
-            <a:fillRect/>
-          </a:stretch>
-        </p:blipFill>
-        <p:spPr>
-          <a:xfrm>
-            <a:off x="832543" y="1412875"/>
-            <a:ext cx="4838589" cy="2350000"/>
-          </a:xfrm>
-          <a:prstGeom prst="rect">
-            <a:avLst/>
-          </a:prstGeom>
-        </p:spPr>
-      </p:pic>
-      <p:pic>
-        <p:nvPicPr>
-          <p:cNvPr id="10" name="Grafik 11" descr="Ersatzstromquelle mit Last">
-            <a:extLst>
-              <a:ext uri="{FF2B5EF4-FFF2-40B4-BE49-F238E27FC236}">
-                <a16:creationId xmlns:a16="http://schemas.microsoft.com/office/drawing/2014/main" id="{55733008-2B9F-90DA-BB58-3F17721D1DA5}"/>
-              </a:ext>
-            </a:extLst>
-          </p:cNvPr>
-          <p:cNvPicPr>
-            <a:picLocks noChangeAspect="1"/>
-          </p:cNvPicPr>
-          <p:nvPr/>
-        </p:nvPicPr>
-        <p:blipFill>
-          <a:blip r:embed="rId4"/>
-          <a:stretch>
-            <a:fillRect/>
-          </a:stretch>
-        </p:blipFill>
-        <p:spPr>
-          <a:xfrm>
-            <a:off x="832543" y="3922875"/>
-            <a:ext cx="4838589" cy="2350000"/>
-          </a:xfrm>
-          <a:prstGeom prst="rect">
-            <a:avLst/>
-          </a:prstGeom>
-        </p:spPr>
-      </p:pic>
-      <mc:AlternateContent xmlns:mc="http://schemas.openxmlformats.org/markup-compatibility/2006">
-        <mc:Choice xmlns:a14="http://schemas.microsoft.com/office/drawing/2010/main" Requires="a14">
-          <p:sp>
-            <p:nvSpPr>
-              <p:cNvPr id="12" name="Textfeld 11">
-                <a:extLst>
-                  <a:ext uri="{FF2B5EF4-FFF2-40B4-BE49-F238E27FC236}">
-                    <a16:creationId xmlns:a16="http://schemas.microsoft.com/office/drawing/2014/main" id="{91880515-FA63-92EC-5847-4FA950CFB8C3}"/>
-                  </a:ext>
-                </a:extLst>
-              </p:cNvPr>
-              <p:cNvSpPr txBox="1"/>
-              <p:nvPr/>
-            </p:nvSpPr>
-            <p:spPr>
-              <a:xfrm>
-                <a:off x="5671132" y="1488022"/>
-                <a:ext cx="6096000" cy="2199705"/>
-              </a:xfrm>
-              <a:prstGeom prst="rect">
-                <a:avLst/>
-              </a:prstGeom>
-              <a:noFill/>
-            </p:spPr>
-            <p:txBody>
-              <a:bodyPr wrap="square">
-                <a:spAutoFit/>
-              </a:bodyPr>
-              <a:lstStyle/>
-              <a:p>
-                <a:pPr marL="0" indent="0">
-                  <a:buNone/>
-                </a:pPr>
-                <a:endParaRPr lang="de-CH" sz="1000" dirty="0"/>
-              </a:p>
-              <a:p>
-                <a:pPr marL="0" indent="0">
-                  <a:buNone/>
-                </a:pPr>
-                <a:r>
-                  <a:rPr lang="de-CH" sz="1600" dirty="0"/>
-                  <a:t>An die Klemmen A und B wird eine Last </a:t>
-                </a:r>
-                <a14:m>
-                  <m:oMath xmlns:m="http://schemas.openxmlformats.org/officeDocument/2006/math">
-                    <m:sSub>
-                      <m:sSubPr>
-                        <m:ctrlPr>
-                          <a:rPr lang="de-CH" sz="1600" b="0" i="1" noProof="0" smtClean="0">
-                            <a:latin typeface="Cambria Math" panose="02040503050406030204" pitchFamily="18" charset="0"/>
-                          </a:rPr>
-                        </m:ctrlPr>
-                      </m:sSubPr>
-                      <m:e>
-                        <m:r>
-                          <m:rPr>
-                            <m:sty m:val="p"/>
-                          </m:rPr>
-                          <a:rPr lang="de-CH" sz="1600" b="0" i="1" noProof="0" smtClean="0">
-                            <a:latin typeface="Cambria Math" panose="02040503050406030204" pitchFamily="18" charset="0"/>
-                          </a:rPr>
-                          <m:t>R</m:t>
-                        </m:r>
-                      </m:e>
-                      <m:sub>
-                        <m:r>
-                          <m:rPr>
-                            <m:sty m:val="p"/>
-                          </m:rPr>
-                          <a:rPr lang="de-CH" sz="1600" b="0" i="1" noProof="0" smtClean="0">
-                            <a:latin typeface="Cambria Math" panose="02040503050406030204" pitchFamily="18" charset="0"/>
-                          </a:rPr>
-                          <m:t>Last</m:t>
-                        </m:r>
-                      </m:sub>
-                    </m:sSub>
-                  </m:oMath>
-                </a14:m>
-                <a:r>
-                  <a:rPr lang="de-CH" sz="1600" dirty="0"/>
-                  <a:t> angeschlossen. Aus Beispiel 2.1 ist die Ersatzstromquelle bekannt: </a:t>
-                </a:r>
-                <a14:m>
-                  <m:oMath xmlns:m="http://schemas.openxmlformats.org/officeDocument/2006/math">
-                    <m:r>
-                      <m:rPr>
-                        <m:sty m:val="p"/>
-                      </m:rPr>
-                      <a:rPr lang="de-CH" sz="1600" b="0" i="1" noProof="0" smtClean="0">
-                        <a:latin typeface="Cambria Math" panose="02040503050406030204" pitchFamily="18" charset="0"/>
-                      </a:rPr>
-                      <m:t>I</m:t>
-                    </m:r>
-                    <m:r>
-                      <a:rPr lang="de-CH" sz="1600" b="0" i="1" noProof="0" smtClean="0">
-                        <a:latin typeface="Cambria Math" panose="02040503050406030204" pitchFamily="18" charset="0"/>
-                      </a:rPr>
-                      <m:t>=</m:t>
-                    </m:r>
-                    <m:f>
-                      <m:fPr>
-                        <m:ctrlPr>
-                          <a:rPr lang="de-CH" sz="1600" b="0" i="1" noProof="0" smtClean="0">
-                            <a:latin typeface="Cambria Math" panose="02040503050406030204" pitchFamily="18" charset="0"/>
-                          </a:rPr>
-                        </m:ctrlPr>
-                      </m:fPr>
-                      <m:num>
-                        <m:r>
-                          <m:rPr>
-                            <m:sty m:val="p"/>
-                          </m:rPr>
-                          <a:rPr lang="de-CH" sz="1600" b="0" i="1" noProof="0" smtClean="0">
-                            <a:latin typeface="Cambria Math" panose="02040503050406030204" pitchFamily="18" charset="0"/>
-                          </a:rPr>
-                          <m:t>U</m:t>
-                        </m:r>
-                      </m:num>
-                      <m:den>
-                        <m:sSub>
-                          <m:sSubPr>
-                            <m:ctrlPr>
-                              <a:rPr lang="de-CH" sz="1600" b="0" i="1" noProof="0" smtClean="0">
-                                <a:latin typeface="Cambria Math" panose="02040503050406030204" pitchFamily="18" charset="0"/>
-                              </a:rPr>
-                            </m:ctrlPr>
-                          </m:sSubPr>
-                          <m:e>
-                            <m:r>
-                              <m:rPr>
-                                <m:sty m:val="p"/>
-                              </m:rPr>
-                              <a:rPr lang="de-CH" sz="1600" b="0" i="1" noProof="0" smtClean="0">
-                                <a:latin typeface="Cambria Math" panose="02040503050406030204" pitchFamily="18" charset="0"/>
-                              </a:rPr>
-                              <m:t>R</m:t>
-                            </m:r>
-                          </m:e>
-                          <m:sub>
-                            <m:r>
-                              <a:rPr lang="de-CH" sz="1600" b="0" i="1" noProof="0" smtClean="0">
-                                <a:latin typeface="Cambria Math" panose="02040503050406030204" pitchFamily="18" charset="0"/>
-                              </a:rPr>
-                              <m:t>1</m:t>
-                            </m:r>
-                          </m:sub>
-                        </m:sSub>
-                      </m:den>
-                    </m:f>
-                  </m:oMath>
-                </a14:m>
-                <a:r>
-                  <a:rPr lang="de-CH" sz="1600" dirty="0"/>
-                  <a:t> und </a:t>
-                </a:r>
-                <a14:m>
-                  <m:oMath xmlns:m="http://schemas.openxmlformats.org/officeDocument/2006/math">
-                    <m:sSub>
-                      <m:sSubPr>
-                        <m:ctrlPr>
-                          <a:rPr lang="de-CH" sz="1600" b="0" i="1" noProof="0" smtClean="0">
-                            <a:latin typeface="Cambria Math" panose="02040503050406030204" pitchFamily="18" charset="0"/>
-                          </a:rPr>
-                        </m:ctrlPr>
-                      </m:sSubPr>
-                      <m:e>
-                        <m:r>
-                          <m:rPr>
-                            <m:sty m:val="p"/>
-                          </m:rPr>
-                          <a:rPr lang="de-CH" sz="1600" b="0" i="1" noProof="0" smtClean="0">
-                            <a:latin typeface="Cambria Math" panose="02040503050406030204" pitchFamily="18" charset="0"/>
-                          </a:rPr>
-                          <m:t>R</m:t>
-                        </m:r>
-                      </m:e>
-                      <m:sub>
-                        <m:r>
-                          <m:rPr>
-                            <m:sty m:val="p"/>
-                          </m:rPr>
-                          <a:rPr lang="de-CH" sz="1600" b="0" i="1" noProof="0" smtClean="0">
-                            <a:latin typeface="Cambria Math" panose="02040503050406030204" pitchFamily="18" charset="0"/>
-                          </a:rPr>
-                          <m:t>i</m:t>
-                        </m:r>
-                      </m:sub>
-                    </m:sSub>
-                    <m:r>
-                      <a:rPr lang="de-CH" sz="1600" b="0" i="1" noProof="0" smtClean="0">
-                        <a:latin typeface="Cambria Math" panose="02040503050406030204" pitchFamily="18" charset="0"/>
-                      </a:rPr>
-                      <m:t>=</m:t>
-                    </m:r>
-                    <m:f>
-                      <m:fPr>
-                        <m:ctrlPr>
-                          <a:rPr lang="de-CH" sz="1600" b="0" i="1" noProof="0" smtClean="0">
-                            <a:latin typeface="Cambria Math" panose="02040503050406030204" pitchFamily="18" charset="0"/>
-                          </a:rPr>
-                        </m:ctrlPr>
-                      </m:fPr>
-                      <m:num>
-                        <m:sSub>
-                          <m:sSubPr>
-                            <m:ctrlPr>
-                              <a:rPr lang="de-CH" sz="1600" b="0" i="1" noProof="0" smtClean="0">
-                                <a:latin typeface="Cambria Math" panose="02040503050406030204" pitchFamily="18" charset="0"/>
-                              </a:rPr>
-                            </m:ctrlPr>
-                          </m:sSubPr>
-                          <m:e>
-                            <m:r>
-                              <m:rPr>
-                                <m:sty m:val="p"/>
-                              </m:rPr>
-                              <a:rPr lang="de-CH" sz="1600" b="0" i="1" noProof="0" smtClean="0">
-                                <a:latin typeface="Cambria Math" panose="02040503050406030204" pitchFamily="18" charset="0"/>
-                              </a:rPr>
-                              <m:t>R</m:t>
-                            </m:r>
-                          </m:e>
-                          <m:sub>
-                            <m:r>
-                              <a:rPr lang="de-CH" sz="1600" b="0" i="1" noProof="0" smtClean="0">
-                                <a:latin typeface="Cambria Math" panose="02040503050406030204" pitchFamily="18" charset="0"/>
-                              </a:rPr>
-                              <m:t>1</m:t>
-                            </m:r>
-                          </m:sub>
-                        </m:sSub>
-                        <m:sSub>
-                          <m:sSubPr>
-                            <m:ctrlPr>
-                              <a:rPr lang="de-CH" sz="1600" b="0" i="1" noProof="0" smtClean="0">
-                                <a:latin typeface="Cambria Math" panose="02040503050406030204" pitchFamily="18" charset="0"/>
-                              </a:rPr>
-                            </m:ctrlPr>
-                          </m:sSubPr>
-                          <m:e>
-                            <m:r>
-                              <m:rPr>
-                                <m:sty m:val="p"/>
-                              </m:rPr>
-                              <a:rPr lang="de-CH" sz="1600" b="0" i="1" noProof="0" smtClean="0">
-                                <a:latin typeface="Cambria Math" panose="02040503050406030204" pitchFamily="18" charset="0"/>
-                              </a:rPr>
-                              <m:t>R</m:t>
-                            </m:r>
-                          </m:e>
-                          <m:sub>
-                            <m:r>
-                              <a:rPr lang="de-CH" sz="1600" b="0" i="1" noProof="0" smtClean="0">
-                                <a:latin typeface="Cambria Math" panose="02040503050406030204" pitchFamily="18" charset="0"/>
-                              </a:rPr>
-                              <m:t>2</m:t>
-                            </m:r>
-                          </m:sub>
-                        </m:sSub>
-                      </m:num>
-                      <m:den>
-                        <m:sSub>
-                          <m:sSubPr>
-                            <m:ctrlPr>
-                              <a:rPr lang="de-CH" sz="1600" b="0" i="1" noProof="0" smtClean="0">
-                                <a:latin typeface="Cambria Math" panose="02040503050406030204" pitchFamily="18" charset="0"/>
-                              </a:rPr>
-                            </m:ctrlPr>
-                          </m:sSubPr>
-                          <m:e>
-                            <m:r>
-                              <m:rPr>
-                                <m:sty m:val="p"/>
-                              </m:rPr>
-                              <a:rPr lang="de-CH" sz="1600" b="0" i="1" noProof="0" smtClean="0">
-                                <a:latin typeface="Cambria Math" panose="02040503050406030204" pitchFamily="18" charset="0"/>
-                              </a:rPr>
-                              <m:t>R</m:t>
-                            </m:r>
-                          </m:e>
-                          <m:sub>
-                            <m:r>
-                              <a:rPr lang="de-CH" sz="1600" b="0" i="1" noProof="0" smtClean="0">
-                                <a:latin typeface="Cambria Math" panose="02040503050406030204" pitchFamily="18" charset="0"/>
-                              </a:rPr>
-                              <m:t>1</m:t>
-                            </m:r>
-                          </m:sub>
-                        </m:sSub>
-                        <m:r>
-                          <a:rPr lang="de-CH" sz="1600" b="0" i="1" noProof="0" smtClean="0">
-                            <a:latin typeface="Cambria Math" panose="02040503050406030204" pitchFamily="18" charset="0"/>
-                          </a:rPr>
-                          <m:t>+</m:t>
-                        </m:r>
-                        <m:sSub>
-                          <m:sSubPr>
-                            <m:ctrlPr>
-                              <a:rPr lang="de-CH" sz="1600" b="0" i="1" noProof="0" smtClean="0">
-                                <a:latin typeface="Cambria Math" panose="02040503050406030204" pitchFamily="18" charset="0"/>
-                              </a:rPr>
-                            </m:ctrlPr>
-                          </m:sSubPr>
-                          <m:e>
-                            <m:r>
-                              <m:rPr>
-                                <m:sty m:val="p"/>
-                              </m:rPr>
-                              <a:rPr lang="de-CH" sz="1600" b="0" i="1" noProof="0" smtClean="0">
-                                <a:latin typeface="Cambria Math" panose="02040503050406030204" pitchFamily="18" charset="0"/>
-                              </a:rPr>
-                              <m:t>R</m:t>
-                            </m:r>
-                          </m:e>
-                          <m:sub>
-                            <m:r>
-                              <a:rPr lang="de-CH" sz="1600" b="0" i="1" noProof="0" smtClean="0">
-                                <a:latin typeface="Cambria Math" panose="02040503050406030204" pitchFamily="18" charset="0"/>
-                              </a:rPr>
-                              <m:t>2</m:t>
-                            </m:r>
-                          </m:sub>
-                        </m:sSub>
-                      </m:den>
-                    </m:f>
-                  </m:oMath>
-                </a14:m>
-                <a:endParaRPr lang="de-CH" sz="1600" dirty="0"/>
-              </a:p>
-              <a:p>
-                <a:pPr marL="0" indent="0">
-                  <a:buNone/>
-                </a:pPr>
-                <a:endParaRPr lang="de-CH" sz="600" dirty="0"/>
-              </a:p>
-              <a:p>
-                <a:r>
-                  <a:rPr lang="de-CH" sz="1600" dirty="0"/>
-                  <a:t>Berechnet den Widerstand </a:t>
-                </a:r>
-                <a14:m>
-                  <m:oMath xmlns:m="http://schemas.openxmlformats.org/officeDocument/2006/math">
-                    <m:sSub>
-                      <m:sSubPr>
-                        <m:ctrlPr>
-                          <a:rPr lang="de-CH" sz="1600" b="0" i="1" noProof="0" smtClean="0">
-                            <a:latin typeface="Cambria Math" panose="02040503050406030204" pitchFamily="18" charset="0"/>
-                          </a:rPr>
-                        </m:ctrlPr>
-                      </m:sSubPr>
-                      <m:e>
-                        <m:r>
-                          <m:rPr>
-                            <m:sty m:val="p"/>
-                          </m:rPr>
-                          <a:rPr lang="de-CH" sz="1600" b="0" i="1" noProof="0" smtClean="0">
-                            <a:latin typeface="Cambria Math" panose="02040503050406030204" pitchFamily="18" charset="0"/>
-                          </a:rPr>
-                          <m:t>R</m:t>
-                        </m:r>
-                      </m:e>
-                      <m:sub>
-                        <m:r>
-                          <m:rPr>
-                            <m:sty m:val="p"/>
-                          </m:rPr>
-                          <a:rPr lang="de-CH" sz="1600" b="0" i="1" noProof="0" smtClean="0">
-                            <a:latin typeface="Cambria Math" panose="02040503050406030204" pitchFamily="18" charset="0"/>
-                          </a:rPr>
-                          <m:t>Last</m:t>
-                        </m:r>
-                      </m:sub>
-                    </m:sSub>
-                  </m:oMath>
-                </a14:m>
-                <a:r>
-                  <a:rPr lang="de-CH" sz="1600" dirty="0"/>
-                  <a:t>, für den die Leistung an der Last maximal wird.</a:t>
-                </a:r>
-              </a:p>
-              <a:p>
-                <a:r>
-                  <a:rPr lang="de-CH" sz="1600" dirty="0"/>
-                  <a:t>Berechnet die maximale Leistung </a:t>
-                </a:r>
-                <a14:m>
-                  <m:oMath xmlns:m="http://schemas.openxmlformats.org/officeDocument/2006/math">
-                    <m:sSub>
-                      <m:sSubPr>
-                        <m:ctrlPr>
-                          <a:rPr lang="de-CH" sz="1600" b="0" i="1" noProof="0" smtClean="0">
-                            <a:latin typeface="Cambria Math" panose="02040503050406030204" pitchFamily="18" charset="0"/>
-                          </a:rPr>
-                        </m:ctrlPr>
-                      </m:sSubPr>
-                      <m:e>
-                        <m:r>
-                          <m:rPr>
-                            <m:sty m:val="p"/>
-                          </m:rPr>
-                          <a:rPr lang="de-CH" sz="1600" b="0" i="1" noProof="0" smtClean="0">
-                            <a:latin typeface="Cambria Math" panose="02040503050406030204" pitchFamily="18" charset="0"/>
-                          </a:rPr>
-                          <m:t>P</m:t>
-                        </m:r>
-                      </m:e>
-                      <m:sub>
-                        <m:r>
-                          <m:rPr>
-                            <m:sty m:val="p"/>
-                          </m:rPr>
-                          <a:rPr lang="de-CH" sz="1600" b="0" i="1" noProof="0" smtClean="0">
-                            <a:latin typeface="Cambria Math" panose="02040503050406030204" pitchFamily="18" charset="0"/>
-                          </a:rPr>
-                          <m:t>max</m:t>
-                        </m:r>
-                      </m:sub>
-                    </m:sSub>
-                  </m:oMath>
-                </a14:m>
-                <a:r>
-                  <a:rPr lang="de-CH" sz="1600" dirty="0"/>
-                  <a:t>.</a:t>
-                </a:r>
-              </a:p>
-              <a:p>
-                <a:r>
-                  <a:rPr lang="de-CH" sz="1600" dirty="0"/>
-                  <a:t>Ist der Wirkungsgrad </a:t>
-                </a:r>
-                <a14:m>
-                  <m:oMath xmlns:m="http://schemas.openxmlformats.org/officeDocument/2006/math">
-                    <m:r>
-                      <m:rPr>
-                        <m:sty m:val="p"/>
-                      </m:rPr>
-                      <a:rPr lang="de-CH" sz="1600" b="0" i="1" noProof="0" smtClean="0">
-                        <a:latin typeface="Cambria Math" panose="02040503050406030204" pitchFamily="18" charset="0"/>
-                      </a:rPr>
-                      <m:t>η</m:t>
-                    </m:r>
-                  </m:oMath>
-                </a14:m>
-                <a:r>
-                  <a:rPr lang="de-CH" sz="1600" dirty="0"/>
-                  <a:t> bei maximaler Leistung grösser als 50 %, gleich 50 % oder kleiner als 50 %? Begründet am Originalnetzwerk (oben).</a:t>
-                </a:r>
-              </a:p>
-            </p:txBody>
-          </p:sp>
-        </mc:Choice>
-        <mc:Fallback>
-          <p:sp>
-            <p:nvSpPr>
-              <p:cNvPr id="12" name="Textfeld 11">
-                <a:extLst>
-                  <a:ext uri="{FF2B5EF4-FFF2-40B4-BE49-F238E27FC236}">
-                    <a16:creationId xmlns:a16="http://schemas.microsoft.com/office/drawing/2014/main" id="{91880515-FA63-92EC-5847-4FA950CFB8C3}"/>
-                  </a:ext>
-                </a:extLst>
-              </p:cNvPr>
-              <p:cNvSpPr txBox="1">
-                <a:spLocks noRot="1" noChangeAspect="1" noMove="1" noResize="1" noEditPoints="1" noAdjustHandles="1" noChangeArrowheads="1" noChangeShapeType="1" noTextEdit="1"/>
-              </p:cNvSpPr>
-              <p:nvPr/>
-            </p:nvSpPr>
-            <p:spPr>
-              <a:xfrm>
-                <a:off x="5671132" y="1488022"/>
-                <a:ext cx="6096000" cy="2199705"/>
-              </a:xfrm>
-              <a:prstGeom prst="rect">
-                <a:avLst/>
-              </a:prstGeom>
-              <a:blipFill>
-                <a:blip r:embed="rId5"/>
-                <a:stretch>
-                  <a:fillRect l="-500" b="-2770"/>
-                </a:stretch>
-              </a:blipFill>
-            </p:spPr>
-            <p:txBody>
-              <a:bodyPr/>
-              <a:lstStyle/>
-              <a:p>
-                <a:r>
-                  <a:rPr lang="de-CH">
-                    <a:noFill/>
-                  </a:rPr>
-                  <a:t> </a:t>
-                </a:r>
-              </a:p>
-            </p:txBody>
-          </p:sp>
-        </mc:Fallback>
-      </mc:AlternateContent>
-    </p:spTree>
-    <p:extLst>
-      <p:ext uri="{BB962C8B-B14F-4D97-AF65-F5344CB8AC3E}">
-        <p14:creationId xmlns:p14="http://schemas.microsoft.com/office/powerpoint/2010/main" val="2965726407"/>
-      </p:ext>
-    </p:extLst>
-  </p:cSld>
-  <p:clrMapOvr>
-    <a:masterClrMapping/>
-  </p:clrMapOvr>
-</p:sld>
-</file>
-
-<file path=ppt/slides/slide12.xml><?xml version="1.0" encoding="utf-8"?>
-<p:sld xmlns:a="http://schemas.openxmlformats.org/drawingml/2006/main" xmlns:r="http://schemas.openxmlformats.org/officeDocument/2006/relationships" xmlns:p="http://schemas.openxmlformats.org/presentationml/2006/main" show="0">
-  <p:cSld>
-    <p:spTree>
-      <p:nvGrpSpPr>
-        <p:cNvPr id="1" name="">
-          <a:extLst>
-            <a:ext uri="{FF2B5EF4-FFF2-40B4-BE49-F238E27FC236}">
-              <a16:creationId xmlns:a16="http://schemas.microsoft.com/office/drawing/2014/main" id="{A96025F3-CBB8-0AB5-10E4-C05C272B8EEE}"/>
-            </a:ext>
-          </a:extLst>
-        </p:cNvPr>
-        <p:cNvGrpSpPr/>
-        <p:nvPr/>
-      </p:nvGrpSpPr>
-      <p:grpSpPr>
-        <a:xfrm>
-          <a:off x="0" y="0"/>
-          <a:ext cx="0" cy="0"/>
-          <a:chOff x="0" y="0"/>
-          <a:chExt cx="0" cy="0"/>
-        </a:xfrm>
-      </p:grpSpPr>
-      <p:sp>
-        <p:nvSpPr>
-          <p:cNvPr id="2" name="Rounded Rectangle 1">
-            <a:extLst>
-              <a:ext uri="{FF2B5EF4-FFF2-40B4-BE49-F238E27FC236}">
-                <a16:creationId xmlns:a16="http://schemas.microsoft.com/office/drawing/2014/main" id="{DDB54A6E-BEB6-17E3-92A3-B2E87B41BD17}"/>
-              </a:ext>
-            </a:extLst>
-          </p:cNvPr>
-          <p:cNvSpPr/>
-          <p:nvPr/>
-        </p:nvSpPr>
-        <p:spPr>
-          <a:xfrm>
-            <a:off x="594360" y="475488"/>
-            <a:ext cx="969264" cy="292608"/>
-          </a:xfrm>
-          <a:prstGeom prst="roundRect">
-            <a:avLst/>
-          </a:prstGeom>
-          <a:solidFill>
-            <a:srgbClr val="EEEEEA"/>
-          </a:solidFill>
-          <a:ln w="10160">
-            <a:solidFill>
-              <a:srgbClr val="EEEEEA"/>
-            </a:solidFill>
-          </a:ln>
-        </p:spPr>
-        <p:style>
-          <a:lnRef idx="1">
-            <a:schemeClr val="accent1"/>
-          </a:lnRef>
-          <a:fillRef idx="3">
-            <a:schemeClr val="accent1"/>
-          </a:fillRef>
-          <a:effectRef idx="2">
-            <a:schemeClr val="accent1"/>
-          </a:effectRef>
-          <a:fontRef idx="minor">
-            <a:schemeClr val="lt1"/>
-          </a:fontRef>
-        </p:style>
-        <p:txBody>
-          <a:bodyPr rtlCol="0" anchor="ctr"/>
-          <a:lstStyle/>
-          <a:p>
-            <a:pPr algn="ctr"/>
-            <a:endParaRPr/>
-          </a:p>
-        </p:txBody>
-      </p:sp>
-      <p:sp>
-        <p:nvSpPr>
-          <p:cNvPr id="3" name="TextBox 2">
-            <a:extLst>
-              <a:ext uri="{FF2B5EF4-FFF2-40B4-BE49-F238E27FC236}">
-                <a16:creationId xmlns:a16="http://schemas.microsoft.com/office/drawing/2014/main" id="{7B47D914-F029-F1C3-8310-464272553448}"/>
-              </a:ext>
-            </a:extLst>
-          </p:cNvPr>
-          <p:cNvSpPr txBox="1"/>
-          <p:nvPr/>
-        </p:nvSpPr>
-        <p:spPr>
-          <a:xfrm>
-            <a:off x="873811" y="542673"/>
-            <a:ext cx="410369" cy="130805"/>
-          </a:xfrm>
-          <a:prstGeom prst="rect">
-            <a:avLst/>
-          </a:prstGeom>
-          <a:noFill/>
-        </p:spPr>
-        <p:txBody>
-          <a:bodyPr wrap="none" lIns="0" tIns="0" rIns="0" bIns="0" anchor="ctr">
-            <a:spAutoFit/>
-          </a:bodyPr>
-          <a:lstStyle/>
-          <a:p>
-            <a:pPr algn="ctr"/>
-            <a:r>
-              <a:rPr lang="de-CH" sz="850" b="1" dirty="0">
-                <a:solidFill>
-                  <a:srgbClr val="737373"/>
-                </a:solidFill>
-                <a:latin typeface="Aptos"/>
-              </a:rPr>
-              <a:t>Aufgabe</a:t>
-            </a:r>
-            <a:endParaRPr sz="850" b="1" dirty="0">
-              <a:solidFill>
-                <a:srgbClr val="737373"/>
-              </a:solidFill>
-              <a:latin typeface="Aptos"/>
-            </a:endParaRPr>
-          </a:p>
-        </p:txBody>
-      </p:sp>
-      <p:sp>
-        <p:nvSpPr>
-          <p:cNvPr id="4" name="TextBox 3">
-            <a:extLst>
-              <a:ext uri="{FF2B5EF4-FFF2-40B4-BE49-F238E27FC236}">
-                <a16:creationId xmlns:a16="http://schemas.microsoft.com/office/drawing/2014/main" id="{F6393245-CDBF-A7CC-66D3-BFBBCD7376C0}"/>
-              </a:ext>
-            </a:extLst>
-          </p:cNvPr>
-          <p:cNvSpPr txBox="1"/>
-          <p:nvPr/>
-        </p:nvSpPr>
-        <p:spPr>
-          <a:xfrm>
-            <a:off x="594360" y="932688"/>
-            <a:ext cx="3724802" cy="477054"/>
-          </a:xfrm>
-          <a:prstGeom prst="rect">
-            <a:avLst/>
-          </a:prstGeom>
-          <a:noFill/>
-        </p:spPr>
-        <p:txBody>
-          <a:bodyPr wrap="none" lIns="0" tIns="0" rIns="0" bIns="0" anchor="t">
-            <a:spAutoFit/>
-          </a:bodyPr>
-          <a:lstStyle/>
-          <a:p>
-            <a:r>
-              <a:rPr lang="de-CH" sz="3100" b="1" dirty="0">
-                <a:solidFill>
-                  <a:srgbClr val="171717"/>
-                </a:solidFill>
-                <a:latin typeface="Aptos"/>
-              </a:rPr>
-              <a:t>Leistungsanpassung</a:t>
-            </a:r>
-            <a:endParaRPr sz="3100" b="1" dirty="0">
-              <a:solidFill>
-                <a:srgbClr val="171717"/>
-              </a:solidFill>
-              <a:latin typeface="Aptos"/>
-            </a:endParaRPr>
-          </a:p>
-        </p:txBody>
-      </p:sp>
-      <p:sp>
-        <p:nvSpPr>
-          <p:cNvPr id="15" name="Datumsplatzhalter 14">
-            <a:extLst>
-              <a:ext uri="{FF2B5EF4-FFF2-40B4-BE49-F238E27FC236}">
-                <a16:creationId xmlns:a16="http://schemas.microsoft.com/office/drawing/2014/main" id="{30D02237-EA90-69FD-66A4-9514826A62EF}"/>
-              </a:ext>
-            </a:extLst>
-          </p:cNvPr>
-          <p:cNvSpPr>
-            <a:spLocks noGrp="1"/>
-          </p:cNvSpPr>
-          <p:nvPr>
-            <p:ph type="dt" sz="half" idx="10"/>
-          </p:nvPr>
-        </p:nvSpPr>
-        <p:spPr/>
-        <p:txBody>
-          <a:bodyPr/>
-          <a:lstStyle/>
-          <a:p>
-            <a:fld id="{5BEE0FE1-AF03-4944-8B59-6F3340FFC6D2}" type="datetime1">
-              <a:rPr lang="de-CH" smtClean="0"/>
-              <a:t>21.10.2026</a:t>
-            </a:fld>
-            <a:endParaRPr lang="en-US"/>
-          </a:p>
-        </p:txBody>
-      </p:sp>
-      <p:sp>
-        <p:nvSpPr>
-          <p:cNvPr id="16" name="Fußzeilenplatzhalter 15">
-            <a:extLst>
-              <a:ext uri="{FF2B5EF4-FFF2-40B4-BE49-F238E27FC236}">
-                <a16:creationId xmlns:a16="http://schemas.microsoft.com/office/drawing/2014/main" id="{A29F6178-356C-912B-17FB-AF349A3A2AE0}"/>
-              </a:ext>
-            </a:extLst>
-          </p:cNvPr>
-          <p:cNvSpPr>
-            <a:spLocks noGrp="1"/>
-          </p:cNvSpPr>
-          <p:nvPr>
-            <p:ph type="ftr" sz="quarter" idx="11"/>
-          </p:nvPr>
-        </p:nvSpPr>
-        <p:spPr/>
-        <p:txBody>
-          <a:bodyPr/>
-          <a:lstStyle/>
-          <a:p>
-            <a:r>
-              <a:rPr lang="en-US" dirty="0"/>
-              <a:t>Enrico Putzi W06</a:t>
-            </a:r>
-          </a:p>
-        </p:txBody>
-      </p:sp>
-      <p:sp>
-        <p:nvSpPr>
-          <p:cNvPr id="17" name="Foliennummernplatzhalter 16">
-            <a:extLst>
-              <a:ext uri="{FF2B5EF4-FFF2-40B4-BE49-F238E27FC236}">
-                <a16:creationId xmlns:a16="http://schemas.microsoft.com/office/drawing/2014/main" id="{A76B57ED-361A-9811-F924-EDD2C8DF5517}"/>
-              </a:ext>
-            </a:extLst>
-          </p:cNvPr>
-          <p:cNvSpPr>
-            <a:spLocks noGrp="1"/>
-          </p:cNvSpPr>
-          <p:nvPr>
-            <p:ph type="sldNum" sz="quarter" idx="12"/>
-          </p:nvPr>
-        </p:nvSpPr>
-        <p:spPr/>
-        <p:txBody>
-          <a:bodyPr/>
-          <a:lstStyle/>
-          <a:p>
-            <a:fld id="{C1FF6DA9-008F-8B48-92A6-B652298478BF}" type="slidenum">
-              <a:rPr lang="en-US" smtClean="0"/>
-              <a:t>12</a:t>
-            </a:fld>
-            <a:endParaRPr lang="en-US"/>
-          </a:p>
-        </p:txBody>
-      </p:sp>
-      <mc:AlternateContent xmlns:mc="http://schemas.openxmlformats.org/markup-compatibility/2006">
-        <mc:Choice xmlns:a14="http://schemas.microsoft.com/office/drawing/2010/main" Requires="a14">
-          <p:sp>
-            <p:nvSpPr>
-              <p:cNvPr id="8" name="Content Placeholder 2">
-                <a:extLst>
-                  <a:ext uri="{FF2B5EF4-FFF2-40B4-BE49-F238E27FC236}">
-                    <a16:creationId xmlns:a16="http://schemas.microsoft.com/office/drawing/2014/main" id="{F625174D-6C8B-B81A-78E4-AD79E161FE94}"/>
-                  </a:ext>
-                </a:extLst>
-              </p:cNvPr>
-              <p:cNvSpPr txBox="1">
-                <a:spLocks/>
-              </p:cNvSpPr>
-              <p:nvPr/>
-            </p:nvSpPr>
-            <p:spPr>
-              <a:xfrm>
-                <a:off x="6204163" y="1412875"/>
-                <a:ext cx="5256000" cy="4860000"/>
-              </a:xfrm>
-              <a:prstGeom prst="rect">
-                <a:avLst/>
-              </a:prstGeom>
-            </p:spPr>
-            <p:txBody>
-              <a:bodyPr>
-                <a:normAutofit/>
-              </a:bodyPr>
-              <a:lstStyle>
-                <a:lvl1pPr marL="342900" indent="-342900" algn="l" defTabSz="457200" rtl="0" eaLnBrk="1" latinLnBrk="0" hangingPunct="1">
-                  <a:spcBef>
-                    <a:spcPct val="20000"/>
-                  </a:spcBef>
-                  <a:buFont typeface="Arial"/>
-                  <a:buChar char="•"/>
-                  <a:defRPr sz="3200" kern="1200">
-                    <a:solidFill>
-                      <a:schemeClr val="tx1"/>
-                    </a:solidFill>
-                    <a:latin typeface="+mn-lt"/>
-                    <a:ea typeface="+mn-ea"/>
-                    <a:cs typeface="+mn-cs"/>
-                  </a:defRPr>
-                </a:lvl1pPr>
-                <a:lvl2pPr marL="742950" indent="-285750" algn="l" defTabSz="457200" rtl="0" eaLnBrk="1" latinLnBrk="0" hangingPunct="1">
-                  <a:spcBef>
-                    <a:spcPct val="20000"/>
-                  </a:spcBef>
-                  <a:buFont typeface="Arial"/>
-                  <a:buChar char="–"/>
-                  <a:defRPr sz="2800" kern="1200">
-                    <a:solidFill>
-                      <a:schemeClr val="tx1"/>
-                    </a:solidFill>
-                    <a:latin typeface="+mn-lt"/>
-                    <a:ea typeface="+mn-ea"/>
-                    <a:cs typeface="+mn-cs"/>
-                  </a:defRPr>
-                </a:lvl2pPr>
-                <a:lvl3pPr marL="1143000" indent="-228600" algn="l" defTabSz="457200" rtl="0" eaLnBrk="1" latinLnBrk="0" hangingPunct="1">
-                  <a:spcBef>
-                    <a:spcPct val="20000"/>
-                  </a:spcBef>
-                  <a:buFont typeface="Arial"/>
-                  <a:buChar char="•"/>
-                  <a:defRPr sz="2400" kern="1200">
-                    <a:solidFill>
-                      <a:schemeClr val="tx1"/>
-                    </a:solidFill>
-                    <a:latin typeface="+mn-lt"/>
-                    <a:ea typeface="+mn-ea"/>
-                    <a:cs typeface="+mn-cs"/>
-                  </a:defRPr>
-                </a:lvl3pPr>
-                <a:lvl4pPr marL="1600200" indent="-228600" algn="l" defTabSz="457200" rtl="0" eaLnBrk="1" latinLnBrk="0" hangingPunct="1">
-                  <a:spcBef>
-                    <a:spcPct val="20000"/>
-                  </a:spcBef>
-                  <a:buFont typeface="Arial"/>
-                  <a:buChar char="–"/>
-                  <a:defRPr sz="2000" kern="1200">
-                    <a:solidFill>
-                      <a:schemeClr val="tx1"/>
-                    </a:solidFill>
-                    <a:latin typeface="+mn-lt"/>
-                    <a:ea typeface="+mn-ea"/>
-                    <a:cs typeface="+mn-cs"/>
-                  </a:defRPr>
-                </a:lvl4pPr>
-                <a:lvl5pPr marL="2057400" indent="-228600" algn="l" defTabSz="457200" rtl="0" eaLnBrk="1" latinLnBrk="0" hangingPunct="1">
-                  <a:spcBef>
-                    <a:spcPct val="20000"/>
-                  </a:spcBef>
-                  <a:buFont typeface="Arial"/>
-                  <a:buChar char="»"/>
-                  <a:defRPr sz="2000" kern="1200">
-                    <a:solidFill>
-                      <a:schemeClr val="tx1"/>
-                    </a:solidFill>
-                    <a:latin typeface="+mn-lt"/>
-                    <a:ea typeface="+mn-ea"/>
-                    <a:cs typeface="+mn-cs"/>
-                  </a:defRPr>
-                </a:lvl5pPr>
-                <a:lvl6pPr marL="2514600" indent="-228600" algn="l" defTabSz="457200" rtl="0" eaLnBrk="1" latinLnBrk="0" hangingPunct="1">
-                  <a:spcBef>
-                    <a:spcPct val="20000"/>
-                  </a:spcBef>
-                  <a:buFont typeface="Arial"/>
-                  <a:buChar char="•"/>
-                  <a:defRPr sz="2000" kern="1200">
-                    <a:solidFill>
-                      <a:schemeClr val="tx1"/>
-                    </a:solidFill>
-                    <a:latin typeface="+mn-lt"/>
-                    <a:ea typeface="+mn-ea"/>
-                    <a:cs typeface="+mn-cs"/>
-                  </a:defRPr>
-                </a:lvl6pPr>
-                <a:lvl7pPr marL="2971800" indent="-228600" algn="l" defTabSz="457200" rtl="0" eaLnBrk="1" latinLnBrk="0" hangingPunct="1">
-                  <a:spcBef>
-                    <a:spcPct val="20000"/>
-                  </a:spcBef>
-                  <a:buFont typeface="Arial"/>
-                  <a:buChar char="•"/>
-                  <a:defRPr sz="2000" kern="1200">
-                    <a:solidFill>
-                      <a:schemeClr val="tx1"/>
-                    </a:solidFill>
-                    <a:latin typeface="+mn-lt"/>
-                    <a:ea typeface="+mn-ea"/>
-                    <a:cs typeface="+mn-cs"/>
-                  </a:defRPr>
-                </a:lvl7pPr>
-                <a:lvl8pPr marL="3429000" indent="-228600" algn="l" defTabSz="457200" rtl="0" eaLnBrk="1" latinLnBrk="0" hangingPunct="1">
-                  <a:spcBef>
-                    <a:spcPct val="20000"/>
-                  </a:spcBef>
-                  <a:buFont typeface="Arial"/>
-                  <a:buChar char="•"/>
-                  <a:defRPr sz="2000" kern="1200">
-                    <a:solidFill>
-                      <a:schemeClr val="tx1"/>
-                    </a:solidFill>
-                    <a:latin typeface="+mn-lt"/>
-                    <a:ea typeface="+mn-ea"/>
-                    <a:cs typeface="+mn-cs"/>
-                  </a:defRPr>
-                </a:lvl8pPr>
-                <a:lvl9pPr marL="3886200" indent="-228600" algn="l" defTabSz="457200" rtl="0" eaLnBrk="1" latinLnBrk="0" hangingPunct="1">
-                  <a:spcBef>
-                    <a:spcPct val="20000"/>
-                  </a:spcBef>
-                  <a:buFont typeface="Arial"/>
-                  <a:buChar char="•"/>
-                  <a:defRPr sz="2000" kern="1200">
-                    <a:solidFill>
-                      <a:schemeClr val="tx1"/>
-                    </a:solidFill>
-                    <a:latin typeface="+mn-lt"/>
-                    <a:ea typeface="+mn-ea"/>
-                    <a:cs typeface="+mn-cs"/>
-                  </a:defRPr>
-                </a:lvl9pPr>
-              </a:lstStyle>
-              <a:p>
-                <a:r>
-                  <a:rPr lang="de-CH" sz="1600" dirty="0"/>
-                  <a:t>Bezüglich der Klemmen verhält sich das Netzwerk wie die Ersatzstromquelle. Leistungsanpassung:</a:t>
-                </a:r>
-              </a:p>
-              <a:p>
-                <a:pPr marL="0" indent="0" algn="ctr">
-                  <a:buFont typeface="Arial"/>
-                  <a:buNone/>
-                </a:pPr>
-                <a14:m>
-                  <m:oMathPara xmlns:m="http://schemas.openxmlformats.org/officeDocument/2006/math">
-                    <m:oMath>
-                      <m:sSub>
-                        <m:sSubPr>
-                          <m:ctrlPr>
-                            <a:rPr lang="de-CH" sz="1600" i="1" smtClean="0">
-                              <a:latin typeface="Cambria Math" panose="02040503050406030204" pitchFamily="18" charset="0"/>
-                            </a:rPr>
-                          </m:ctrlPr>
-                        </m:sSubPr>
-                        <m:e>
-                          <m:r>
-                            <m:rPr>
-                              <m:sty m:val="p"/>
-                            </m:rPr>
-                            <a:rPr lang="de-CH" sz="1600" i="1" smtClean="0">
-                              <a:latin typeface="Cambria Math" panose="02040503050406030204" pitchFamily="18" charset="0"/>
-                            </a:rPr>
-                            <m:t>R</m:t>
-                          </m:r>
-                        </m:e>
-                        <m:sub>
-                          <m:r>
-                            <m:rPr>
-                              <m:sty m:val="p"/>
-                            </m:rPr>
-                            <a:rPr lang="de-CH" sz="1600" i="1" smtClean="0">
-                              <a:latin typeface="Cambria Math" panose="02040503050406030204" pitchFamily="18" charset="0"/>
-                            </a:rPr>
-                            <m:t>Last</m:t>
-                          </m:r>
-                        </m:sub>
-                      </m:sSub>
-                      <m:r>
-                        <a:rPr lang="de-CH" sz="1600" i="1" smtClean="0">
-                          <a:latin typeface="Cambria Math" panose="02040503050406030204" pitchFamily="18" charset="0"/>
-                        </a:rPr>
-                        <m:t>=</m:t>
-                      </m:r>
-                      <m:sSub>
-                        <m:sSubPr>
-                          <m:ctrlPr>
-                            <a:rPr lang="de-CH" sz="1600" i="1" smtClean="0">
-                              <a:latin typeface="Cambria Math" panose="02040503050406030204" pitchFamily="18" charset="0"/>
-                            </a:rPr>
-                          </m:ctrlPr>
-                        </m:sSubPr>
-                        <m:e>
-                          <m:r>
-                            <m:rPr>
-                              <m:sty m:val="p"/>
-                            </m:rPr>
-                            <a:rPr lang="de-CH" sz="1600" i="1" smtClean="0">
-                              <a:latin typeface="Cambria Math" panose="02040503050406030204" pitchFamily="18" charset="0"/>
-                            </a:rPr>
-                            <m:t>R</m:t>
-                          </m:r>
-                        </m:e>
-                        <m:sub>
-                          <m:r>
-                            <m:rPr>
-                              <m:sty m:val="p"/>
-                            </m:rPr>
-                            <a:rPr lang="de-CH" sz="1600" i="1" smtClean="0">
-                              <a:latin typeface="Cambria Math" panose="02040503050406030204" pitchFamily="18" charset="0"/>
-                            </a:rPr>
-                            <m:t>i</m:t>
-                          </m:r>
-                        </m:sub>
-                      </m:sSub>
-                      <m:r>
-                        <a:rPr lang="de-CH" sz="1600" i="1" smtClean="0">
-                          <a:latin typeface="Cambria Math" panose="02040503050406030204" pitchFamily="18" charset="0"/>
-                        </a:rPr>
-                        <m:t>=</m:t>
-                      </m:r>
-                      <m:f>
-                        <m:fPr>
-                          <m:ctrlPr>
-                            <a:rPr lang="de-CH" sz="1600" i="1" smtClean="0">
-                              <a:latin typeface="Cambria Math" panose="02040503050406030204" pitchFamily="18" charset="0"/>
-                            </a:rPr>
-                          </m:ctrlPr>
-                        </m:fPr>
-                        <m:num>
-                          <m:sSub>
-                            <m:sSubPr>
-                              <m:ctrlPr>
-                                <a:rPr lang="de-CH" sz="1600" i="1" smtClean="0">
-                                  <a:latin typeface="Cambria Math" panose="02040503050406030204" pitchFamily="18" charset="0"/>
-                                </a:rPr>
-                              </m:ctrlPr>
-                            </m:sSubPr>
-                            <m:e>
-                              <m:r>
-                                <m:rPr>
-                                  <m:sty m:val="p"/>
-                                </m:rPr>
-                                <a:rPr lang="de-CH" sz="1600" i="1" smtClean="0">
-                                  <a:latin typeface="Cambria Math" panose="02040503050406030204" pitchFamily="18" charset="0"/>
-                                </a:rPr>
-                                <m:t>R</m:t>
-                              </m:r>
-                            </m:e>
-                            <m:sub>
-                              <m:r>
-                                <a:rPr lang="de-CH" sz="1600" i="1" smtClean="0">
-                                  <a:latin typeface="Cambria Math" panose="02040503050406030204" pitchFamily="18" charset="0"/>
-                                </a:rPr>
-                                <m:t>1</m:t>
-                              </m:r>
-                            </m:sub>
-                          </m:sSub>
-                          <m:sSub>
-                            <m:sSubPr>
-                              <m:ctrlPr>
-                                <a:rPr lang="de-CH" sz="1600" i="1" smtClean="0">
-                                  <a:latin typeface="Cambria Math" panose="02040503050406030204" pitchFamily="18" charset="0"/>
-                                </a:rPr>
-                              </m:ctrlPr>
-                            </m:sSubPr>
-                            <m:e>
-                              <m:r>
-                                <m:rPr>
-                                  <m:sty m:val="p"/>
-                                </m:rPr>
-                                <a:rPr lang="de-CH" sz="1600" i="1" smtClean="0">
-                                  <a:latin typeface="Cambria Math" panose="02040503050406030204" pitchFamily="18" charset="0"/>
-                                </a:rPr>
-                                <m:t>R</m:t>
-                              </m:r>
-                            </m:e>
-                            <m:sub>
-                              <m:r>
-                                <a:rPr lang="de-CH" sz="1600" i="1" smtClean="0">
-                                  <a:latin typeface="Cambria Math" panose="02040503050406030204" pitchFamily="18" charset="0"/>
-                                </a:rPr>
-                                <m:t>2</m:t>
-                              </m:r>
-                            </m:sub>
-                          </m:sSub>
-                        </m:num>
-                        <m:den>
-                          <m:sSub>
-                            <m:sSubPr>
-                              <m:ctrlPr>
-                                <a:rPr lang="de-CH" sz="1600" i="1" smtClean="0">
-                                  <a:latin typeface="Cambria Math" panose="02040503050406030204" pitchFamily="18" charset="0"/>
-                                </a:rPr>
-                              </m:ctrlPr>
-                            </m:sSubPr>
-                            <m:e>
-                              <m:r>
-                                <m:rPr>
-                                  <m:sty m:val="p"/>
-                                </m:rPr>
-                                <a:rPr lang="de-CH" sz="1600" i="1" smtClean="0">
-                                  <a:latin typeface="Cambria Math" panose="02040503050406030204" pitchFamily="18" charset="0"/>
-                                </a:rPr>
-                                <m:t>R</m:t>
-                              </m:r>
-                            </m:e>
-                            <m:sub>
-                              <m:r>
-                                <a:rPr lang="de-CH" sz="1600" i="1" smtClean="0">
-                                  <a:latin typeface="Cambria Math" panose="02040503050406030204" pitchFamily="18" charset="0"/>
-                                </a:rPr>
-                                <m:t>1</m:t>
-                              </m:r>
-                            </m:sub>
-                          </m:sSub>
-                          <m:r>
-                            <a:rPr lang="de-CH" sz="1600" i="1" smtClean="0">
-                              <a:latin typeface="Cambria Math" panose="02040503050406030204" pitchFamily="18" charset="0"/>
-                            </a:rPr>
-                            <m:t>+</m:t>
-                          </m:r>
-                          <m:sSub>
-                            <m:sSubPr>
-                              <m:ctrlPr>
-                                <a:rPr lang="de-CH" sz="1600" i="1" smtClean="0">
-                                  <a:latin typeface="Cambria Math" panose="02040503050406030204" pitchFamily="18" charset="0"/>
-                                </a:rPr>
-                              </m:ctrlPr>
-                            </m:sSubPr>
-                            <m:e>
-                              <m:r>
-                                <m:rPr>
-                                  <m:sty m:val="p"/>
-                                </m:rPr>
-                                <a:rPr lang="de-CH" sz="1600" i="1" smtClean="0">
-                                  <a:latin typeface="Cambria Math" panose="02040503050406030204" pitchFamily="18" charset="0"/>
-                                </a:rPr>
-                                <m:t>R</m:t>
-                              </m:r>
-                            </m:e>
-                            <m:sub>
-                              <m:r>
-                                <a:rPr lang="de-CH" sz="1600" i="1" smtClean="0">
-                                  <a:latin typeface="Cambria Math" panose="02040503050406030204" pitchFamily="18" charset="0"/>
-                                </a:rPr>
-                                <m:t>2</m:t>
-                              </m:r>
-                            </m:sub>
-                          </m:sSub>
-                        </m:den>
-                      </m:f>
-                    </m:oMath>
-                  </m:oMathPara>
-                </a14:m>
-                <a:endParaRPr lang="de-CH" sz="1600" dirty="0"/>
-              </a:p>
-              <a:p>
-                <a:r>
-                  <a:rPr lang="de-CH" sz="1600" dirty="0"/>
-                  <a:t>Ersatzstromquelle: </a:t>
-                </a:r>
-                <a14:m>
-                  <m:oMath xmlns:m="http://schemas.openxmlformats.org/officeDocument/2006/math">
-                    <m:sSub>
-                      <m:sSubPr>
-                        <m:ctrlPr>
-                          <a:rPr lang="de-CH" sz="1600" i="1" smtClean="0">
-                            <a:latin typeface="Cambria Math" panose="02040503050406030204" pitchFamily="18" charset="0"/>
-                          </a:rPr>
-                        </m:ctrlPr>
-                      </m:sSubPr>
-                      <m:e>
-                        <m:r>
-                          <m:rPr>
-                            <m:sty m:val="p"/>
-                          </m:rPr>
-                          <a:rPr lang="de-CH" sz="1600" i="1" smtClean="0">
-                            <a:latin typeface="Cambria Math" panose="02040503050406030204" pitchFamily="18" charset="0"/>
-                          </a:rPr>
-                          <m:t>R</m:t>
-                        </m:r>
-                      </m:e>
-                      <m:sub>
-                        <m:r>
-                          <m:rPr>
-                            <m:sty m:val="p"/>
-                          </m:rPr>
-                          <a:rPr lang="de-CH" sz="1600" i="1" smtClean="0">
-                            <a:latin typeface="Cambria Math" panose="02040503050406030204" pitchFamily="18" charset="0"/>
-                          </a:rPr>
-                          <m:t>i</m:t>
-                        </m:r>
-                      </m:sub>
-                    </m:sSub>
-                  </m:oMath>
-                </a14:m>
-                <a:r>
-                  <a:rPr lang="de-CH" sz="1600" dirty="0"/>
-                  <a:t> und </a:t>
-                </a:r>
-                <a14:m>
-                  <m:oMath xmlns:m="http://schemas.openxmlformats.org/officeDocument/2006/math">
-                    <m:sSub>
-                      <m:sSubPr>
-                        <m:ctrlPr>
-                          <a:rPr lang="de-CH" sz="1600" i="1" smtClean="0">
-                            <a:latin typeface="Cambria Math" panose="02040503050406030204" pitchFamily="18" charset="0"/>
-                          </a:rPr>
-                        </m:ctrlPr>
-                      </m:sSubPr>
-                      <m:e>
-                        <m:r>
-                          <m:rPr>
-                            <m:sty m:val="p"/>
-                          </m:rPr>
-                          <a:rPr lang="de-CH" sz="1600" i="1" smtClean="0">
-                            <a:latin typeface="Cambria Math" panose="02040503050406030204" pitchFamily="18" charset="0"/>
-                          </a:rPr>
-                          <m:t>R</m:t>
-                        </m:r>
-                      </m:e>
-                      <m:sub>
-                        <m:r>
-                          <m:rPr>
-                            <m:sty m:val="p"/>
-                          </m:rPr>
-                          <a:rPr lang="de-CH" sz="1600" i="1" smtClean="0">
-                            <a:latin typeface="Cambria Math" panose="02040503050406030204" pitchFamily="18" charset="0"/>
-                          </a:rPr>
-                          <m:t>Last</m:t>
-                        </m:r>
-                      </m:sub>
-                    </m:sSub>
-                  </m:oMath>
-                </a14:m>
-                <a:r>
-                  <a:rPr lang="de-CH" sz="1600" dirty="0"/>
-                  <a:t> sind gleich gross, der Strom </a:t>
-                </a:r>
-                <a14:m>
-                  <m:oMath xmlns:m="http://schemas.openxmlformats.org/officeDocument/2006/math">
-                    <m:r>
-                      <m:rPr>
-                        <m:sty m:val="p"/>
-                      </m:rPr>
-                      <a:rPr lang="de-CH" sz="1600" i="1" smtClean="0">
-                        <a:latin typeface="Cambria Math" panose="02040503050406030204" pitchFamily="18" charset="0"/>
-                      </a:rPr>
-                      <m:t>I</m:t>
-                    </m:r>
-                  </m:oMath>
-                </a14:m>
-                <a:r>
-                  <a:rPr lang="de-CH" sz="1600" dirty="0"/>
-                  <a:t> teilt sich je zur Hälfte auf:</a:t>
-                </a:r>
-              </a:p>
-              <a:p>
-                <a:pPr marL="0" indent="0" algn="ctr">
-                  <a:buFont typeface="Arial"/>
-                  <a:buNone/>
-                </a:pPr>
-                <a14:m>
-                  <m:oMathPara xmlns:m="http://schemas.openxmlformats.org/officeDocument/2006/math">
-                    <m:oMath>
-                      <m:sSub>
-                        <m:sSubPr>
-                          <m:ctrlPr>
-                            <a:rPr lang="de-CH" sz="1600" i="1" smtClean="0">
-                              <a:latin typeface="Cambria Math" panose="02040503050406030204" pitchFamily="18" charset="0"/>
-                            </a:rPr>
-                          </m:ctrlPr>
-                        </m:sSubPr>
-                        <m:e>
-                          <m:r>
-                            <m:rPr>
-                              <m:sty m:val="p"/>
-                            </m:rPr>
-                            <a:rPr lang="de-CH" sz="1600" i="1" smtClean="0">
-                              <a:latin typeface="Cambria Math" panose="02040503050406030204" pitchFamily="18" charset="0"/>
-                            </a:rPr>
-                            <m:t>I</m:t>
-                          </m:r>
-                        </m:e>
-                        <m:sub>
-                          <m:r>
-                            <m:rPr>
-                              <m:sty m:val="p"/>
-                            </m:rPr>
-                            <a:rPr lang="de-CH" sz="1600" i="1" smtClean="0">
-                              <a:latin typeface="Cambria Math" panose="02040503050406030204" pitchFamily="18" charset="0"/>
-                            </a:rPr>
-                            <m:t>Last</m:t>
-                          </m:r>
-                        </m:sub>
-                      </m:sSub>
-                      <m:r>
-                        <a:rPr lang="de-CH" sz="1600" i="1" smtClean="0">
-                          <a:latin typeface="Cambria Math" panose="02040503050406030204" pitchFamily="18" charset="0"/>
-                        </a:rPr>
-                        <m:t>=</m:t>
-                      </m:r>
-                      <m:f>
-                        <m:fPr>
-                          <m:ctrlPr>
-                            <a:rPr lang="de-CH" sz="1600" i="1" smtClean="0">
-                              <a:latin typeface="Cambria Math" panose="02040503050406030204" pitchFamily="18" charset="0"/>
-                            </a:rPr>
-                          </m:ctrlPr>
-                        </m:fPr>
-                        <m:num>
-                          <m:r>
-                            <m:rPr>
-                              <m:sty m:val="p"/>
-                            </m:rPr>
-                            <a:rPr lang="de-CH" sz="1600" i="1" smtClean="0">
-                              <a:latin typeface="Cambria Math" panose="02040503050406030204" pitchFamily="18" charset="0"/>
-                            </a:rPr>
-                            <m:t>I</m:t>
-                          </m:r>
-                        </m:num>
-                        <m:den>
-                          <m:r>
-                            <a:rPr lang="de-CH" sz="1600" i="1" smtClean="0">
-                              <a:latin typeface="Cambria Math" panose="02040503050406030204" pitchFamily="18" charset="0"/>
-                            </a:rPr>
-                            <m:t>2</m:t>
-                          </m:r>
-                        </m:den>
-                      </m:f>
-                      <m:r>
-                        <a:rPr lang="de-CH" sz="1600" i="1" smtClean="0">
-                          <a:latin typeface="Cambria Math" panose="02040503050406030204" pitchFamily="18" charset="0"/>
-                        </a:rPr>
-                        <m:t>=</m:t>
-                      </m:r>
-                      <m:f>
-                        <m:fPr>
-                          <m:ctrlPr>
-                            <a:rPr lang="de-CH" sz="1600" i="1" smtClean="0">
-                              <a:latin typeface="Cambria Math" panose="02040503050406030204" pitchFamily="18" charset="0"/>
-                            </a:rPr>
-                          </m:ctrlPr>
-                        </m:fPr>
-                        <m:num>
-                          <m:r>
-                            <m:rPr>
-                              <m:sty m:val="p"/>
-                            </m:rPr>
-                            <a:rPr lang="de-CH" sz="1600" i="1" smtClean="0">
-                              <a:latin typeface="Cambria Math" panose="02040503050406030204" pitchFamily="18" charset="0"/>
-                            </a:rPr>
-                            <m:t>U</m:t>
-                          </m:r>
-                        </m:num>
-                        <m:den>
-                          <m:r>
-                            <a:rPr lang="de-CH" sz="1600" i="1" smtClean="0">
-                              <a:latin typeface="Cambria Math" panose="02040503050406030204" pitchFamily="18" charset="0"/>
-                            </a:rPr>
-                            <m:t>2</m:t>
-                          </m:r>
-                          <m:sSub>
-                            <m:sSubPr>
-                              <m:ctrlPr>
-                                <a:rPr lang="de-CH" sz="1600" i="1" smtClean="0">
-                                  <a:latin typeface="Cambria Math" panose="02040503050406030204" pitchFamily="18" charset="0"/>
-                                </a:rPr>
-                              </m:ctrlPr>
-                            </m:sSubPr>
-                            <m:e>
-                              <m:r>
-                                <m:rPr>
-                                  <m:sty m:val="p"/>
-                                </m:rPr>
-                                <a:rPr lang="de-CH" sz="1600" i="1" smtClean="0">
-                                  <a:latin typeface="Cambria Math" panose="02040503050406030204" pitchFamily="18" charset="0"/>
-                                </a:rPr>
-                                <m:t>R</m:t>
-                              </m:r>
-                            </m:e>
-                            <m:sub>
-                              <m:r>
-                                <a:rPr lang="de-CH" sz="1600" i="1" smtClean="0">
-                                  <a:latin typeface="Cambria Math" panose="02040503050406030204" pitchFamily="18" charset="0"/>
-                                </a:rPr>
-                                <m:t>1</m:t>
-                              </m:r>
-                            </m:sub>
-                          </m:sSub>
-                        </m:den>
-                      </m:f>
-                    </m:oMath>
-                  </m:oMathPara>
-                </a14:m>
-                <a:endParaRPr lang="de-CH" sz="1600" dirty="0"/>
-              </a:p>
-              <a:p>
-                <a:r>
-                  <a:rPr lang="de-CH" sz="1600" dirty="0"/>
-                  <a:t>Leistung an der Last:</a:t>
-                </a:r>
-              </a:p>
-              <a:p>
-                <a:pPr marL="0" indent="0" algn="ctr">
-                  <a:buFont typeface="Arial"/>
-                  <a:buNone/>
-                </a:pPr>
-                <a14:m>
-                  <m:oMathPara xmlns:m="http://schemas.openxmlformats.org/officeDocument/2006/math">
-                    <m:oMath>
-                      <m:sSub>
-                        <m:sSubPr>
-                          <m:ctrlPr>
-                            <a:rPr lang="de-CH" sz="1600" i="1" smtClean="0">
-                              <a:latin typeface="Cambria Math" panose="02040503050406030204" pitchFamily="18" charset="0"/>
-                            </a:rPr>
-                          </m:ctrlPr>
-                        </m:sSubPr>
-                        <m:e>
-                          <m:r>
-                            <m:rPr>
-                              <m:sty m:val="p"/>
-                            </m:rPr>
-                            <a:rPr lang="de-CH" sz="1600" i="1" smtClean="0">
-                              <a:latin typeface="Cambria Math" panose="02040503050406030204" pitchFamily="18" charset="0"/>
-                            </a:rPr>
-                            <m:t>P</m:t>
-                          </m:r>
-                        </m:e>
-                        <m:sub>
-                          <m:r>
-                            <m:rPr>
-                              <m:sty m:val="p"/>
-                            </m:rPr>
-                            <a:rPr lang="de-CH" sz="1600" i="1" smtClean="0">
-                              <a:latin typeface="Cambria Math" panose="02040503050406030204" pitchFamily="18" charset="0"/>
-                            </a:rPr>
-                            <m:t>max</m:t>
-                          </m:r>
-                        </m:sub>
-                      </m:sSub>
-                      <m:r>
-                        <a:rPr lang="de-CH" sz="1600" i="1" smtClean="0">
-                          <a:latin typeface="Cambria Math" panose="02040503050406030204" pitchFamily="18" charset="0"/>
-                        </a:rPr>
-                        <m:t>=</m:t>
-                      </m:r>
-                      <m:sSub>
-                        <m:sSubPr>
-                          <m:ctrlPr>
-                            <a:rPr lang="de-CH" sz="1600" i="1" smtClean="0">
-                              <a:latin typeface="Cambria Math" panose="02040503050406030204" pitchFamily="18" charset="0"/>
-                            </a:rPr>
-                          </m:ctrlPr>
-                        </m:sSubPr>
-                        <m:e>
-                          <m:r>
-                            <m:rPr>
-                              <m:sty m:val="p"/>
-                            </m:rPr>
-                            <a:rPr lang="de-CH" sz="1600" i="1" smtClean="0">
-                              <a:latin typeface="Cambria Math" panose="02040503050406030204" pitchFamily="18" charset="0"/>
-                            </a:rPr>
-                            <m:t>R</m:t>
-                          </m:r>
-                        </m:e>
-                        <m:sub>
-                          <m:r>
-                            <m:rPr>
-                              <m:sty m:val="p"/>
-                            </m:rPr>
-                            <a:rPr lang="de-CH" sz="1600" i="1" smtClean="0">
-                              <a:latin typeface="Cambria Math" panose="02040503050406030204" pitchFamily="18" charset="0"/>
-                            </a:rPr>
-                            <m:t>Last</m:t>
-                          </m:r>
-                        </m:sub>
-                      </m:sSub>
-                      <m:r>
-                        <a:rPr lang="de-CH" sz="1600" i="1" smtClean="0">
-                          <a:latin typeface="Cambria Math" panose="02040503050406030204" pitchFamily="18" charset="0"/>
-                        </a:rPr>
-                        <m:t>⋅ </m:t>
-                      </m:r>
-                      <m:sSubSup>
-                        <m:sSubSupPr>
-                          <m:ctrlPr>
-                            <a:rPr lang="de-CH" sz="1600" i="1" smtClean="0">
-                              <a:latin typeface="Cambria Math" panose="02040503050406030204" pitchFamily="18" charset="0"/>
-                            </a:rPr>
-                          </m:ctrlPr>
-                        </m:sSubSupPr>
-                        <m:e>
-                          <m:r>
-                            <m:rPr>
-                              <m:sty m:val="p"/>
-                            </m:rPr>
-                            <a:rPr lang="de-CH" sz="1600" i="1" smtClean="0">
-                              <a:latin typeface="Cambria Math" panose="02040503050406030204" pitchFamily="18" charset="0"/>
-                            </a:rPr>
-                            <m:t>I</m:t>
-                          </m:r>
-                        </m:e>
-                        <m:sub>
-                          <m:r>
-                            <m:rPr>
-                              <m:sty m:val="p"/>
-                            </m:rPr>
-                            <a:rPr lang="de-CH" sz="1600" i="1" smtClean="0">
-                              <a:latin typeface="Cambria Math" panose="02040503050406030204" pitchFamily="18" charset="0"/>
-                            </a:rPr>
-                            <m:t>Last</m:t>
-                          </m:r>
-                        </m:sub>
-                        <m:sup>
-                          <m:r>
-                            <a:rPr lang="de-CH" sz="1600" i="1" smtClean="0">
-                              <a:latin typeface="Cambria Math" panose="02040503050406030204" pitchFamily="18" charset="0"/>
-                            </a:rPr>
-                            <m:t>2</m:t>
-                          </m:r>
-                        </m:sup>
-                      </m:sSubSup>
-                      <m:r>
-                        <a:rPr lang="de-CH" sz="1600" i="1" smtClean="0">
-                          <a:latin typeface="Cambria Math" panose="02040503050406030204" pitchFamily="18" charset="0"/>
-                        </a:rPr>
-                        <m:t>=</m:t>
-                      </m:r>
-                      <m:f>
-                        <m:fPr>
-                          <m:ctrlPr>
-                            <a:rPr lang="de-CH" sz="1600" i="1" smtClean="0">
-                              <a:latin typeface="Cambria Math" panose="02040503050406030204" pitchFamily="18" charset="0"/>
-                            </a:rPr>
-                          </m:ctrlPr>
-                        </m:fPr>
-                        <m:num>
-                          <m:sSub>
-                            <m:sSubPr>
-                              <m:ctrlPr>
-                                <a:rPr lang="de-CH" sz="1600" i="1" smtClean="0">
-                                  <a:latin typeface="Cambria Math" panose="02040503050406030204" pitchFamily="18" charset="0"/>
-                                </a:rPr>
-                              </m:ctrlPr>
-                            </m:sSubPr>
-                            <m:e>
-                              <m:r>
-                                <m:rPr>
-                                  <m:sty m:val="p"/>
-                                </m:rPr>
-                                <a:rPr lang="de-CH" sz="1600" i="1" smtClean="0">
-                                  <a:latin typeface="Cambria Math" panose="02040503050406030204" pitchFamily="18" charset="0"/>
-                                </a:rPr>
-                                <m:t>R</m:t>
-                              </m:r>
-                            </m:e>
-                            <m:sub>
-                              <m:r>
-                                <a:rPr lang="de-CH" sz="1600" i="1" smtClean="0">
-                                  <a:latin typeface="Cambria Math" panose="02040503050406030204" pitchFamily="18" charset="0"/>
-                                </a:rPr>
-                                <m:t>1</m:t>
-                              </m:r>
-                            </m:sub>
-                          </m:sSub>
-                          <m:sSub>
-                            <m:sSubPr>
-                              <m:ctrlPr>
-                                <a:rPr lang="de-CH" sz="1600" i="1" smtClean="0">
-                                  <a:latin typeface="Cambria Math" panose="02040503050406030204" pitchFamily="18" charset="0"/>
-                                </a:rPr>
-                              </m:ctrlPr>
-                            </m:sSubPr>
-                            <m:e>
-                              <m:r>
-                                <m:rPr>
-                                  <m:sty m:val="p"/>
-                                </m:rPr>
-                                <a:rPr lang="de-CH" sz="1600" i="1" smtClean="0">
-                                  <a:latin typeface="Cambria Math" panose="02040503050406030204" pitchFamily="18" charset="0"/>
-                                </a:rPr>
-                                <m:t>R</m:t>
-                              </m:r>
-                            </m:e>
-                            <m:sub>
-                              <m:r>
-                                <a:rPr lang="de-CH" sz="1600" i="1" smtClean="0">
-                                  <a:latin typeface="Cambria Math" panose="02040503050406030204" pitchFamily="18" charset="0"/>
-                                </a:rPr>
-                                <m:t>2</m:t>
-                              </m:r>
-                            </m:sub>
-                          </m:sSub>
-                        </m:num>
-                        <m:den>
-                          <m:sSub>
-                            <m:sSubPr>
-                              <m:ctrlPr>
-                                <a:rPr lang="de-CH" sz="1600" i="1" smtClean="0">
-                                  <a:latin typeface="Cambria Math" panose="02040503050406030204" pitchFamily="18" charset="0"/>
-                                </a:rPr>
-                              </m:ctrlPr>
-                            </m:sSubPr>
-                            <m:e>
-                              <m:r>
-                                <m:rPr>
-                                  <m:sty m:val="p"/>
-                                </m:rPr>
-                                <a:rPr lang="de-CH" sz="1600" i="1" smtClean="0">
-                                  <a:latin typeface="Cambria Math" panose="02040503050406030204" pitchFamily="18" charset="0"/>
-                                </a:rPr>
-                                <m:t>R</m:t>
-                              </m:r>
-                            </m:e>
-                            <m:sub>
-                              <m:r>
-                                <a:rPr lang="de-CH" sz="1600" i="1" smtClean="0">
-                                  <a:latin typeface="Cambria Math" panose="02040503050406030204" pitchFamily="18" charset="0"/>
-                                </a:rPr>
-                                <m:t>1</m:t>
-                              </m:r>
-                            </m:sub>
-                          </m:sSub>
-                          <m:r>
-                            <a:rPr lang="de-CH" sz="1600" i="1" smtClean="0">
-                              <a:latin typeface="Cambria Math" panose="02040503050406030204" pitchFamily="18" charset="0"/>
-                            </a:rPr>
-                            <m:t>+</m:t>
-                          </m:r>
-                          <m:sSub>
-                            <m:sSubPr>
-                              <m:ctrlPr>
-                                <a:rPr lang="de-CH" sz="1600" i="1" smtClean="0">
-                                  <a:latin typeface="Cambria Math" panose="02040503050406030204" pitchFamily="18" charset="0"/>
-                                </a:rPr>
-                              </m:ctrlPr>
-                            </m:sSubPr>
-                            <m:e>
-                              <m:r>
-                                <m:rPr>
-                                  <m:sty m:val="p"/>
-                                </m:rPr>
-                                <a:rPr lang="de-CH" sz="1600" i="1" smtClean="0">
-                                  <a:latin typeface="Cambria Math" panose="02040503050406030204" pitchFamily="18" charset="0"/>
-                                </a:rPr>
-                                <m:t>R</m:t>
-                              </m:r>
-                            </m:e>
-                            <m:sub>
-                              <m:r>
-                                <a:rPr lang="de-CH" sz="1600" i="1" smtClean="0">
-                                  <a:latin typeface="Cambria Math" panose="02040503050406030204" pitchFamily="18" charset="0"/>
-                                </a:rPr>
-                                <m:t>2</m:t>
-                              </m:r>
-                            </m:sub>
-                          </m:sSub>
-                        </m:den>
-                      </m:f>
-                      <m:r>
-                        <a:rPr lang="de-CH" sz="1600" i="1" smtClean="0">
-                          <a:latin typeface="Cambria Math" panose="02040503050406030204" pitchFamily="18" charset="0"/>
-                        </a:rPr>
-                        <m:t>⋅ </m:t>
-                      </m:r>
-                      <m:f>
-                        <m:fPr>
-                          <m:ctrlPr>
-                            <a:rPr lang="de-CH" sz="1600" i="1" smtClean="0">
-                              <a:latin typeface="Cambria Math" panose="02040503050406030204" pitchFamily="18" charset="0"/>
-                            </a:rPr>
-                          </m:ctrlPr>
-                        </m:fPr>
-                        <m:num>
-                          <m:sSup>
-                            <m:sSupPr>
-                              <m:ctrlPr>
-                                <a:rPr lang="de-CH" sz="1600" i="1" smtClean="0">
-                                  <a:latin typeface="Cambria Math" panose="02040503050406030204" pitchFamily="18" charset="0"/>
-                                </a:rPr>
-                              </m:ctrlPr>
-                            </m:sSupPr>
-                            <m:e>
-                              <m:r>
-                                <m:rPr>
-                                  <m:sty m:val="p"/>
-                                </m:rPr>
-                                <a:rPr lang="de-CH" sz="1600" i="1" smtClean="0">
-                                  <a:latin typeface="Cambria Math" panose="02040503050406030204" pitchFamily="18" charset="0"/>
-                                </a:rPr>
-                                <m:t>U</m:t>
-                              </m:r>
-                            </m:e>
-                            <m:sup>
-                              <m:r>
-                                <a:rPr lang="de-CH" sz="1600" i="1" smtClean="0">
-                                  <a:latin typeface="Cambria Math" panose="02040503050406030204" pitchFamily="18" charset="0"/>
-                                </a:rPr>
-                                <m:t>2</m:t>
-                              </m:r>
-                            </m:sup>
-                          </m:sSup>
-                        </m:num>
-                        <m:den>
-                          <m:r>
-                            <a:rPr lang="de-CH" sz="1600" i="1" smtClean="0">
-                              <a:latin typeface="Cambria Math" panose="02040503050406030204" pitchFamily="18" charset="0"/>
-                            </a:rPr>
-                            <m:t>4</m:t>
-                          </m:r>
-                          <m:sSubSup>
-                            <m:sSubSupPr>
-                              <m:ctrlPr>
-                                <a:rPr lang="de-CH" sz="1600" i="1" smtClean="0">
-                                  <a:latin typeface="Cambria Math" panose="02040503050406030204" pitchFamily="18" charset="0"/>
-                                </a:rPr>
-                              </m:ctrlPr>
-                            </m:sSubSupPr>
-                            <m:e>
-                              <m:r>
-                                <m:rPr>
-                                  <m:sty m:val="p"/>
-                                </m:rPr>
-                                <a:rPr lang="de-CH" sz="1600" i="1" smtClean="0">
-                                  <a:latin typeface="Cambria Math" panose="02040503050406030204" pitchFamily="18" charset="0"/>
-                                </a:rPr>
-                                <m:t>R</m:t>
-                              </m:r>
-                            </m:e>
-                            <m:sub>
-                              <m:r>
-                                <a:rPr lang="de-CH" sz="1600" i="1" smtClean="0">
-                                  <a:latin typeface="Cambria Math" panose="02040503050406030204" pitchFamily="18" charset="0"/>
-                                </a:rPr>
-                                <m:t>1</m:t>
-                              </m:r>
-                            </m:sub>
-                            <m:sup>
-                              <m:r>
-                                <a:rPr lang="de-CH" sz="1600" i="1" smtClean="0">
-                                  <a:latin typeface="Cambria Math" panose="02040503050406030204" pitchFamily="18" charset="0"/>
-                                </a:rPr>
-                                <m:t>2</m:t>
-                              </m:r>
-                            </m:sup>
-                          </m:sSubSup>
-                        </m:den>
-                      </m:f>
-                    </m:oMath>
-                  </m:oMathPara>
-                </a14:m>
-                <a:endParaRPr lang="de-CH" sz="1600" dirty="0"/>
-              </a:p>
-              <a:p>
-                <a:pPr marL="0" indent="0" algn="ctr">
-                  <a:buFont typeface="Arial"/>
-                  <a:buNone/>
-                </a:pPr>
-                <a14:m>
-                  <m:oMathPara xmlns:m="http://schemas.openxmlformats.org/officeDocument/2006/math">
-                    <m:oMath>
-                      <m:sSub>
-                        <m:sSubPr>
-                          <m:ctrlPr>
-                            <a:rPr lang="de-CH" sz="1600" i="1" smtClean="0">
-                              <a:latin typeface="Cambria Math" panose="02040503050406030204" pitchFamily="18" charset="0"/>
-                            </a:rPr>
-                          </m:ctrlPr>
-                        </m:sSubPr>
-                        <m:e>
-                          <m:r>
-                            <m:rPr>
-                              <m:sty m:val="p"/>
-                            </m:rPr>
-                            <a:rPr lang="de-CH" sz="1600" i="1" smtClean="0">
-                              <a:latin typeface="Cambria Math" panose="02040503050406030204" pitchFamily="18" charset="0"/>
-                            </a:rPr>
-                            <m:t>P</m:t>
-                          </m:r>
-                        </m:e>
-                        <m:sub>
-                          <m:r>
-                            <m:rPr>
-                              <m:sty m:val="p"/>
-                            </m:rPr>
-                            <a:rPr lang="de-CH" sz="1600" i="1" smtClean="0">
-                              <a:latin typeface="Cambria Math" panose="02040503050406030204" pitchFamily="18" charset="0"/>
-                            </a:rPr>
-                            <m:t>max</m:t>
-                          </m:r>
-                        </m:sub>
-                      </m:sSub>
-                      <m:r>
-                        <a:rPr lang="de-CH" sz="1600" i="1" smtClean="0">
-                          <a:latin typeface="Cambria Math" panose="02040503050406030204" pitchFamily="18" charset="0"/>
-                        </a:rPr>
-                        <m:t>=</m:t>
-                      </m:r>
-                      <m:f>
-                        <m:fPr>
-                          <m:ctrlPr>
-                            <a:rPr lang="de-CH" sz="1600" i="1" smtClean="0">
-                              <a:latin typeface="Cambria Math" panose="02040503050406030204" pitchFamily="18" charset="0"/>
-                            </a:rPr>
-                          </m:ctrlPr>
-                        </m:fPr>
-                        <m:num>
-                          <m:sSup>
-                            <m:sSupPr>
-                              <m:ctrlPr>
-                                <a:rPr lang="de-CH" sz="1600" i="1" smtClean="0">
-                                  <a:latin typeface="Cambria Math" panose="02040503050406030204" pitchFamily="18" charset="0"/>
-                                </a:rPr>
-                              </m:ctrlPr>
-                            </m:sSupPr>
-                            <m:e>
-                              <m:r>
-                                <m:rPr>
-                                  <m:sty m:val="p"/>
-                                </m:rPr>
-                                <a:rPr lang="de-CH" sz="1600" i="1" smtClean="0">
-                                  <a:latin typeface="Cambria Math" panose="02040503050406030204" pitchFamily="18" charset="0"/>
-                                </a:rPr>
-                                <m:t>U</m:t>
-                              </m:r>
-                            </m:e>
-                            <m:sup>
-                              <m:r>
-                                <a:rPr lang="de-CH" sz="1600" i="1" smtClean="0">
-                                  <a:latin typeface="Cambria Math" panose="02040503050406030204" pitchFamily="18" charset="0"/>
-                                </a:rPr>
-                                <m:t>2</m:t>
-                              </m:r>
-                            </m:sup>
-                          </m:sSup>
-                          <m:sSub>
-                            <m:sSubPr>
-                              <m:ctrlPr>
-                                <a:rPr lang="de-CH" sz="1600" i="1" smtClean="0">
-                                  <a:latin typeface="Cambria Math" panose="02040503050406030204" pitchFamily="18" charset="0"/>
-                                </a:rPr>
-                              </m:ctrlPr>
-                            </m:sSubPr>
-                            <m:e>
-                              <m:r>
-                                <m:rPr>
-                                  <m:sty m:val="p"/>
-                                </m:rPr>
-                                <a:rPr lang="de-CH" sz="1600" i="1" smtClean="0">
-                                  <a:latin typeface="Cambria Math" panose="02040503050406030204" pitchFamily="18" charset="0"/>
-                                </a:rPr>
-                                <m:t>R</m:t>
-                              </m:r>
-                            </m:e>
-                            <m:sub>
-                              <m:r>
-                                <a:rPr lang="de-CH" sz="1600" i="1" smtClean="0">
-                                  <a:latin typeface="Cambria Math" panose="02040503050406030204" pitchFamily="18" charset="0"/>
-                                </a:rPr>
-                                <m:t>2</m:t>
-                              </m:r>
-                            </m:sub>
-                          </m:sSub>
-                        </m:num>
-                        <m:den>
-                          <m:r>
-                            <a:rPr lang="de-CH" sz="1600" i="1" smtClean="0">
-                              <a:latin typeface="Cambria Math" panose="02040503050406030204" pitchFamily="18" charset="0"/>
-                            </a:rPr>
-                            <m:t>4</m:t>
-                          </m:r>
-                          <m:sSub>
-                            <m:sSubPr>
-                              <m:ctrlPr>
-                                <a:rPr lang="de-CH" sz="1600" i="1" smtClean="0">
-                                  <a:latin typeface="Cambria Math" panose="02040503050406030204" pitchFamily="18" charset="0"/>
-                                </a:rPr>
-                              </m:ctrlPr>
-                            </m:sSubPr>
-                            <m:e>
-                              <m:r>
-                                <m:rPr>
-                                  <m:sty m:val="p"/>
-                                </m:rPr>
-                                <a:rPr lang="de-CH" sz="1600" i="1" smtClean="0">
-                                  <a:latin typeface="Cambria Math" panose="02040503050406030204" pitchFamily="18" charset="0"/>
-                                </a:rPr>
-                                <m:t>R</m:t>
-                              </m:r>
-                            </m:e>
-                            <m:sub>
-                              <m:r>
-                                <a:rPr lang="de-CH" sz="1600" i="1" smtClean="0">
-                                  <a:latin typeface="Cambria Math" panose="02040503050406030204" pitchFamily="18" charset="0"/>
-                                </a:rPr>
-                                <m:t>1</m:t>
-                              </m:r>
-                            </m:sub>
-                          </m:sSub>
-                          <m:d>
-                            <m:dPr>
-                              <m:ctrlPr>
-                                <a:rPr lang="de-CH" sz="1600" i="1" smtClean="0">
-                                  <a:latin typeface="Cambria Math" panose="02040503050406030204" pitchFamily="18" charset="0"/>
-                                </a:rPr>
-                              </m:ctrlPr>
-                            </m:dPr>
-                            <m:e>
-                              <m:sSub>
-                                <m:sSubPr>
-                                  <m:ctrlPr>
-                                    <a:rPr lang="de-CH" sz="1600" i="1" smtClean="0">
-                                      <a:latin typeface="Cambria Math" panose="02040503050406030204" pitchFamily="18" charset="0"/>
-                                    </a:rPr>
-                                  </m:ctrlPr>
-                                </m:sSubPr>
-                                <m:e>
-                                  <m:r>
-                                    <m:rPr>
-                                      <m:sty m:val="p"/>
-                                    </m:rPr>
-                                    <a:rPr lang="de-CH" sz="1600" i="1" smtClean="0">
-                                      <a:latin typeface="Cambria Math" panose="02040503050406030204" pitchFamily="18" charset="0"/>
-                                    </a:rPr>
-                                    <m:t>R</m:t>
-                                  </m:r>
-                                </m:e>
-                                <m:sub>
-                                  <m:r>
-                                    <a:rPr lang="de-CH" sz="1600" i="1" smtClean="0">
-                                      <a:latin typeface="Cambria Math" panose="02040503050406030204" pitchFamily="18" charset="0"/>
-                                    </a:rPr>
-                                    <m:t>1</m:t>
-                                  </m:r>
-                                </m:sub>
-                              </m:sSub>
-                              <m:r>
-                                <a:rPr lang="de-CH" sz="1600" i="1" smtClean="0">
-                                  <a:latin typeface="Cambria Math" panose="02040503050406030204" pitchFamily="18" charset="0"/>
-                                </a:rPr>
-                                <m:t>+</m:t>
-                              </m:r>
-                              <m:sSub>
-                                <m:sSubPr>
-                                  <m:ctrlPr>
-                                    <a:rPr lang="de-CH" sz="1600" i="1" smtClean="0">
-                                      <a:latin typeface="Cambria Math" panose="02040503050406030204" pitchFamily="18" charset="0"/>
-                                    </a:rPr>
-                                  </m:ctrlPr>
-                                </m:sSubPr>
-                                <m:e>
-                                  <m:r>
-                                    <m:rPr>
-                                      <m:sty m:val="p"/>
-                                    </m:rPr>
-                                    <a:rPr lang="de-CH" sz="1600" i="1" smtClean="0">
-                                      <a:latin typeface="Cambria Math" panose="02040503050406030204" pitchFamily="18" charset="0"/>
-                                    </a:rPr>
-                                    <m:t>R</m:t>
-                                  </m:r>
-                                </m:e>
-                                <m:sub>
-                                  <m:r>
-                                    <a:rPr lang="de-CH" sz="1600" i="1" smtClean="0">
-                                      <a:latin typeface="Cambria Math" panose="02040503050406030204" pitchFamily="18" charset="0"/>
-                                    </a:rPr>
-                                    <m:t>2</m:t>
-                                  </m:r>
-                                </m:sub>
-                              </m:sSub>
-                            </m:e>
-                          </m:d>
-                        </m:den>
-                      </m:f>
-                    </m:oMath>
-                  </m:oMathPara>
-                </a14:m>
-                <a:endParaRPr lang="de-CH" sz="1600" dirty="0"/>
-              </a:p>
-            </p:txBody>
-          </p:sp>
-        </mc:Choice>
-        <mc:Fallback>
-          <p:sp>
-            <p:nvSpPr>
-              <p:cNvPr id="8" name="Content Placeholder 2">
-                <a:extLst>
-                  <a:ext uri="{FF2B5EF4-FFF2-40B4-BE49-F238E27FC236}">
-                    <a16:creationId xmlns:a16="http://schemas.microsoft.com/office/drawing/2014/main" id="{F625174D-6C8B-B81A-78E4-AD79E161FE94}"/>
-                  </a:ext>
-                </a:extLst>
-              </p:cNvPr>
-              <p:cNvSpPr txBox="1">
-                <a:spLocks noRot="1" noChangeAspect="1" noMove="1" noResize="1" noEditPoints="1" noAdjustHandles="1" noChangeArrowheads="1" noChangeShapeType="1" noTextEdit="1"/>
-              </p:cNvSpPr>
-              <p:nvPr/>
-            </p:nvSpPr>
-            <p:spPr>
-              <a:xfrm>
-                <a:off x="6204163" y="1412875"/>
-                <a:ext cx="5256000" cy="4860000"/>
-              </a:xfrm>
-              <a:prstGeom prst="rect">
-                <a:avLst/>
-              </a:prstGeom>
-              <a:blipFill>
-                <a:blip r:embed="rId3"/>
-                <a:stretch>
-                  <a:fillRect l="-464" t="-376" r="-1392"/>
-                </a:stretch>
-              </a:blipFill>
-            </p:spPr>
-            <p:txBody>
-              <a:bodyPr/>
-              <a:lstStyle/>
-              <a:p>
-                <a:r>
-                  <a:rPr lang="de-CH">
-                    <a:noFill/>
-                  </a:rPr>
-                  <a:t> </a:t>
-                </a:r>
-              </a:p>
-            </p:txBody>
-          </p:sp>
-        </mc:Fallback>
-      </mc:AlternateContent>
-      <p:pic>
-        <p:nvPicPr>
-          <p:cNvPr id="9" name="Grafik 10" descr="Netzwerk mit Last">
-            <a:extLst>
-              <a:ext uri="{FF2B5EF4-FFF2-40B4-BE49-F238E27FC236}">
-                <a16:creationId xmlns:a16="http://schemas.microsoft.com/office/drawing/2014/main" id="{359F512B-9682-6D9A-10E6-3DC066C56EAD}"/>
-              </a:ext>
-            </a:extLst>
-          </p:cNvPr>
-          <p:cNvPicPr>
-            <a:picLocks noChangeAspect="1"/>
-          </p:cNvPicPr>
-          <p:nvPr/>
-        </p:nvPicPr>
-        <p:blipFill>
-          <a:blip r:embed="rId4"/>
-          <a:stretch>
-            <a:fillRect/>
-          </a:stretch>
-        </p:blipFill>
-        <p:spPr>
-          <a:xfrm>
-            <a:off x="832543" y="1412875"/>
-            <a:ext cx="4838589" cy="2350000"/>
-          </a:xfrm>
-          <a:prstGeom prst="rect">
-            <a:avLst/>
-          </a:prstGeom>
-        </p:spPr>
-      </p:pic>
-      <p:pic>
-        <p:nvPicPr>
-          <p:cNvPr id="10" name="Grafik 11" descr="Ersatzstromquelle mit Last">
-            <a:extLst>
-              <a:ext uri="{FF2B5EF4-FFF2-40B4-BE49-F238E27FC236}">
-                <a16:creationId xmlns:a16="http://schemas.microsoft.com/office/drawing/2014/main" id="{3F8517D3-88EE-3424-E1DE-15ABB13CB84E}"/>
-              </a:ext>
-            </a:extLst>
-          </p:cNvPr>
-          <p:cNvPicPr>
-            <a:picLocks noChangeAspect="1"/>
-          </p:cNvPicPr>
-          <p:nvPr/>
-        </p:nvPicPr>
-        <p:blipFill>
-          <a:blip r:embed="rId5"/>
-          <a:stretch>
-            <a:fillRect/>
-          </a:stretch>
-        </p:blipFill>
-        <p:spPr>
-          <a:xfrm>
-            <a:off x="832543" y="3922875"/>
-            <a:ext cx="4838589" cy="2350000"/>
-          </a:xfrm>
-          <a:prstGeom prst="rect">
-            <a:avLst/>
-          </a:prstGeom>
-        </p:spPr>
-      </p:pic>
-    </p:spTree>
-    <p:extLst>
-      <p:ext uri="{BB962C8B-B14F-4D97-AF65-F5344CB8AC3E}">
-        <p14:creationId xmlns:p14="http://schemas.microsoft.com/office/powerpoint/2010/main" val="3574953262"/>
-      </p:ext>
-    </p:extLst>
-  </p:cSld>
-  <p:clrMapOvr>
-    <a:masterClrMapping/>
-  </p:clrMapOvr>
-  <p:timing>
-    <p:tnLst>
-      <p:par>
-        <p:cTn id="1" dur="indefinite" restart="never" nodeType="tmRoot">
-          <p:childTnLst>
-            <p:seq concurrent="1" nextAc="seek">
-              <p:cTn id="2" dur="indefinite" nodeType="mainSeq">
-                <p:childTnLst>
-                  <p:par>
-                    <p:cTn id="3" fill="hold">
-                      <p:stCondLst>
-                        <p:cond delay="indefinite"/>
-                      </p:stCondLst>
-                      <p:childTnLst>
-                        <p:par>
-                          <p:cTn id="4" fill="hold">
-                            <p:stCondLst>
-                              <p:cond delay="0"/>
-                            </p:stCondLst>
-                            <p:childTnLst>
-                              <p:par>
-                                <p:cTn id="5" presetID="1" presetClass="entr" presetSubtype="0" fill="hold" nodeType="clickEffect">
-                                  <p:stCondLst>
-                                    <p:cond delay="0"/>
-                                  </p:stCondLst>
-                                  <p:childTnLst>
-                                    <p:set>
-                                      <p:cBhvr>
-                                        <p:cTn id="6" dur="1" fill="hold">
-                                          <p:stCondLst>
-                                            <p:cond delay="0"/>
-                                          </p:stCondLst>
-                                        </p:cTn>
-                                        <p:tgtEl>
-                                          <p:spTgt spid="8">
-                                            <p:txEl>
-                                              <p:pRg st="0" end="0"/>
-                                            </p:txEl>
-                                          </p:spTgt>
-                                        </p:tgtEl>
-                                        <p:attrNameLst>
-                                          <p:attrName>style.visibility</p:attrName>
-                                        </p:attrNameLst>
-                                      </p:cBhvr>
-                                      <p:to>
-                                        <p:strVal val="visible"/>
-                                      </p:to>
-                                    </p:set>
-                                  </p:childTnLst>
-                                </p:cTn>
-                              </p:par>
-                              <p:par>
-                                <p:cTn id="7" presetID="1" presetClass="entr" presetSubtype="0" fill="hold" nodeType="withEffect">
-                                  <p:stCondLst>
-                                    <p:cond delay="0"/>
-                                  </p:stCondLst>
-                                  <p:childTnLst>
-                                    <p:set>
-                                      <p:cBhvr>
-                                        <p:cTn id="8" dur="1" fill="hold">
-                                          <p:stCondLst>
-                                            <p:cond delay="0"/>
-                                          </p:stCondLst>
-                                        </p:cTn>
-                                        <p:tgtEl>
-                                          <p:spTgt spid="8">
-                                            <p:txEl>
-                                              <p:pRg st="1" end="1"/>
-                                            </p:txEl>
-                                          </p:spTgt>
-                                        </p:tgtEl>
-                                        <p:attrNameLst>
-                                          <p:attrName>style.visibility</p:attrName>
-                                        </p:attrNameLst>
-                                      </p:cBhvr>
-                                      <p:to>
-                                        <p:strVal val="visible"/>
-                                      </p:to>
-                                    </p:set>
-                                  </p:childTnLst>
-                                </p:cTn>
-                              </p:par>
-                            </p:childTnLst>
-                          </p:cTn>
-                        </p:par>
-                      </p:childTnLst>
-                    </p:cTn>
-                  </p:par>
-                  <p:par>
-                    <p:cTn id="9" fill="hold">
-                      <p:stCondLst>
-                        <p:cond delay="indefinite"/>
-                      </p:stCondLst>
-                      <p:childTnLst>
-                        <p:par>
-                          <p:cTn id="10" fill="hold">
-                            <p:stCondLst>
-                              <p:cond delay="0"/>
-                            </p:stCondLst>
-                            <p:childTnLst>
-                              <p:par>
-                                <p:cTn id="11" presetID="1" presetClass="entr" presetSubtype="0" fill="hold" nodeType="clickEffect">
-                                  <p:stCondLst>
-                                    <p:cond delay="0"/>
-                                  </p:stCondLst>
-                                  <p:childTnLst>
-                                    <p:set>
-                                      <p:cBhvr>
-                                        <p:cTn id="12" dur="1" fill="hold">
-                                          <p:stCondLst>
-                                            <p:cond delay="0"/>
-                                          </p:stCondLst>
-                                        </p:cTn>
-                                        <p:tgtEl>
-                                          <p:spTgt spid="8">
-                                            <p:txEl>
-                                              <p:pRg st="2" end="2"/>
-                                            </p:txEl>
-                                          </p:spTgt>
-                                        </p:tgtEl>
-                                        <p:attrNameLst>
-                                          <p:attrName>style.visibility</p:attrName>
-                                        </p:attrNameLst>
-                                      </p:cBhvr>
-                                      <p:to>
-                                        <p:strVal val="visible"/>
-                                      </p:to>
-                                    </p:set>
-                                  </p:childTnLst>
-                                </p:cTn>
-                              </p:par>
-                              <p:par>
-                                <p:cTn id="13" presetID="1" presetClass="entr" presetSubtype="0" fill="hold" nodeType="withEffect">
-                                  <p:stCondLst>
-                                    <p:cond delay="0"/>
-                                  </p:stCondLst>
-                                  <p:childTnLst>
-                                    <p:set>
-                                      <p:cBhvr>
-                                        <p:cTn id="14" dur="1" fill="hold">
-                                          <p:stCondLst>
-                                            <p:cond delay="0"/>
-                                          </p:stCondLst>
-                                        </p:cTn>
-                                        <p:tgtEl>
-                                          <p:spTgt spid="8">
-                                            <p:txEl>
-                                              <p:pRg st="3" end="3"/>
-                                            </p:txEl>
-                                          </p:spTgt>
-                                        </p:tgtEl>
-                                        <p:attrNameLst>
-                                          <p:attrName>style.visibility</p:attrName>
-                                        </p:attrNameLst>
-                                      </p:cBhvr>
-                                      <p:to>
-                                        <p:strVal val="visible"/>
-                                      </p:to>
-                                    </p:set>
-                                  </p:childTnLst>
-                                </p:cTn>
-                              </p:par>
-                            </p:childTnLst>
-                          </p:cTn>
-                        </p:par>
-                      </p:childTnLst>
-                    </p:cTn>
-                  </p:par>
-                  <p:par>
-                    <p:cTn id="15" fill="hold">
-                      <p:stCondLst>
-                        <p:cond delay="indefinite"/>
-                      </p:stCondLst>
-                      <p:childTnLst>
-                        <p:par>
-                          <p:cTn id="16" fill="hold">
-                            <p:stCondLst>
-                              <p:cond delay="0"/>
-                            </p:stCondLst>
-                            <p:childTnLst>
-                              <p:par>
-                                <p:cTn id="17" presetID="1" presetClass="entr" presetSubtype="0" fill="hold" nodeType="clickEffect">
-                                  <p:stCondLst>
-                                    <p:cond delay="0"/>
-                                  </p:stCondLst>
-                                  <p:childTnLst>
-                                    <p:set>
-                                      <p:cBhvr>
-                                        <p:cTn id="18" dur="1" fill="hold">
-                                          <p:stCondLst>
-                                            <p:cond delay="0"/>
-                                          </p:stCondLst>
-                                        </p:cTn>
-                                        <p:tgtEl>
-                                          <p:spTgt spid="8">
-                                            <p:txEl>
-                                              <p:pRg st="4" end="4"/>
-                                            </p:txEl>
-                                          </p:spTgt>
-                                        </p:tgtEl>
-                                        <p:attrNameLst>
-                                          <p:attrName>style.visibility</p:attrName>
-                                        </p:attrNameLst>
-                                      </p:cBhvr>
-                                      <p:to>
-                                        <p:strVal val="visible"/>
-                                      </p:to>
-                                    </p:set>
-                                  </p:childTnLst>
-                                </p:cTn>
-                              </p:par>
-                              <p:par>
-                                <p:cTn id="19" presetID="1" presetClass="entr" presetSubtype="0" fill="hold" nodeType="withEffect">
-                                  <p:stCondLst>
-                                    <p:cond delay="0"/>
-                                  </p:stCondLst>
-                                  <p:childTnLst>
-                                    <p:set>
-                                      <p:cBhvr>
-                                        <p:cTn id="20" dur="1" fill="hold">
-                                          <p:stCondLst>
-                                            <p:cond delay="0"/>
-                                          </p:stCondLst>
-                                        </p:cTn>
-                                        <p:tgtEl>
-                                          <p:spTgt spid="8">
-                                            <p:txEl>
-                                              <p:pRg st="5" end="5"/>
-                                            </p:txEl>
-                                          </p:spTgt>
-                                        </p:tgtEl>
-                                        <p:attrNameLst>
-                                          <p:attrName>style.visibility</p:attrName>
-                                        </p:attrNameLst>
-                                      </p:cBhvr>
-                                      <p:to>
-                                        <p:strVal val="visible"/>
-                                      </p:to>
-                                    </p:set>
-                                  </p:childTnLst>
-                                </p:cTn>
-                              </p:par>
-                            </p:childTnLst>
-                          </p:cTn>
-                        </p:par>
-                      </p:childTnLst>
-                    </p:cTn>
-                  </p:par>
-                  <p:par>
-                    <p:cTn id="21" fill="hold">
-                      <p:stCondLst>
-                        <p:cond delay="indefinite"/>
-                      </p:stCondLst>
-                      <p:childTnLst>
-                        <p:par>
-                          <p:cTn id="22" fill="hold">
-                            <p:stCondLst>
-                              <p:cond delay="0"/>
-                            </p:stCondLst>
-                            <p:childTnLst>
-                              <p:par>
-                                <p:cTn id="23" presetID="1" presetClass="entr" presetSubtype="0" fill="hold" nodeType="clickEffect">
-                                  <p:stCondLst>
-                                    <p:cond delay="0"/>
-                                  </p:stCondLst>
-                                  <p:childTnLst>
-                                    <p:set>
-                                      <p:cBhvr>
-                                        <p:cTn id="24" dur="1" fill="hold">
-                                          <p:stCondLst>
-                                            <p:cond delay="0"/>
-                                          </p:stCondLst>
-                                        </p:cTn>
-                                        <p:tgtEl>
-                                          <p:spTgt spid="8">
-                                            <p:txEl>
-                                              <p:pRg st="6" end="6"/>
-                                            </p:txEl>
-                                          </p:spTgt>
-                                        </p:tgtEl>
-                                        <p:attrNameLst>
-                                          <p:attrName>style.visibility</p:attrName>
-                                        </p:attrNameLst>
-                                      </p:cBhvr>
-                                      <p:to>
-                                        <p:strVal val="visible"/>
-                                      </p:to>
-                                    </p:set>
-                                  </p:childTnLst>
-                                </p:cTn>
-                              </p:par>
-                            </p:childTnLst>
-                          </p:cTn>
-                        </p:par>
-                      </p:childTnLst>
-                    </p:cTn>
-                  </p:par>
-                </p:childTnLst>
-              </p:cTn>
-              <p:prevCondLst>
-                <p:cond evt="onPrev" delay="0">
-                  <p:tgtEl>
-                    <p:sldTgt/>
-                  </p:tgtEl>
-                </p:cond>
-              </p:prevCondLst>
-              <p:nextCondLst>
-                <p:cond evt="onNext" delay="0">
-                  <p:tgtEl>
-                    <p:sldTgt/>
-                  </p:tgtEl>
-                </p:cond>
-              </p:nextCondLst>
-            </p:seq>
-          </p:childTnLst>
-        </p:cTn>
-      </p:par>
-    </p:tnLst>
-  </p:timing>
-</p:sld>
-</file>
-
-<file path=ppt/slides/slide13.xml><?xml version="1.0" encoding="utf-8"?>
-<p:sld xmlns:a="http://schemas.openxmlformats.org/drawingml/2006/main" xmlns:r="http://schemas.openxmlformats.org/officeDocument/2006/relationships" xmlns:p="http://schemas.openxmlformats.org/presentationml/2006/main" show="0">
-  <p:cSld>
-    <p:spTree>
-      <p:nvGrpSpPr>
-        <p:cNvPr id="1" name="">
-          <a:extLst>
-            <a:ext uri="{FF2B5EF4-FFF2-40B4-BE49-F238E27FC236}">
-              <a16:creationId xmlns:a16="http://schemas.microsoft.com/office/drawing/2014/main" id="{04443551-4091-4EC2-CA96-A62B18E48039}"/>
-            </a:ext>
-          </a:extLst>
-        </p:cNvPr>
-        <p:cNvGrpSpPr/>
-        <p:nvPr/>
-      </p:nvGrpSpPr>
-      <p:grpSpPr>
-        <a:xfrm>
-          <a:off x="0" y="0"/>
-          <a:ext cx="0" cy="0"/>
-          <a:chOff x="0" y="0"/>
-          <a:chExt cx="0" cy="0"/>
-        </a:xfrm>
-      </p:grpSpPr>
-      <p:sp>
-        <p:nvSpPr>
-          <p:cNvPr id="2" name="Rounded Rectangle 1">
-            <a:extLst>
-              <a:ext uri="{FF2B5EF4-FFF2-40B4-BE49-F238E27FC236}">
-                <a16:creationId xmlns:a16="http://schemas.microsoft.com/office/drawing/2014/main" id="{D97F8FC2-12BB-1254-9723-E2D6B54E5D71}"/>
-              </a:ext>
-            </a:extLst>
-          </p:cNvPr>
-          <p:cNvSpPr/>
-          <p:nvPr/>
-        </p:nvSpPr>
-        <p:spPr>
-          <a:xfrm>
-            <a:off x="594360" y="475488"/>
-            <a:ext cx="969264" cy="292608"/>
-          </a:xfrm>
-          <a:prstGeom prst="roundRect">
-            <a:avLst/>
-          </a:prstGeom>
-          <a:solidFill>
-            <a:srgbClr val="EEEEEA"/>
-          </a:solidFill>
-          <a:ln w="10160">
-            <a:solidFill>
-              <a:srgbClr val="EEEEEA"/>
-            </a:solidFill>
-          </a:ln>
-        </p:spPr>
-        <p:style>
-          <a:lnRef idx="1">
-            <a:schemeClr val="accent1"/>
-          </a:lnRef>
-          <a:fillRef idx="3">
-            <a:schemeClr val="accent1"/>
-          </a:fillRef>
-          <a:effectRef idx="2">
-            <a:schemeClr val="accent1"/>
-          </a:effectRef>
-          <a:fontRef idx="minor">
-            <a:schemeClr val="lt1"/>
-          </a:fontRef>
-        </p:style>
-        <p:txBody>
-          <a:bodyPr rtlCol="0" anchor="ctr"/>
-          <a:lstStyle/>
-          <a:p>
-            <a:pPr algn="ctr"/>
-            <a:endParaRPr/>
-          </a:p>
-        </p:txBody>
-      </p:sp>
-      <p:sp>
-        <p:nvSpPr>
-          <p:cNvPr id="3" name="TextBox 2">
-            <a:extLst>
-              <a:ext uri="{FF2B5EF4-FFF2-40B4-BE49-F238E27FC236}">
-                <a16:creationId xmlns:a16="http://schemas.microsoft.com/office/drawing/2014/main" id="{C556AAEE-F262-1202-DDCB-CE005EA9FE7D}"/>
-              </a:ext>
-            </a:extLst>
-          </p:cNvPr>
-          <p:cNvSpPr txBox="1"/>
-          <p:nvPr/>
-        </p:nvSpPr>
-        <p:spPr>
-          <a:xfrm>
-            <a:off x="873811" y="542673"/>
-            <a:ext cx="410369" cy="130805"/>
-          </a:xfrm>
-          <a:prstGeom prst="rect">
-            <a:avLst/>
-          </a:prstGeom>
-          <a:noFill/>
-        </p:spPr>
-        <p:txBody>
-          <a:bodyPr wrap="none" lIns="0" tIns="0" rIns="0" bIns="0" anchor="ctr">
-            <a:spAutoFit/>
-          </a:bodyPr>
-          <a:lstStyle/>
-          <a:p>
-            <a:pPr algn="ctr"/>
-            <a:r>
-              <a:rPr lang="de-CH" sz="850" b="1" dirty="0">
-                <a:solidFill>
-                  <a:srgbClr val="737373"/>
-                </a:solidFill>
-                <a:latin typeface="Aptos"/>
-              </a:rPr>
-              <a:t>Aufgabe</a:t>
-            </a:r>
-            <a:endParaRPr sz="850" b="1" dirty="0">
-              <a:solidFill>
-                <a:srgbClr val="737373"/>
-              </a:solidFill>
-              <a:latin typeface="Aptos"/>
-            </a:endParaRPr>
-          </a:p>
-        </p:txBody>
-      </p:sp>
-      <p:sp>
-        <p:nvSpPr>
-          <p:cNvPr id="4" name="TextBox 3">
-            <a:extLst>
-              <a:ext uri="{FF2B5EF4-FFF2-40B4-BE49-F238E27FC236}">
-                <a16:creationId xmlns:a16="http://schemas.microsoft.com/office/drawing/2014/main" id="{1D1538DD-6358-9401-7B2F-DC03C1E6F8B8}"/>
-              </a:ext>
-            </a:extLst>
-          </p:cNvPr>
-          <p:cNvSpPr txBox="1"/>
-          <p:nvPr/>
-        </p:nvSpPr>
-        <p:spPr>
-          <a:xfrm>
-            <a:off x="594360" y="932688"/>
-            <a:ext cx="3724802" cy="477054"/>
-          </a:xfrm>
-          <a:prstGeom prst="rect">
-            <a:avLst/>
-          </a:prstGeom>
-          <a:noFill/>
-        </p:spPr>
-        <p:txBody>
-          <a:bodyPr wrap="none" lIns="0" tIns="0" rIns="0" bIns="0" anchor="t">
-            <a:spAutoFit/>
-          </a:bodyPr>
-          <a:lstStyle/>
-          <a:p>
-            <a:r>
-              <a:rPr lang="de-CH" sz="3100" b="1" dirty="0">
-                <a:solidFill>
-                  <a:srgbClr val="171717"/>
-                </a:solidFill>
-                <a:latin typeface="Aptos"/>
-              </a:rPr>
-              <a:t>Leistungsanpassung</a:t>
-            </a:r>
-            <a:endParaRPr sz="3100" b="1" dirty="0">
-              <a:solidFill>
-                <a:srgbClr val="171717"/>
-              </a:solidFill>
-              <a:latin typeface="Aptos"/>
-            </a:endParaRPr>
-          </a:p>
-        </p:txBody>
-      </p:sp>
-      <p:sp>
-        <p:nvSpPr>
-          <p:cNvPr id="15" name="Datumsplatzhalter 14">
-            <a:extLst>
-              <a:ext uri="{FF2B5EF4-FFF2-40B4-BE49-F238E27FC236}">
-                <a16:creationId xmlns:a16="http://schemas.microsoft.com/office/drawing/2014/main" id="{5D49CB33-824B-EC93-8E74-0DAE31C482B1}"/>
-              </a:ext>
-            </a:extLst>
-          </p:cNvPr>
-          <p:cNvSpPr>
-            <a:spLocks noGrp="1"/>
-          </p:cNvSpPr>
-          <p:nvPr>
-            <p:ph type="dt" sz="half" idx="10"/>
-          </p:nvPr>
-        </p:nvSpPr>
-        <p:spPr/>
-        <p:txBody>
-          <a:bodyPr/>
-          <a:lstStyle/>
-          <a:p>
-            <a:fld id="{5BEE0FE1-AF03-4944-8B59-6F3340FFC6D2}" type="datetime1">
-              <a:rPr lang="de-CH" smtClean="0"/>
-              <a:t>21.10.2026</a:t>
-            </a:fld>
-            <a:endParaRPr lang="en-US"/>
-          </a:p>
-        </p:txBody>
-      </p:sp>
-      <p:sp>
-        <p:nvSpPr>
-          <p:cNvPr id="16" name="Fußzeilenplatzhalter 15">
-            <a:extLst>
-              <a:ext uri="{FF2B5EF4-FFF2-40B4-BE49-F238E27FC236}">
-                <a16:creationId xmlns:a16="http://schemas.microsoft.com/office/drawing/2014/main" id="{66FA353B-877E-EF31-D15C-B014B994568A}"/>
-              </a:ext>
-            </a:extLst>
-          </p:cNvPr>
-          <p:cNvSpPr>
-            <a:spLocks noGrp="1"/>
-          </p:cNvSpPr>
-          <p:nvPr>
-            <p:ph type="ftr" sz="quarter" idx="11"/>
-          </p:nvPr>
-        </p:nvSpPr>
-        <p:spPr/>
-        <p:txBody>
-          <a:bodyPr/>
-          <a:lstStyle/>
-          <a:p>
-            <a:r>
-              <a:rPr lang="en-US" dirty="0"/>
-              <a:t>Enrico Putzi W06</a:t>
-            </a:r>
-          </a:p>
-        </p:txBody>
-      </p:sp>
-      <p:sp>
-        <p:nvSpPr>
-          <p:cNvPr id="17" name="Foliennummernplatzhalter 16">
-            <a:extLst>
-              <a:ext uri="{FF2B5EF4-FFF2-40B4-BE49-F238E27FC236}">
-                <a16:creationId xmlns:a16="http://schemas.microsoft.com/office/drawing/2014/main" id="{50C92417-1043-5A1B-792C-0DED5EDBAAC6}"/>
-              </a:ext>
-            </a:extLst>
-          </p:cNvPr>
-          <p:cNvSpPr>
-            <a:spLocks noGrp="1"/>
-          </p:cNvSpPr>
-          <p:nvPr>
-            <p:ph type="sldNum" sz="quarter" idx="12"/>
-          </p:nvPr>
-        </p:nvSpPr>
-        <p:spPr/>
-        <p:txBody>
-          <a:bodyPr/>
-          <a:lstStyle/>
-          <a:p>
-            <a:fld id="{C1FF6DA9-008F-8B48-92A6-B652298478BF}" type="slidenum">
-              <a:rPr lang="en-US" smtClean="0"/>
-              <a:t>13</a:t>
-            </a:fld>
-            <a:endParaRPr lang="en-US"/>
-          </a:p>
-        </p:txBody>
-      </p:sp>
-      <mc:AlternateContent xmlns:mc="http://schemas.openxmlformats.org/markup-compatibility/2006">
-        <mc:Choice xmlns:a14="http://schemas.microsoft.com/office/drawing/2010/main" Requires="a14">
-          <p:sp>
-            <p:nvSpPr>
-              <p:cNvPr id="5" name="Content Placeholder 2">
-                <a:extLst>
-                  <a:ext uri="{FF2B5EF4-FFF2-40B4-BE49-F238E27FC236}">
-                    <a16:creationId xmlns:a16="http://schemas.microsoft.com/office/drawing/2014/main" id="{E20179F8-B0EE-BC7F-572D-FE44F23C7A0A}"/>
-                  </a:ext>
-                </a:extLst>
-              </p:cNvPr>
-              <p:cNvSpPr txBox="1">
-                <a:spLocks/>
-              </p:cNvSpPr>
-              <p:nvPr/>
-            </p:nvSpPr>
-            <p:spPr>
-              <a:xfrm>
-                <a:off x="6204163" y="1412875"/>
-                <a:ext cx="5256000" cy="4860000"/>
-              </a:xfrm>
-              <a:prstGeom prst="rect">
-                <a:avLst/>
-              </a:prstGeom>
-            </p:spPr>
-            <p:txBody>
-              <a:bodyPr>
-                <a:normAutofit/>
-              </a:bodyPr>
-              <a:lstStyle>
-                <a:lvl1pPr marL="342900" indent="-342900" algn="l" defTabSz="457200" rtl="0" eaLnBrk="1" latinLnBrk="0" hangingPunct="1">
-                  <a:spcBef>
-                    <a:spcPct val="20000"/>
-                  </a:spcBef>
-                  <a:buFont typeface="Arial"/>
-                  <a:buChar char="•"/>
-                  <a:defRPr sz="3200" kern="1200">
-                    <a:solidFill>
-                      <a:schemeClr val="tx1"/>
-                    </a:solidFill>
-                    <a:latin typeface="+mn-lt"/>
-                    <a:ea typeface="+mn-ea"/>
-                    <a:cs typeface="+mn-cs"/>
-                  </a:defRPr>
-                </a:lvl1pPr>
-                <a:lvl2pPr marL="742950" indent="-285750" algn="l" defTabSz="457200" rtl="0" eaLnBrk="1" latinLnBrk="0" hangingPunct="1">
-                  <a:spcBef>
-                    <a:spcPct val="20000"/>
-                  </a:spcBef>
-                  <a:buFont typeface="Arial"/>
-                  <a:buChar char="–"/>
-                  <a:defRPr sz="2800" kern="1200">
-                    <a:solidFill>
-                      <a:schemeClr val="tx1"/>
-                    </a:solidFill>
-                    <a:latin typeface="+mn-lt"/>
-                    <a:ea typeface="+mn-ea"/>
-                    <a:cs typeface="+mn-cs"/>
-                  </a:defRPr>
-                </a:lvl2pPr>
-                <a:lvl3pPr marL="1143000" indent="-228600" algn="l" defTabSz="457200" rtl="0" eaLnBrk="1" latinLnBrk="0" hangingPunct="1">
-                  <a:spcBef>
-                    <a:spcPct val="20000"/>
-                  </a:spcBef>
-                  <a:buFont typeface="Arial"/>
-                  <a:buChar char="•"/>
-                  <a:defRPr sz="2400" kern="1200">
-                    <a:solidFill>
-                      <a:schemeClr val="tx1"/>
-                    </a:solidFill>
-                    <a:latin typeface="+mn-lt"/>
-                    <a:ea typeface="+mn-ea"/>
-                    <a:cs typeface="+mn-cs"/>
-                  </a:defRPr>
-                </a:lvl3pPr>
-                <a:lvl4pPr marL="1600200" indent="-228600" algn="l" defTabSz="457200" rtl="0" eaLnBrk="1" latinLnBrk="0" hangingPunct="1">
-                  <a:spcBef>
-                    <a:spcPct val="20000"/>
-                  </a:spcBef>
-                  <a:buFont typeface="Arial"/>
-                  <a:buChar char="–"/>
-                  <a:defRPr sz="2000" kern="1200">
-                    <a:solidFill>
-                      <a:schemeClr val="tx1"/>
-                    </a:solidFill>
-                    <a:latin typeface="+mn-lt"/>
-                    <a:ea typeface="+mn-ea"/>
-                    <a:cs typeface="+mn-cs"/>
-                  </a:defRPr>
-                </a:lvl4pPr>
-                <a:lvl5pPr marL="2057400" indent="-228600" algn="l" defTabSz="457200" rtl="0" eaLnBrk="1" latinLnBrk="0" hangingPunct="1">
-                  <a:spcBef>
-                    <a:spcPct val="20000"/>
-                  </a:spcBef>
-                  <a:buFont typeface="Arial"/>
-                  <a:buChar char="»"/>
-                  <a:defRPr sz="2000" kern="1200">
-                    <a:solidFill>
-                      <a:schemeClr val="tx1"/>
-                    </a:solidFill>
-                    <a:latin typeface="+mn-lt"/>
-                    <a:ea typeface="+mn-ea"/>
-                    <a:cs typeface="+mn-cs"/>
-                  </a:defRPr>
-                </a:lvl5pPr>
-                <a:lvl6pPr marL="2514600" indent="-228600" algn="l" defTabSz="457200" rtl="0" eaLnBrk="1" latinLnBrk="0" hangingPunct="1">
-                  <a:spcBef>
-                    <a:spcPct val="20000"/>
-                  </a:spcBef>
-                  <a:buFont typeface="Arial"/>
-                  <a:buChar char="•"/>
-                  <a:defRPr sz="2000" kern="1200">
-                    <a:solidFill>
-                      <a:schemeClr val="tx1"/>
-                    </a:solidFill>
-                    <a:latin typeface="+mn-lt"/>
-                    <a:ea typeface="+mn-ea"/>
-                    <a:cs typeface="+mn-cs"/>
-                  </a:defRPr>
-                </a:lvl6pPr>
-                <a:lvl7pPr marL="2971800" indent="-228600" algn="l" defTabSz="457200" rtl="0" eaLnBrk="1" latinLnBrk="0" hangingPunct="1">
-                  <a:spcBef>
-                    <a:spcPct val="20000"/>
-                  </a:spcBef>
-                  <a:buFont typeface="Arial"/>
-                  <a:buChar char="•"/>
-                  <a:defRPr sz="2000" kern="1200">
-                    <a:solidFill>
-                      <a:schemeClr val="tx1"/>
-                    </a:solidFill>
-                    <a:latin typeface="+mn-lt"/>
-                    <a:ea typeface="+mn-ea"/>
-                    <a:cs typeface="+mn-cs"/>
-                  </a:defRPr>
-                </a:lvl7pPr>
-                <a:lvl8pPr marL="3429000" indent="-228600" algn="l" defTabSz="457200" rtl="0" eaLnBrk="1" latinLnBrk="0" hangingPunct="1">
-                  <a:spcBef>
-                    <a:spcPct val="20000"/>
-                  </a:spcBef>
-                  <a:buFont typeface="Arial"/>
-                  <a:buChar char="•"/>
-                  <a:defRPr sz="2000" kern="1200">
-                    <a:solidFill>
-                      <a:schemeClr val="tx1"/>
-                    </a:solidFill>
-                    <a:latin typeface="+mn-lt"/>
-                    <a:ea typeface="+mn-ea"/>
-                    <a:cs typeface="+mn-cs"/>
-                  </a:defRPr>
-                </a:lvl8pPr>
-                <a:lvl9pPr marL="3886200" indent="-228600" algn="l" defTabSz="457200" rtl="0" eaLnBrk="1" latinLnBrk="0" hangingPunct="1">
-                  <a:spcBef>
-                    <a:spcPct val="20000"/>
-                  </a:spcBef>
-                  <a:buFont typeface="Arial"/>
-                  <a:buChar char="•"/>
-                  <a:defRPr sz="2000" kern="1200">
-                    <a:solidFill>
-                      <a:schemeClr val="tx1"/>
-                    </a:solidFill>
-                    <a:latin typeface="+mn-lt"/>
-                    <a:ea typeface="+mn-ea"/>
-                    <a:cs typeface="+mn-cs"/>
-                  </a:defRPr>
-                </a:lvl9pPr>
-              </a:lstStyle>
-              <a:p>
-                <a:r>
-                  <a:rPr lang="de-CH" sz="1600" dirty="0"/>
-                  <a:t>Am </a:t>
-                </a:r>
-                <a:r>
-                  <a:rPr lang="de-CH" sz="1600" b="1" dirty="0"/>
-                  <a:t>Originalnetzwerk</a:t>
-                </a:r>
-                <a:r>
-                  <a:rPr lang="de-CH" sz="1600" dirty="0"/>
-                  <a:t> liefert die Quelle </a:t>
-                </a:r>
-                <a14:m>
-                  <m:oMath xmlns:m="http://schemas.openxmlformats.org/officeDocument/2006/math">
-                    <m:r>
-                      <m:rPr>
-                        <m:sty m:val="p"/>
-                      </m:rPr>
-                      <a:rPr lang="de-CH" sz="1600" i="1" smtClean="0">
-                        <a:latin typeface="Cambria Math" panose="02040503050406030204" pitchFamily="18" charset="0"/>
-                      </a:rPr>
-                      <m:t>U</m:t>
-                    </m:r>
-                  </m:oMath>
-                </a14:m>
-                <a:r>
-                  <a:rPr lang="de-CH" sz="1600" dirty="0"/>
-                  <a:t> die Leistung für </a:t>
-                </a:r>
-                <a14:m>
-                  <m:oMath xmlns:m="http://schemas.openxmlformats.org/officeDocument/2006/math">
-                    <m:sSub>
-                      <m:sSubPr>
-                        <m:ctrlPr>
-                          <a:rPr lang="de-CH" sz="1600" i="1" smtClean="0">
-                            <a:latin typeface="Cambria Math" panose="02040503050406030204" pitchFamily="18" charset="0"/>
-                          </a:rPr>
-                        </m:ctrlPr>
-                      </m:sSubPr>
-                      <m:e>
-                        <m:r>
-                          <m:rPr>
-                            <m:sty m:val="p"/>
-                          </m:rPr>
-                          <a:rPr lang="de-CH" sz="1600" i="1" smtClean="0">
-                            <a:latin typeface="Cambria Math" panose="02040503050406030204" pitchFamily="18" charset="0"/>
-                          </a:rPr>
-                          <m:t>R</m:t>
-                        </m:r>
-                      </m:e>
-                      <m:sub>
-                        <m:r>
-                          <a:rPr lang="de-CH" sz="1600" i="1" smtClean="0">
-                            <a:latin typeface="Cambria Math" panose="02040503050406030204" pitchFamily="18" charset="0"/>
-                          </a:rPr>
-                          <m:t>1</m:t>
-                        </m:r>
-                      </m:sub>
-                    </m:sSub>
-                  </m:oMath>
-                </a14:m>
-                <a:r>
-                  <a:rPr lang="de-CH" sz="1600" dirty="0"/>
-                  <a:t>, </a:t>
-                </a:r>
-                <a14:m>
-                  <m:oMath xmlns:m="http://schemas.openxmlformats.org/officeDocument/2006/math">
-                    <m:sSub>
-                      <m:sSubPr>
-                        <m:ctrlPr>
-                          <a:rPr lang="de-CH" sz="1600" i="1" smtClean="0">
-                            <a:latin typeface="Cambria Math" panose="02040503050406030204" pitchFamily="18" charset="0"/>
-                          </a:rPr>
-                        </m:ctrlPr>
-                      </m:sSubPr>
-                      <m:e>
-                        <m:r>
-                          <m:rPr>
-                            <m:sty m:val="p"/>
-                          </m:rPr>
-                          <a:rPr lang="de-CH" sz="1600" i="1" smtClean="0">
-                            <a:latin typeface="Cambria Math" panose="02040503050406030204" pitchFamily="18" charset="0"/>
-                          </a:rPr>
-                          <m:t>R</m:t>
-                        </m:r>
-                      </m:e>
-                      <m:sub>
-                        <m:r>
-                          <a:rPr lang="de-CH" sz="1600" i="1" smtClean="0">
-                            <a:latin typeface="Cambria Math" panose="02040503050406030204" pitchFamily="18" charset="0"/>
-                          </a:rPr>
-                          <m:t>2</m:t>
-                        </m:r>
-                      </m:sub>
-                    </m:sSub>
-                  </m:oMath>
-                </a14:m>
-                <a:r>
-                  <a:rPr lang="de-CH" sz="1600" dirty="0"/>
-                  <a:t> und </a:t>
-                </a:r>
-                <a14:m>
-                  <m:oMath xmlns:m="http://schemas.openxmlformats.org/officeDocument/2006/math">
-                    <m:sSub>
-                      <m:sSubPr>
-                        <m:ctrlPr>
-                          <a:rPr lang="de-CH" sz="1600" i="1" smtClean="0">
-                            <a:latin typeface="Cambria Math" panose="02040503050406030204" pitchFamily="18" charset="0"/>
-                          </a:rPr>
-                        </m:ctrlPr>
-                      </m:sSubPr>
-                      <m:e>
-                        <m:r>
-                          <m:rPr>
-                            <m:sty m:val="p"/>
-                          </m:rPr>
-                          <a:rPr lang="de-CH" sz="1600" i="1" smtClean="0">
-                            <a:latin typeface="Cambria Math" panose="02040503050406030204" pitchFamily="18" charset="0"/>
-                          </a:rPr>
-                          <m:t>R</m:t>
-                        </m:r>
-                      </m:e>
-                      <m:sub>
-                        <m:r>
-                          <m:rPr>
-                            <m:sty m:val="p"/>
-                          </m:rPr>
-                          <a:rPr lang="de-CH" sz="1600" i="1" smtClean="0">
-                            <a:latin typeface="Cambria Math" panose="02040503050406030204" pitchFamily="18" charset="0"/>
-                          </a:rPr>
-                          <m:t>Last</m:t>
-                        </m:r>
-                      </m:sub>
-                    </m:sSub>
-                  </m:oMath>
-                </a14:m>
-                <a:r>
-                  <a:rPr lang="de-CH" sz="1600" dirty="0"/>
-                  <a:t>:</a:t>
-                </a:r>
-              </a:p>
-              <a:p>
-                <a:pPr marL="0" indent="0" algn="ctr">
-                  <a:buFont typeface="Arial"/>
-                  <a:buNone/>
-                </a:pPr>
-                <a14:m>
-                  <m:oMathPara xmlns:m="http://schemas.openxmlformats.org/officeDocument/2006/math">
-                    <m:oMath>
-                      <m:r>
-                        <m:rPr>
-                          <m:sty m:val="p"/>
-                        </m:rPr>
-                        <a:rPr lang="de-CH" sz="1600" i="1" smtClean="0">
-                          <a:latin typeface="Cambria Math" panose="02040503050406030204" pitchFamily="18" charset="0"/>
-                        </a:rPr>
-                        <m:t>η</m:t>
-                      </m:r>
-                      <m:r>
-                        <a:rPr lang="de-CH" sz="1600" i="1" smtClean="0">
-                          <a:latin typeface="Cambria Math" panose="02040503050406030204" pitchFamily="18" charset="0"/>
-                        </a:rPr>
-                        <m:t>=</m:t>
-                      </m:r>
-                      <m:f>
-                        <m:fPr>
-                          <m:ctrlPr>
-                            <a:rPr lang="de-CH" sz="1600" i="1" smtClean="0">
-                              <a:latin typeface="Cambria Math" panose="02040503050406030204" pitchFamily="18" charset="0"/>
-                            </a:rPr>
-                          </m:ctrlPr>
-                        </m:fPr>
-                        <m:num>
-                          <m:sSub>
-                            <m:sSubPr>
-                              <m:ctrlPr>
-                                <a:rPr lang="de-CH" sz="1600" i="1" smtClean="0">
-                                  <a:latin typeface="Cambria Math" panose="02040503050406030204" pitchFamily="18" charset="0"/>
-                                </a:rPr>
-                              </m:ctrlPr>
-                            </m:sSubPr>
-                            <m:e>
-                              <m:r>
-                                <m:rPr>
-                                  <m:sty m:val="p"/>
-                                </m:rPr>
-                                <a:rPr lang="de-CH" sz="1600" i="1" smtClean="0">
-                                  <a:latin typeface="Cambria Math" panose="02040503050406030204" pitchFamily="18" charset="0"/>
-                                </a:rPr>
-                                <m:t>P</m:t>
-                              </m:r>
-                            </m:e>
-                            <m:sub>
-                              <m:r>
-                                <m:rPr>
-                                  <m:sty m:val="p"/>
-                                </m:rPr>
-                                <a:rPr lang="de-CH" sz="1600" i="1" smtClean="0">
-                                  <a:latin typeface="Cambria Math" panose="02040503050406030204" pitchFamily="18" charset="0"/>
-                                </a:rPr>
-                                <m:t>Last</m:t>
-                              </m:r>
-                            </m:sub>
-                          </m:sSub>
-                        </m:num>
-                        <m:den>
-                          <m:sSub>
-                            <m:sSubPr>
-                              <m:ctrlPr>
-                                <a:rPr lang="de-CH" sz="1600" i="1" smtClean="0">
-                                  <a:latin typeface="Cambria Math" panose="02040503050406030204" pitchFamily="18" charset="0"/>
-                                </a:rPr>
-                              </m:ctrlPr>
-                            </m:sSubPr>
-                            <m:e>
-                              <m:r>
-                                <m:rPr>
-                                  <m:sty m:val="p"/>
-                                </m:rPr>
-                                <a:rPr lang="de-CH" sz="1600" i="1" smtClean="0">
-                                  <a:latin typeface="Cambria Math" panose="02040503050406030204" pitchFamily="18" charset="0"/>
-                                </a:rPr>
-                                <m:t>P</m:t>
-                              </m:r>
-                            </m:e>
-                            <m:sub>
-                              <m:r>
-                                <m:rPr>
-                                  <m:sty m:val="p"/>
-                                </m:rPr>
-                                <a:rPr lang="de-CH" sz="1600" i="1" smtClean="0">
-                                  <a:latin typeface="Cambria Math" panose="02040503050406030204" pitchFamily="18" charset="0"/>
-                                </a:rPr>
-                                <m:t>R</m:t>
-                              </m:r>
-                              <m:r>
-                                <a:rPr lang="de-CH" sz="1600" i="1" smtClean="0">
-                                  <a:latin typeface="Cambria Math" panose="02040503050406030204" pitchFamily="18" charset="0"/>
-                                </a:rPr>
-                                <m:t>1</m:t>
-                              </m:r>
-                            </m:sub>
-                          </m:sSub>
-                          <m:r>
-                            <a:rPr lang="de-CH" sz="1600" i="1" smtClean="0">
-                              <a:latin typeface="Cambria Math" panose="02040503050406030204" pitchFamily="18" charset="0"/>
-                            </a:rPr>
-                            <m:t>+</m:t>
-                          </m:r>
-                          <m:sSub>
-                            <m:sSubPr>
-                              <m:ctrlPr>
-                                <a:rPr lang="de-CH" sz="1600" i="1" smtClean="0">
-                                  <a:latin typeface="Cambria Math" panose="02040503050406030204" pitchFamily="18" charset="0"/>
-                                </a:rPr>
-                              </m:ctrlPr>
-                            </m:sSubPr>
-                            <m:e>
-                              <m:r>
-                                <m:rPr>
-                                  <m:sty m:val="p"/>
-                                </m:rPr>
-                                <a:rPr lang="de-CH" sz="1600" i="1" smtClean="0">
-                                  <a:latin typeface="Cambria Math" panose="02040503050406030204" pitchFamily="18" charset="0"/>
-                                </a:rPr>
-                                <m:t>P</m:t>
-                              </m:r>
-                            </m:e>
-                            <m:sub>
-                              <m:r>
-                                <m:rPr>
-                                  <m:sty m:val="p"/>
-                                </m:rPr>
-                                <a:rPr lang="de-CH" sz="1600" i="1" smtClean="0">
-                                  <a:latin typeface="Cambria Math" panose="02040503050406030204" pitchFamily="18" charset="0"/>
-                                </a:rPr>
-                                <m:t>R</m:t>
-                              </m:r>
-                              <m:r>
-                                <a:rPr lang="de-CH" sz="1600" i="1" smtClean="0">
-                                  <a:latin typeface="Cambria Math" panose="02040503050406030204" pitchFamily="18" charset="0"/>
-                                </a:rPr>
-                                <m:t>2</m:t>
-                              </m:r>
-                            </m:sub>
-                          </m:sSub>
-                          <m:r>
-                            <a:rPr lang="de-CH" sz="1600" i="1" smtClean="0">
-                              <a:latin typeface="Cambria Math" panose="02040503050406030204" pitchFamily="18" charset="0"/>
-                            </a:rPr>
-                            <m:t>+</m:t>
-                          </m:r>
-                          <m:sSub>
-                            <m:sSubPr>
-                              <m:ctrlPr>
-                                <a:rPr lang="de-CH" sz="1600" i="1" smtClean="0">
-                                  <a:latin typeface="Cambria Math" panose="02040503050406030204" pitchFamily="18" charset="0"/>
-                                </a:rPr>
-                              </m:ctrlPr>
-                            </m:sSubPr>
-                            <m:e>
-                              <m:r>
-                                <m:rPr>
-                                  <m:sty m:val="p"/>
-                                </m:rPr>
-                                <a:rPr lang="de-CH" sz="1600" i="1" smtClean="0">
-                                  <a:latin typeface="Cambria Math" panose="02040503050406030204" pitchFamily="18" charset="0"/>
-                                </a:rPr>
-                                <m:t>P</m:t>
-                              </m:r>
-                            </m:e>
-                            <m:sub>
-                              <m:r>
-                                <m:rPr>
-                                  <m:sty m:val="p"/>
-                                </m:rPr>
-                                <a:rPr lang="de-CH" sz="1600" i="1" smtClean="0">
-                                  <a:latin typeface="Cambria Math" panose="02040503050406030204" pitchFamily="18" charset="0"/>
-                                </a:rPr>
-                                <m:t>Last</m:t>
-                              </m:r>
-                            </m:sub>
-                          </m:sSub>
-                        </m:den>
-                      </m:f>
-                    </m:oMath>
-                  </m:oMathPara>
-                </a14:m>
-                <a:endParaRPr lang="de-CH" sz="1600" dirty="0"/>
-              </a:p>
-              <a:p>
-                <a14:m>
-                  <m:oMath xmlns:m="http://schemas.openxmlformats.org/officeDocument/2006/math">
-                    <m:sSub>
-                      <m:sSubPr>
-                        <m:ctrlPr>
-                          <a:rPr lang="de-CH" sz="1600" i="1" smtClean="0">
-                            <a:latin typeface="Cambria Math" panose="02040503050406030204" pitchFamily="18" charset="0"/>
-                          </a:rPr>
-                        </m:ctrlPr>
-                      </m:sSubPr>
-                      <m:e>
-                        <m:r>
-                          <m:rPr>
-                            <m:sty m:val="p"/>
-                          </m:rPr>
-                          <a:rPr lang="de-CH" sz="1600" i="1" smtClean="0">
-                            <a:latin typeface="Cambria Math" panose="02040503050406030204" pitchFamily="18" charset="0"/>
-                          </a:rPr>
-                          <m:t>R</m:t>
-                        </m:r>
-                      </m:e>
-                      <m:sub>
-                        <m:r>
-                          <a:rPr lang="de-CH" sz="1600" i="1" smtClean="0">
-                            <a:latin typeface="Cambria Math" panose="02040503050406030204" pitchFamily="18" charset="0"/>
-                          </a:rPr>
-                          <m:t>1</m:t>
-                        </m:r>
-                      </m:sub>
-                    </m:sSub>
-                  </m:oMath>
-                </a14:m>
-                <a:r>
-                  <a:rPr lang="de-CH" sz="1600" dirty="0"/>
-                  <a:t> ist grösser als </a:t>
-                </a:r>
-                <a14:m>
-                  <m:oMath xmlns:m="http://schemas.openxmlformats.org/officeDocument/2006/math">
-                    <m:sSub>
-                      <m:sSubPr>
-                        <m:ctrlPr>
-                          <a:rPr lang="de-CH" sz="1600" i="1" smtClean="0">
-                            <a:latin typeface="Cambria Math" panose="02040503050406030204" pitchFamily="18" charset="0"/>
-                          </a:rPr>
-                        </m:ctrlPr>
-                      </m:sSubPr>
-                      <m:e>
-                        <m:r>
-                          <m:rPr>
-                            <m:sty m:val="p"/>
-                          </m:rPr>
-                          <a:rPr lang="de-CH" sz="1600" i="1" smtClean="0">
-                            <a:latin typeface="Cambria Math" panose="02040503050406030204" pitchFamily="18" charset="0"/>
-                          </a:rPr>
-                          <m:t>R</m:t>
-                        </m:r>
-                      </m:e>
-                      <m:sub>
-                        <m:r>
-                          <m:rPr>
-                            <m:sty m:val="p"/>
-                          </m:rPr>
-                          <a:rPr lang="de-CH" sz="1600" i="1" smtClean="0">
-                            <a:latin typeface="Cambria Math" panose="02040503050406030204" pitchFamily="18" charset="0"/>
-                          </a:rPr>
-                          <m:t>Last</m:t>
-                        </m:r>
-                      </m:sub>
-                    </m:sSub>
-                    <m:r>
-                      <a:rPr lang="de-CH" sz="1600" i="1" smtClean="0">
-                        <a:latin typeface="Cambria Math" panose="02040503050406030204" pitchFamily="18" charset="0"/>
-                      </a:rPr>
-                      <m:t>=</m:t>
-                    </m:r>
-                    <m:sSub>
-                      <m:sSubPr>
-                        <m:ctrlPr>
-                          <a:rPr lang="de-CH" sz="1600" i="1" smtClean="0">
-                            <a:latin typeface="Cambria Math" panose="02040503050406030204" pitchFamily="18" charset="0"/>
-                          </a:rPr>
-                        </m:ctrlPr>
-                      </m:sSubPr>
-                      <m:e>
-                        <m:r>
-                          <m:rPr>
-                            <m:sty m:val="p"/>
-                          </m:rPr>
-                          <a:rPr lang="de-CH" sz="1600" i="1" smtClean="0">
-                            <a:latin typeface="Cambria Math" panose="02040503050406030204" pitchFamily="18" charset="0"/>
-                          </a:rPr>
-                          <m:t>R</m:t>
-                        </m:r>
-                      </m:e>
-                      <m:sub>
-                        <m:r>
-                          <a:rPr lang="de-CH" sz="1600" i="1" smtClean="0">
-                            <a:latin typeface="Cambria Math" panose="02040503050406030204" pitchFamily="18" charset="0"/>
-                          </a:rPr>
-                          <m:t>1</m:t>
-                        </m:r>
-                      </m:sub>
-                    </m:sSub>
-                    <m:r>
-                      <a:rPr lang="de-CH" sz="1600" i="1" smtClean="0">
-                        <a:latin typeface="Cambria Math" panose="02040503050406030204" pitchFamily="18" charset="0"/>
-                      </a:rPr>
-                      <m:t>∥ </m:t>
-                    </m:r>
-                    <m:sSub>
-                      <m:sSubPr>
-                        <m:ctrlPr>
-                          <a:rPr lang="de-CH" sz="1600" i="1" smtClean="0">
-                            <a:latin typeface="Cambria Math" panose="02040503050406030204" pitchFamily="18" charset="0"/>
-                          </a:rPr>
-                        </m:ctrlPr>
-                      </m:sSubPr>
-                      <m:e>
-                        <m:r>
-                          <m:rPr>
-                            <m:sty m:val="p"/>
-                          </m:rPr>
-                          <a:rPr lang="de-CH" sz="1600" i="1" smtClean="0">
-                            <a:latin typeface="Cambria Math" panose="02040503050406030204" pitchFamily="18" charset="0"/>
-                          </a:rPr>
-                          <m:t>R</m:t>
-                        </m:r>
-                      </m:e>
-                      <m:sub>
-                        <m:r>
-                          <a:rPr lang="de-CH" sz="1600" i="1" smtClean="0">
-                            <a:latin typeface="Cambria Math" panose="02040503050406030204" pitchFamily="18" charset="0"/>
-                          </a:rPr>
-                          <m:t>2</m:t>
-                        </m:r>
-                      </m:sub>
-                    </m:sSub>
-                  </m:oMath>
-                </a14:m>
-                <a:r>
-                  <a:rPr lang="de-CH" sz="1600" dirty="0"/>
-                  <a:t>, und durch </a:t>
-                </a:r>
-                <a14:m>
-                  <m:oMath xmlns:m="http://schemas.openxmlformats.org/officeDocument/2006/math">
-                    <m:sSub>
-                      <m:sSubPr>
-                        <m:ctrlPr>
-                          <a:rPr lang="de-CH" sz="1600" i="1" smtClean="0">
-                            <a:latin typeface="Cambria Math" panose="02040503050406030204" pitchFamily="18" charset="0"/>
-                          </a:rPr>
-                        </m:ctrlPr>
-                      </m:sSubPr>
-                      <m:e>
-                        <m:r>
-                          <m:rPr>
-                            <m:sty m:val="p"/>
-                          </m:rPr>
-                          <a:rPr lang="de-CH" sz="1600" i="1" smtClean="0">
-                            <a:latin typeface="Cambria Math" panose="02040503050406030204" pitchFamily="18" charset="0"/>
-                          </a:rPr>
-                          <m:t>R</m:t>
-                        </m:r>
-                      </m:e>
-                      <m:sub>
-                        <m:r>
-                          <a:rPr lang="de-CH" sz="1600" i="1" smtClean="0">
-                            <a:latin typeface="Cambria Math" panose="02040503050406030204" pitchFamily="18" charset="0"/>
-                          </a:rPr>
-                          <m:t>1</m:t>
-                        </m:r>
-                      </m:sub>
-                    </m:sSub>
-                  </m:oMath>
-                </a14:m>
-                <a:r>
-                  <a:rPr lang="de-CH" sz="1600" dirty="0"/>
-                  <a:t> fliesst mehr Strom als durch die Last (</a:t>
-                </a:r>
-                <a14:m>
-                  <m:oMath xmlns:m="http://schemas.openxmlformats.org/officeDocument/2006/math">
-                    <m:sSub>
-                      <m:sSubPr>
-                        <m:ctrlPr>
-                          <a:rPr lang="de-CH" sz="1600" i="1" smtClean="0">
-                            <a:latin typeface="Cambria Math" panose="02040503050406030204" pitchFamily="18" charset="0"/>
-                          </a:rPr>
-                        </m:ctrlPr>
-                      </m:sSubPr>
-                      <m:e>
-                        <m:r>
-                          <m:rPr>
-                            <m:sty m:val="p"/>
-                          </m:rPr>
-                          <a:rPr lang="de-CH" sz="1600" i="1" smtClean="0">
-                            <a:latin typeface="Cambria Math" panose="02040503050406030204" pitchFamily="18" charset="0"/>
-                          </a:rPr>
-                          <m:t>I</m:t>
-                        </m:r>
-                      </m:e>
-                      <m:sub>
-                        <m:r>
-                          <m:rPr>
-                            <m:sty m:val="p"/>
-                          </m:rPr>
-                          <a:rPr lang="de-CH" sz="1600" i="1" smtClean="0">
-                            <a:latin typeface="Cambria Math" panose="02040503050406030204" pitchFamily="18" charset="0"/>
-                          </a:rPr>
-                          <m:t>q</m:t>
-                        </m:r>
-                      </m:sub>
-                    </m:sSub>
-                    <m:r>
-                      <a:rPr lang="de-CH" sz="1600" i="1" smtClean="0">
-                        <a:latin typeface="Cambria Math" panose="02040503050406030204" pitchFamily="18" charset="0"/>
-                      </a:rPr>
-                      <m:t>=</m:t>
-                    </m:r>
-                    <m:sSub>
-                      <m:sSubPr>
-                        <m:ctrlPr>
-                          <a:rPr lang="de-CH" sz="1600" i="1" smtClean="0">
-                            <a:latin typeface="Cambria Math" panose="02040503050406030204" pitchFamily="18" charset="0"/>
-                          </a:rPr>
-                        </m:ctrlPr>
-                      </m:sSubPr>
-                      <m:e>
-                        <m:r>
-                          <m:rPr>
-                            <m:sty m:val="p"/>
-                          </m:rPr>
-                          <a:rPr lang="de-CH" sz="1600" i="1" smtClean="0">
-                            <a:latin typeface="Cambria Math" panose="02040503050406030204" pitchFamily="18" charset="0"/>
-                          </a:rPr>
-                          <m:t>I</m:t>
-                        </m:r>
-                      </m:e>
-                      <m:sub>
-                        <m:r>
-                          <a:rPr lang="de-CH" sz="1600" i="1" smtClean="0">
-                            <a:latin typeface="Cambria Math" panose="02040503050406030204" pitchFamily="18" charset="0"/>
-                          </a:rPr>
-                          <m:t>2</m:t>
-                        </m:r>
-                      </m:sub>
-                    </m:sSub>
-                    <m:r>
-                      <a:rPr lang="de-CH" sz="1600" i="1" smtClean="0">
-                        <a:latin typeface="Cambria Math" panose="02040503050406030204" pitchFamily="18" charset="0"/>
-                      </a:rPr>
-                      <m:t>+</m:t>
-                    </m:r>
-                    <m:sSub>
-                      <m:sSubPr>
-                        <m:ctrlPr>
-                          <a:rPr lang="de-CH" sz="1600" i="1" smtClean="0">
-                            <a:latin typeface="Cambria Math" panose="02040503050406030204" pitchFamily="18" charset="0"/>
-                          </a:rPr>
-                        </m:ctrlPr>
-                      </m:sSubPr>
-                      <m:e>
-                        <m:r>
-                          <m:rPr>
-                            <m:sty m:val="p"/>
-                          </m:rPr>
-                          <a:rPr lang="de-CH" sz="1600" i="1" smtClean="0">
-                            <a:latin typeface="Cambria Math" panose="02040503050406030204" pitchFamily="18" charset="0"/>
-                          </a:rPr>
-                          <m:t>I</m:t>
-                        </m:r>
-                      </m:e>
-                      <m:sub>
-                        <m:r>
-                          <m:rPr>
-                            <m:sty m:val="p"/>
-                          </m:rPr>
-                          <a:rPr lang="de-CH" sz="1600" i="1" smtClean="0">
-                            <a:latin typeface="Cambria Math" panose="02040503050406030204" pitchFamily="18" charset="0"/>
-                          </a:rPr>
-                          <m:t>Last</m:t>
-                        </m:r>
-                      </m:sub>
-                    </m:sSub>
-                  </m:oMath>
-                </a14:m>
-                <a:r>
-                  <a:rPr lang="de-CH" sz="1600" dirty="0"/>
-                  <a:t>):</a:t>
-                </a:r>
-              </a:p>
-              <a:p>
-                <a:pPr marL="0" indent="0" algn="ctr">
-                  <a:buFont typeface="Arial"/>
-                  <a:buNone/>
-                </a:pPr>
-                <a14:m>
-                  <m:oMathPara xmlns:m="http://schemas.openxmlformats.org/officeDocument/2006/math">
-                    <m:oMath>
-                      <m:sSub>
-                        <m:sSubPr>
-                          <m:ctrlPr>
-                            <a:rPr lang="de-CH" sz="1600" i="1" smtClean="0">
-                              <a:latin typeface="Cambria Math" panose="02040503050406030204" pitchFamily="18" charset="0"/>
-                            </a:rPr>
-                          </m:ctrlPr>
-                        </m:sSubPr>
-                        <m:e>
-                          <m:r>
-                            <m:rPr>
-                              <m:sty m:val="p"/>
-                            </m:rPr>
-                            <a:rPr lang="de-CH" sz="1600" i="1" smtClean="0">
-                              <a:latin typeface="Cambria Math" panose="02040503050406030204" pitchFamily="18" charset="0"/>
-                            </a:rPr>
-                            <m:t>P</m:t>
-                          </m:r>
-                        </m:e>
-                        <m:sub>
-                          <m:r>
-                            <m:rPr>
-                              <m:sty m:val="p"/>
-                            </m:rPr>
-                            <a:rPr lang="de-CH" sz="1600" i="1" smtClean="0">
-                              <a:latin typeface="Cambria Math" panose="02040503050406030204" pitchFamily="18" charset="0"/>
-                            </a:rPr>
-                            <m:t>R</m:t>
-                          </m:r>
-                          <m:r>
-                            <a:rPr lang="de-CH" sz="1600" i="1" smtClean="0">
-                              <a:latin typeface="Cambria Math" panose="02040503050406030204" pitchFamily="18" charset="0"/>
-                            </a:rPr>
-                            <m:t>1</m:t>
-                          </m:r>
-                        </m:sub>
-                      </m:sSub>
-                      <m:r>
-                        <a:rPr lang="de-CH" sz="1600" i="1" smtClean="0">
-                          <a:latin typeface="Cambria Math" panose="02040503050406030204" pitchFamily="18" charset="0"/>
-                        </a:rPr>
-                        <m:t>=</m:t>
-                      </m:r>
-                      <m:sSub>
-                        <m:sSubPr>
-                          <m:ctrlPr>
-                            <a:rPr lang="de-CH" sz="1600" i="1" smtClean="0">
-                              <a:latin typeface="Cambria Math" panose="02040503050406030204" pitchFamily="18" charset="0"/>
-                            </a:rPr>
-                          </m:ctrlPr>
-                        </m:sSubPr>
-                        <m:e>
-                          <m:r>
-                            <m:rPr>
-                              <m:sty m:val="p"/>
-                            </m:rPr>
-                            <a:rPr lang="de-CH" sz="1600" i="1" smtClean="0">
-                              <a:latin typeface="Cambria Math" panose="02040503050406030204" pitchFamily="18" charset="0"/>
-                            </a:rPr>
-                            <m:t>R</m:t>
-                          </m:r>
-                        </m:e>
-                        <m:sub>
-                          <m:r>
-                            <a:rPr lang="de-CH" sz="1600" i="1" smtClean="0">
-                              <a:latin typeface="Cambria Math" panose="02040503050406030204" pitchFamily="18" charset="0"/>
-                            </a:rPr>
-                            <m:t>1</m:t>
-                          </m:r>
-                        </m:sub>
-                      </m:sSub>
-                      <m:r>
-                        <a:rPr lang="de-CH" sz="1600" i="1" smtClean="0">
-                          <a:latin typeface="Cambria Math" panose="02040503050406030204" pitchFamily="18" charset="0"/>
-                        </a:rPr>
-                        <m:t>⋅ </m:t>
-                      </m:r>
-                      <m:sSubSup>
-                        <m:sSubSupPr>
-                          <m:ctrlPr>
-                            <a:rPr lang="de-CH" sz="1600" i="1" smtClean="0">
-                              <a:latin typeface="Cambria Math" panose="02040503050406030204" pitchFamily="18" charset="0"/>
-                            </a:rPr>
-                          </m:ctrlPr>
-                        </m:sSubSupPr>
-                        <m:e>
-                          <m:r>
-                            <m:rPr>
-                              <m:sty m:val="p"/>
-                            </m:rPr>
-                            <a:rPr lang="de-CH" sz="1600" i="1" smtClean="0">
-                              <a:latin typeface="Cambria Math" panose="02040503050406030204" pitchFamily="18" charset="0"/>
-                            </a:rPr>
-                            <m:t>I</m:t>
-                          </m:r>
-                        </m:e>
-                        <m:sub>
-                          <m:r>
-                            <m:rPr>
-                              <m:sty m:val="p"/>
-                            </m:rPr>
-                            <a:rPr lang="de-CH" sz="1600" i="1" smtClean="0">
-                              <a:latin typeface="Cambria Math" panose="02040503050406030204" pitchFamily="18" charset="0"/>
-                            </a:rPr>
-                            <m:t>q</m:t>
-                          </m:r>
-                        </m:sub>
-                        <m:sup>
-                          <m:r>
-                            <a:rPr lang="de-CH" sz="1600" i="1" smtClean="0">
-                              <a:latin typeface="Cambria Math" panose="02040503050406030204" pitchFamily="18" charset="0"/>
-                            </a:rPr>
-                            <m:t>2</m:t>
-                          </m:r>
-                        </m:sup>
-                      </m:sSubSup>
-                      <m:r>
-                        <a:rPr lang="de-CH" sz="1600" i="1" smtClean="0">
-                          <a:latin typeface="Cambria Math" panose="02040503050406030204" pitchFamily="18" charset="0"/>
-                        </a:rPr>
-                        <m:t>&gt;</m:t>
-                      </m:r>
-                      <m:sSub>
-                        <m:sSubPr>
-                          <m:ctrlPr>
-                            <a:rPr lang="de-CH" sz="1600" i="1" smtClean="0">
-                              <a:latin typeface="Cambria Math" panose="02040503050406030204" pitchFamily="18" charset="0"/>
-                            </a:rPr>
-                          </m:ctrlPr>
-                        </m:sSubPr>
-                        <m:e>
-                          <m:r>
-                            <m:rPr>
-                              <m:sty m:val="p"/>
-                            </m:rPr>
-                            <a:rPr lang="de-CH" sz="1600" i="1" smtClean="0">
-                              <a:latin typeface="Cambria Math" panose="02040503050406030204" pitchFamily="18" charset="0"/>
-                            </a:rPr>
-                            <m:t>R</m:t>
-                          </m:r>
-                        </m:e>
-                        <m:sub>
-                          <m:r>
-                            <m:rPr>
-                              <m:sty m:val="p"/>
-                            </m:rPr>
-                            <a:rPr lang="de-CH" sz="1600" i="1" smtClean="0">
-                              <a:latin typeface="Cambria Math" panose="02040503050406030204" pitchFamily="18" charset="0"/>
-                            </a:rPr>
-                            <m:t>Last</m:t>
-                          </m:r>
-                        </m:sub>
-                      </m:sSub>
-                      <m:r>
-                        <a:rPr lang="de-CH" sz="1600" i="1" smtClean="0">
-                          <a:latin typeface="Cambria Math" panose="02040503050406030204" pitchFamily="18" charset="0"/>
-                        </a:rPr>
-                        <m:t>⋅ </m:t>
-                      </m:r>
-                      <m:sSubSup>
-                        <m:sSubSupPr>
-                          <m:ctrlPr>
-                            <a:rPr lang="de-CH" sz="1600" i="1" smtClean="0">
-                              <a:latin typeface="Cambria Math" panose="02040503050406030204" pitchFamily="18" charset="0"/>
-                            </a:rPr>
-                          </m:ctrlPr>
-                        </m:sSubSupPr>
-                        <m:e>
-                          <m:r>
-                            <m:rPr>
-                              <m:sty m:val="p"/>
-                            </m:rPr>
-                            <a:rPr lang="de-CH" sz="1600" i="1" smtClean="0">
-                              <a:latin typeface="Cambria Math" panose="02040503050406030204" pitchFamily="18" charset="0"/>
-                            </a:rPr>
-                            <m:t>I</m:t>
-                          </m:r>
-                        </m:e>
-                        <m:sub>
-                          <m:r>
-                            <m:rPr>
-                              <m:sty m:val="p"/>
-                            </m:rPr>
-                            <a:rPr lang="de-CH" sz="1600" i="1" smtClean="0">
-                              <a:latin typeface="Cambria Math" panose="02040503050406030204" pitchFamily="18" charset="0"/>
-                            </a:rPr>
-                            <m:t>Last</m:t>
-                          </m:r>
-                        </m:sub>
-                        <m:sup>
-                          <m:r>
-                            <a:rPr lang="de-CH" sz="1600" i="1" smtClean="0">
-                              <a:latin typeface="Cambria Math" panose="02040503050406030204" pitchFamily="18" charset="0"/>
-                            </a:rPr>
-                            <m:t>2</m:t>
-                          </m:r>
-                        </m:sup>
-                      </m:sSubSup>
-                      <m:r>
-                        <a:rPr lang="de-CH" sz="1600" i="1" smtClean="0">
-                          <a:latin typeface="Cambria Math" panose="02040503050406030204" pitchFamily="18" charset="0"/>
-                        </a:rPr>
-                        <m:t>=</m:t>
-                      </m:r>
-                      <m:sSub>
-                        <m:sSubPr>
-                          <m:ctrlPr>
-                            <a:rPr lang="de-CH" sz="1600" i="1" smtClean="0">
-                              <a:latin typeface="Cambria Math" panose="02040503050406030204" pitchFamily="18" charset="0"/>
-                            </a:rPr>
-                          </m:ctrlPr>
-                        </m:sSubPr>
-                        <m:e>
-                          <m:r>
-                            <m:rPr>
-                              <m:sty m:val="p"/>
-                            </m:rPr>
-                            <a:rPr lang="de-CH" sz="1600" i="1" smtClean="0">
-                              <a:latin typeface="Cambria Math" panose="02040503050406030204" pitchFamily="18" charset="0"/>
-                            </a:rPr>
-                            <m:t>P</m:t>
-                          </m:r>
-                        </m:e>
-                        <m:sub>
-                          <m:r>
-                            <m:rPr>
-                              <m:sty m:val="p"/>
-                            </m:rPr>
-                            <a:rPr lang="de-CH" sz="1600" i="1" smtClean="0">
-                              <a:latin typeface="Cambria Math" panose="02040503050406030204" pitchFamily="18" charset="0"/>
-                            </a:rPr>
-                            <m:t>Last</m:t>
-                          </m:r>
-                        </m:sub>
-                      </m:sSub>
-                    </m:oMath>
-                  </m:oMathPara>
-                </a14:m>
-                <a:endParaRPr lang="de-CH" sz="1600" dirty="0"/>
-              </a:p>
-              <a:p>
-                <a:r>
-                  <a:rPr lang="de-CH" sz="1600" dirty="0"/>
-                  <a:t>Dazu kommen die Verluste in </a:t>
-                </a:r>
-                <a14:m>
-                  <m:oMath xmlns:m="http://schemas.openxmlformats.org/officeDocument/2006/math">
-                    <m:sSub>
-                      <m:sSubPr>
-                        <m:ctrlPr>
-                          <a:rPr lang="de-CH" sz="1600" i="1" smtClean="0">
-                            <a:latin typeface="Cambria Math" panose="02040503050406030204" pitchFamily="18" charset="0"/>
-                          </a:rPr>
-                        </m:ctrlPr>
-                      </m:sSubPr>
-                      <m:e>
-                        <m:r>
-                          <m:rPr>
-                            <m:sty m:val="p"/>
-                          </m:rPr>
-                          <a:rPr lang="de-CH" sz="1600" i="1" smtClean="0">
-                            <a:latin typeface="Cambria Math" panose="02040503050406030204" pitchFamily="18" charset="0"/>
-                          </a:rPr>
-                          <m:t>R</m:t>
-                        </m:r>
-                      </m:e>
-                      <m:sub>
-                        <m:r>
-                          <a:rPr lang="de-CH" sz="1600" i="1" smtClean="0">
-                            <a:latin typeface="Cambria Math" panose="02040503050406030204" pitchFamily="18" charset="0"/>
-                          </a:rPr>
-                          <m:t>2</m:t>
-                        </m:r>
-                      </m:sub>
-                    </m:sSub>
-                  </m:oMath>
-                </a14:m>
-                <a:r>
-                  <a:rPr lang="de-CH" sz="1600" dirty="0"/>
-                  <a:t>.</a:t>
-                </a:r>
-              </a:p>
-              <a:p>
-                <a:r>
-                  <a:rPr lang="de-CH" sz="1600" dirty="0"/>
-                  <a:t>⇒ Der Wirkungsgrad ist </a:t>
-                </a:r>
-                <a:r>
-                  <a:rPr lang="de-CH" sz="1600" b="1" dirty="0"/>
-                  <a:t>kleiner als 50 %</a:t>
-                </a:r>
-                <a:r>
-                  <a:rPr lang="de-CH" sz="1600" dirty="0"/>
-                  <a:t>.</a:t>
-                </a:r>
-              </a:p>
-              <a:p>
-                <a:pPr marL="0" indent="0">
-                  <a:buFont typeface="Arial"/>
-                  <a:buNone/>
-                </a:pPr>
-                <a:r>
-                  <a:rPr lang="de-CH" sz="1600" b="1" dirty="0"/>
-                  <a:t>Merke:</a:t>
-                </a:r>
-                <a:r>
-                  <a:rPr lang="de-CH" sz="1600" dirty="0"/>
-                  <a:t> Die Ersatzquelle stimmt nur an den Klemmen. Verluste im Inneren am Originalnetzwerk bestimmen den Wirkungsgrad.</a:t>
-                </a:r>
-              </a:p>
-            </p:txBody>
-          </p:sp>
-        </mc:Choice>
-        <mc:Fallback>
-          <p:sp>
-            <p:nvSpPr>
-              <p:cNvPr id="5" name="Content Placeholder 2">
-                <a:extLst>
-                  <a:ext uri="{FF2B5EF4-FFF2-40B4-BE49-F238E27FC236}">
-                    <a16:creationId xmlns:a16="http://schemas.microsoft.com/office/drawing/2014/main" id="{E20179F8-B0EE-BC7F-572D-FE44F23C7A0A}"/>
-                  </a:ext>
-                </a:extLst>
-              </p:cNvPr>
-              <p:cNvSpPr txBox="1">
-                <a:spLocks noRot="1" noChangeAspect="1" noMove="1" noResize="1" noEditPoints="1" noAdjustHandles="1" noChangeArrowheads="1" noChangeShapeType="1" noTextEdit="1"/>
-              </p:cNvSpPr>
-              <p:nvPr/>
-            </p:nvSpPr>
-            <p:spPr>
-              <a:xfrm>
-                <a:off x="6204163" y="1412875"/>
-                <a:ext cx="5256000" cy="4860000"/>
-              </a:xfrm>
-              <a:prstGeom prst="rect">
-                <a:avLst/>
-              </a:prstGeom>
-              <a:blipFill>
-                <a:blip r:embed="rId3"/>
-                <a:stretch>
-                  <a:fillRect l="-696" t="-376" r="-696"/>
-                </a:stretch>
-              </a:blipFill>
-            </p:spPr>
-            <p:txBody>
-              <a:bodyPr/>
-              <a:lstStyle/>
-              <a:p>
-                <a:r>
-                  <a:rPr lang="de-CH">
-                    <a:noFill/>
-                  </a:rPr>
-                  <a:t> </a:t>
-                </a:r>
-              </a:p>
-            </p:txBody>
-          </p:sp>
-        </mc:Fallback>
-      </mc:AlternateContent>
-      <p:pic>
-        <p:nvPicPr>
-          <p:cNvPr id="6" name="Grafik 10">
-            <a:extLst>
-              <a:ext uri="{FF2B5EF4-FFF2-40B4-BE49-F238E27FC236}">
-                <a16:creationId xmlns:a16="http://schemas.microsoft.com/office/drawing/2014/main" id="{259B67D1-0C6B-995C-6C8C-4DC51691D9FC}"/>
-              </a:ext>
-            </a:extLst>
-          </p:cNvPr>
-          <p:cNvPicPr>
-            <a:picLocks noChangeAspect="1"/>
-          </p:cNvPicPr>
-          <p:nvPr/>
-        </p:nvPicPr>
-        <p:blipFill>
-          <a:blip r:embed="rId4">
-            <a:extLst>
-              <a:ext uri="{28A0092B-C50C-407E-A947-70E740481C1C}">
-                <a14:useLocalDpi xmlns:a14="http://schemas.microsoft.com/office/drawing/2010/main" val="0"/>
-              </a:ext>
-            </a:extLst>
-          </a:blip>
-          <a:srcRect/>
-          <a:stretch/>
-        </p:blipFill>
-        <p:spPr>
-          <a:xfrm>
-            <a:off x="832543" y="1414795"/>
-            <a:ext cx="4838589" cy="2346159"/>
-          </a:xfrm>
-          <a:prstGeom prst="rect">
-            <a:avLst/>
-          </a:prstGeom>
-        </p:spPr>
-      </p:pic>
-    </p:spTree>
-    <p:extLst>
-      <p:ext uri="{BB962C8B-B14F-4D97-AF65-F5344CB8AC3E}">
-        <p14:creationId xmlns:p14="http://schemas.microsoft.com/office/powerpoint/2010/main" val="2247455013"/>
-      </p:ext>
-    </p:extLst>
-  </p:cSld>
-  <p:clrMapOvr>
-    <a:masterClrMapping/>
-  </p:clrMapOvr>
-  <p:timing>
-    <p:tnLst>
-      <p:par>
-        <p:cTn id="1" dur="indefinite" restart="never" nodeType="tmRoot">
-          <p:childTnLst>
-            <p:seq concurrent="1" nextAc="seek">
-              <p:cTn id="2" dur="indefinite" nodeType="mainSeq">
-                <p:childTnLst>
-                  <p:par>
-                    <p:cTn id="3" fill="hold">
-                      <p:stCondLst>
-                        <p:cond delay="indefinite"/>
-                      </p:stCondLst>
-                      <p:childTnLst>
-                        <p:par>
-                          <p:cTn id="4" fill="hold">
-                            <p:stCondLst>
-                              <p:cond delay="0"/>
-                            </p:stCondLst>
-                            <p:childTnLst>
-                              <p:par>
-                                <p:cTn id="5" presetID="1" presetClass="entr" presetSubtype="0" fill="hold" nodeType="clickEffect">
-                                  <p:stCondLst>
-                                    <p:cond delay="0"/>
-                                  </p:stCondLst>
-                                  <p:childTnLst>
-                                    <p:set>
-                                      <p:cBhvr>
-                                        <p:cTn id="6" dur="1" fill="hold">
-                                          <p:stCondLst>
-                                            <p:cond delay="0"/>
-                                          </p:stCondLst>
-                                        </p:cTn>
-                                        <p:tgtEl>
-                                          <p:spTgt spid="5">
-                                            <p:txEl>
-                                              <p:pRg st="0" end="0"/>
-                                            </p:txEl>
-                                          </p:spTgt>
-                                        </p:tgtEl>
-                                        <p:attrNameLst>
-                                          <p:attrName>style.visibility</p:attrName>
-                                        </p:attrNameLst>
-                                      </p:cBhvr>
-                                      <p:to>
-                                        <p:strVal val="visible"/>
-                                      </p:to>
-                                    </p:set>
-                                  </p:childTnLst>
-                                </p:cTn>
-                              </p:par>
-                              <p:par>
-                                <p:cTn id="7" presetID="1" presetClass="entr" presetSubtype="0" fill="hold" nodeType="withEffect">
-                                  <p:stCondLst>
-                                    <p:cond delay="0"/>
-                                  </p:stCondLst>
-                                  <p:childTnLst>
-                                    <p:set>
-                                      <p:cBhvr>
-                                        <p:cTn id="8" dur="1" fill="hold">
-                                          <p:stCondLst>
-                                            <p:cond delay="0"/>
-                                          </p:stCondLst>
-                                        </p:cTn>
-                                        <p:tgtEl>
-                                          <p:spTgt spid="5">
-                                            <p:txEl>
-                                              <p:pRg st="1" end="1"/>
-                                            </p:txEl>
-                                          </p:spTgt>
-                                        </p:tgtEl>
-                                        <p:attrNameLst>
-                                          <p:attrName>style.visibility</p:attrName>
-                                        </p:attrNameLst>
-                                      </p:cBhvr>
-                                      <p:to>
-                                        <p:strVal val="visible"/>
-                                      </p:to>
-                                    </p:set>
-                                  </p:childTnLst>
-                                </p:cTn>
-                              </p:par>
-                            </p:childTnLst>
-                          </p:cTn>
-                        </p:par>
-                      </p:childTnLst>
-                    </p:cTn>
-                  </p:par>
-                  <p:par>
-                    <p:cTn id="9" fill="hold">
-                      <p:stCondLst>
-                        <p:cond delay="indefinite"/>
-                      </p:stCondLst>
-                      <p:childTnLst>
-                        <p:par>
-                          <p:cTn id="10" fill="hold">
-                            <p:stCondLst>
-                              <p:cond delay="0"/>
-                            </p:stCondLst>
-                            <p:childTnLst>
-                              <p:par>
-                                <p:cTn id="11" presetID="1" presetClass="entr" presetSubtype="0" fill="hold" nodeType="clickEffect">
-                                  <p:stCondLst>
-                                    <p:cond delay="0"/>
-                                  </p:stCondLst>
-                                  <p:childTnLst>
-                                    <p:set>
-                                      <p:cBhvr>
-                                        <p:cTn id="12" dur="1" fill="hold">
-                                          <p:stCondLst>
-                                            <p:cond delay="0"/>
-                                          </p:stCondLst>
-                                        </p:cTn>
-                                        <p:tgtEl>
-                                          <p:spTgt spid="5">
-                                            <p:txEl>
-                                              <p:pRg st="2" end="2"/>
-                                            </p:txEl>
-                                          </p:spTgt>
-                                        </p:tgtEl>
-                                        <p:attrNameLst>
-                                          <p:attrName>style.visibility</p:attrName>
-                                        </p:attrNameLst>
-                                      </p:cBhvr>
-                                      <p:to>
-                                        <p:strVal val="visible"/>
-                                      </p:to>
-                                    </p:set>
-                                  </p:childTnLst>
-                                </p:cTn>
-                              </p:par>
-                            </p:childTnLst>
-                          </p:cTn>
-                        </p:par>
-                      </p:childTnLst>
-                    </p:cTn>
-                  </p:par>
-                  <p:par>
-                    <p:cTn id="13" fill="hold">
-                      <p:stCondLst>
-                        <p:cond delay="indefinite"/>
-                      </p:stCondLst>
-                      <p:childTnLst>
-                        <p:par>
-                          <p:cTn id="14" fill="hold">
-                            <p:stCondLst>
-                              <p:cond delay="0"/>
-                            </p:stCondLst>
-                            <p:childTnLst>
-                              <p:par>
-                                <p:cTn id="15" presetID="1" presetClass="entr" presetSubtype="0" fill="hold" nodeType="clickEffect">
-                                  <p:stCondLst>
-                                    <p:cond delay="0"/>
-                                  </p:stCondLst>
-                                  <p:childTnLst>
-                                    <p:set>
-                                      <p:cBhvr>
-                                        <p:cTn id="16" dur="1" fill="hold">
-                                          <p:stCondLst>
-                                            <p:cond delay="0"/>
-                                          </p:stCondLst>
-                                        </p:cTn>
-                                        <p:tgtEl>
-                                          <p:spTgt spid="5">
-                                            <p:txEl>
-                                              <p:pRg st="3" end="3"/>
-                                            </p:txEl>
-                                          </p:spTgt>
-                                        </p:tgtEl>
-                                        <p:attrNameLst>
-                                          <p:attrName>style.visibility</p:attrName>
-                                        </p:attrNameLst>
-                                      </p:cBhvr>
-                                      <p:to>
-                                        <p:strVal val="visible"/>
-                                      </p:to>
-                                    </p:set>
-                                  </p:childTnLst>
-                                </p:cTn>
-                              </p:par>
-                            </p:childTnLst>
-                          </p:cTn>
-                        </p:par>
-                      </p:childTnLst>
-                    </p:cTn>
-                  </p:par>
-                  <p:par>
-                    <p:cTn id="17" fill="hold">
-                      <p:stCondLst>
-                        <p:cond delay="indefinite"/>
-                      </p:stCondLst>
-                      <p:childTnLst>
-                        <p:par>
-                          <p:cTn id="18" fill="hold">
-                            <p:stCondLst>
-                              <p:cond delay="0"/>
-                            </p:stCondLst>
-                            <p:childTnLst>
-                              <p:par>
-                                <p:cTn id="19" presetID="1" presetClass="entr" presetSubtype="0" fill="hold" nodeType="clickEffect">
-                                  <p:stCondLst>
-                                    <p:cond delay="0"/>
-                                  </p:stCondLst>
-                                  <p:childTnLst>
-                                    <p:set>
-                                      <p:cBhvr>
-                                        <p:cTn id="20" dur="1" fill="hold">
-                                          <p:stCondLst>
-                                            <p:cond delay="0"/>
-                                          </p:stCondLst>
-                                        </p:cTn>
-                                        <p:tgtEl>
-                                          <p:spTgt spid="5">
-                                            <p:txEl>
-                                              <p:pRg st="4" end="4"/>
-                                            </p:txEl>
-                                          </p:spTgt>
-                                        </p:tgtEl>
-                                        <p:attrNameLst>
-                                          <p:attrName>style.visibility</p:attrName>
-                                        </p:attrNameLst>
-                                      </p:cBhvr>
-                                      <p:to>
-                                        <p:strVal val="visible"/>
-                                      </p:to>
-                                    </p:set>
-                                  </p:childTnLst>
-                                </p:cTn>
-                              </p:par>
-                            </p:childTnLst>
-                          </p:cTn>
-                        </p:par>
-                      </p:childTnLst>
-                    </p:cTn>
-                  </p:par>
-                  <p:par>
-                    <p:cTn id="21" fill="hold">
-                      <p:stCondLst>
-                        <p:cond delay="indefinite"/>
-                      </p:stCondLst>
-                      <p:childTnLst>
-                        <p:par>
-                          <p:cTn id="22" fill="hold">
-                            <p:stCondLst>
-                              <p:cond delay="0"/>
-                            </p:stCondLst>
-                            <p:childTnLst>
-                              <p:par>
-                                <p:cTn id="23" presetID="1" presetClass="entr" presetSubtype="0" fill="hold" nodeType="clickEffect">
-                                  <p:stCondLst>
-                                    <p:cond delay="0"/>
-                                  </p:stCondLst>
-                                  <p:childTnLst>
-                                    <p:set>
-                                      <p:cBhvr>
-                                        <p:cTn id="24" dur="1" fill="hold">
-                                          <p:stCondLst>
-                                            <p:cond delay="0"/>
-                                          </p:stCondLst>
-                                        </p:cTn>
-                                        <p:tgtEl>
-                                          <p:spTgt spid="5">
-                                            <p:txEl>
-                                              <p:pRg st="5" end="5"/>
-                                            </p:txEl>
-                                          </p:spTgt>
-                                        </p:tgtEl>
-                                        <p:attrNameLst>
-                                          <p:attrName>style.visibility</p:attrName>
-                                        </p:attrNameLst>
-                                      </p:cBhvr>
-                                      <p:to>
-                                        <p:strVal val="visible"/>
-                                      </p:to>
-                                    </p:set>
-                                  </p:childTnLst>
-                                </p:cTn>
-                              </p:par>
-                            </p:childTnLst>
-                          </p:cTn>
-                        </p:par>
-                      </p:childTnLst>
-                    </p:cTn>
-                  </p:par>
-                  <p:par>
-                    <p:cTn id="25" fill="hold">
-                      <p:stCondLst>
-                        <p:cond delay="indefinite"/>
-                      </p:stCondLst>
-                      <p:childTnLst>
-                        <p:par>
-                          <p:cTn id="26" fill="hold">
-                            <p:stCondLst>
-                              <p:cond delay="0"/>
-                            </p:stCondLst>
-                            <p:childTnLst>
-                              <p:par>
-                                <p:cTn id="27" presetID="1" presetClass="entr" presetSubtype="0" fill="hold" nodeType="clickEffect">
-                                  <p:stCondLst>
-                                    <p:cond delay="0"/>
-                                  </p:stCondLst>
-                                  <p:childTnLst>
-                                    <p:set>
-                                      <p:cBhvr>
-                                        <p:cTn id="28" dur="1" fill="hold">
-                                          <p:stCondLst>
-                                            <p:cond delay="0"/>
-                                          </p:stCondLst>
-                                        </p:cTn>
-                                        <p:tgtEl>
-                                          <p:spTgt spid="5">
-                                            <p:txEl>
-                                              <p:pRg st="6" end="6"/>
-                                            </p:txEl>
-                                          </p:spTgt>
-                                        </p:tgtEl>
-                                        <p:attrNameLst>
-                                          <p:attrName>style.visibility</p:attrName>
-                                        </p:attrNameLst>
-                                      </p:cBhvr>
-                                      <p:to>
-                                        <p:strVal val="visible"/>
-                                      </p:to>
-                                    </p:set>
-                                  </p:childTnLst>
-                                </p:cTn>
-                              </p:par>
-                            </p:childTnLst>
-                          </p:cTn>
-                        </p:par>
-                      </p:childTnLst>
-                    </p:cTn>
-                  </p:par>
-                </p:childTnLst>
-              </p:cTn>
-              <p:prevCondLst>
-                <p:cond evt="onPrev" delay="0">
-                  <p:tgtEl>
-                    <p:sldTgt/>
-                  </p:tgtEl>
-                </p:cond>
-              </p:prevCondLst>
-              <p:nextCondLst>
-                <p:cond evt="onNext" delay="0">
-                  <p:tgtEl>
-                    <p:sldTgt/>
-                  </p:tgtEl>
-                </p:cond>
-              </p:nextCondLst>
-            </p:seq>
-          </p:childTnLst>
-        </p:cTn>
-      </p:par>
-    </p:tnLst>
-  </p:timing>
-</p:sld>
-</file>
-
-<file path=ppt/slides/slide14.xml><?xml version="1.0" encoding="utf-8"?>
-<p:sld xmlns:a="http://schemas.openxmlformats.org/drawingml/2006/main" xmlns:r="http://schemas.openxmlformats.org/officeDocument/2006/relationships" xmlns:p="http://schemas.openxmlformats.org/presentationml/2006/main">
-  <p:cSld>
-    <p:spTree>
-      <p:nvGrpSpPr>
-        <p:cNvPr id="1" name="">
-          <a:extLst>
-            <a:ext uri="{FF2B5EF4-FFF2-40B4-BE49-F238E27FC236}">
-              <a16:creationId xmlns:a16="http://schemas.microsoft.com/office/drawing/2014/main" id="{DDF6332E-2FD5-6FB3-F842-A40538C2A738}"/>
-            </a:ext>
-          </a:extLst>
-        </p:cNvPr>
-        <p:cNvGrpSpPr/>
-        <p:nvPr/>
-      </p:nvGrpSpPr>
-      <p:grpSpPr>
-        <a:xfrm>
-          <a:off x="0" y="0"/>
-          <a:ext cx="0" cy="0"/>
-          <a:chOff x="0" y="0"/>
-          <a:chExt cx="0" cy="0"/>
-        </a:xfrm>
-      </p:grpSpPr>
-      <p:sp>
-        <p:nvSpPr>
-          <p:cNvPr id="2" name="Rounded Rectangle 1">
-            <a:extLst>
-              <a:ext uri="{FF2B5EF4-FFF2-40B4-BE49-F238E27FC236}">
-                <a16:creationId xmlns:a16="http://schemas.microsoft.com/office/drawing/2014/main" id="{6A35AC10-3FF1-0107-E12B-BC0C04EFEFD2}"/>
-              </a:ext>
-            </a:extLst>
-          </p:cNvPr>
-          <p:cNvSpPr/>
-          <p:nvPr/>
-        </p:nvSpPr>
-        <p:spPr>
-          <a:xfrm>
-            <a:off x="594360" y="475488"/>
-            <a:ext cx="969264" cy="292608"/>
-          </a:xfrm>
-          <a:prstGeom prst="roundRect">
-            <a:avLst/>
-          </a:prstGeom>
-          <a:solidFill>
-            <a:srgbClr val="EEEEEA"/>
-          </a:solidFill>
-          <a:ln w="10160">
-            <a:solidFill>
-              <a:srgbClr val="EEEEEA"/>
-            </a:solidFill>
-          </a:ln>
-        </p:spPr>
-        <p:style>
-          <a:lnRef idx="1">
-            <a:schemeClr val="accent1"/>
-          </a:lnRef>
-          <a:fillRef idx="3">
-            <a:schemeClr val="accent1"/>
-          </a:fillRef>
-          <a:effectRef idx="2">
-            <a:schemeClr val="accent1"/>
-          </a:effectRef>
-          <a:fontRef idx="minor">
-            <a:schemeClr val="lt1"/>
-          </a:fontRef>
-        </p:style>
-        <p:txBody>
-          <a:bodyPr rtlCol="0" anchor="ctr"/>
-          <a:lstStyle/>
-          <a:p>
-            <a:pPr algn="ctr"/>
-            <a:endParaRPr/>
-          </a:p>
-        </p:txBody>
-      </p:sp>
-      <p:sp>
-        <p:nvSpPr>
-          <p:cNvPr id="3" name="TextBox 2">
-            <a:extLst>
-              <a:ext uri="{FF2B5EF4-FFF2-40B4-BE49-F238E27FC236}">
                 <a16:creationId xmlns:a16="http://schemas.microsoft.com/office/drawing/2014/main" id="{75C6FF47-FA38-1F1E-EEC4-D6BFB6C6A053}"/>
               </a:ext>
             </a:extLst>
@@ -13586,7 +8742,7 @@
         <p:spPr>
           <a:xfrm>
             <a:off x="914400" y="2761488"/>
-            <a:ext cx="3202415" cy="307777"/>
+            <a:ext cx="3712170" cy="307777"/>
           </a:xfrm>
           <a:prstGeom prst="rect">
             <a:avLst/>
@@ -13610,7 +8766,7 @@
                 </a:solidFill>
                 <a:latin typeface="Aptos"/>
               </a:rPr>
-              <a:t>Formel anwenden können</a:t>
+              <a:t>In Formelsammlung schreiben</a:t>
             </a:r>
           </a:p>
         </p:txBody>
@@ -13695,7 +8851,7 @@
           <a:p>
             <a:fld id="{C1FF6DA9-008F-8B48-92A6-B652298478BF}" type="slidenum">
               <a:rPr lang="en-US" smtClean="0"/>
-              <a:t>14</a:t>
+              <a:t>11</a:t>
             </a:fld>
             <a:endParaRPr lang="en-US"/>
           </a:p>
@@ -13731,8 +8887,8 @@
           </a:prstGeom>
         </p:spPr>
       </p:pic>
-      <mc:AlternateContent xmlns:mc="http://schemas.openxmlformats.org/markup-compatibility/2006">
-        <mc:Choice xmlns:p14="http://schemas.microsoft.com/office/powerpoint/2010/main" Requires="p14">
+      <mc:AlternateContent xmlns:mc="http://schemas.openxmlformats.org/markup-compatibility/2006" xmlns:p14="http://schemas.microsoft.com/office/powerpoint/2010/main">
+        <mc:Choice Requires="p14">
           <p:contentPart p14:bwMode="auto" r:id="rId4">
             <p14:nvContentPartPr>
               <p14:cNvPr id="9" name="Freihand 8">
@@ -13751,7 +8907,7 @@
             </p14:xfrm>
           </p:contentPart>
         </mc:Choice>
-        <mc:Fallback>
+        <mc:Fallback xmlns="">
           <p:pic>
             <p:nvPicPr>
               <p:cNvPr id="9" name="Freihand 8">
@@ -13795,7 +8951,7 @@
 </p:sld>
 </file>
 
-<file path=ppt/slides/slide15.xml><?xml version="1.0" encoding="utf-8"?>
+<file path=ppt/slides/slide12.xml><?xml version="1.0" encoding="utf-8"?>
 <p:sld xmlns:a="http://schemas.openxmlformats.org/drawingml/2006/main" xmlns:r="http://schemas.openxmlformats.org/officeDocument/2006/relationships" xmlns:p="http://schemas.openxmlformats.org/presentationml/2006/main">
   <p:cSld>
     <p:spTree>
@@ -14147,7 +9303,7 @@
           <a:p>
             <a:fld id="{C1FF6DA9-008F-8B48-92A6-B652298478BF}" type="slidenum">
               <a:rPr lang="en-US" smtClean="0"/>
-              <a:t>15</a:t>
+              <a:t>12</a:t>
             </a:fld>
             <a:endParaRPr lang="en-US"/>
           </a:p>
@@ -14268,7 +9424,7 @@
 </p:sld>
 </file>
 
-<file path=ppt/slides/slide16.xml><?xml version="1.0" encoding="utf-8"?>
+<file path=ppt/slides/slide13.xml><?xml version="1.0" encoding="utf-8"?>
 <p:sld xmlns:a="http://schemas.openxmlformats.org/drawingml/2006/main" xmlns:r="http://schemas.openxmlformats.org/officeDocument/2006/relationships" xmlns:p="http://schemas.openxmlformats.org/presentationml/2006/main">
   <p:cSld>
     <p:spTree>
@@ -14620,7 +9776,7 @@
           <a:p>
             <a:fld id="{C1FF6DA9-008F-8B48-92A6-B652298478BF}" type="slidenum">
               <a:rPr lang="en-US" smtClean="0"/>
-              <a:t>16</a:t>
+              <a:t>13</a:t>
             </a:fld>
             <a:endParaRPr lang="en-US"/>
           </a:p>
@@ -14700,7 +9856,7 @@
 </p:sld>
 </file>
 
-<file path=ppt/slides/slide17.xml><?xml version="1.0" encoding="utf-8"?>
+<file path=ppt/slides/slide14.xml><?xml version="1.0" encoding="utf-8"?>
 <p:sld xmlns:a="http://schemas.openxmlformats.org/drawingml/2006/main" xmlns:r="http://schemas.openxmlformats.org/officeDocument/2006/relationships" xmlns:p="http://schemas.openxmlformats.org/presentationml/2006/main">
   <p:cSld>
     <p:spTree>
@@ -14949,7 +10105,7 @@
           <a:p>
             <a:fld id="{C1FF6DA9-008F-8B48-92A6-B652298478BF}" type="slidenum">
               <a:rPr lang="en-US" smtClean="0"/>
-              <a:t>17</a:t>
+              <a:t>14</a:t>
             </a:fld>
             <a:endParaRPr lang="en-US"/>
           </a:p>
@@ -15033,7 +10189,7 @@
 </p:sld>
 </file>
 
-<file path=ppt/slides/slide18.xml><?xml version="1.0" encoding="utf-8"?>
+<file path=ppt/slides/slide15.xml><?xml version="1.0" encoding="utf-8"?>
 <p:sld xmlns:a="http://schemas.openxmlformats.org/drawingml/2006/main" xmlns:r="http://schemas.openxmlformats.org/officeDocument/2006/relationships" xmlns:p="http://schemas.openxmlformats.org/presentationml/2006/main">
   <p:cSld>
     <p:spTree>
@@ -15282,14 +10438,14 @@
           <a:p>
             <a:fld id="{C1FF6DA9-008F-8B48-92A6-B652298478BF}" type="slidenum">
               <a:rPr lang="en-US" smtClean="0"/>
-              <a:t>18</a:t>
+              <a:t>15</a:t>
             </a:fld>
             <a:endParaRPr lang="en-US"/>
           </a:p>
         </p:txBody>
       </p:sp>
-      <mc:AlternateContent xmlns:mc="http://schemas.openxmlformats.org/markup-compatibility/2006">
-        <mc:Choice xmlns:a14="http://schemas.microsoft.com/office/drawing/2010/main" Requires="a14">
+      <mc:AlternateContent xmlns:mc="http://schemas.openxmlformats.org/markup-compatibility/2006" xmlns:a14="http://schemas.microsoft.com/office/drawing/2010/main">
+        <mc:Choice Requires="a14">
           <p:sp>
             <p:nvSpPr>
               <p:cNvPr id="5" name="Content Placeholder 2">
@@ -15662,7 +10818,7 @@
             </p:txBody>
           </p:sp>
         </mc:Choice>
-        <mc:Fallback>
+        <mc:Fallback xmlns="">
           <p:sp>
             <p:nvSpPr>
               <p:cNvPr id="5" name="Content Placeholder 2">
@@ -15750,7 +10906,7 @@
 </p:sld>
 </file>
 
-<file path=ppt/slides/slide19.xml><?xml version="1.0" encoding="utf-8"?>
+<file path=ppt/slides/slide16.xml><?xml version="1.0" encoding="utf-8"?>
 <p:sld xmlns:a="http://schemas.openxmlformats.org/drawingml/2006/main" xmlns:r="http://schemas.openxmlformats.org/officeDocument/2006/relationships" xmlns:p="http://schemas.openxmlformats.org/presentationml/2006/main" show="0">
   <p:cSld>
     <p:spTree>
@@ -15999,14 +11155,14 @@
           <a:p>
             <a:fld id="{C1FF6DA9-008F-8B48-92A6-B652298478BF}" type="slidenum">
               <a:rPr lang="en-US" smtClean="0"/>
-              <a:t>19</a:t>
+              <a:t>16</a:t>
             </a:fld>
             <a:endParaRPr lang="en-US"/>
           </a:p>
         </p:txBody>
       </p:sp>
-      <mc:AlternateContent xmlns:mc="http://schemas.openxmlformats.org/markup-compatibility/2006">
-        <mc:Choice xmlns:a14="http://schemas.microsoft.com/office/drawing/2010/main" Requires="a14">
+      <mc:AlternateContent xmlns:mc="http://schemas.openxmlformats.org/markup-compatibility/2006" xmlns:a14="http://schemas.microsoft.com/office/drawing/2010/main">
+        <mc:Choice Requires="a14">
           <p:sp>
             <p:nvSpPr>
               <p:cNvPr id="7" name="Content Placeholder 2">
@@ -17412,7 +12568,7 @@
             </p:txBody>
           </p:sp>
         </mc:Choice>
-        <mc:Fallback>
+        <mc:Fallback xmlns="">
           <p:sp>
             <p:nvSpPr>
               <p:cNvPr id="7" name="Content Placeholder 2">
@@ -17894,20 +13050,18 @@
 </p:sld>
 </file>
 
-<file path=ppt/slides/slide2.xml><?xml version="1.0" encoding="utf-8"?>
-<p:sld xmlns:a="http://schemas.openxmlformats.org/drawingml/2006/main" xmlns:r="http://schemas.openxmlformats.org/officeDocument/2006/relationships" xmlns:p="http://schemas.openxmlformats.org/presentationml/2006/main">
+<file path=ppt/slides/slide17.xml><?xml version="1.0" encoding="utf-8"?>
+<p:sld xmlns:a="http://schemas.openxmlformats.org/drawingml/2006/main" xmlns:r="http://schemas.openxmlformats.org/officeDocument/2006/relationships" xmlns:p="http://schemas.openxmlformats.org/presentationml/2006/main" show="0">
   <p:cSld>
-    <p:bg>
-      <p:bgPr>
-        <a:solidFill>
-          <a:schemeClr val="bg1"/>
-        </a:solidFill>
-        <a:effectLst/>
-      </p:bgPr>
-    </p:bg>
     <p:spTree>
       <p:nvGrpSpPr>
-        <p:cNvPr id="1" name=""/>
+        <p:cNvPr id="1" name="">
+          <a:extLst>
+            <a:ext uri="{FF2B5EF4-FFF2-40B4-BE49-F238E27FC236}">
+              <a16:creationId xmlns:a16="http://schemas.microsoft.com/office/drawing/2014/main" id="{883AC815-F157-F2AE-3D35-07D984B2F491}"/>
+            </a:ext>
+          </a:extLst>
+        </p:cNvPr>
         <p:cNvGrpSpPr/>
         <p:nvPr/>
       </p:nvGrpSpPr>
@@ -17921,7 +13075,13 @@
       </p:grpSpPr>
       <p:sp>
         <p:nvSpPr>
-          <p:cNvPr id="2" name="Rounded Rectangle 1"/>
+          <p:cNvPr id="2" name="Rounded Rectangle 1">
+            <a:extLst>
+              <a:ext uri="{FF2B5EF4-FFF2-40B4-BE49-F238E27FC236}">
+                <a16:creationId xmlns:a16="http://schemas.microsoft.com/office/drawing/2014/main" id="{823E0E6E-474D-5BD5-FA4B-232BE134115F}"/>
+              </a:ext>
+            </a:extLst>
+          </p:cNvPr>
           <p:cNvSpPr/>
           <p:nvPr/>
         </p:nvSpPr>
@@ -17967,459 +13127,6 @@
       </p:sp>
       <p:sp>
         <p:nvSpPr>
-          <p:cNvPr id="3" name="TextBox 2"/>
-          <p:cNvSpPr txBox="1"/>
-          <p:nvPr/>
-        </p:nvSpPr>
-        <p:spPr>
-          <a:xfrm>
-            <a:off x="934724" y="542673"/>
-            <a:ext cx="288542" cy="130805"/>
-          </a:xfrm>
-          <a:prstGeom prst="rect">
-            <a:avLst/>
-          </a:prstGeom>
-          <a:noFill/>
-        </p:spPr>
-        <p:txBody>
-          <a:bodyPr wrap="none" lIns="0" tIns="0" rIns="0" bIns="0" anchor="ctr">
-            <a:spAutoFit/>
-          </a:bodyPr>
-          <a:lstStyle/>
-          <a:p>
-            <a:pPr algn="ctr"/>
-            <a:r>
-              <a:rPr lang="de-CH" sz="850" b="1" dirty="0">
-                <a:solidFill>
-                  <a:srgbClr val="737373"/>
-                </a:solidFill>
-                <a:latin typeface="Aptos"/>
-              </a:rPr>
-              <a:t>Inhalt</a:t>
-            </a:r>
-            <a:endParaRPr sz="850" b="1" dirty="0">
-              <a:solidFill>
-                <a:srgbClr val="737373"/>
-              </a:solidFill>
-              <a:latin typeface="Aptos"/>
-            </a:endParaRPr>
-          </a:p>
-        </p:txBody>
-      </p:sp>
-      <p:sp>
-        <p:nvSpPr>
-          <p:cNvPr id="4" name="TextBox 3"/>
-          <p:cNvSpPr txBox="1"/>
-          <p:nvPr/>
-        </p:nvSpPr>
-        <p:spPr>
-          <a:xfrm>
-            <a:off x="594360" y="932688"/>
-            <a:ext cx="4283417" cy="477054"/>
-          </a:xfrm>
-          <a:prstGeom prst="rect">
-            <a:avLst/>
-          </a:prstGeom>
-          <a:noFill/>
-        </p:spPr>
-        <p:txBody>
-          <a:bodyPr wrap="none" lIns="0" tIns="0" rIns="0" bIns="0" anchor="t">
-            <a:spAutoFit/>
-          </a:bodyPr>
-          <a:lstStyle/>
-          <a:p>
-            <a:pPr algn="l"/>
-            <a:r>
-              <a:rPr lang="de-CH" sz="3100" b="1" dirty="0">
-                <a:solidFill>
-                  <a:srgbClr val="171717"/>
-                </a:solidFill>
-                <a:latin typeface="Aptos"/>
-              </a:rPr>
-              <a:t>Was machen wir heute?</a:t>
-            </a:r>
-            <a:endParaRPr sz="3100" b="1" dirty="0">
-              <a:solidFill>
-                <a:srgbClr val="171717"/>
-              </a:solidFill>
-              <a:latin typeface="Aptos"/>
-            </a:endParaRPr>
-          </a:p>
-        </p:txBody>
-      </p:sp>
-      <p:sp>
-        <p:nvSpPr>
-          <p:cNvPr id="11" name="TextBox 10"/>
-          <p:cNvSpPr txBox="1"/>
-          <p:nvPr/>
-        </p:nvSpPr>
-        <p:spPr>
-          <a:xfrm>
-            <a:off x="914400" y="2761488"/>
-            <a:ext cx="4393510" cy="1538883"/>
-          </a:xfrm>
-          <a:prstGeom prst="rect">
-            <a:avLst/>
-          </a:prstGeom>
-          <a:noFill/>
-        </p:spPr>
-        <p:txBody>
-          <a:bodyPr wrap="none" lIns="0" tIns="0" rIns="0" bIns="0" anchor="t">
-            <a:spAutoFit/>
-          </a:bodyPr>
-          <a:lstStyle/>
-          <a:p>
-            <a:pPr marL="342900" indent="-342900" algn="l">
-              <a:buFont typeface="Arial" panose="020B0604020202020204" pitchFamily="34" charset="0"/>
-              <a:buChar char="•"/>
-            </a:pPr>
-            <a:r>
-              <a:rPr lang="de-CH" sz="2000" b="0" dirty="0">
-                <a:solidFill>
-                  <a:srgbClr val="171717"/>
-                </a:solidFill>
-                <a:latin typeface="Aptos"/>
-              </a:rPr>
-              <a:t>Reale Spannungs- und Stromquellen</a:t>
-            </a:r>
-            <a:r>
-              <a:rPr sz="2000" b="0" dirty="0">
-                <a:solidFill>
-                  <a:srgbClr val="171717"/>
-                </a:solidFill>
-                <a:latin typeface="Aptos"/>
-              </a:rPr>
-              <a:t>
-</a:t>
-            </a:r>
-            <a:r>
-              <a:rPr lang="de-CH" sz="2000" b="0" dirty="0">
-                <a:solidFill>
-                  <a:srgbClr val="171717"/>
-                </a:solidFill>
-                <a:latin typeface="Aptos"/>
-              </a:rPr>
-              <a:t>Leistungsanpassung</a:t>
-            </a:r>
-            <a:r>
-              <a:rPr sz="2000" b="0" dirty="0">
-                <a:solidFill>
-                  <a:srgbClr val="171717"/>
-                </a:solidFill>
-                <a:latin typeface="Aptos"/>
-              </a:rPr>
-              <a:t>
-</a:t>
-            </a:r>
-            <a:r>
-              <a:rPr lang="de-CH" sz="2000" dirty="0">
-                <a:solidFill>
-                  <a:srgbClr val="171717"/>
-                </a:solidFill>
-                <a:latin typeface="Aptos"/>
-              </a:rPr>
-              <a:t>Netzwerkumwandlung </a:t>
-            </a:r>
-          </a:p>
-          <a:p>
-            <a:pPr marL="342900" indent="-342900" algn="l">
-              <a:buFont typeface="Arial" panose="020B0604020202020204" pitchFamily="34" charset="0"/>
-              <a:buChar char="•"/>
-            </a:pPr>
-            <a:r>
-              <a:rPr lang="de-CH" sz="2000" dirty="0">
-                <a:solidFill>
-                  <a:srgbClr val="171717"/>
-                </a:solidFill>
-                <a:latin typeface="Aptos"/>
-              </a:rPr>
-              <a:t>Überlagerungsprinzip</a:t>
-            </a:r>
-          </a:p>
-          <a:p>
-            <a:pPr marL="342900" indent="-342900" algn="l">
-              <a:buFont typeface="Arial" panose="020B0604020202020204" pitchFamily="34" charset="0"/>
-              <a:buChar char="•"/>
-            </a:pPr>
-            <a:r>
-              <a:rPr lang="de-CH" sz="2000" b="0" dirty="0">
-                <a:solidFill>
-                  <a:srgbClr val="171717"/>
-                </a:solidFill>
-                <a:latin typeface="Aptos"/>
-              </a:rPr>
-              <a:t>Netzwerkanalyse</a:t>
-            </a:r>
-            <a:endParaRPr sz="2000" b="0" dirty="0">
-              <a:solidFill>
-                <a:srgbClr val="171717"/>
-              </a:solidFill>
-              <a:latin typeface="Aptos"/>
-            </a:endParaRPr>
-          </a:p>
-        </p:txBody>
-      </p:sp>
-      <p:sp>
-        <p:nvSpPr>
-          <p:cNvPr id="15" name="Datumsplatzhalter 14">
-            <a:extLst>
-              <a:ext uri="{FF2B5EF4-FFF2-40B4-BE49-F238E27FC236}">
-                <a16:creationId xmlns:a16="http://schemas.microsoft.com/office/drawing/2014/main" id="{FA1345AC-CE9B-7FE2-5382-D92AEFB1F35A}"/>
-              </a:ext>
-            </a:extLst>
-          </p:cNvPr>
-          <p:cNvSpPr>
-            <a:spLocks noGrp="1"/>
-          </p:cNvSpPr>
-          <p:nvPr>
-            <p:ph type="dt" sz="half" idx="10"/>
-          </p:nvPr>
-        </p:nvSpPr>
-        <p:spPr/>
-        <p:txBody>
-          <a:bodyPr/>
-          <a:lstStyle/>
-          <a:p>
-            <a:fld id="{5BEE0FE1-AF03-4944-8B59-6F3340FFC6D2}" type="datetime1">
-              <a:rPr lang="de-CH" smtClean="0"/>
-              <a:t>21.10.2026</a:t>
-            </a:fld>
-            <a:endParaRPr lang="en-US"/>
-          </a:p>
-        </p:txBody>
-      </p:sp>
-      <p:sp>
-        <p:nvSpPr>
-          <p:cNvPr id="16" name="Fußzeilenplatzhalter 15">
-            <a:extLst>
-              <a:ext uri="{FF2B5EF4-FFF2-40B4-BE49-F238E27FC236}">
-                <a16:creationId xmlns:a16="http://schemas.microsoft.com/office/drawing/2014/main" id="{5890F6DA-FF1C-B12F-C9A4-D27FAC23DAF3}"/>
-              </a:ext>
-            </a:extLst>
-          </p:cNvPr>
-          <p:cNvSpPr>
-            <a:spLocks noGrp="1"/>
-          </p:cNvSpPr>
-          <p:nvPr>
-            <p:ph type="ftr" sz="quarter" idx="11"/>
-          </p:nvPr>
-        </p:nvSpPr>
-        <p:spPr/>
-        <p:txBody>
-          <a:bodyPr/>
-          <a:lstStyle/>
-          <a:p>
-            <a:r>
-              <a:rPr lang="en-US" dirty="0"/>
-              <a:t>Enrico Putzi W06</a:t>
-            </a:r>
-          </a:p>
-        </p:txBody>
-      </p:sp>
-      <p:sp>
-        <p:nvSpPr>
-          <p:cNvPr id="17" name="Foliennummernplatzhalter 16">
-            <a:extLst>
-              <a:ext uri="{FF2B5EF4-FFF2-40B4-BE49-F238E27FC236}">
-                <a16:creationId xmlns:a16="http://schemas.microsoft.com/office/drawing/2014/main" id="{00071AF8-AC7C-5E34-152B-776853FD6453}"/>
-              </a:ext>
-            </a:extLst>
-          </p:cNvPr>
-          <p:cNvSpPr>
-            <a:spLocks noGrp="1"/>
-          </p:cNvSpPr>
-          <p:nvPr>
-            <p:ph type="sldNum" sz="quarter" idx="12"/>
-          </p:nvPr>
-        </p:nvSpPr>
-        <p:spPr/>
-        <p:txBody>
-          <a:bodyPr/>
-          <a:lstStyle/>
-          <a:p>
-            <a:fld id="{C1FF6DA9-008F-8B48-92A6-B652298478BF}" type="slidenum">
-              <a:rPr lang="en-US" smtClean="0"/>
-              <a:t>2</a:t>
-            </a:fld>
-            <a:endParaRPr lang="en-US"/>
-          </a:p>
-        </p:txBody>
-      </p:sp>
-      <p:pic>
-        <p:nvPicPr>
-          <p:cNvPr id="7" name="Grafik 6">
-            <a:extLst>
-              <a:ext uri="{FF2B5EF4-FFF2-40B4-BE49-F238E27FC236}">
-                <a16:creationId xmlns:a16="http://schemas.microsoft.com/office/drawing/2014/main" id="{9C8081B2-94B4-CCBB-C2BE-58AAF8A23334}"/>
-              </a:ext>
-            </a:extLst>
-          </p:cNvPr>
-          <p:cNvPicPr>
-            <a:picLocks noChangeAspect="1"/>
-          </p:cNvPicPr>
-          <p:nvPr/>
-        </p:nvPicPr>
-        <p:blipFill>
-          <a:blip r:embed="rId3"/>
-          <a:stretch>
-            <a:fillRect/>
-          </a:stretch>
-        </p:blipFill>
-        <p:spPr>
-          <a:xfrm>
-            <a:off x="6884092" y="208432"/>
-            <a:ext cx="2572109" cy="2553056"/>
-          </a:xfrm>
-          <a:prstGeom prst="rect">
-            <a:avLst/>
-          </a:prstGeom>
-        </p:spPr>
-      </p:pic>
-      <p:pic>
-        <p:nvPicPr>
-          <p:cNvPr id="9" name="Grafik 8">
-            <a:extLst>
-              <a:ext uri="{FF2B5EF4-FFF2-40B4-BE49-F238E27FC236}">
-                <a16:creationId xmlns:a16="http://schemas.microsoft.com/office/drawing/2014/main" id="{A0940231-63B6-80BB-CC9D-09DFDE295B63}"/>
-              </a:ext>
-            </a:extLst>
-          </p:cNvPr>
-          <p:cNvPicPr>
-            <a:picLocks noChangeAspect="1"/>
-          </p:cNvPicPr>
-          <p:nvPr/>
-        </p:nvPicPr>
-        <p:blipFill>
-          <a:blip r:embed="rId4"/>
-          <a:stretch>
-            <a:fillRect/>
-          </a:stretch>
-        </p:blipFill>
-        <p:spPr>
-          <a:xfrm>
-            <a:off x="6299816" y="3156368"/>
-            <a:ext cx="2538767" cy="2233925"/>
-          </a:xfrm>
-          <a:prstGeom prst="rect">
-            <a:avLst/>
-          </a:prstGeom>
-        </p:spPr>
-      </p:pic>
-      <p:pic>
-        <p:nvPicPr>
-          <p:cNvPr id="12" name="Grafik 11">
-            <a:extLst>
-              <a:ext uri="{FF2B5EF4-FFF2-40B4-BE49-F238E27FC236}">
-                <a16:creationId xmlns:a16="http://schemas.microsoft.com/office/drawing/2014/main" id="{42449994-9566-A58B-A4C3-88607BD8207A}"/>
-              </a:ext>
-            </a:extLst>
-          </p:cNvPr>
-          <p:cNvPicPr>
-            <a:picLocks noChangeAspect="1"/>
-          </p:cNvPicPr>
-          <p:nvPr/>
-        </p:nvPicPr>
-        <p:blipFill>
-          <a:blip r:embed="rId5"/>
-          <a:stretch>
-            <a:fillRect/>
-          </a:stretch>
-        </p:blipFill>
-        <p:spPr>
-          <a:xfrm>
-            <a:off x="3333364" y="4300371"/>
-            <a:ext cx="2762636" cy="1095528"/>
-          </a:xfrm>
-          <a:prstGeom prst="rect">
-            <a:avLst/>
-          </a:prstGeom>
-        </p:spPr>
-      </p:pic>
-    </p:spTree>
-  </p:cSld>
-  <p:clrMapOvr>
-    <a:masterClrMapping/>
-  </p:clrMapOvr>
-</p:sld>
-</file>
-
-<file path=ppt/slides/slide20.xml><?xml version="1.0" encoding="utf-8"?>
-<p:sld xmlns:a="http://schemas.openxmlformats.org/drawingml/2006/main" xmlns:r="http://schemas.openxmlformats.org/officeDocument/2006/relationships" xmlns:p="http://schemas.openxmlformats.org/presentationml/2006/main" show="0">
-  <p:cSld>
-    <p:spTree>
-      <p:nvGrpSpPr>
-        <p:cNvPr id="1" name="">
-          <a:extLst>
-            <a:ext uri="{FF2B5EF4-FFF2-40B4-BE49-F238E27FC236}">
-              <a16:creationId xmlns:a16="http://schemas.microsoft.com/office/drawing/2014/main" id="{883AC815-F157-F2AE-3D35-07D984B2F491}"/>
-            </a:ext>
-          </a:extLst>
-        </p:cNvPr>
-        <p:cNvGrpSpPr/>
-        <p:nvPr/>
-      </p:nvGrpSpPr>
-      <p:grpSpPr>
-        <a:xfrm>
-          <a:off x="0" y="0"/>
-          <a:ext cx="0" cy="0"/>
-          <a:chOff x="0" y="0"/>
-          <a:chExt cx="0" cy="0"/>
-        </a:xfrm>
-      </p:grpSpPr>
-      <p:sp>
-        <p:nvSpPr>
-          <p:cNvPr id="2" name="Rounded Rectangle 1">
-            <a:extLst>
-              <a:ext uri="{FF2B5EF4-FFF2-40B4-BE49-F238E27FC236}">
-                <a16:creationId xmlns:a16="http://schemas.microsoft.com/office/drawing/2014/main" id="{823E0E6E-474D-5BD5-FA4B-232BE134115F}"/>
-              </a:ext>
-            </a:extLst>
-          </p:cNvPr>
-          <p:cNvSpPr/>
-          <p:nvPr/>
-        </p:nvSpPr>
-        <p:spPr>
-          <a:xfrm>
-            <a:off x="594360" y="475488"/>
-            <a:ext cx="969264" cy="292608"/>
-          </a:xfrm>
-          <a:prstGeom prst="roundRect">
-            <a:avLst/>
-          </a:prstGeom>
-          <a:solidFill>
-            <a:srgbClr val="EEEEEA"/>
-          </a:solidFill>
-          <a:ln w="10160">
-            <a:solidFill>
-              <a:srgbClr val="EEEEEA"/>
-            </a:solidFill>
-          </a:ln>
-        </p:spPr>
-        <p:style>
-          <a:lnRef idx="1">
-            <a:schemeClr val="accent1"/>
-          </a:lnRef>
-          <a:fillRef idx="3">
-            <a:schemeClr val="accent1"/>
-          </a:fillRef>
-          <a:effectRef idx="2">
-            <a:schemeClr val="accent1"/>
-          </a:effectRef>
-          <a:fontRef idx="minor">
-            <a:schemeClr val="lt1"/>
-          </a:fontRef>
-        </p:style>
-        <p:txBody>
-          <a:bodyPr rtlCol="0" anchor="ctr"/>
-          <a:lstStyle/>
-          <a:p>
-            <a:pPr algn="ctr"/>
-            <a:endParaRPr/>
-          </a:p>
-        </p:txBody>
-      </p:sp>
-      <p:sp>
-        <p:nvSpPr>
           <p:cNvPr id="3" name="TextBox 2">
             <a:extLst>
               <a:ext uri="{FF2B5EF4-FFF2-40B4-BE49-F238E27FC236}">
@@ -18592,14 +13299,14 @@
           <a:p>
             <a:fld id="{C1FF6DA9-008F-8B48-92A6-B652298478BF}" type="slidenum">
               <a:rPr lang="en-US" smtClean="0"/>
-              <a:t>20</a:t>
+              <a:t>17</a:t>
             </a:fld>
             <a:endParaRPr lang="en-US"/>
           </a:p>
         </p:txBody>
       </p:sp>
-      <mc:AlternateContent xmlns:mc="http://schemas.openxmlformats.org/markup-compatibility/2006">
-        <mc:Choice xmlns:a14="http://schemas.microsoft.com/office/drawing/2010/main" Requires="a14">
+      <mc:AlternateContent xmlns:mc="http://schemas.openxmlformats.org/markup-compatibility/2006" xmlns:a14="http://schemas.microsoft.com/office/drawing/2010/main">
+        <mc:Choice Requires="a14">
           <p:sp>
             <p:nvSpPr>
               <p:cNvPr id="5" name="Content Placeholder 2">
@@ -19744,7 +14451,7 @@
             </p:txBody>
           </p:sp>
         </mc:Choice>
-        <mc:Fallback>
+        <mc:Fallback xmlns="">
           <p:sp>
             <p:nvSpPr>
               <p:cNvPr id="5" name="Content Placeholder 2">
@@ -20226,7 +14933,7 @@
 </p:sld>
 </file>
 
-<file path=ppt/slides/slide21.xml><?xml version="1.0" encoding="utf-8"?>
+<file path=ppt/slides/slide18.xml><?xml version="1.0" encoding="utf-8"?>
 <p:sld xmlns:a="http://schemas.openxmlformats.org/drawingml/2006/main" xmlns:r="http://schemas.openxmlformats.org/officeDocument/2006/relationships" xmlns:p="http://schemas.openxmlformats.org/presentationml/2006/main">
   <p:cSld>
     <p:spTree>
@@ -20475,7 +15182,7 @@
           <a:p>
             <a:fld id="{C1FF6DA9-008F-8B48-92A6-B652298478BF}" type="slidenum">
               <a:rPr lang="en-US" smtClean="0"/>
-              <a:t>21</a:t>
+              <a:t>18</a:t>
             </a:fld>
             <a:endParaRPr lang="en-US"/>
           </a:p>
@@ -20639,7 +15346,7 @@
 </p:sld>
 </file>
 
-<file path=ppt/slides/slide22.xml><?xml version="1.0" encoding="utf-8"?>
+<file path=ppt/slides/slide19.xml><?xml version="1.0" encoding="utf-8"?>
 <p:sld xmlns:a="http://schemas.openxmlformats.org/drawingml/2006/main" xmlns:r="http://schemas.openxmlformats.org/officeDocument/2006/relationships" xmlns:p="http://schemas.openxmlformats.org/presentationml/2006/main">
   <p:cSld>
     <p:spTree>
@@ -20888,7 +15595,7 @@
           <a:p>
             <a:fld id="{C1FF6DA9-008F-8B48-92A6-B652298478BF}" type="slidenum">
               <a:rPr lang="en-US" smtClean="0"/>
-              <a:t>22</a:t>
+              <a:t>19</a:t>
             </a:fld>
             <a:endParaRPr lang="en-US"/>
           </a:p>
@@ -20991,18 +15698,20 @@
 </p:sld>
 </file>
 
-<file path=ppt/slides/slide23.xml><?xml version="1.0" encoding="utf-8"?>
+<file path=ppt/slides/slide2.xml><?xml version="1.0" encoding="utf-8"?>
 <p:sld xmlns:a="http://schemas.openxmlformats.org/drawingml/2006/main" xmlns:r="http://schemas.openxmlformats.org/officeDocument/2006/relationships" xmlns:p="http://schemas.openxmlformats.org/presentationml/2006/main">
   <p:cSld>
+    <p:bg>
+      <p:bgPr>
+        <a:solidFill>
+          <a:schemeClr val="bg1"/>
+        </a:solidFill>
+        <a:effectLst/>
+      </p:bgPr>
+    </p:bg>
     <p:spTree>
       <p:nvGrpSpPr>
-        <p:cNvPr id="1" name="">
-          <a:extLst>
-            <a:ext uri="{FF2B5EF4-FFF2-40B4-BE49-F238E27FC236}">
-              <a16:creationId xmlns:a16="http://schemas.microsoft.com/office/drawing/2014/main" id="{4C099528-8CEB-095D-F2C7-3A2F746EE970}"/>
-            </a:ext>
-          </a:extLst>
-        </p:cNvPr>
+        <p:cNvPr id="1" name=""/>
         <p:cNvGrpSpPr/>
         <p:nvPr/>
       </p:nvGrpSpPr>
@@ -21016,13 +15725,7 @@
       </p:grpSpPr>
       <p:sp>
         <p:nvSpPr>
-          <p:cNvPr id="2" name="Rounded Rectangle 1">
-            <a:extLst>
-              <a:ext uri="{FF2B5EF4-FFF2-40B4-BE49-F238E27FC236}">
-                <a16:creationId xmlns:a16="http://schemas.microsoft.com/office/drawing/2014/main" id="{A9FCB194-E7A6-44C4-6916-5FED6A2E07D1}"/>
-              </a:ext>
-            </a:extLst>
-          </p:cNvPr>
+          <p:cNvPr id="2" name="Rounded Rectangle 1"/>
           <p:cNvSpPr/>
           <p:nvPr/>
         </p:nvSpPr>
@@ -21068,20 +15771,14 @@
       </p:sp>
       <p:sp>
         <p:nvSpPr>
-          <p:cNvPr id="3" name="TextBox 2">
-            <a:extLst>
-              <a:ext uri="{FF2B5EF4-FFF2-40B4-BE49-F238E27FC236}">
-                <a16:creationId xmlns:a16="http://schemas.microsoft.com/office/drawing/2014/main" id="{15EB27D2-755F-898F-C6B8-4DA3F502ACEE}"/>
-              </a:ext>
-            </a:extLst>
-          </p:cNvPr>
+          <p:cNvPr id="3" name="TextBox 2"/>
           <p:cNvSpPr txBox="1"/>
           <p:nvPr/>
         </p:nvSpPr>
         <p:spPr>
           <a:xfrm>
-            <a:off x="893847" y="542673"/>
-            <a:ext cx="370294" cy="130805"/>
+            <a:off x="934724" y="542673"/>
+            <a:ext cx="288542" cy="130805"/>
           </a:xfrm>
           <a:prstGeom prst="rect">
             <a:avLst/>
@@ -21102,7 +15799,7 @@
                 </a:solidFill>
                 <a:latin typeface="Aptos"/>
               </a:rPr>
-              <a:t>Theorie</a:t>
+              <a:t>Inhalt</a:t>
             </a:r>
             <a:endParaRPr sz="850" b="1" dirty="0">
               <a:solidFill>
@@ -21115,20 +15812,14 @@
       </p:sp>
       <p:sp>
         <p:nvSpPr>
-          <p:cNvPr id="4" name="TextBox 3">
-            <a:extLst>
-              <a:ext uri="{FF2B5EF4-FFF2-40B4-BE49-F238E27FC236}">
-                <a16:creationId xmlns:a16="http://schemas.microsoft.com/office/drawing/2014/main" id="{E89BE684-F7A6-9E73-779F-A238F3669D6B}"/>
-              </a:ext>
-            </a:extLst>
-          </p:cNvPr>
+          <p:cNvPr id="4" name="TextBox 3"/>
           <p:cNvSpPr txBox="1"/>
           <p:nvPr/>
         </p:nvSpPr>
         <p:spPr>
           <a:xfrm>
             <a:off x="594360" y="932688"/>
-            <a:ext cx="5095882" cy="477054"/>
+            <a:ext cx="4283417" cy="477054"/>
           </a:xfrm>
           <a:prstGeom prst="rect">
             <a:avLst/>
@@ -21149,7 +15840,7 @@
                 </a:solidFill>
                 <a:latin typeface="Aptos"/>
               </a:rPr>
-              <a:t>Maschengleichungen finden</a:t>
+              <a:t>Was machen wir heute?</a:t>
             </a:r>
             <a:endParaRPr sz="3100" b="1" dirty="0">
               <a:solidFill>
@@ -21162,106 +15853,14 @@
       </p:sp>
       <p:sp>
         <p:nvSpPr>
-          <p:cNvPr id="15" name="Datumsplatzhalter 14">
-            <a:extLst>
-              <a:ext uri="{FF2B5EF4-FFF2-40B4-BE49-F238E27FC236}">
-                <a16:creationId xmlns:a16="http://schemas.microsoft.com/office/drawing/2014/main" id="{E59C5943-1FCB-D003-4EDC-2AD866F6C35F}"/>
-              </a:ext>
-            </a:extLst>
-          </p:cNvPr>
-          <p:cNvSpPr>
-            <a:spLocks noGrp="1"/>
-          </p:cNvSpPr>
-          <p:nvPr>
-            <p:ph type="dt" sz="half" idx="10"/>
-          </p:nvPr>
-        </p:nvSpPr>
-        <p:spPr/>
-        <p:txBody>
-          <a:bodyPr/>
-          <a:lstStyle/>
-          <a:p>
-            <a:fld id="{5BEE0FE1-AF03-4944-8B59-6F3340FFC6D2}" type="datetime1">
-              <a:rPr lang="de-CH" smtClean="0"/>
-              <a:t>21.10.2026</a:t>
-            </a:fld>
-            <a:endParaRPr lang="en-US"/>
-          </a:p>
-        </p:txBody>
-      </p:sp>
-      <p:sp>
-        <p:nvSpPr>
-          <p:cNvPr id="16" name="Fußzeilenplatzhalter 15">
-            <a:extLst>
-              <a:ext uri="{FF2B5EF4-FFF2-40B4-BE49-F238E27FC236}">
-                <a16:creationId xmlns:a16="http://schemas.microsoft.com/office/drawing/2014/main" id="{F768DD35-6A7B-0643-33D5-C37702CAE695}"/>
-              </a:ext>
-            </a:extLst>
-          </p:cNvPr>
-          <p:cNvSpPr>
-            <a:spLocks noGrp="1"/>
-          </p:cNvSpPr>
-          <p:nvPr>
-            <p:ph type="ftr" sz="quarter" idx="11"/>
-          </p:nvPr>
-        </p:nvSpPr>
-        <p:spPr/>
-        <p:txBody>
-          <a:bodyPr/>
-          <a:lstStyle/>
-          <a:p>
-            <a:r>
-              <a:rPr lang="en-US" dirty="0"/>
-              <a:t>Enrico Putzi W06</a:t>
-            </a:r>
-          </a:p>
-        </p:txBody>
-      </p:sp>
-      <p:sp>
-        <p:nvSpPr>
-          <p:cNvPr id="17" name="Foliennummernplatzhalter 16">
-            <a:extLst>
-              <a:ext uri="{FF2B5EF4-FFF2-40B4-BE49-F238E27FC236}">
-                <a16:creationId xmlns:a16="http://schemas.microsoft.com/office/drawing/2014/main" id="{F187A1F6-DB8E-40FF-B545-20B9529BE35E}"/>
-              </a:ext>
-            </a:extLst>
-          </p:cNvPr>
-          <p:cNvSpPr>
-            <a:spLocks noGrp="1"/>
-          </p:cNvSpPr>
-          <p:nvPr>
-            <p:ph type="sldNum" sz="quarter" idx="12"/>
-          </p:nvPr>
-        </p:nvSpPr>
-        <p:spPr/>
-        <p:txBody>
-          <a:bodyPr/>
-          <a:lstStyle/>
-          <a:p>
-            <a:fld id="{C1FF6DA9-008F-8B48-92A6-B652298478BF}" type="slidenum">
-              <a:rPr lang="en-US" smtClean="0"/>
-              <a:t>23</a:t>
-            </a:fld>
-            <a:endParaRPr lang="en-US"/>
-          </a:p>
-        </p:txBody>
-      </p:sp>
-      <p:sp>
-        <p:nvSpPr>
-          <p:cNvPr id="5" name="Textfeld 4">
-            <a:extLst>
-              <a:ext uri="{FF2B5EF4-FFF2-40B4-BE49-F238E27FC236}">
-                <a16:creationId xmlns:a16="http://schemas.microsoft.com/office/drawing/2014/main" id="{27991786-2832-808F-7679-D96214487431}"/>
-              </a:ext>
-            </a:extLst>
-          </p:cNvPr>
+          <p:cNvPr id="11" name="TextBox 10"/>
           <p:cNvSpPr txBox="1"/>
           <p:nvPr/>
         </p:nvSpPr>
         <p:spPr>
           <a:xfrm>
-            <a:off x="594360" y="1574334"/>
-            <a:ext cx="6312818" cy="646331"/>
+            <a:off x="914400" y="2761488"/>
+            <a:ext cx="4393510" cy="1538883"/>
           </a:xfrm>
           <a:prstGeom prst="rect">
             <a:avLst/>
@@ -21269,38 +15868,193 @@
           <a:noFill/>
         </p:spPr>
         <p:txBody>
-          <a:bodyPr wrap="none" rtlCol="0">
+          <a:bodyPr wrap="none" lIns="0" tIns="0" rIns="0" bIns="0" anchor="t">
             <a:spAutoFit/>
           </a:bodyPr>
           <a:lstStyle/>
           <a:p>
-            <a:pPr marL="285750" indent="-285750">
+            <a:pPr marL="342900" indent="-342900" algn="l">
               <a:buFont typeface="Arial" panose="020B0604020202020204" pitchFamily="34" charset="0"/>
               <a:buChar char="•"/>
             </a:pPr>
             <a:r>
-              <a:rPr lang="de-CH" dirty="0"/>
-              <a:t>Uns fehlen noch m=z-(k-1) Gleichungen</a:t>
+              <a:rPr lang="de-CH" sz="2000" b="0" dirty="0">
+                <a:solidFill>
+                  <a:srgbClr val="171717"/>
+                </a:solidFill>
+                <a:latin typeface="Aptos"/>
+              </a:rPr>
+              <a:t>Reale Spannungs- und Stromquellen</a:t>
             </a:r>
-          </a:p>
-          <a:p>
-            <a:pPr marL="285750" indent="-285750">
+            <a:r>
+              <a:rPr sz="2000" b="0" dirty="0">
+                <a:solidFill>
+                  <a:srgbClr val="171717"/>
+                </a:solidFill>
+                <a:latin typeface="Aptos"/>
+              </a:rPr>
+              <a:t>
+</a:t>
+            </a:r>
+            <a:r>
+              <a:rPr lang="de-CH" sz="2000" b="0" dirty="0">
+                <a:solidFill>
+                  <a:srgbClr val="171717"/>
+                </a:solidFill>
+                <a:latin typeface="Aptos"/>
+              </a:rPr>
+              <a:t>Leistungsanpassung</a:t>
+            </a:r>
+            <a:r>
+              <a:rPr sz="2000" b="0" dirty="0">
+                <a:solidFill>
+                  <a:srgbClr val="171717"/>
+                </a:solidFill>
+                <a:latin typeface="Aptos"/>
+              </a:rPr>
+              <a:t>
+</a:t>
+            </a:r>
+            <a:r>
+              <a:rPr lang="de-CH" sz="2000" dirty="0">
+                <a:solidFill>
+                  <a:srgbClr val="171717"/>
+                </a:solidFill>
+                <a:latin typeface="Aptos"/>
+              </a:rPr>
+              <a:t>Netzwerkumwandlung </a:t>
+            </a:r>
+          </a:p>
+          <a:p>
+            <a:pPr marL="342900" indent="-342900" algn="l">
               <a:buFont typeface="Arial" panose="020B0604020202020204" pitchFamily="34" charset="0"/>
               <a:buChar char="•"/>
             </a:pPr>
             <a:r>
-              <a:rPr lang="de-CH" dirty="0"/>
-              <a:t>Entweder Vollständiger Baum oder Auftrennung der Maschen </a:t>
+              <a:rPr lang="de-CH" sz="2000" dirty="0">
+                <a:solidFill>
+                  <a:srgbClr val="171717"/>
+                </a:solidFill>
+                <a:latin typeface="Aptos"/>
+              </a:rPr>
+              <a:t>Überlagerungsprinzip</a:t>
             </a:r>
+          </a:p>
+          <a:p>
+            <a:pPr marL="342900" indent="-342900" algn="l">
+              <a:buFont typeface="Arial" panose="020B0604020202020204" pitchFamily="34" charset="0"/>
+              <a:buChar char="•"/>
+            </a:pPr>
+            <a:r>
+              <a:rPr lang="de-CH" sz="2000" b="0" dirty="0">
+                <a:solidFill>
+                  <a:srgbClr val="171717"/>
+                </a:solidFill>
+                <a:latin typeface="Aptos"/>
+              </a:rPr>
+              <a:t>Netzwerkanalyse</a:t>
+            </a:r>
+            <a:endParaRPr sz="2000" b="0" dirty="0">
+              <a:solidFill>
+                <a:srgbClr val="171717"/>
+              </a:solidFill>
+              <a:latin typeface="Aptos"/>
+            </a:endParaRPr>
+          </a:p>
+        </p:txBody>
+      </p:sp>
+      <p:sp>
+        <p:nvSpPr>
+          <p:cNvPr id="15" name="Datumsplatzhalter 14">
+            <a:extLst>
+              <a:ext uri="{FF2B5EF4-FFF2-40B4-BE49-F238E27FC236}">
+                <a16:creationId xmlns:a16="http://schemas.microsoft.com/office/drawing/2014/main" id="{FA1345AC-CE9B-7FE2-5382-D92AEFB1F35A}"/>
+              </a:ext>
+            </a:extLst>
+          </p:cNvPr>
+          <p:cNvSpPr>
+            <a:spLocks noGrp="1"/>
+          </p:cNvSpPr>
+          <p:nvPr>
+            <p:ph type="dt" sz="half" idx="10"/>
+          </p:nvPr>
+        </p:nvSpPr>
+        <p:spPr/>
+        <p:txBody>
+          <a:bodyPr/>
+          <a:lstStyle/>
+          <a:p>
+            <a:fld id="{5BEE0FE1-AF03-4944-8B59-6F3340FFC6D2}" type="datetime1">
+              <a:rPr lang="de-CH" smtClean="0"/>
+              <a:t>21.10.2026</a:t>
+            </a:fld>
+            <a:endParaRPr lang="en-US"/>
+          </a:p>
+        </p:txBody>
+      </p:sp>
+      <p:sp>
+        <p:nvSpPr>
+          <p:cNvPr id="16" name="Fußzeilenplatzhalter 15">
+            <a:extLst>
+              <a:ext uri="{FF2B5EF4-FFF2-40B4-BE49-F238E27FC236}">
+                <a16:creationId xmlns:a16="http://schemas.microsoft.com/office/drawing/2014/main" id="{5890F6DA-FF1C-B12F-C9A4-D27FAC23DAF3}"/>
+              </a:ext>
+            </a:extLst>
+          </p:cNvPr>
+          <p:cNvSpPr>
+            <a:spLocks noGrp="1"/>
+          </p:cNvSpPr>
+          <p:nvPr>
+            <p:ph type="ftr" sz="quarter" idx="11"/>
+          </p:nvPr>
+        </p:nvSpPr>
+        <p:spPr/>
+        <p:txBody>
+          <a:bodyPr/>
+          <a:lstStyle/>
+          <a:p>
+            <a:r>
+              <a:rPr lang="en-US" dirty="0"/>
+              <a:t>Enrico Putzi W06</a:t>
+            </a:r>
+          </a:p>
+        </p:txBody>
+      </p:sp>
+      <p:sp>
+        <p:nvSpPr>
+          <p:cNvPr id="17" name="Foliennummernplatzhalter 16">
+            <a:extLst>
+              <a:ext uri="{FF2B5EF4-FFF2-40B4-BE49-F238E27FC236}">
+                <a16:creationId xmlns:a16="http://schemas.microsoft.com/office/drawing/2014/main" id="{00071AF8-AC7C-5E34-152B-776853FD6453}"/>
+              </a:ext>
+            </a:extLst>
+          </p:cNvPr>
+          <p:cNvSpPr>
+            <a:spLocks noGrp="1"/>
+          </p:cNvSpPr>
+          <p:nvPr>
+            <p:ph type="sldNum" sz="quarter" idx="12"/>
+          </p:nvPr>
+        </p:nvSpPr>
+        <p:spPr/>
+        <p:txBody>
+          <a:bodyPr/>
+          <a:lstStyle/>
+          <a:p>
+            <a:fld id="{C1FF6DA9-008F-8B48-92A6-B652298478BF}" type="slidenum">
+              <a:rPr lang="en-US" smtClean="0"/>
+              <a:t>2</a:t>
+            </a:fld>
+            <a:endParaRPr lang="en-US"/>
           </a:p>
         </p:txBody>
       </p:sp>
       <p:pic>
         <p:nvPicPr>
-          <p:cNvPr id="8" name="Grafik 7">
-            <a:extLst>
-              <a:ext uri="{FF2B5EF4-FFF2-40B4-BE49-F238E27FC236}">
-                <a16:creationId xmlns:a16="http://schemas.microsoft.com/office/drawing/2014/main" id="{5306B513-A4B0-2793-3388-8EB95F6BF842}"/>
+          <p:cNvPr id="7" name="Grafik 6">
+            <a:extLst>
+              <a:ext uri="{FF2B5EF4-FFF2-40B4-BE49-F238E27FC236}">
+                <a16:creationId xmlns:a16="http://schemas.microsoft.com/office/drawing/2014/main" id="{9C8081B2-94B4-CCBB-C2BE-58AAF8A23334}"/>
               </a:ext>
             </a:extLst>
           </p:cNvPr>
@@ -21317,8 +16071,8 @@
         </p:blipFill>
         <p:spPr>
           <a:xfrm>
-            <a:off x="892870" y="2453504"/>
-            <a:ext cx="2857899" cy="2048161"/>
+            <a:off x="6884092" y="208432"/>
+            <a:ext cx="2572109" cy="2553056"/>
           </a:xfrm>
           <a:prstGeom prst="rect">
             <a:avLst/>
@@ -21327,10 +16081,10 @@
       </p:pic>
       <p:pic>
         <p:nvPicPr>
-          <p:cNvPr id="10" name="Grafik 9">
-            <a:extLst>
-              <a:ext uri="{FF2B5EF4-FFF2-40B4-BE49-F238E27FC236}">
-                <a16:creationId xmlns:a16="http://schemas.microsoft.com/office/drawing/2014/main" id="{0E8C76CD-595C-5F91-DCEB-ABE0249A7A3D}"/>
+          <p:cNvPr id="9" name="Grafik 8">
+            <a:extLst>
+              <a:ext uri="{FF2B5EF4-FFF2-40B4-BE49-F238E27FC236}">
+                <a16:creationId xmlns:a16="http://schemas.microsoft.com/office/drawing/2014/main" id="{A0940231-63B6-80BB-CC9D-09DFDE295B63}"/>
               </a:ext>
             </a:extLst>
           </p:cNvPr>
@@ -21347,8 +16101,8 @@
         </p:blipFill>
         <p:spPr>
           <a:xfrm>
-            <a:off x="204760" y="4519159"/>
-            <a:ext cx="4234118" cy="1239537"/>
+            <a:off x="6299816" y="3156368"/>
+            <a:ext cx="2538767" cy="2233925"/>
           </a:xfrm>
           <a:prstGeom prst="rect">
             <a:avLst/>
@@ -21360,7 +16114,7 @@
           <p:cNvPr id="12" name="Grafik 11">
             <a:extLst>
               <a:ext uri="{FF2B5EF4-FFF2-40B4-BE49-F238E27FC236}">
-                <a16:creationId xmlns:a16="http://schemas.microsoft.com/office/drawing/2014/main" id="{DD5828D7-D4EA-DE9A-B0C1-D436BAC111AF}"/>
+                <a16:creationId xmlns:a16="http://schemas.microsoft.com/office/drawing/2014/main" id="{42449994-9566-A58B-A4C3-88607BD8207A}"/>
               </a:ext>
             </a:extLst>
           </p:cNvPr>
@@ -21377,67 +16131,15 @@
         </p:blipFill>
         <p:spPr>
           <a:xfrm>
-            <a:off x="5042546" y="3074720"/>
-            <a:ext cx="6944694" cy="1971950"/>
+            <a:off x="3333364" y="4300371"/>
+            <a:ext cx="2762636" cy="1095528"/>
           </a:xfrm>
           <a:prstGeom prst="rect">
             <a:avLst/>
           </a:prstGeom>
         </p:spPr>
       </p:pic>
-      <p:sp>
-        <p:nvSpPr>
-          <p:cNvPr id="14" name="Textfeld 13">
-            <a:extLst>
-              <a:ext uri="{FF2B5EF4-FFF2-40B4-BE49-F238E27FC236}">
-                <a16:creationId xmlns:a16="http://schemas.microsoft.com/office/drawing/2014/main" id="{1D70EC92-D768-D392-31D2-03DC5A02EC1C}"/>
-              </a:ext>
-            </a:extLst>
-          </p:cNvPr>
-          <p:cNvSpPr txBox="1"/>
-          <p:nvPr/>
-        </p:nvSpPr>
-        <p:spPr>
-          <a:xfrm>
-            <a:off x="7571232" y="329184"/>
-            <a:ext cx="3263073" cy="923330"/>
-          </a:xfrm>
-          <a:prstGeom prst="rect">
-            <a:avLst/>
-          </a:prstGeom>
-          <a:noFill/>
-        </p:spPr>
-        <p:txBody>
-          <a:bodyPr wrap="none" rtlCol="0">
-            <a:spAutoFit/>
-          </a:bodyPr>
-          <a:lstStyle/>
-          <a:p>
-            <a:r>
-              <a:rPr lang="de-CH" dirty="0"/>
-              <a:t>z = Anzahl Unbekannte</a:t>
-            </a:r>
-          </a:p>
-          <a:p>
-            <a:r>
-              <a:rPr lang="de-CH" dirty="0"/>
-              <a:t>k = Anzahl Knoten</a:t>
-            </a:r>
-          </a:p>
-          <a:p>
-            <a:r>
-              <a:rPr lang="de-CH" dirty="0"/>
-              <a:t>m = Anzahl Maschengleichungen</a:t>
-            </a:r>
-          </a:p>
-        </p:txBody>
-      </p:sp>
     </p:spTree>
-    <p:extLst>
-      <p:ext uri="{BB962C8B-B14F-4D97-AF65-F5344CB8AC3E}">
-        <p14:creationId xmlns:p14="http://schemas.microsoft.com/office/powerpoint/2010/main" val="1161669360"/>
-      </p:ext>
-    </p:extLst>
   </p:cSld>
   <p:clrMapOvr>
     <a:masterClrMapping/>
@@ -21445,7 +16147,7 @@
 </p:sld>
 </file>
 
-<file path=ppt/slides/slide24.xml><?xml version="1.0" encoding="utf-8"?>
+<file path=ppt/slides/slide20.xml><?xml version="1.0" encoding="utf-8"?>
 <p:sld xmlns:a="http://schemas.openxmlformats.org/drawingml/2006/main" xmlns:r="http://schemas.openxmlformats.org/officeDocument/2006/relationships" xmlns:p="http://schemas.openxmlformats.org/presentationml/2006/main">
   <p:cSld>
     <p:spTree>
@@ -21453,7 +16155,7 @@
         <p:cNvPr id="1" name="">
           <a:extLst>
             <a:ext uri="{FF2B5EF4-FFF2-40B4-BE49-F238E27FC236}">
-              <a16:creationId xmlns:a16="http://schemas.microsoft.com/office/drawing/2014/main" id="{BCE8E6B7-CD49-E972-8361-52304C16D0DC}"/>
+              <a16:creationId xmlns:a16="http://schemas.microsoft.com/office/drawing/2014/main" id="{4C099528-8CEB-095D-F2C7-3A2F746EE970}"/>
             </a:ext>
           </a:extLst>
         </p:cNvPr>
@@ -21473,7 +16175,7 @@
           <p:cNvPr id="2" name="Rounded Rectangle 1">
             <a:extLst>
               <a:ext uri="{FF2B5EF4-FFF2-40B4-BE49-F238E27FC236}">
-                <a16:creationId xmlns:a16="http://schemas.microsoft.com/office/drawing/2014/main" id="{B86BC0FC-0445-C60F-5A15-35ACA47BD380}"/>
+                <a16:creationId xmlns:a16="http://schemas.microsoft.com/office/drawing/2014/main" id="{A9FCB194-E7A6-44C4-6916-5FED6A2E07D1}"/>
               </a:ext>
             </a:extLst>
           </p:cNvPr>
@@ -21525,7 +16227,7 @@
           <p:cNvPr id="3" name="TextBox 2">
             <a:extLst>
               <a:ext uri="{FF2B5EF4-FFF2-40B4-BE49-F238E27FC236}">
-                <a16:creationId xmlns:a16="http://schemas.microsoft.com/office/drawing/2014/main" id="{15DB22C5-95BA-2209-D9CF-E94B62527584}"/>
+                <a16:creationId xmlns:a16="http://schemas.microsoft.com/office/drawing/2014/main" id="{15EB27D2-755F-898F-C6B8-4DA3F502ACEE}"/>
               </a:ext>
             </a:extLst>
           </p:cNvPr>
@@ -21572,6 +16274,460 @@
           <p:cNvPr id="4" name="TextBox 3">
             <a:extLst>
               <a:ext uri="{FF2B5EF4-FFF2-40B4-BE49-F238E27FC236}">
+                <a16:creationId xmlns:a16="http://schemas.microsoft.com/office/drawing/2014/main" id="{E89BE684-F7A6-9E73-779F-A238F3669D6B}"/>
+              </a:ext>
+            </a:extLst>
+          </p:cNvPr>
+          <p:cNvSpPr txBox="1"/>
+          <p:nvPr/>
+        </p:nvSpPr>
+        <p:spPr>
+          <a:xfrm>
+            <a:off x="594360" y="932688"/>
+            <a:ext cx="5095882" cy="477054"/>
+          </a:xfrm>
+          <a:prstGeom prst="rect">
+            <a:avLst/>
+          </a:prstGeom>
+          <a:noFill/>
+        </p:spPr>
+        <p:txBody>
+          <a:bodyPr wrap="none" lIns="0" tIns="0" rIns="0" bIns="0" anchor="t">
+            <a:spAutoFit/>
+          </a:bodyPr>
+          <a:lstStyle/>
+          <a:p>
+            <a:pPr algn="l"/>
+            <a:r>
+              <a:rPr lang="de-CH" sz="3100" b="1" dirty="0">
+                <a:solidFill>
+                  <a:srgbClr val="171717"/>
+                </a:solidFill>
+                <a:latin typeface="Aptos"/>
+              </a:rPr>
+              <a:t>Maschengleichungen finden</a:t>
+            </a:r>
+            <a:endParaRPr sz="3100" b="1" dirty="0">
+              <a:solidFill>
+                <a:srgbClr val="171717"/>
+              </a:solidFill>
+              <a:latin typeface="Aptos"/>
+            </a:endParaRPr>
+          </a:p>
+        </p:txBody>
+      </p:sp>
+      <p:sp>
+        <p:nvSpPr>
+          <p:cNvPr id="15" name="Datumsplatzhalter 14">
+            <a:extLst>
+              <a:ext uri="{FF2B5EF4-FFF2-40B4-BE49-F238E27FC236}">
+                <a16:creationId xmlns:a16="http://schemas.microsoft.com/office/drawing/2014/main" id="{E59C5943-1FCB-D003-4EDC-2AD866F6C35F}"/>
+              </a:ext>
+            </a:extLst>
+          </p:cNvPr>
+          <p:cNvSpPr>
+            <a:spLocks noGrp="1"/>
+          </p:cNvSpPr>
+          <p:nvPr>
+            <p:ph type="dt" sz="half" idx="10"/>
+          </p:nvPr>
+        </p:nvSpPr>
+        <p:spPr/>
+        <p:txBody>
+          <a:bodyPr/>
+          <a:lstStyle/>
+          <a:p>
+            <a:fld id="{5BEE0FE1-AF03-4944-8B59-6F3340FFC6D2}" type="datetime1">
+              <a:rPr lang="de-CH" smtClean="0"/>
+              <a:t>21.10.2026</a:t>
+            </a:fld>
+            <a:endParaRPr lang="en-US"/>
+          </a:p>
+        </p:txBody>
+      </p:sp>
+      <p:sp>
+        <p:nvSpPr>
+          <p:cNvPr id="16" name="Fußzeilenplatzhalter 15">
+            <a:extLst>
+              <a:ext uri="{FF2B5EF4-FFF2-40B4-BE49-F238E27FC236}">
+                <a16:creationId xmlns:a16="http://schemas.microsoft.com/office/drawing/2014/main" id="{F768DD35-6A7B-0643-33D5-C37702CAE695}"/>
+              </a:ext>
+            </a:extLst>
+          </p:cNvPr>
+          <p:cNvSpPr>
+            <a:spLocks noGrp="1"/>
+          </p:cNvSpPr>
+          <p:nvPr>
+            <p:ph type="ftr" sz="quarter" idx="11"/>
+          </p:nvPr>
+        </p:nvSpPr>
+        <p:spPr/>
+        <p:txBody>
+          <a:bodyPr/>
+          <a:lstStyle/>
+          <a:p>
+            <a:r>
+              <a:rPr lang="en-US" dirty="0"/>
+              <a:t>Enrico Putzi W06</a:t>
+            </a:r>
+          </a:p>
+        </p:txBody>
+      </p:sp>
+      <p:sp>
+        <p:nvSpPr>
+          <p:cNvPr id="17" name="Foliennummernplatzhalter 16">
+            <a:extLst>
+              <a:ext uri="{FF2B5EF4-FFF2-40B4-BE49-F238E27FC236}">
+                <a16:creationId xmlns:a16="http://schemas.microsoft.com/office/drawing/2014/main" id="{F187A1F6-DB8E-40FF-B545-20B9529BE35E}"/>
+              </a:ext>
+            </a:extLst>
+          </p:cNvPr>
+          <p:cNvSpPr>
+            <a:spLocks noGrp="1"/>
+          </p:cNvSpPr>
+          <p:nvPr>
+            <p:ph type="sldNum" sz="quarter" idx="12"/>
+          </p:nvPr>
+        </p:nvSpPr>
+        <p:spPr/>
+        <p:txBody>
+          <a:bodyPr/>
+          <a:lstStyle/>
+          <a:p>
+            <a:fld id="{C1FF6DA9-008F-8B48-92A6-B652298478BF}" type="slidenum">
+              <a:rPr lang="en-US" smtClean="0"/>
+              <a:t>20</a:t>
+            </a:fld>
+            <a:endParaRPr lang="en-US"/>
+          </a:p>
+        </p:txBody>
+      </p:sp>
+      <p:sp>
+        <p:nvSpPr>
+          <p:cNvPr id="5" name="Textfeld 4">
+            <a:extLst>
+              <a:ext uri="{FF2B5EF4-FFF2-40B4-BE49-F238E27FC236}">
+                <a16:creationId xmlns:a16="http://schemas.microsoft.com/office/drawing/2014/main" id="{27991786-2832-808F-7679-D96214487431}"/>
+              </a:ext>
+            </a:extLst>
+          </p:cNvPr>
+          <p:cNvSpPr txBox="1"/>
+          <p:nvPr/>
+        </p:nvSpPr>
+        <p:spPr>
+          <a:xfrm>
+            <a:off x="594360" y="1574334"/>
+            <a:ext cx="6312818" cy="646331"/>
+          </a:xfrm>
+          <a:prstGeom prst="rect">
+            <a:avLst/>
+          </a:prstGeom>
+          <a:noFill/>
+        </p:spPr>
+        <p:txBody>
+          <a:bodyPr wrap="none" rtlCol="0">
+            <a:spAutoFit/>
+          </a:bodyPr>
+          <a:lstStyle/>
+          <a:p>
+            <a:pPr marL="285750" indent="-285750">
+              <a:buFont typeface="Arial" panose="020B0604020202020204" pitchFamily="34" charset="0"/>
+              <a:buChar char="•"/>
+            </a:pPr>
+            <a:r>
+              <a:rPr lang="de-CH" dirty="0"/>
+              <a:t>Uns fehlen noch m=z-(k-1) Gleichungen</a:t>
+            </a:r>
+          </a:p>
+          <a:p>
+            <a:pPr marL="285750" indent="-285750">
+              <a:buFont typeface="Arial" panose="020B0604020202020204" pitchFamily="34" charset="0"/>
+              <a:buChar char="•"/>
+            </a:pPr>
+            <a:r>
+              <a:rPr lang="de-CH" dirty="0"/>
+              <a:t>Entweder Vollständiger Baum oder Auftrennung der Maschen </a:t>
+            </a:r>
+          </a:p>
+        </p:txBody>
+      </p:sp>
+      <p:pic>
+        <p:nvPicPr>
+          <p:cNvPr id="8" name="Grafik 7">
+            <a:extLst>
+              <a:ext uri="{FF2B5EF4-FFF2-40B4-BE49-F238E27FC236}">
+                <a16:creationId xmlns:a16="http://schemas.microsoft.com/office/drawing/2014/main" id="{5306B513-A4B0-2793-3388-8EB95F6BF842}"/>
+              </a:ext>
+            </a:extLst>
+          </p:cNvPr>
+          <p:cNvPicPr>
+            <a:picLocks noChangeAspect="1"/>
+          </p:cNvPicPr>
+          <p:nvPr/>
+        </p:nvPicPr>
+        <p:blipFill>
+          <a:blip r:embed="rId3"/>
+          <a:stretch>
+            <a:fillRect/>
+          </a:stretch>
+        </p:blipFill>
+        <p:spPr>
+          <a:xfrm>
+            <a:off x="892870" y="2453504"/>
+            <a:ext cx="2857899" cy="2048161"/>
+          </a:xfrm>
+          <a:prstGeom prst="rect">
+            <a:avLst/>
+          </a:prstGeom>
+        </p:spPr>
+      </p:pic>
+      <p:pic>
+        <p:nvPicPr>
+          <p:cNvPr id="10" name="Grafik 9">
+            <a:extLst>
+              <a:ext uri="{FF2B5EF4-FFF2-40B4-BE49-F238E27FC236}">
+                <a16:creationId xmlns:a16="http://schemas.microsoft.com/office/drawing/2014/main" id="{0E8C76CD-595C-5F91-DCEB-ABE0249A7A3D}"/>
+              </a:ext>
+            </a:extLst>
+          </p:cNvPr>
+          <p:cNvPicPr>
+            <a:picLocks noChangeAspect="1"/>
+          </p:cNvPicPr>
+          <p:nvPr/>
+        </p:nvPicPr>
+        <p:blipFill>
+          <a:blip r:embed="rId4"/>
+          <a:stretch>
+            <a:fillRect/>
+          </a:stretch>
+        </p:blipFill>
+        <p:spPr>
+          <a:xfrm>
+            <a:off x="204760" y="4519159"/>
+            <a:ext cx="4234118" cy="1239537"/>
+          </a:xfrm>
+          <a:prstGeom prst="rect">
+            <a:avLst/>
+          </a:prstGeom>
+        </p:spPr>
+      </p:pic>
+      <p:pic>
+        <p:nvPicPr>
+          <p:cNvPr id="12" name="Grafik 11">
+            <a:extLst>
+              <a:ext uri="{FF2B5EF4-FFF2-40B4-BE49-F238E27FC236}">
+                <a16:creationId xmlns:a16="http://schemas.microsoft.com/office/drawing/2014/main" id="{DD5828D7-D4EA-DE9A-B0C1-D436BAC111AF}"/>
+              </a:ext>
+            </a:extLst>
+          </p:cNvPr>
+          <p:cNvPicPr>
+            <a:picLocks noChangeAspect="1"/>
+          </p:cNvPicPr>
+          <p:nvPr/>
+        </p:nvPicPr>
+        <p:blipFill>
+          <a:blip r:embed="rId5"/>
+          <a:stretch>
+            <a:fillRect/>
+          </a:stretch>
+        </p:blipFill>
+        <p:spPr>
+          <a:xfrm>
+            <a:off x="5042546" y="3074720"/>
+            <a:ext cx="6944694" cy="1971950"/>
+          </a:xfrm>
+          <a:prstGeom prst="rect">
+            <a:avLst/>
+          </a:prstGeom>
+        </p:spPr>
+      </p:pic>
+      <p:sp>
+        <p:nvSpPr>
+          <p:cNvPr id="14" name="Textfeld 13">
+            <a:extLst>
+              <a:ext uri="{FF2B5EF4-FFF2-40B4-BE49-F238E27FC236}">
+                <a16:creationId xmlns:a16="http://schemas.microsoft.com/office/drawing/2014/main" id="{1D70EC92-D768-D392-31D2-03DC5A02EC1C}"/>
+              </a:ext>
+            </a:extLst>
+          </p:cNvPr>
+          <p:cNvSpPr txBox="1"/>
+          <p:nvPr/>
+        </p:nvSpPr>
+        <p:spPr>
+          <a:xfrm>
+            <a:off x="7571232" y="329184"/>
+            <a:ext cx="3263073" cy="923330"/>
+          </a:xfrm>
+          <a:prstGeom prst="rect">
+            <a:avLst/>
+          </a:prstGeom>
+          <a:noFill/>
+        </p:spPr>
+        <p:txBody>
+          <a:bodyPr wrap="none" rtlCol="0">
+            <a:spAutoFit/>
+          </a:bodyPr>
+          <a:lstStyle/>
+          <a:p>
+            <a:r>
+              <a:rPr lang="de-CH" dirty="0"/>
+              <a:t>z = Anzahl Unbekannte</a:t>
+            </a:r>
+          </a:p>
+          <a:p>
+            <a:r>
+              <a:rPr lang="de-CH" dirty="0"/>
+              <a:t>k = Anzahl Knoten</a:t>
+            </a:r>
+          </a:p>
+          <a:p>
+            <a:r>
+              <a:rPr lang="de-CH" dirty="0"/>
+              <a:t>m = Anzahl Maschengleichungen</a:t>
+            </a:r>
+          </a:p>
+        </p:txBody>
+      </p:sp>
+    </p:spTree>
+    <p:extLst>
+      <p:ext uri="{BB962C8B-B14F-4D97-AF65-F5344CB8AC3E}">
+        <p14:creationId xmlns:p14="http://schemas.microsoft.com/office/powerpoint/2010/main" val="1161669360"/>
+      </p:ext>
+    </p:extLst>
+  </p:cSld>
+  <p:clrMapOvr>
+    <a:masterClrMapping/>
+  </p:clrMapOvr>
+</p:sld>
+</file>
+
+<file path=ppt/slides/slide21.xml><?xml version="1.0" encoding="utf-8"?>
+<p:sld xmlns:a="http://schemas.openxmlformats.org/drawingml/2006/main" xmlns:r="http://schemas.openxmlformats.org/officeDocument/2006/relationships" xmlns:p="http://schemas.openxmlformats.org/presentationml/2006/main">
+  <p:cSld>
+    <p:spTree>
+      <p:nvGrpSpPr>
+        <p:cNvPr id="1" name="">
+          <a:extLst>
+            <a:ext uri="{FF2B5EF4-FFF2-40B4-BE49-F238E27FC236}">
+              <a16:creationId xmlns:a16="http://schemas.microsoft.com/office/drawing/2014/main" id="{BCE8E6B7-CD49-E972-8361-52304C16D0DC}"/>
+            </a:ext>
+          </a:extLst>
+        </p:cNvPr>
+        <p:cNvGrpSpPr/>
+        <p:nvPr/>
+      </p:nvGrpSpPr>
+      <p:grpSpPr>
+        <a:xfrm>
+          <a:off x="0" y="0"/>
+          <a:ext cx="0" cy="0"/>
+          <a:chOff x="0" y="0"/>
+          <a:chExt cx="0" cy="0"/>
+        </a:xfrm>
+      </p:grpSpPr>
+      <p:sp>
+        <p:nvSpPr>
+          <p:cNvPr id="2" name="Rounded Rectangle 1">
+            <a:extLst>
+              <a:ext uri="{FF2B5EF4-FFF2-40B4-BE49-F238E27FC236}">
+                <a16:creationId xmlns:a16="http://schemas.microsoft.com/office/drawing/2014/main" id="{B86BC0FC-0445-C60F-5A15-35ACA47BD380}"/>
+              </a:ext>
+            </a:extLst>
+          </p:cNvPr>
+          <p:cNvSpPr/>
+          <p:nvPr/>
+        </p:nvSpPr>
+        <p:spPr>
+          <a:xfrm>
+            <a:off x="594360" y="475488"/>
+            <a:ext cx="969264" cy="292608"/>
+          </a:xfrm>
+          <a:prstGeom prst="roundRect">
+            <a:avLst/>
+          </a:prstGeom>
+          <a:solidFill>
+            <a:srgbClr val="EEEEEA"/>
+          </a:solidFill>
+          <a:ln w="10160">
+            <a:solidFill>
+              <a:srgbClr val="EEEEEA"/>
+            </a:solidFill>
+          </a:ln>
+        </p:spPr>
+        <p:style>
+          <a:lnRef idx="1">
+            <a:schemeClr val="accent1"/>
+          </a:lnRef>
+          <a:fillRef idx="3">
+            <a:schemeClr val="accent1"/>
+          </a:fillRef>
+          <a:effectRef idx="2">
+            <a:schemeClr val="accent1"/>
+          </a:effectRef>
+          <a:fontRef idx="minor">
+            <a:schemeClr val="lt1"/>
+          </a:fontRef>
+        </p:style>
+        <p:txBody>
+          <a:bodyPr rtlCol="0" anchor="ctr"/>
+          <a:lstStyle/>
+          <a:p>
+            <a:pPr algn="ctr"/>
+            <a:endParaRPr/>
+          </a:p>
+        </p:txBody>
+      </p:sp>
+      <p:sp>
+        <p:nvSpPr>
+          <p:cNvPr id="3" name="TextBox 2">
+            <a:extLst>
+              <a:ext uri="{FF2B5EF4-FFF2-40B4-BE49-F238E27FC236}">
+                <a16:creationId xmlns:a16="http://schemas.microsoft.com/office/drawing/2014/main" id="{15DB22C5-95BA-2209-D9CF-E94B62527584}"/>
+              </a:ext>
+            </a:extLst>
+          </p:cNvPr>
+          <p:cNvSpPr txBox="1"/>
+          <p:nvPr/>
+        </p:nvSpPr>
+        <p:spPr>
+          <a:xfrm>
+            <a:off x="893847" y="542673"/>
+            <a:ext cx="370294" cy="130805"/>
+          </a:xfrm>
+          <a:prstGeom prst="rect">
+            <a:avLst/>
+          </a:prstGeom>
+          <a:noFill/>
+        </p:spPr>
+        <p:txBody>
+          <a:bodyPr wrap="none" lIns="0" tIns="0" rIns="0" bIns="0" anchor="ctr">
+            <a:spAutoFit/>
+          </a:bodyPr>
+          <a:lstStyle/>
+          <a:p>
+            <a:pPr algn="ctr"/>
+            <a:r>
+              <a:rPr lang="de-CH" sz="850" b="1" dirty="0">
+                <a:solidFill>
+                  <a:srgbClr val="737373"/>
+                </a:solidFill>
+                <a:latin typeface="Aptos"/>
+              </a:rPr>
+              <a:t>Theorie</a:t>
+            </a:r>
+            <a:endParaRPr sz="850" b="1" dirty="0">
+              <a:solidFill>
+                <a:srgbClr val="737373"/>
+              </a:solidFill>
+              <a:latin typeface="Aptos"/>
+            </a:endParaRPr>
+          </a:p>
+        </p:txBody>
+      </p:sp>
+      <p:sp>
+        <p:nvSpPr>
+          <p:cNvPr id="4" name="TextBox 3">
+            <a:extLst>
+              <a:ext uri="{FF2B5EF4-FFF2-40B4-BE49-F238E27FC236}">
                 <a16:creationId xmlns:a16="http://schemas.microsoft.com/office/drawing/2014/main" id="{5855247D-58BD-A95B-48A5-05CCF97A63F8}"/>
               </a:ext>
             </a:extLst>
@@ -21694,7 +16850,7 @@
           <a:p>
             <a:fld id="{C1FF6DA9-008F-8B48-92A6-B652298478BF}" type="slidenum">
               <a:rPr lang="en-US" smtClean="0"/>
-              <a:t>24</a:t>
+              <a:t>21</a:t>
             </a:fld>
             <a:endParaRPr lang="en-US"/>
           </a:p>
@@ -21889,7 +17045,7 @@
 </p:sld>
 </file>
 
-<file path=ppt/slides/slide25.xml><?xml version="1.0" encoding="utf-8"?>
+<file path=ppt/slides/slide22.xml><?xml version="1.0" encoding="utf-8"?>
 <p:sld xmlns:a="http://schemas.openxmlformats.org/drawingml/2006/main" xmlns:r="http://schemas.openxmlformats.org/officeDocument/2006/relationships" xmlns:p="http://schemas.openxmlformats.org/presentationml/2006/main">
   <p:cSld>
     <p:spTree>
@@ -22138,7 +17294,7 @@
           <a:p>
             <a:fld id="{C1FF6DA9-008F-8B48-92A6-B652298478BF}" type="slidenum">
               <a:rPr lang="en-US" smtClean="0"/>
-              <a:t>25</a:t>
+              <a:t>22</a:t>
             </a:fld>
             <a:endParaRPr lang="en-US"/>
           </a:p>
@@ -22239,6 +17395,36 @@
           </a:prstGeom>
         </p:spPr>
       </p:pic>
+      <p:pic>
+        <p:nvPicPr>
+          <p:cNvPr id="6" name="Grafik 5">
+            <a:extLst>
+              <a:ext uri="{FF2B5EF4-FFF2-40B4-BE49-F238E27FC236}">
+                <a16:creationId xmlns:a16="http://schemas.microsoft.com/office/drawing/2014/main" id="{0E1DC70C-1587-0CEE-2AF3-70DF56396FA9}"/>
+              </a:ext>
+            </a:extLst>
+          </p:cNvPr>
+          <p:cNvPicPr>
+            <a:picLocks noChangeAspect="1"/>
+          </p:cNvPicPr>
+          <p:nvPr/>
+        </p:nvPicPr>
+        <p:blipFill>
+          <a:blip r:embed="rId4"/>
+          <a:stretch>
+            <a:fillRect/>
+          </a:stretch>
+        </p:blipFill>
+        <p:spPr>
+          <a:xfrm>
+            <a:off x="8451345" y="401616"/>
+            <a:ext cx="3024376" cy="2016251"/>
+          </a:xfrm>
+          <a:prstGeom prst="rect">
+            <a:avLst/>
+          </a:prstGeom>
+        </p:spPr>
+      </p:pic>
     </p:spTree>
     <p:extLst>
       <p:ext uri="{BB962C8B-B14F-4D97-AF65-F5344CB8AC3E}">
@@ -22252,7 +17438,7 @@
 </p:sld>
 </file>
 
-<file path=ppt/slides/slide26.xml><?xml version="1.0" encoding="utf-8"?>
+<file path=ppt/slides/slide23.xml><?xml version="1.0" encoding="utf-8"?>
 <p:sld xmlns:a="http://schemas.openxmlformats.org/drawingml/2006/main" xmlns:r="http://schemas.openxmlformats.org/officeDocument/2006/relationships" xmlns:p="http://schemas.openxmlformats.org/presentationml/2006/main">
   <p:cSld>
     <p:spTree>
@@ -22501,14 +17687,14 @@
           <a:p>
             <a:fld id="{C1FF6DA9-008F-8B48-92A6-B652298478BF}" type="slidenum">
               <a:rPr lang="en-US" smtClean="0"/>
-              <a:t>26</a:t>
+              <a:t>23</a:t>
             </a:fld>
             <a:endParaRPr lang="en-US"/>
           </a:p>
         </p:txBody>
       </p:sp>
-      <mc:AlternateContent xmlns:mc="http://schemas.openxmlformats.org/markup-compatibility/2006">
-        <mc:Choice xmlns:a14="http://schemas.microsoft.com/office/drawing/2010/main" Requires="a14">
+      <mc:AlternateContent xmlns:mc="http://schemas.openxmlformats.org/markup-compatibility/2006" xmlns:a14="http://schemas.microsoft.com/office/drawing/2010/main">
+        <mc:Choice Requires="a14">
           <p:sp>
             <p:nvSpPr>
               <p:cNvPr id="9" name="Content Placeholder 2">
@@ -22751,7 +17937,7 @@
             </p:txBody>
           </p:sp>
         </mc:Choice>
-        <mc:Fallback>
+        <mc:Fallback xmlns="">
           <p:sp>
             <p:nvSpPr>
               <p:cNvPr id="9" name="Content Placeholder 2">
@@ -22844,7 +18030,7 @@
 </p:sld>
 </file>
 
-<file path=ppt/slides/slide27.xml><?xml version="1.0" encoding="utf-8"?>
+<file path=ppt/slides/slide24.xml><?xml version="1.0" encoding="utf-8"?>
 <p:sld xmlns:a="http://schemas.openxmlformats.org/drawingml/2006/main" xmlns:r="http://schemas.openxmlformats.org/officeDocument/2006/relationships" xmlns:p="http://schemas.openxmlformats.org/presentationml/2006/main" show="0">
   <p:cSld>
     <p:spTree>
@@ -23093,14 +18279,14 @@
           <a:p>
             <a:fld id="{C1FF6DA9-008F-8B48-92A6-B652298478BF}" type="slidenum">
               <a:rPr lang="en-US" smtClean="0"/>
-              <a:t>27</a:t>
+              <a:t>24</a:t>
             </a:fld>
             <a:endParaRPr lang="en-US"/>
           </a:p>
         </p:txBody>
       </p:sp>
-      <mc:AlternateContent xmlns:mc="http://schemas.openxmlformats.org/markup-compatibility/2006">
-        <mc:Choice xmlns:a14="http://schemas.microsoft.com/office/drawing/2010/main" Requires="a14">
+      <mc:AlternateContent xmlns:mc="http://schemas.openxmlformats.org/markup-compatibility/2006" xmlns:a14="http://schemas.microsoft.com/office/drawing/2010/main">
+        <mc:Choice Requires="a14">
           <p:sp>
             <p:nvSpPr>
               <p:cNvPr id="5" name="Content Placeholder 2">
@@ -23866,7 +19052,7 @@
             </p:txBody>
           </p:sp>
         </mc:Choice>
-        <mc:Fallback>
+        <mc:Fallback xmlns="">
           <p:sp>
             <p:nvSpPr>
               <p:cNvPr id="5" name="Content Placeholder 2">
@@ -24229,7 +19415,7 @@
 </p:sld>
 </file>
 
-<file path=ppt/slides/slide28.xml><?xml version="1.0" encoding="utf-8"?>
+<file path=ppt/slides/slide25.xml><?xml version="1.0" encoding="utf-8"?>
 <p:sld xmlns:a="http://schemas.openxmlformats.org/drawingml/2006/main" xmlns:r="http://schemas.openxmlformats.org/officeDocument/2006/relationships" xmlns:p="http://schemas.openxmlformats.org/presentationml/2006/main">
   <p:cSld>
     <p:spTree>
@@ -24478,7 +19664,7 @@
           <a:p>
             <a:fld id="{C1FF6DA9-008F-8B48-92A6-B652298478BF}" type="slidenum">
               <a:rPr lang="en-US" smtClean="0"/>
-              <a:t>28</a:t>
+              <a:t>25</a:t>
             </a:fld>
             <a:endParaRPr lang="en-US"/>
           </a:p>
@@ -24699,7 +19885,7 @@
 </p:sld>
 </file>
 
-<file path=ppt/slides/slide29.xml><?xml version="1.0" encoding="utf-8"?>
+<file path=ppt/slides/slide26.xml><?xml version="1.0" encoding="utf-8"?>
 <p:sld xmlns:a="http://schemas.openxmlformats.org/drawingml/2006/main" xmlns:r="http://schemas.openxmlformats.org/officeDocument/2006/relationships" xmlns:p="http://schemas.openxmlformats.org/presentationml/2006/main" show="0">
   <p:cSld>
     <p:spTree>
@@ -24948,14 +20134,14 @@
           <a:p>
             <a:fld id="{C1FF6DA9-008F-8B48-92A6-B652298478BF}" type="slidenum">
               <a:rPr lang="en-US" smtClean="0"/>
-              <a:t>29</a:t>
+              <a:t>26</a:t>
             </a:fld>
             <a:endParaRPr lang="en-US"/>
           </a:p>
         </p:txBody>
       </p:sp>
-      <mc:AlternateContent xmlns:mc="http://schemas.openxmlformats.org/markup-compatibility/2006">
-        <mc:Choice xmlns:a14="http://schemas.microsoft.com/office/drawing/2010/main" Requires="a14">
+      <mc:AlternateContent xmlns:mc="http://schemas.openxmlformats.org/markup-compatibility/2006" xmlns:a14="http://schemas.microsoft.com/office/drawing/2010/main">
+        <mc:Choice Requires="a14">
           <p:sp>
             <p:nvSpPr>
               <p:cNvPr id="5" name="Content Placeholder 2">
@@ -25902,7 +21088,7 @@
             </p:txBody>
           </p:sp>
         </mc:Choice>
-        <mc:Fallback>
+        <mc:Fallback xmlns="">
           <p:sp>
             <p:nvSpPr>
               <p:cNvPr id="5" name="Content Placeholder 2">
@@ -26420,23 +21606,15 @@
 </p:sld>
 </file>
 
-<file path=ppt/slides/slide3.xml><?xml version="1.0" encoding="utf-8"?>
+<file path=ppt/slides/slide27.xml><?xml version="1.0" encoding="utf-8"?>
 <p:sld xmlns:a="http://schemas.openxmlformats.org/drawingml/2006/main" xmlns:r="http://schemas.openxmlformats.org/officeDocument/2006/relationships" xmlns:p="http://schemas.openxmlformats.org/presentationml/2006/main">
   <p:cSld>
-    <p:bg>
-      <p:bgPr>
-        <a:solidFill>
-          <a:schemeClr val="bg1"/>
-        </a:solidFill>
-        <a:effectLst/>
-      </p:bgPr>
-    </p:bg>
     <p:spTree>
       <p:nvGrpSpPr>
         <p:cNvPr id="1" name="">
           <a:extLst>
             <a:ext uri="{FF2B5EF4-FFF2-40B4-BE49-F238E27FC236}">
-              <a16:creationId xmlns:a16="http://schemas.microsoft.com/office/drawing/2014/main" id="{F5D1D3E4-14B6-E74E-8F47-EB8652CD611C}"/>
+              <a16:creationId xmlns:a16="http://schemas.microsoft.com/office/drawing/2014/main" id="{3EE36DD1-E8E0-0CE8-90C8-85DDFFF28D42}"/>
             </a:ext>
           </a:extLst>
         </p:cNvPr>
@@ -26456,7 +21634,7 @@
           <p:cNvPr id="2" name="Rounded Rectangle 1">
             <a:extLst>
               <a:ext uri="{FF2B5EF4-FFF2-40B4-BE49-F238E27FC236}">
-                <a16:creationId xmlns:a16="http://schemas.microsoft.com/office/drawing/2014/main" id="{25B1A1EE-67A7-218C-88BE-7521B729D2E8}"/>
+                <a16:creationId xmlns:a16="http://schemas.microsoft.com/office/drawing/2014/main" id="{83C0CCB9-D4C5-B23B-C8E8-D29FC8E70D6B}"/>
               </a:ext>
             </a:extLst>
           </p:cNvPr>
@@ -26508,429 +21686,6 @@
           <p:cNvPr id="3" name="TextBox 2">
             <a:extLst>
               <a:ext uri="{FF2B5EF4-FFF2-40B4-BE49-F238E27FC236}">
-                <a16:creationId xmlns:a16="http://schemas.microsoft.com/office/drawing/2014/main" id="{062D4570-A7FD-2923-67A4-D80F8FCEF622}"/>
-              </a:ext>
-            </a:extLst>
-          </p:cNvPr>
-          <p:cNvSpPr txBox="1"/>
-          <p:nvPr/>
-        </p:nvSpPr>
-        <p:spPr>
-          <a:xfrm>
-            <a:off x="893847" y="542673"/>
-            <a:ext cx="370294" cy="130805"/>
-          </a:xfrm>
-          <a:prstGeom prst="rect">
-            <a:avLst/>
-          </a:prstGeom>
-          <a:noFill/>
-        </p:spPr>
-        <p:txBody>
-          <a:bodyPr wrap="square" lIns="0" tIns="0" rIns="0" bIns="0" anchor="ctr">
-            <a:spAutoFit/>
-          </a:bodyPr>
-          <a:lstStyle/>
-          <a:p>
-            <a:pPr algn="ctr"/>
-            <a:r>
-              <a:rPr lang="de-CH" sz="850" b="1" dirty="0">
-                <a:solidFill>
-                  <a:srgbClr val="737373"/>
-                </a:solidFill>
-                <a:latin typeface="Aptos"/>
-              </a:rPr>
-              <a:t>Theorie</a:t>
-            </a:r>
-            <a:endParaRPr sz="850" b="1" dirty="0">
-              <a:solidFill>
-                <a:srgbClr val="737373"/>
-              </a:solidFill>
-              <a:latin typeface="Aptos"/>
-            </a:endParaRPr>
-          </a:p>
-        </p:txBody>
-      </p:sp>
-      <p:sp>
-        <p:nvSpPr>
-          <p:cNvPr id="4" name="TextBox 3">
-            <a:extLst>
-              <a:ext uri="{FF2B5EF4-FFF2-40B4-BE49-F238E27FC236}">
-                <a16:creationId xmlns:a16="http://schemas.microsoft.com/office/drawing/2014/main" id="{A8FAB37C-B1F4-C442-5C6B-2C278E003121}"/>
-              </a:ext>
-            </a:extLst>
-          </p:cNvPr>
-          <p:cNvSpPr txBox="1"/>
-          <p:nvPr/>
-        </p:nvSpPr>
-        <p:spPr>
-          <a:xfrm>
-            <a:off x="594360" y="932688"/>
-            <a:ext cx="4342792" cy="477054"/>
-          </a:xfrm>
-          <a:prstGeom prst="rect">
-            <a:avLst/>
-          </a:prstGeom>
-          <a:noFill/>
-        </p:spPr>
-        <p:txBody>
-          <a:bodyPr wrap="none" lIns="0" tIns="0" rIns="0" bIns="0" anchor="t">
-            <a:spAutoFit/>
-          </a:bodyPr>
-          <a:lstStyle/>
-          <a:p>
-            <a:pPr algn="l"/>
-            <a:r>
-              <a:rPr lang="de-CH" sz="3100" b="1" dirty="0">
-                <a:solidFill>
-                  <a:srgbClr val="171717"/>
-                </a:solidFill>
-                <a:latin typeface="Aptos"/>
-              </a:rPr>
-              <a:t>Reale vs. Ideale Quellen</a:t>
-            </a:r>
-            <a:endParaRPr sz="3100" b="1" dirty="0">
-              <a:solidFill>
-                <a:srgbClr val="171717"/>
-              </a:solidFill>
-              <a:latin typeface="Aptos"/>
-            </a:endParaRPr>
-          </a:p>
-        </p:txBody>
-      </p:sp>
-      <p:sp>
-        <p:nvSpPr>
-          <p:cNvPr id="11" name="TextBox 10">
-            <a:extLst>
-              <a:ext uri="{FF2B5EF4-FFF2-40B4-BE49-F238E27FC236}">
-                <a16:creationId xmlns:a16="http://schemas.microsoft.com/office/drawing/2014/main" id="{DE417472-1392-E920-D4E0-99D2C7769D1F}"/>
-              </a:ext>
-            </a:extLst>
-          </p:cNvPr>
-          <p:cNvSpPr txBox="1"/>
-          <p:nvPr/>
-        </p:nvSpPr>
-        <p:spPr>
-          <a:xfrm>
-            <a:off x="1099370" y="4706762"/>
-            <a:ext cx="3332772" cy="307777"/>
-          </a:xfrm>
-          <a:prstGeom prst="rect">
-            <a:avLst/>
-          </a:prstGeom>
-          <a:noFill/>
-        </p:spPr>
-        <p:txBody>
-          <a:bodyPr wrap="none" lIns="0" tIns="0" rIns="0" bIns="0" anchor="t">
-            <a:spAutoFit/>
-          </a:bodyPr>
-          <a:lstStyle/>
-          <a:p>
-            <a:pPr algn="l"/>
-            <a:r>
-              <a:rPr lang="de-CH" sz="2000" dirty="0">
-                <a:solidFill>
-                  <a:srgbClr val="171717"/>
-                </a:solidFill>
-                <a:latin typeface="Aptos"/>
-              </a:rPr>
-              <a:t>Besitzt einen Innenwiderstand</a:t>
-            </a:r>
-            <a:endParaRPr sz="2000" b="0" dirty="0">
-              <a:solidFill>
-                <a:srgbClr val="171717"/>
-              </a:solidFill>
-              <a:latin typeface="Aptos"/>
-            </a:endParaRPr>
-          </a:p>
-        </p:txBody>
-      </p:sp>
-      <p:sp>
-        <p:nvSpPr>
-          <p:cNvPr id="15" name="Datumsplatzhalter 14">
-            <a:extLst>
-              <a:ext uri="{FF2B5EF4-FFF2-40B4-BE49-F238E27FC236}">
-                <a16:creationId xmlns:a16="http://schemas.microsoft.com/office/drawing/2014/main" id="{116F2CDE-D424-DFFA-C252-2953D0D84668}"/>
-              </a:ext>
-            </a:extLst>
-          </p:cNvPr>
-          <p:cNvSpPr>
-            <a:spLocks noGrp="1"/>
-          </p:cNvSpPr>
-          <p:nvPr>
-            <p:ph type="dt" sz="half" idx="10"/>
-          </p:nvPr>
-        </p:nvSpPr>
-        <p:spPr/>
-        <p:txBody>
-          <a:bodyPr/>
-          <a:lstStyle/>
-          <a:p>
-            <a:fld id="{5BEE0FE1-AF03-4944-8B59-6F3340FFC6D2}" type="datetime1">
-              <a:rPr lang="de-CH" smtClean="0"/>
-              <a:t>21.10.2026</a:t>
-            </a:fld>
-            <a:endParaRPr lang="en-US"/>
-          </a:p>
-        </p:txBody>
-      </p:sp>
-      <p:sp>
-        <p:nvSpPr>
-          <p:cNvPr id="16" name="Fußzeilenplatzhalter 15">
-            <a:extLst>
-              <a:ext uri="{FF2B5EF4-FFF2-40B4-BE49-F238E27FC236}">
-                <a16:creationId xmlns:a16="http://schemas.microsoft.com/office/drawing/2014/main" id="{ED54B423-4A1E-442F-AC36-4E7E1EBE5E2B}"/>
-              </a:ext>
-            </a:extLst>
-          </p:cNvPr>
-          <p:cNvSpPr>
-            <a:spLocks noGrp="1"/>
-          </p:cNvSpPr>
-          <p:nvPr>
-            <p:ph type="ftr" sz="quarter" idx="11"/>
-          </p:nvPr>
-        </p:nvSpPr>
-        <p:spPr/>
-        <p:txBody>
-          <a:bodyPr/>
-          <a:lstStyle/>
-          <a:p>
-            <a:r>
-              <a:rPr lang="en-US" dirty="0"/>
-              <a:t>Enrico Putzi W06</a:t>
-            </a:r>
-          </a:p>
-        </p:txBody>
-      </p:sp>
-      <p:sp>
-        <p:nvSpPr>
-          <p:cNvPr id="17" name="Foliennummernplatzhalter 16">
-            <a:extLst>
-              <a:ext uri="{FF2B5EF4-FFF2-40B4-BE49-F238E27FC236}">
-                <a16:creationId xmlns:a16="http://schemas.microsoft.com/office/drawing/2014/main" id="{9B462E26-55E7-EBD4-0157-A63479746454}"/>
-              </a:ext>
-            </a:extLst>
-          </p:cNvPr>
-          <p:cNvSpPr>
-            <a:spLocks noGrp="1"/>
-          </p:cNvSpPr>
-          <p:nvPr>
-            <p:ph type="sldNum" sz="quarter" idx="12"/>
-          </p:nvPr>
-        </p:nvSpPr>
-        <p:spPr/>
-        <p:txBody>
-          <a:bodyPr/>
-          <a:lstStyle/>
-          <a:p>
-            <a:fld id="{C1FF6DA9-008F-8B48-92A6-B652298478BF}" type="slidenum">
-              <a:rPr lang="en-US" smtClean="0"/>
-              <a:t>3</a:t>
-            </a:fld>
-            <a:endParaRPr lang="en-US"/>
-          </a:p>
-        </p:txBody>
-      </p:sp>
-      <p:pic>
-        <p:nvPicPr>
-          <p:cNvPr id="8" name="Grafik 7">
-            <a:extLst>
-              <a:ext uri="{FF2B5EF4-FFF2-40B4-BE49-F238E27FC236}">
-                <a16:creationId xmlns:a16="http://schemas.microsoft.com/office/drawing/2014/main" id="{E893EB9A-F82C-2C53-C619-E73FADCB336C}"/>
-              </a:ext>
-            </a:extLst>
-          </p:cNvPr>
-          <p:cNvPicPr>
-            <a:picLocks noChangeAspect="1"/>
-          </p:cNvPicPr>
-          <p:nvPr/>
-        </p:nvPicPr>
-        <p:blipFill>
-          <a:blip r:embed="rId3"/>
-          <a:srcRect b="20431"/>
-          <a:stretch>
-            <a:fillRect/>
-          </a:stretch>
-        </p:blipFill>
-        <p:spPr>
-          <a:xfrm>
-            <a:off x="7470130" y="1764509"/>
-            <a:ext cx="2405390" cy="2842286"/>
-          </a:xfrm>
-          <a:prstGeom prst="rect">
-            <a:avLst/>
-          </a:prstGeom>
-        </p:spPr>
-      </p:pic>
-      <p:pic>
-        <p:nvPicPr>
-          <p:cNvPr id="10" name="Grafik 9">
-            <a:extLst>
-              <a:ext uri="{FF2B5EF4-FFF2-40B4-BE49-F238E27FC236}">
-                <a16:creationId xmlns:a16="http://schemas.microsoft.com/office/drawing/2014/main" id="{1D9A58EF-DF50-313E-FC35-EBE4F54EE1BE}"/>
-              </a:ext>
-            </a:extLst>
-          </p:cNvPr>
-          <p:cNvPicPr>
-            <a:picLocks noChangeAspect="1"/>
-          </p:cNvPicPr>
-          <p:nvPr/>
-        </p:nvPicPr>
-        <p:blipFill>
-          <a:blip r:embed="rId4"/>
-          <a:stretch>
-            <a:fillRect/>
-          </a:stretch>
-        </p:blipFill>
-        <p:spPr>
-          <a:xfrm>
-            <a:off x="1153957" y="1574334"/>
-            <a:ext cx="2873685" cy="2860065"/>
-          </a:xfrm>
-          <a:prstGeom prst="rect">
-            <a:avLst/>
-          </a:prstGeom>
-        </p:spPr>
-      </p:pic>
-      <p:sp>
-        <p:nvSpPr>
-          <p:cNvPr id="13" name="TextBox 10">
-            <a:extLst>
-              <a:ext uri="{FF2B5EF4-FFF2-40B4-BE49-F238E27FC236}">
-                <a16:creationId xmlns:a16="http://schemas.microsoft.com/office/drawing/2014/main" id="{0CF2DCA9-583C-ED96-F939-644044CDD77A}"/>
-              </a:ext>
-            </a:extLst>
-          </p:cNvPr>
-          <p:cNvSpPr txBox="1"/>
-          <p:nvPr/>
-        </p:nvSpPr>
-        <p:spPr>
-          <a:xfrm>
-            <a:off x="7485250" y="4706762"/>
-            <a:ext cx="2390270" cy="307777"/>
-          </a:xfrm>
-          <a:prstGeom prst="rect">
-            <a:avLst/>
-          </a:prstGeom>
-          <a:noFill/>
-        </p:spPr>
-        <p:txBody>
-          <a:bodyPr wrap="none" lIns="0" tIns="0" rIns="0" bIns="0" anchor="t">
-            <a:spAutoFit/>
-          </a:bodyPr>
-          <a:lstStyle/>
-          <a:p>
-            <a:pPr algn="l"/>
-            <a:r>
-              <a:rPr lang="de-CH" sz="2000" dirty="0">
-                <a:solidFill>
-                  <a:srgbClr val="171717"/>
-                </a:solidFill>
-                <a:latin typeface="Aptos"/>
-              </a:rPr>
-              <a:t>Kein Innenwiderstand</a:t>
-            </a:r>
-            <a:endParaRPr sz="2000" b="0" dirty="0">
-              <a:solidFill>
-                <a:srgbClr val="171717"/>
-              </a:solidFill>
-              <a:latin typeface="Aptos"/>
-            </a:endParaRPr>
-          </a:p>
-        </p:txBody>
-      </p:sp>
-    </p:spTree>
-    <p:extLst>
-      <p:ext uri="{BB962C8B-B14F-4D97-AF65-F5344CB8AC3E}">
-        <p14:creationId xmlns:p14="http://schemas.microsoft.com/office/powerpoint/2010/main" val="4182677124"/>
-      </p:ext>
-    </p:extLst>
-  </p:cSld>
-  <p:clrMapOvr>
-    <a:masterClrMapping/>
-  </p:clrMapOvr>
-</p:sld>
-</file>
-
-<file path=ppt/slides/slide30.xml><?xml version="1.0" encoding="utf-8"?>
-<p:sld xmlns:a="http://schemas.openxmlformats.org/drawingml/2006/main" xmlns:r="http://schemas.openxmlformats.org/officeDocument/2006/relationships" xmlns:p="http://schemas.openxmlformats.org/presentationml/2006/main">
-  <p:cSld>
-    <p:spTree>
-      <p:nvGrpSpPr>
-        <p:cNvPr id="1" name="">
-          <a:extLst>
-            <a:ext uri="{FF2B5EF4-FFF2-40B4-BE49-F238E27FC236}">
-              <a16:creationId xmlns:a16="http://schemas.microsoft.com/office/drawing/2014/main" id="{3EE36DD1-E8E0-0CE8-90C8-85DDFFF28D42}"/>
-            </a:ext>
-          </a:extLst>
-        </p:cNvPr>
-        <p:cNvGrpSpPr/>
-        <p:nvPr/>
-      </p:nvGrpSpPr>
-      <p:grpSpPr>
-        <a:xfrm>
-          <a:off x="0" y="0"/>
-          <a:ext cx="0" cy="0"/>
-          <a:chOff x="0" y="0"/>
-          <a:chExt cx="0" cy="0"/>
-        </a:xfrm>
-      </p:grpSpPr>
-      <p:sp>
-        <p:nvSpPr>
-          <p:cNvPr id="2" name="Rounded Rectangle 1">
-            <a:extLst>
-              <a:ext uri="{FF2B5EF4-FFF2-40B4-BE49-F238E27FC236}">
-                <a16:creationId xmlns:a16="http://schemas.microsoft.com/office/drawing/2014/main" id="{83C0CCB9-D4C5-B23B-C8E8-D29FC8E70D6B}"/>
-              </a:ext>
-            </a:extLst>
-          </p:cNvPr>
-          <p:cNvSpPr/>
-          <p:nvPr/>
-        </p:nvSpPr>
-        <p:spPr>
-          <a:xfrm>
-            <a:off x="594360" y="475488"/>
-            <a:ext cx="969264" cy="292608"/>
-          </a:xfrm>
-          <a:prstGeom prst="roundRect">
-            <a:avLst/>
-          </a:prstGeom>
-          <a:solidFill>
-            <a:srgbClr val="EEEEEA"/>
-          </a:solidFill>
-          <a:ln w="10160">
-            <a:solidFill>
-              <a:srgbClr val="EEEEEA"/>
-            </a:solidFill>
-          </a:ln>
-        </p:spPr>
-        <p:style>
-          <a:lnRef idx="1">
-            <a:schemeClr val="accent1"/>
-          </a:lnRef>
-          <a:fillRef idx="3">
-            <a:schemeClr val="accent1"/>
-          </a:fillRef>
-          <a:effectRef idx="2">
-            <a:schemeClr val="accent1"/>
-          </a:effectRef>
-          <a:fontRef idx="minor">
-            <a:schemeClr val="lt1"/>
-          </a:fontRef>
-        </p:style>
-        <p:txBody>
-          <a:bodyPr rtlCol="0" anchor="ctr"/>
-          <a:lstStyle/>
-          <a:p>
-            <a:pPr algn="ctr"/>
-            <a:endParaRPr/>
-          </a:p>
-        </p:txBody>
-      </p:sp>
-      <p:sp>
-        <p:nvSpPr>
-          <p:cNvPr id="3" name="TextBox 2">
-            <a:extLst>
-              <a:ext uri="{FF2B5EF4-FFF2-40B4-BE49-F238E27FC236}">
                 <a16:creationId xmlns:a16="http://schemas.microsoft.com/office/drawing/2014/main" id="{6386AB1C-CADC-7017-95CE-B9742F8D0E67}"/>
               </a:ext>
             </a:extLst>
@@ -27100,7 +21855,7 @@
           <a:p>
             <a:fld id="{C1FF6DA9-008F-8B48-92A6-B652298478BF}" type="slidenum">
               <a:rPr lang="en-US" smtClean="0"/>
-              <a:t>30</a:t>
+              <a:t>27</a:t>
             </a:fld>
             <a:endParaRPr lang="en-US"/>
           </a:p>
@@ -27350,7 +22105,7 @@
 </p:sld>
 </file>
 
-<file path=ppt/slides/slide31.xml><?xml version="1.0" encoding="utf-8"?>
+<file path=ppt/slides/slide28.xml><?xml version="1.0" encoding="utf-8"?>
 <p:sld xmlns:a="http://schemas.openxmlformats.org/drawingml/2006/main" xmlns:r="http://schemas.openxmlformats.org/officeDocument/2006/relationships" xmlns:p="http://schemas.openxmlformats.org/presentationml/2006/main" show="0">
   <p:cSld>
     <p:spTree>
@@ -27599,14 +22354,14 @@
           <a:p>
             <a:fld id="{C1FF6DA9-008F-8B48-92A6-B652298478BF}" type="slidenum">
               <a:rPr lang="en-US" smtClean="0"/>
-              <a:t>31</a:t>
+              <a:t>28</a:t>
             </a:fld>
             <a:endParaRPr lang="en-US"/>
           </a:p>
         </p:txBody>
       </p:sp>
-      <mc:AlternateContent xmlns:mc="http://schemas.openxmlformats.org/markup-compatibility/2006">
-        <mc:Choice xmlns:a14="http://schemas.microsoft.com/office/drawing/2010/main" Requires="a14">
+      <mc:AlternateContent xmlns:mc="http://schemas.openxmlformats.org/markup-compatibility/2006" xmlns:a14="http://schemas.microsoft.com/office/drawing/2010/main">
+        <mc:Choice Requires="a14">
           <p:sp>
             <p:nvSpPr>
               <p:cNvPr id="5" name="Content Placeholder 2">
@@ -27906,7 +22661,7 @@
             </p:txBody>
           </p:sp>
         </mc:Choice>
-        <mc:Fallback>
+        <mc:Fallback xmlns="">
           <p:sp>
             <p:nvSpPr>
               <p:cNvPr id="5" name="Content Placeholder 2">
@@ -28277,7 +23032,7 @@
 </p:sld>
 </file>
 
-<file path=ppt/slides/slide32.xml><?xml version="1.0" encoding="utf-8"?>
+<file path=ppt/slides/slide29.xml><?xml version="1.0" encoding="utf-8"?>
 <p:sld xmlns:a="http://schemas.openxmlformats.org/drawingml/2006/main" xmlns:r="http://schemas.openxmlformats.org/officeDocument/2006/relationships" xmlns:p="http://schemas.openxmlformats.org/presentationml/2006/main" show="0">
   <p:cSld>
     <p:spTree>
@@ -28526,14 +23281,14 @@
           <a:p>
             <a:fld id="{C1FF6DA9-008F-8B48-92A6-B652298478BF}" type="slidenum">
               <a:rPr lang="en-US" smtClean="0"/>
-              <a:t>32</a:t>
+              <a:t>29</a:t>
             </a:fld>
             <a:endParaRPr lang="en-US"/>
           </a:p>
         </p:txBody>
       </p:sp>
-      <mc:AlternateContent xmlns:mc="http://schemas.openxmlformats.org/markup-compatibility/2006">
-        <mc:Choice xmlns:a14="http://schemas.microsoft.com/office/drawing/2010/main" Requires="a14">
+      <mc:AlternateContent xmlns:mc="http://schemas.openxmlformats.org/markup-compatibility/2006" xmlns:a14="http://schemas.microsoft.com/office/drawing/2010/main">
+        <mc:Choice Requires="a14">
           <p:sp>
             <p:nvSpPr>
               <p:cNvPr id="5" name="Content Placeholder 2">
@@ -29795,7 +24550,7 @@
             </p:txBody>
           </p:sp>
         </mc:Choice>
-        <mc:Fallback>
+        <mc:Fallback xmlns="">
           <p:sp>
             <p:nvSpPr>
               <p:cNvPr id="5" name="Content Placeholder 2">
@@ -30343,15 +25098,23 @@
 </p:sld>
 </file>
 
-<file path=ppt/slides/slide33.xml><?xml version="1.0" encoding="utf-8"?>
+<file path=ppt/slides/slide3.xml><?xml version="1.0" encoding="utf-8"?>
 <p:sld xmlns:a="http://schemas.openxmlformats.org/drawingml/2006/main" xmlns:r="http://schemas.openxmlformats.org/officeDocument/2006/relationships" xmlns:p="http://schemas.openxmlformats.org/presentationml/2006/main">
   <p:cSld>
+    <p:bg>
+      <p:bgPr>
+        <a:solidFill>
+          <a:schemeClr val="bg1"/>
+        </a:solidFill>
+        <a:effectLst/>
+      </p:bgPr>
+    </p:bg>
     <p:spTree>
       <p:nvGrpSpPr>
         <p:cNvPr id="1" name="">
           <a:extLst>
             <a:ext uri="{FF2B5EF4-FFF2-40B4-BE49-F238E27FC236}">
-              <a16:creationId xmlns:a16="http://schemas.microsoft.com/office/drawing/2014/main" id="{7A239470-8D8A-E827-DA9F-21C9DFE38FEB}"/>
+              <a16:creationId xmlns:a16="http://schemas.microsoft.com/office/drawing/2014/main" id="{F5D1D3E4-14B6-E74E-8F47-EB8652CD611C}"/>
             </a:ext>
           </a:extLst>
         </p:cNvPr>
@@ -30371,7 +25134,7 @@
           <p:cNvPr id="2" name="Rounded Rectangle 1">
             <a:extLst>
               <a:ext uri="{FF2B5EF4-FFF2-40B4-BE49-F238E27FC236}">
-                <a16:creationId xmlns:a16="http://schemas.microsoft.com/office/drawing/2014/main" id="{50974DE2-A19D-2C1F-EDD7-886AE4CEC1BC}"/>
+                <a16:creationId xmlns:a16="http://schemas.microsoft.com/office/drawing/2014/main" id="{25B1A1EE-67A7-218C-88BE-7521B729D2E8}"/>
               </a:ext>
             </a:extLst>
           </p:cNvPr>
@@ -30423,6 +25186,429 @@
           <p:cNvPr id="3" name="TextBox 2">
             <a:extLst>
               <a:ext uri="{FF2B5EF4-FFF2-40B4-BE49-F238E27FC236}">
+                <a16:creationId xmlns:a16="http://schemas.microsoft.com/office/drawing/2014/main" id="{062D4570-A7FD-2923-67A4-D80F8FCEF622}"/>
+              </a:ext>
+            </a:extLst>
+          </p:cNvPr>
+          <p:cNvSpPr txBox="1"/>
+          <p:nvPr/>
+        </p:nvSpPr>
+        <p:spPr>
+          <a:xfrm>
+            <a:off x="893847" y="542673"/>
+            <a:ext cx="370294" cy="130805"/>
+          </a:xfrm>
+          <a:prstGeom prst="rect">
+            <a:avLst/>
+          </a:prstGeom>
+          <a:noFill/>
+        </p:spPr>
+        <p:txBody>
+          <a:bodyPr wrap="square" lIns="0" tIns="0" rIns="0" bIns="0" anchor="ctr">
+            <a:spAutoFit/>
+          </a:bodyPr>
+          <a:lstStyle/>
+          <a:p>
+            <a:pPr algn="ctr"/>
+            <a:r>
+              <a:rPr lang="de-CH" sz="850" b="1" dirty="0">
+                <a:solidFill>
+                  <a:srgbClr val="737373"/>
+                </a:solidFill>
+                <a:latin typeface="Aptos"/>
+              </a:rPr>
+              <a:t>Theorie</a:t>
+            </a:r>
+            <a:endParaRPr sz="850" b="1" dirty="0">
+              <a:solidFill>
+                <a:srgbClr val="737373"/>
+              </a:solidFill>
+              <a:latin typeface="Aptos"/>
+            </a:endParaRPr>
+          </a:p>
+        </p:txBody>
+      </p:sp>
+      <p:sp>
+        <p:nvSpPr>
+          <p:cNvPr id="4" name="TextBox 3">
+            <a:extLst>
+              <a:ext uri="{FF2B5EF4-FFF2-40B4-BE49-F238E27FC236}">
+                <a16:creationId xmlns:a16="http://schemas.microsoft.com/office/drawing/2014/main" id="{A8FAB37C-B1F4-C442-5C6B-2C278E003121}"/>
+              </a:ext>
+            </a:extLst>
+          </p:cNvPr>
+          <p:cNvSpPr txBox="1"/>
+          <p:nvPr/>
+        </p:nvSpPr>
+        <p:spPr>
+          <a:xfrm>
+            <a:off x="594360" y="932688"/>
+            <a:ext cx="4342792" cy="477054"/>
+          </a:xfrm>
+          <a:prstGeom prst="rect">
+            <a:avLst/>
+          </a:prstGeom>
+          <a:noFill/>
+        </p:spPr>
+        <p:txBody>
+          <a:bodyPr wrap="none" lIns="0" tIns="0" rIns="0" bIns="0" anchor="t">
+            <a:spAutoFit/>
+          </a:bodyPr>
+          <a:lstStyle/>
+          <a:p>
+            <a:pPr algn="l"/>
+            <a:r>
+              <a:rPr lang="de-CH" sz="3100" b="1" dirty="0">
+                <a:solidFill>
+                  <a:srgbClr val="171717"/>
+                </a:solidFill>
+                <a:latin typeface="Aptos"/>
+              </a:rPr>
+              <a:t>Reale vs. Ideale Quellen</a:t>
+            </a:r>
+            <a:endParaRPr sz="3100" b="1" dirty="0">
+              <a:solidFill>
+                <a:srgbClr val="171717"/>
+              </a:solidFill>
+              <a:latin typeface="Aptos"/>
+            </a:endParaRPr>
+          </a:p>
+        </p:txBody>
+      </p:sp>
+      <p:sp>
+        <p:nvSpPr>
+          <p:cNvPr id="11" name="TextBox 10">
+            <a:extLst>
+              <a:ext uri="{FF2B5EF4-FFF2-40B4-BE49-F238E27FC236}">
+                <a16:creationId xmlns:a16="http://schemas.microsoft.com/office/drawing/2014/main" id="{DE417472-1392-E920-D4E0-99D2C7769D1F}"/>
+              </a:ext>
+            </a:extLst>
+          </p:cNvPr>
+          <p:cNvSpPr txBox="1"/>
+          <p:nvPr/>
+        </p:nvSpPr>
+        <p:spPr>
+          <a:xfrm>
+            <a:off x="1099370" y="4706762"/>
+            <a:ext cx="3332772" cy="307777"/>
+          </a:xfrm>
+          <a:prstGeom prst="rect">
+            <a:avLst/>
+          </a:prstGeom>
+          <a:noFill/>
+        </p:spPr>
+        <p:txBody>
+          <a:bodyPr wrap="none" lIns="0" tIns="0" rIns="0" bIns="0" anchor="t">
+            <a:spAutoFit/>
+          </a:bodyPr>
+          <a:lstStyle/>
+          <a:p>
+            <a:pPr algn="l"/>
+            <a:r>
+              <a:rPr lang="de-CH" sz="2000" dirty="0">
+                <a:solidFill>
+                  <a:srgbClr val="171717"/>
+                </a:solidFill>
+                <a:latin typeface="Aptos"/>
+              </a:rPr>
+              <a:t>Besitzt einen Innenwiderstand</a:t>
+            </a:r>
+            <a:endParaRPr sz="2000" b="0" dirty="0">
+              <a:solidFill>
+                <a:srgbClr val="171717"/>
+              </a:solidFill>
+              <a:latin typeface="Aptos"/>
+            </a:endParaRPr>
+          </a:p>
+        </p:txBody>
+      </p:sp>
+      <p:sp>
+        <p:nvSpPr>
+          <p:cNvPr id="15" name="Datumsplatzhalter 14">
+            <a:extLst>
+              <a:ext uri="{FF2B5EF4-FFF2-40B4-BE49-F238E27FC236}">
+                <a16:creationId xmlns:a16="http://schemas.microsoft.com/office/drawing/2014/main" id="{116F2CDE-D424-DFFA-C252-2953D0D84668}"/>
+              </a:ext>
+            </a:extLst>
+          </p:cNvPr>
+          <p:cNvSpPr>
+            <a:spLocks noGrp="1"/>
+          </p:cNvSpPr>
+          <p:nvPr>
+            <p:ph type="dt" sz="half" idx="10"/>
+          </p:nvPr>
+        </p:nvSpPr>
+        <p:spPr/>
+        <p:txBody>
+          <a:bodyPr/>
+          <a:lstStyle/>
+          <a:p>
+            <a:fld id="{5BEE0FE1-AF03-4944-8B59-6F3340FFC6D2}" type="datetime1">
+              <a:rPr lang="de-CH" smtClean="0"/>
+              <a:t>21.10.2026</a:t>
+            </a:fld>
+            <a:endParaRPr lang="en-US"/>
+          </a:p>
+        </p:txBody>
+      </p:sp>
+      <p:sp>
+        <p:nvSpPr>
+          <p:cNvPr id="16" name="Fußzeilenplatzhalter 15">
+            <a:extLst>
+              <a:ext uri="{FF2B5EF4-FFF2-40B4-BE49-F238E27FC236}">
+                <a16:creationId xmlns:a16="http://schemas.microsoft.com/office/drawing/2014/main" id="{ED54B423-4A1E-442F-AC36-4E7E1EBE5E2B}"/>
+              </a:ext>
+            </a:extLst>
+          </p:cNvPr>
+          <p:cNvSpPr>
+            <a:spLocks noGrp="1"/>
+          </p:cNvSpPr>
+          <p:nvPr>
+            <p:ph type="ftr" sz="quarter" idx="11"/>
+          </p:nvPr>
+        </p:nvSpPr>
+        <p:spPr/>
+        <p:txBody>
+          <a:bodyPr/>
+          <a:lstStyle/>
+          <a:p>
+            <a:r>
+              <a:rPr lang="en-US" dirty="0"/>
+              <a:t>Enrico Putzi W06</a:t>
+            </a:r>
+          </a:p>
+        </p:txBody>
+      </p:sp>
+      <p:sp>
+        <p:nvSpPr>
+          <p:cNvPr id="17" name="Foliennummernplatzhalter 16">
+            <a:extLst>
+              <a:ext uri="{FF2B5EF4-FFF2-40B4-BE49-F238E27FC236}">
+                <a16:creationId xmlns:a16="http://schemas.microsoft.com/office/drawing/2014/main" id="{9B462E26-55E7-EBD4-0157-A63479746454}"/>
+              </a:ext>
+            </a:extLst>
+          </p:cNvPr>
+          <p:cNvSpPr>
+            <a:spLocks noGrp="1"/>
+          </p:cNvSpPr>
+          <p:nvPr>
+            <p:ph type="sldNum" sz="quarter" idx="12"/>
+          </p:nvPr>
+        </p:nvSpPr>
+        <p:spPr/>
+        <p:txBody>
+          <a:bodyPr/>
+          <a:lstStyle/>
+          <a:p>
+            <a:fld id="{C1FF6DA9-008F-8B48-92A6-B652298478BF}" type="slidenum">
+              <a:rPr lang="en-US" smtClean="0"/>
+              <a:t>3</a:t>
+            </a:fld>
+            <a:endParaRPr lang="en-US"/>
+          </a:p>
+        </p:txBody>
+      </p:sp>
+      <p:pic>
+        <p:nvPicPr>
+          <p:cNvPr id="8" name="Grafik 7">
+            <a:extLst>
+              <a:ext uri="{FF2B5EF4-FFF2-40B4-BE49-F238E27FC236}">
+                <a16:creationId xmlns:a16="http://schemas.microsoft.com/office/drawing/2014/main" id="{E893EB9A-F82C-2C53-C619-E73FADCB336C}"/>
+              </a:ext>
+            </a:extLst>
+          </p:cNvPr>
+          <p:cNvPicPr>
+            <a:picLocks noChangeAspect="1"/>
+          </p:cNvPicPr>
+          <p:nvPr/>
+        </p:nvPicPr>
+        <p:blipFill>
+          <a:blip r:embed="rId3"/>
+          <a:srcRect b="20431"/>
+          <a:stretch>
+            <a:fillRect/>
+          </a:stretch>
+        </p:blipFill>
+        <p:spPr>
+          <a:xfrm>
+            <a:off x="7470130" y="1764509"/>
+            <a:ext cx="2405390" cy="2842286"/>
+          </a:xfrm>
+          <a:prstGeom prst="rect">
+            <a:avLst/>
+          </a:prstGeom>
+        </p:spPr>
+      </p:pic>
+      <p:pic>
+        <p:nvPicPr>
+          <p:cNvPr id="10" name="Grafik 9">
+            <a:extLst>
+              <a:ext uri="{FF2B5EF4-FFF2-40B4-BE49-F238E27FC236}">
+                <a16:creationId xmlns:a16="http://schemas.microsoft.com/office/drawing/2014/main" id="{1D9A58EF-DF50-313E-FC35-EBE4F54EE1BE}"/>
+              </a:ext>
+            </a:extLst>
+          </p:cNvPr>
+          <p:cNvPicPr>
+            <a:picLocks noChangeAspect="1"/>
+          </p:cNvPicPr>
+          <p:nvPr/>
+        </p:nvPicPr>
+        <p:blipFill>
+          <a:blip r:embed="rId4"/>
+          <a:stretch>
+            <a:fillRect/>
+          </a:stretch>
+        </p:blipFill>
+        <p:spPr>
+          <a:xfrm>
+            <a:off x="1153957" y="1574334"/>
+            <a:ext cx="2873685" cy="2860065"/>
+          </a:xfrm>
+          <a:prstGeom prst="rect">
+            <a:avLst/>
+          </a:prstGeom>
+        </p:spPr>
+      </p:pic>
+      <p:sp>
+        <p:nvSpPr>
+          <p:cNvPr id="13" name="TextBox 10">
+            <a:extLst>
+              <a:ext uri="{FF2B5EF4-FFF2-40B4-BE49-F238E27FC236}">
+                <a16:creationId xmlns:a16="http://schemas.microsoft.com/office/drawing/2014/main" id="{0CF2DCA9-583C-ED96-F939-644044CDD77A}"/>
+              </a:ext>
+            </a:extLst>
+          </p:cNvPr>
+          <p:cNvSpPr txBox="1"/>
+          <p:nvPr/>
+        </p:nvSpPr>
+        <p:spPr>
+          <a:xfrm>
+            <a:off x="7485250" y="4706762"/>
+            <a:ext cx="2390270" cy="307777"/>
+          </a:xfrm>
+          <a:prstGeom prst="rect">
+            <a:avLst/>
+          </a:prstGeom>
+          <a:noFill/>
+        </p:spPr>
+        <p:txBody>
+          <a:bodyPr wrap="none" lIns="0" tIns="0" rIns="0" bIns="0" anchor="t">
+            <a:spAutoFit/>
+          </a:bodyPr>
+          <a:lstStyle/>
+          <a:p>
+            <a:pPr algn="l"/>
+            <a:r>
+              <a:rPr lang="de-CH" sz="2000" dirty="0">
+                <a:solidFill>
+                  <a:srgbClr val="171717"/>
+                </a:solidFill>
+                <a:latin typeface="Aptos"/>
+              </a:rPr>
+              <a:t>Kein Innenwiderstand</a:t>
+            </a:r>
+            <a:endParaRPr sz="2000" b="0" dirty="0">
+              <a:solidFill>
+                <a:srgbClr val="171717"/>
+              </a:solidFill>
+              <a:latin typeface="Aptos"/>
+            </a:endParaRPr>
+          </a:p>
+        </p:txBody>
+      </p:sp>
+    </p:spTree>
+    <p:extLst>
+      <p:ext uri="{BB962C8B-B14F-4D97-AF65-F5344CB8AC3E}">
+        <p14:creationId xmlns:p14="http://schemas.microsoft.com/office/powerpoint/2010/main" val="4182677124"/>
+      </p:ext>
+    </p:extLst>
+  </p:cSld>
+  <p:clrMapOvr>
+    <a:masterClrMapping/>
+  </p:clrMapOvr>
+</p:sld>
+</file>
+
+<file path=ppt/slides/slide30.xml><?xml version="1.0" encoding="utf-8"?>
+<p:sld xmlns:a="http://schemas.openxmlformats.org/drawingml/2006/main" xmlns:r="http://schemas.openxmlformats.org/officeDocument/2006/relationships" xmlns:p="http://schemas.openxmlformats.org/presentationml/2006/main">
+  <p:cSld>
+    <p:spTree>
+      <p:nvGrpSpPr>
+        <p:cNvPr id="1" name="">
+          <a:extLst>
+            <a:ext uri="{FF2B5EF4-FFF2-40B4-BE49-F238E27FC236}">
+              <a16:creationId xmlns:a16="http://schemas.microsoft.com/office/drawing/2014/main" id="{7A239470-8D8A-E827-DA9F-21C9DFE38FEB}"/>
+            </a:ext>
+          </a:extLst>
+        </p:cNvPr>
+        <p:cNvGrpSpPr/>
+        <p:nvPr/>
+      </p:nvGrpSpPr>
+      <p:grpSpPr>
+        <a:xfrm>
+          <a:off x="0" y="0"/>
+          <a:ext cx="0" cy="0"/>
+          <a:chOff x="0" y="0"/>
+          <a:chExt cx="0" cy="0"/>
+        </a:xfrm>
+      </p:grpSpPr>
+      <p:sp>
+        <p:nvSpPr>
+          <p:cNvPr id="2" name="Rounded Rectangle 1">
+            <a:extLst>
+              <a:ext uri="{FF2B5EF4-FFF2-40B4-BE49-F238E27FC236}">
+                <a16:creationId xmlns:a16="http://schemas.microsoft.com/office/drawing/2014/main" id="{50974DE2-A19D-2C1F-EDD7-886AE4CEC1BC}"/>
+              </a:ext>
+            </a:extLst>
+          </p:cNvPr>
+          <p:cNvSpPr/>
+          <p:nvPr/>
+        </p:nvSpPr>
+        <p:spPr>
+          <a:xfrm>
+            <a:off x="594360" y="475488"/>
+            <a:ext cx="969264" cy="292608"/>
+          </a:xfrm>
+          <a:prstGeom prst="roundRect">
+            <a:avLst/>
+          </a:prstGeom>
+          <a:solidFill>
+            <a:srgbClr val="EEEEEA"/>
+          </a:solidFill>
+          <a:ln w="10160">
+            <a:solidFill>
+              <a:srgbClr val="EEEEEA"/>
+            </a:solidFill>
+          </a:ln>
+        </p:spPr>
+        <p:style>
+          <a:lnRef idx="1">
+            <a:schemeClr val="accent1"/>
+          </a:lnRef>
+          <a:fillRef idx="3">
+            <a:schemeClr val="accent1"/>
+          </a:fillRef>
+          <a:effectRef idx="2">
+            <a:schemeClr val="accent1"/>
+          </a:effectRef>
+          <a:fontRef idx="minor">
+            <a:schemeClr val="lt1"/>
+          </a:fontRef>
+        </p:style>
+        <p:txBody>
+          <a:bodyPr rtlCol="0" anchor="ctr"/>
+          <a:lstStyle/>
+          <a:p>
+            <a:pPr algn="ctr"/>
+            <a:endParaRPr/>
+          </a:p>
+        </p:txBody>
+      </p:sp>
+      <p:sp>
+        <p:nvSpPr>
+          <p:cNvPr id="3" name="TextBox 2">
+            <a:extLst>
+              <a:ext uri="{FF2B5EF4-FFF2-40B4-BE49-F238E27FC236}">
                 <a16:creationId xmlns:a16="http://schemas.microsoft.com/office/drawing/2014/main" id="{15F0F3A2-E58D-BEE3-A2EB-85406752B17F}"/>
               </a:ext>
             </a:extLst>
@@ -30592,7 +25778,7 @@
           <a:p>
             <a:fld id="{C1FF6DA9-008F-8B48-92A6-B652298478BF}" type="slidenum">
               <a:rPr lang="en-US" smtClean="0"/>
-              <a:t>33</a:t>
+              <a:t>30</a:t>
             </a:fld>
             <a:endParaRPr lang="en-US"/>
           </a:p>
@@ -30825,7 +26011,7 @@
 </p:sld>
 </file>
 
-<file path=ppt/slides/slide34.xml><?xml version="1.0" encoding="utf-8"?>
+<file path=ppt/slides/slide31.xml><?xml version="1.0" encoding="utf-8"?>
 <p:sld xmlns:a="http://schemas.openxmlformats.org/drawingml/2006/main" xmlns:r="http://schemas.openxmlformats.org/officeDocument/2006/relationships" xmlns:p="http://schemas.openxmlformats.org/presentationml/2006/main" show="0">
   <p:cSld>
     <p:spTree>
@@ -31074,14 +26260,14 @@
           <a:p>
             <a:fld id="{C1FF6DA9-008F-8B48-92A6-B652298478BF}" type="slidenum">
               <a:rPr lang="en-US" smtClean="0"/>
-              <a:t>34</a:t>
+              <a:t>31</a:t>
             </a:fld>
             <a:endParaRPr lang="en-US"/>
           </a:p>
         </p:txBody>
       </p:sp>
-      <mc:AlternateContent xmlns:mc="http://schemas.openxmlformats.org/markup-compatibility/2006">
-        <mc:Choice xmlns:a14="http://schemas.microsoft.com/office/drawing/2010/main" Requires="a14">
+      <mc:AlternateContent xmlns:mc="http://schemas.openxmlformats.org/markup-compatibility/2006" xmlns:a14="http://schemas.microsoft.com/office/drawing/2010/main">
+        <mc:Choice Requires="a14">
           <p:sp>
             <p:nvSpPr>
               <p:cNvPr id="5" name="Content Placeholder 2">
@@ -31975,7 +27161,7 @@
             </p:txBody>
           </p:sp>
         </mc:Choice>
-        <mc:Fallback>
+        <mc:Fallback xmlns="">
           <p:sp>
             <p:nvSpPr>
               <p:cNvPr id="5" name="Content Placeholder 2">
@@ -32590,7 +27776,7 @@
 </p:sld>
 </file>
 
-<file path=ppt/slides/slide35.xml><?xml version="1.0" encoding="utf-8"?>
+<file path=ppt/slides/slide32.xml><?xml version="1.0" encoding="utf-8"?>
 <p:sld xmlns:a="http://schemas.openxmlformats.org/drawingml/2006/main" xmlns:r="http://schemas.openxmlformats.org/officeDocument/2006/relationships" xmlns:p="http://schemas.openxmlformats.org/presentationml/2006/main">
   <p:cSld>
     <p:spTree>
@@ -32848,14 +28034,14 @@
           <a:p>
             <a:fld id="{C1FF6DA9-008F-8B48-92A6-B652298478BF}" type="slidenum">
               <a:rPr lang="en-US" smtClean="0"/>
-              <a:t>35</a:t>
+              <a:t>32</a:t>
             </a:fld>
             <a:endParaRPr lang="en-US"/>
           </a:p>
         </p:txBody>
       </p:sp>
-      <mc:AlternateContent xmlns:mc="http://schemas.openxmlformats.org/markup-compatibility/2006">
-        <mc:Choice xmlns:a14="http://schemas.microsoft.com/office/drawing/2010/main" Requires="a14">
+      <mc:AlternateContent xmlns:mc="http://schemas.openxmlformats.org/markup-compatibility/2006" xmlns:a14="http://schemas.microsoft.com/office/drawing/2010/main">
+        <mc:Choice Requires="a14">
           <p:sp>
             <p:nvSpPr>
               <p:cNvPr id="7" name="Content Placeholder 2">
@@ -33141,7 +28327,7 @@
             </p:txBody>
           </p:sp>
         </mc:Choice>
-        <mc:Fallback>
+        <mc:Fallback xmlns="">
           <p:sp>
             <p:nvSpPr>
               <p:cNvPr id="7" name="Content Placeholder 2">
@@ -33229,7 +28415,7 @@
 </p:sld>
 </file>
 
-<file path=ppt/slides/slide36.xml><?xml version="1.0" encoding="utf-8"?>
+<file path=ppt/slides/slide33.xml><?xml version="1.0" encoding="utf-8"?>
 <p:sld xmlns:a="http://schemas.openxmlformats.org/drawingml/2006/main" xmlns:r="http://schemas.openxmlformats.org/officeDocument/2006/relationships" xmlns:p="http://schemas.openxmlformats.org/presentationml/2006/main" show="0">
   <p:cSld>
     <p:spTree>
@@ -33487,14 +28673,14 @@
           <a:p>
             <a:fld id="{C1FF6DA9-008F-8B48-92A6-B652298478BF}" type="slidenum">
               <a:rPr lang="en-US" smtClean="0"/>
-              <a:t>36</a:t>
+              <a:t>33</a:t>
             </a:fld>
             <a:endParaRPr lang="en-US"/>
           </a:p>
         </p:txBody>
       </p:sp>
-      <mc:AlternateContent xmlns:mc="http://schemas.openxmlformats.org/markup-compatibility/2006">
-        <mc:Choice xmlns:a14="http://schemas.microsoft.com/office/drawing/2010/main" Requires="a14">
+      <mc:AlternateContent xmlns:mc="http://schemas.openxmlformats.org/markup-compatibility/2006" xmlns:a14="http://schemas.microsoft.com/office/drawing/2010/main">
+        <mc:Choice Requires="a14">
           <p:sp>
             <p:nvSpPr>
               <p:cNvPr id="7" name="Content Placeholder 2">
@@ -34399,7 +29585,7 @@
             </p:txBody>
           </p:sp>
         </mc:Choice>
-        <mc:Fallback>
+        <mc:Fallback xmlns="">
           <p:sp>
             <p:nvSpPr>
               <p:cNvPr id="7" name="Content Placeholder 2">
@@ -34487,7 +29673,7 @@
 </p:sld>
 </file>
 
-<file path=ppt/slides/slide37.xml><?xml version="1.0" encoding="utf-8"?>
+<file path=ppt/slides/slide34.xml><?xml version="1.0" encoding="utf-8"?>
 <p:sld xmlns:a="http://schemas.openxmlformats.org/drawingml/2006/main" xmlns:r="http://schemas.openxmlformats.org/officeDocument/2006/relationships" xmlns:p="http://schemas.openxmlformats.org/presentationml/2006/main">
   <p:cSld>
     <p:spTree>
@@ -34745,7 +29931,7 @@
           <a:p>
             <a:fld id="{C1FF6DA9-008F-8B48-92A6-B652298478BF}" type="slidenum">
               <a:rPr lang="en-US" smtClean="0"/>
-              <a:t>37</a:t>
+              <a:t>34</a:t>
             </a:fld>
             <a:endParaRPr lang="en-US"/>
           </a:p>
@@ -34794,7 +29980,7 @@
 </p:sld>
 </file>
 
-<file path=ppt/slides/slide38.xml><?xml version="1.0" encoding="utf-8"?>
+<file path=ppt/slides/slide35.xml><?xml version="1.0" encoding="utf-8"?>
 <p:sld xmlns:a="http://schemas.openxmlformats.org/drawingml/2006/main" xmlns:r="http://schemas.openxmlformats.org/officeDocument/2006/relationships" xmlns:p="http://schemas.openxmlformats.org/presentationml/2006/main" show="0">
   <p:cSld>
     <p:spTree>
@@ -35052,7 +30238,7 @@
           <a:p>
             <a:fld id="{C1FF6DA9-008F-8B48-92A6-B652298478BF}" type="slidenum">
               <a:rPr lang="en-US" smtClean="0"/>
-              <a:t>38</a:t>
+              <a:t>35</a:t>
             </a:fld>
             <a:endParaRPr lang="en-US"/>
           </a:p>
@@ -35088,8 +30274,8 @@
           </a:prstGeom>
         </p:spPr>
       </p:pic>
-      <mc:AlternateContent xmlns:mc="http://schemas.openxmlformats.org/markup-compatibility/2006">
-        <mc:Choice xmlns:a14="http://schemas.microsoft.com/office/drawing/2010/main" Requires="a14">
+      <mc:AlternateContent xmlns:mc="http://schemas.openxmlformats.org/markup-compatibility/2006" xmlns:a14="http://schemas.microsoft.com/office/drawing/2010/main">
+        <mc:Choice Requires="a14">
           <p:sp>
             <p:nvSpPr>
               <p:cNvPr id="9" name="Content Placeholder 2">
@@ -36153,7 +31339,7 @@
             </p:txBody>
           </p:sp>
         </mc:Choice>
-        <mc:Fallback>
+        <mc:Fallback xmlns="">
           <p:sp>
             <p:nvSpPr>
               <p:cNvPr id="9" name="Content Placeholder 2">
@@ -36566,7 +31752,7 @@
 </p:sld>
 </file>
 
-<file path=ppt/slides/slide39.xml><?xml version="1.0" encoding="utf-8"?>
+<file path=ppt/slides/slide36.xml><?xml version="1.0" encoding="utf-8"?>
 <p:sld xmlns:a="http://schemas.openxmlformats.org/drawingml/2006/main" xmlns:r="http://schemas.openxmlformats.org/officeDocument/2006/relationships" xmlns:p="http://schemas.openxmlformats.org/presentationml/2006/main">
   <p:cSld>
     <p:bg>
@@ -37270,7 +32456,7 @@
           <a:p>
             <a:fld id="{C1FF6DA9-008F-8B48-92A6-B652298478BF}" type="slidenum">
               <a:rPr lang="en-US" smtClean="0"/>
-              <a:t>39</a:t>
+              <a:t>36</a:t>
             </a:fld>
             <a:endParaRPr lang="en-US"/>
           </a:p>
@@ -38201,8 +33387,8 @@
           </a:p>
         </p:txBody>
       </p:sp>
-      <mc:AlternateContent xmlns:mc="http://schemas.openxmlformats.org/markup-compatibility/2006">
-        <mc:Choice xmlns:a14="http://schemas.microsoft.com/office/drawing/2010/main" Requires="a14">
+      <mc:AlternateContent xmlns:mc="http://schemas.openxmlformats.org/markup-compatibility/2006" xmlns:a14="http://schemas.microsoft.com/office/drawing/2010/main">
+        <mc:Choice Requires="a14">
           <p:sp>
             <p:nvSpPr>
               <p:cNvPr id="11" name="TextBox 10">
@@ -38325,7 +33511,7 @@
                         <a:solidFill>
                           <a:srgbClr val="171717"/>
                         </a:solidFill>
-                        <a:latin typeface="Aptos"/>
+                        <a:latin typeface="Cambria Math" panose="02040503050406030204" pitchFamily="18" charset="0"/>
                       </a:rPr>
                       <m:t>𝜂</m:t>
                     </m:r>
@@ -38334,18 +33520,18 @@
                         <a:solidFill>
                           <a:srgbClr val="171717"/>
                         </a:solidFill>
-                        <a:latin typeface="Aptos"/>
+                        <a:latin typeface="Cambria Math" panose="02040503050406030204" pitchFamily="18" charset="0"/>
                       </a:rPr>
                       <m:t>=</m:t>
                     </m:r>
                     <m:f>
                       <m:fPr>
                         <m:ctrlPr>
-                          <a:rPr lang="de-CH" sz="2000">
+                          <a:rPr lang="de-CH" sz="2000" i="1">
                             <a:solidFill>
                               <a:srgbClr val="171717"/>
                             </a:solidFill>
-                            <a:latin typeface="Aptos"/>
+                            <a:latin typeface="Cambria Math" panose="02040503050406030204" pitchFamily="18" charset="0"/>
                           </a:rPr>
                         </m:ctrlPr>
                       </m:fPr>
@@ -38357,7 +33543,7 @@
                                 <a:solidFill>
                                   <a:srgbClr val="171717"/>
                                 </a:solidFill>
-                                <a:latin typeface="Aptos"/>
+                                <a:latin typeface="Cambria Math" panose="02040503050406030204" pitchFamily="18" charset="0"/>
                               </a:rPr>
                             </m:ctrlPr>
                           </m:sSubPr>
@@ -38367,7 +33553,7 @@
                                 <a:solidFill>
                                   <a:srgbClr val="171717"/>
                                 </a:solidFill>
-                                <a:latin typeface="Aptos"/>
+                                <a:latin typeface="Cambria Math" panose="02040503050406030204" pitchFamily="18" charset="0"/>
                               </a:rPr>
                               <m:t>𝑃</m:t>
                             </m:r>
@@ -38378,7 +33564,7 @@
                                 <a:solidFill>
                                   <a:srgbClr val="171717"/>
                                 </a:solidFill>
-                                <a:latin typeface="Aptos"/>
+                                <a:latin typeface="Cambria Math" panose="02040503050406030204" pitchFamily="18" charset="0"/>
                               </a:rPr>
                               <m:t>𝐿</m:t>
                             </m:r>
@@ -38393,7 +33579,7 @@
                                 <a:solidFill>
                                   <a:srgbClr val="171717"/>
                                 </a:solidFill>
-                                <a:latin typeface="Aptos"/>
+                                <a:latin typeface="Cambria Math" panose="02040503050406030204" pitchFamily="18" charset="0"/>
                               </a:rPr>
                             </m:ctrlPr>
                           </m:sSubPr>
@@ -38403,7 +33589,7 @@
                                 <a:solidFill>
                                   <a:srgbClr val="171717"/>
                                 </a:solidFill>
-                                <a:latin typeface="Aptos"/>
+                                <a:latin typeface="Cambria Math" panose="02040503050406030204" pitchFamily="18" charset="0"/>
                               </a:rPr>
                               <m:t>𝑃</m:t>
                             </m:r>
@@ -38413,7 +33599,7 @@
                               <m:rPr>
                                 <m:nor/>
                               </m:rPr>
-                              <a:rPr lang="de-CH" sz="2000">
+                              <a:rPr lang="de-CH" sz="2000" i="0">
                                 <a:solidFill>
                                   <a:srgbClr val="171717"/>
                                 </a:solidFill>
@@ -38430,18 +33616,18 @@
                         <a:solidFill>
                           <a:srgbClr val="171717"/>
                         </a:solidFill>
-                        <a:latin typeface="Aptos"/>
+                        <a:latin typeface="Cambria Math" panose="02040503050406030204" pitchFamily="18" charset="0"/>
                       </a:rPr>
                       <m:t>=</m:t>
                     </m:r>
                     <m:f>
                       <m:fPr>
                         <m:ctrlPr>
-                          <a:rPr lang="de-CH" sz="2000">
+                          <a:rPr lang="de-CH" sz="2000" i="1">
                             <a:solidFill>
                               <a:srgbClr val="171717"/>
                             </a:solidFill>
-                            <a:latin typeface="Aptos"/>
+                            <a:latin typeface="Cambria Math" panose="02040503050406030204" pitchFamily="18" charset="0"/>
                           </a:rPr>
                         </m:ctrlPr>
                       </m:fPr>
@@ -38453,7 +33639,7 @@
                                 <a:solidFill>
                                   <a:srgbClr val="171717"/>
                                 </a:solidFill>
-                                <a:latin typeface="Aptos"/>
+                                <a:latin typeface="Cambria Math" panose="02040503050406030204" pitchFamily="18" charset="0"/>
                               </a:rPr>
                             </m:ctrlPr>
                           </m:sSubPr>
@@ -38463,7 +33649,7 @@
                                 <a:solidFill>
                                   <a:srgbClr val="171717"/>
                                 </a:solidFill>
-                                <a:latin typeface="Aptos"/>
+                                <a:latin typeface="Cambria Math" panose="02040503050406030204" pitchFamily="18" charset="0"/>
                               </a:rPr>
                               <m:t>𝑅</m:t>
                             </m:r>
@@ -38474,7 +33660,7 @@
                                 <a:solidFill>
                                   <a:srgbClr val="171717"/>
                                 </a:solidFill>
-                                <a:latin typeface="Aptos"/>
+                                <a:latin typeface="Cambria Math" panose="02040503050406030204" pitchFamily="18" charset="0"/>
                               </a:rPr>
                               <m:t>𝐿</m:t>
                             </m:r>
@@ -38489,7 +33675,7 @@
                                 <a:solidFill>
                                   <a:srgbClr val="171717"/>
                                 </a:solidFill>
-                                <a:latin typeface="Aptos"/>
+                                <a:latin typeface="Cambria Math" panose="02040503050406030204" pitchFamily="18" charset="0"/>
                               </a:rPr>
                             </m:ctrlPr>
                           </m:sSubPr>
@@ -38499,7 +33685,7 @@
                                 <a:solidFill>
                                   <a:srgbClr val="171717"/>
                                 </a:solidFill>
-                                <a:latin typeface="Aptos"/>
+                                <a:latin typeface="Cambria Math" panose="02040503050406030204" pitchFamily="18" charset="0"/>
                               </a:rPr>
                               <m:t>𝑅</m:t>
                             </m:r>
@@ -38510,7 +33696,7 @@
                                 <a:solidFill>
                                   <a:srgbClr val="171717"/>
                                 </a:solidFill>
-                                <a:latin typeface="Aptos"/>
+                                <a:latin typeface="Cambria Math" panose="02040503050406030204" pitchFamily="18" charset="0"/>
                               </a:rPr>
                               <m:t>𝑖</m:t>
                             </m:r>
@@ -38521,7 +33707,7 @@
                             <a:solidFill>
                               <a:srgbClr val="171717"/>
                             </a:solidFill>
-                            <a:latin typeface="Aptos"/>
+                            <a:latin typeface="Cambria Math" panose="02040503050406030204" pitchFamily="18" charset="0"/>
                           </a:rPr>
                           <m:t>+</m:t>
                         </m:r>
@@ -38532,7 +33718,7 @@
                                 <a:solidFill>
                                   <a:srgbClr val="171717"/>
                                 </a:solidFill>
-                                <a:latin typeface="Aptos"/>
+                                <a:latin typeface="Cambria Math" panose="02040503050406030204" pitchFamily="18" charset="0"/>
                               </a:rPr>
                             </m:ctrlPr>
                           </m:sSubPr>
@@ -38542,7 +33728,7 @@
                                 <a:solidFill>
                                   <a:srgbClr val="171717"/>
                                 </a:solidFill>
-                                <a:latin typeface="Aptos"/>
+                                <a:latin typeface="Cambria Math" panose="02040503050406030204" pitchFamily="18" charset="0"/>
                               </a:rPr>
                               <m:t>𝑅</m:t>
                             </m:r>
@@ -38553,7 +33739,7 @@
                                 <a:solidFill>
                                   <a:srgbClr val="171717"/>
                                 </a:solidFill>
-                                <a:latin typeface="Aptos"/>
+                                <a:latin typeface="Cambria Math" panose="02040503050406030204" pitchFamily="18" charset="0"/>
                               </a:rPr>
                               <m:t>𝐿</m:t>
                             </m:r>
@@ -38581,7 +33767,7 @@
             </p:txBody>
           </p:sp>
         </mc:Choice>
-        <mc:Fallback>
+        <mc:Fallback xmlns="">
           <p:sp>
             <p:nvSpPr>
               <p:cNvPr id="11" name="TextBox 10">
@@ -39617,8 +34803,8 @@
           </a:p>
         </p:txBody>
       </p:sp>
-      <mc:AlternateContent xmlns:mc="http://schemas.openxmlformats.org/markup-compatibility/2006">
-        <mc:Choice xmlns:a14="http://schemas.microsoft.com/office/drawing/2010/main" Requires="a14">
+      <mc:AlternateContent xmlns:mc="http://schemas.openxmlformats.org/markup-compatibility/2006" xmlns:a14="http://schemas.microsoft.com/office/drawing/2010/main">
+        <mc:Choice Requires="a14">
           <p:sp>
             <p:nvSpPr>
               <p:cNvPr id="5" name="Content Placeholder 2">
@@ -39968,7 +35154,7 @@
             </p:txBody>
           </p:sp>
         </mc:Choice>
-        <mc:Fallback>
+        <mc:Fallback xmlns="">
           <p:sp>
             <p:nvSpPr>
               <p:cNvPr id="5" name="Content Placeholder 2">
@@ -40341,8 +35527,8 @@
           </a:p>
         </p:txBody>
       </p:sp>
-      <mc:AlternateContent xmlns:mc="http://schemas.openxmlformats.org/markup-compatibility/2006">
-        <mc:Choice xmlns:a14="http://schemas.microsoft.com/office/drawing/2010/main" Requires="a14">
+      <mc:AlternateContent xmlns:mc="http://schemas.openxmlformats.org/markup-compatibility/2006" xmlns:a14="http://schemas.microsoft.com/office/drawing/2010/main">
+        <mc:Choice Requires="a14">
           <p:sp>
             <p:nvSpPr>
               <p:cNvPr id="8" name="Content Placeholder 2">
@@ -40749,7 +35935,7 @@
             </p:txBody>
           </p:sp>
         </mc:Choice>
-        <mc:Fallback>
+        <mc:Fallback xmlns="">
           <p:sp>
             <p:nvSpPr>
               <p:cNvPr id="8" name="Content Placeholder 2">
@@ -41299,8 +36485,8 @@
           </a:p>
         </p:txBody>
       </p:sp>
-      <mc:AlternateContent xmlns:mc="http://schemas.openxmlformats.org/markup-compatibility/2006">
-        <mc:Choice xmlns:a14="http://schemas.microsoft.com/office/drawing/2010/main" Requires="a14">
+      <mc:AlternateContent xmlns:mc="http://schemas.openxmlformats.org/markup-compatibility/2006" xmlns:a14="http://schemas.microsoft.com/office/drawing/2010/main">
+        <mc:Choice Requires="a14">
           <p:sp>
             <p:nvSpPr>
               <p:cNvPr id="5" name="Content Placeholder 2">
@@ -41801,7 +36987,7 @@
             </p:txBody>
           </p:sp>
         </mc:Choice>
-        <mc:Fallback>
+        <mc:Fallback xmlns="">
           <p:sp>
             <p:nvSpPr>
               <p:cNvPr id="5" name="Content Placeholder 2">
